--- a/docs/AI-Native-训战营-介绍与日程.pptx
+++ b/docs/AI-Native-训战营-介绍与日程.pptx
@@ -2822,7 +2822,7 @@
                 <a:ea typeface="Arial" pitchFamily="34" charset="-122"/>
                 <a:cs typeface="Arial" pitchFamily="34" charset="-120"/>
               </a:rPr>
-              <a:t>案例</a:t>
+              <a:t>增量重构</a:t>
             </a:r>
             <a:endParaRPr lang="en-US" sz="800" dirty="0"/>
           </a:p>
@@ -3471,7 +3471,7 @@
                   <a:srgbClr val="2563EB"/>
                 </a:solidFill>
               </a:rPr>
-              <a:t>L4 安卓转鸿蒙案例 75min</a:t>
+              <a:t>L4 增量开发与重构 75min</a:t>
             </a:r>
             <a:endParaRPr lang="en-US" sz="800" dirty="0"/>
           </a:p>
@@ -3562,7 +3562,7 @@
                   <a:srgbClr val="2563EB"/>
                 </a:solidFill>
               </a:rPr>
-              <a:t>W2迁移 75min | W3项目 60min</a:t>
+              <a:t>W2重构 75min | W3项目 60min</a:t>
             </a:r>
             <a:endParaRPr lang="en-US" sz="800" dirty="0"/>
           </a:p>
@@ -4357,7 +4357,7 @@
                           <a:ea typeface="Arial" pitchFamily="34" charset="-122"/>
                           <a:cs typeface="Arial" pitchFamily="34" charset="-120"/>
                         </a:rPr>
-                        <a:t>W2 迁移 + W3 项目 (135min)</a:t>
+                        <a:t>W2 重构 + W3 项目 (135min)</a:t>
                       </a:r>
                       <a:endParaRPr lang="en-US" sz="800" dirty="0">
                         <a:latin typeface="Arial" charset="0"/>
@@ -7814,7 +7814,7 @@
                           <a:ea typeface="Arial" pitchFamily="34" charset="-122"/>
                           <a:cs typeface="Arial" pitchFamily="34" charset="-120"/>
                         </a:rPr>
-                        <a:t>L4: 安卓转鸿蒙案例 (75min)</a:t>
+                        <a:t>L4: 增量开发与重构 (75min)</a:t>
                       </a:r>
                       <a:endParaRPr lang="en-US" sz="800" dirty="0">
                         <a:latin typeface="Arial" charset="0"/>
@@ -7879,7 +7879,7 @@
                           <a:ea typeface="Arial" pitchFamily="34" charset="-122"/>
                           <a:cs typeface="Arial" pitchFamily="34" charset="-120"/>
                         </a:rPr>
-                        <a:t>真实项目解读 · Skill四原则 · 迁移铁律 · Token优化历程</a:t>
+                        <a:t>增量开发场景 · AID增量流程 · 重构三原则 · 真实案例数据</a:t>
                       </a:r>
                       <a:endParaRPr lang="en-US" sz="800" dirty="0">
                         <a:latin typeface="Arial" charset="0"/>
@@ -8681,7 +8681,7 @@
                           <a:ea typeface="Arial" pitchFamily="34" charset="-122"/>
                           <a:cs typeface="Arial" pitchFamily="34" charset="-120"/>
                         </a:rPr>
-                        <a:t>Workshop 2: 迁移实操 (75min)</a:t>
+                        <a:t>Workshop 2: 增量重构实操 (75min)</a:t>
                       </a:r>
                       <a:endParaRPr lang="en-US" sz="800" dirty="0">
                         <a:latin typeface="Arial" charset="0"/>
@@ -8746,7 +8746,7 @@
                           <a:ea typeface="Arial" pitchFamily="34" charset="-122"/>
                           <a:cs typeface="Arial" pitchFamily="34" charset="-120"/>
                         </a:rPr>
-                        <a:t>A组(全自动)/B组(分步式)/C组(参考式) 迁移同一Activity 策略对比</a:t>
+                        <a:t>A组(AI全量重写)/B组(AI增量)/C组(手工+AI) 策略对比</a:t>
                       </a:r>
                       <a:endParaRPr lang="en-US" sz="800" dirty="0">
                         <a:latin typeface="Arial" charset="0"/>
@@ -10468,7 +10468,7 @@
                 <a:ea typeface="Arial" pitchFamily="34" charset="-122"/>
                 <a:cs typeface="Arial" pitchFamily="34" charset="-120"/>
               </a:rPr>
-              <a:t>L4: 安卓转鸿蒙案例 (75min)</a:t>
+              <a:t>L4: 增量开发与重构 (75min)</a:t>
             </a:r>
             <a:endParaRPr lang="en-US" sz="1000" dirty="0"/>
           </a:p>
@@ -10507,7 +10507,7 @@
                   <a:srgbClr val="64748B"/>
                 </a:solidFill>
               </a:rPr>
-              <a:t>真实客户项目解读</a:t>
+              <a:t>增量开发场景</a:t>
             </a:r>
             <a:endParaRPr lang="en-US" sz="800" dirty="0"/>
           </a:p>
@@ -10524,7 +10524,7 @@
                   <a:srgbClr val="64748B"/>
                 </a:solidFill>
               </a:rPr>
-              <a:t>Skill四原则(自包含/分层/CI/适配)</a:t>
+              <a:t>AID增量流程 · Skill四原则</a:t>
             </a:r>
             <a:endParaRPr lang="en-US" sz="800" dirty="0"/>
           </a:p>
@@ -10541,7 +10541,7 @@
                   <a:srgbClr val="64748B"/>
                 </a:solidFill>
               </a:rPr>
-              <a:t>6条迁移铁律 反面教材</a:t>
+              <a:t>重构三原则 真实案例数据</a:t>
             </a:r>
             <a:endParaRPr lang="en-US" sz="800" dirty="0"/>
           </a:p>
@@ -12931,7 +12931,7 @@
                   <a:srgbClr val="64748B"/>
                 </a:solidFill>
               </a:rPr>
-              <a:t>A/B/C三组不同策略 限时迁移 策略优劣对比(在L4后)</a:t>
+              <a:t>A/B/C三组不同策略 限时增量/重构 策略优劣对比(在L4后)</a:t>
             </a:r>
             <a:endParaRPr lang="en-US" sz="800" dirty="0"/>
           </a:p>
@@ -16817,7 +16817,7 @@
                           <a:ea typeface="Arial" pitchFamily="34" charset="-122"/>
                           <a:cs typeface="Arial" pitchFamily="34" charset="-120"/>
                         </a:rPr>
-                        <a:t>W2 迁移</a:t>
+                        <a:t>W2 重构</a:t>
                       </a:r>
                       <a:endParaRPr lang="en-US" sz="700" dirty="0">
                         <a:latin typeface="Arial" charset="0"/>

--- a/docs/AI-Native-训战营-介绍与日程.pptx
+++ b/docs/AI-Native-训战营-介绍与日程.pptx
@@ -1328,8 +1328,8 @@
         </p:nvSpPr>
         <p:spPr>
           <a:xfrm>
-            <a:off x="457200" y="4892040"/>
-            <a:ext cx="11064240" cy="36576"/>
+            <a:off x="1979676" y="4892040"/>
+            <a:ext cx="8229600" cy="27432"/>
           </a:xfrm>
           <a:prstGeom prst="rect">
             <a:avLst/>
@@ -1348,8 +1348,8 @@
         </p:nvSpPr>
         <p:spPr>
           <a:xfrm>
-            <a:off x="457200" y="4983480"/>
-            <a:ext cx="3657600" cy="182880"/>
+            <a:off x="1979676" y="4983480"/>
+            <a:ext cx="8229600" cy="182880"/>
           </a:xfrm>
           <a:prstGeom prst="rect">
             <a:avLst/>
@@ -1358,10 +1358,10 @@
           <a:ln/>
         </p:spPr>
         <p:txBody>
-          <a:bodyPr wrap="square" rtlCol="0" anchor="ctr"/>
+          <a:bodyPr wrap="square" lIns="0" tIns="0" rIns="0" bIns="0" rtlCol="0" anchor="ctr"/>
           <a:lstStyle/>
           <a:p>
-            <a:pPr indent="0" marL="0">
+            <a:pPr algn="ctr" indent="0" marL="0">
               <a:buNone/>
             </a:pPr>
             <a:r>
@@ -1384,12 +1384,12 @@
         </p:nvSpPr>
         <p:spPr>
           <a:xfrm>
-            <a:off x="457200" y="685800"/>
-            <a:ext cx="1508760" cy="201168"/>
+            <a:off x="1979676" y="594360"/>
+            <a:ext cx="1389888" cy="182880"/>
           </a:xfrm>
           <a:prstGeom prst="roundRect">
             <a:avLst>
-              <a:gd name="adj" fmla="val 45455"/>
+              <a:gd name="adj" fmla="val 40000"/>
             </a:avLst>
           </a:prstGeom>
           <a:solidFill>
@@ -1406,8 +1406,8 @@
         </p:nvSpPr>
         <p:spPr>
           <a:xfrm>
-            <a:off x="457200" y="685800"/>
-            <a:ext cx="1508760" cy="201168"/>
+            <a:off x="1979676" y="594360"/>
+            <a:ext cx="1389888" cy="182880"/>
           </a:xfrm>
           <a:prstGeom prst="rect">
             <a:avLst/>
@@ -1423,7 +1423,7 @@
               <a:buNone/>
             </a:pPr>
             <a:r>
-              <a:rPr lang="en-US" sz="700" b="1" dirty="0">
+              <a:rPr lang="en-US" sz="650" b="1" dirty="0">
                 <a:solidFill>
                   <a:srgbClr val="2563EB"/>
                 </a:solidFill>
@@ -1433,7 +1433,7 @@
               </a:rPr>
               <a:t>2天 L1-L6体系</a:t>
             </a:r>
-            <a:endParaRPr lang="en-US" sz="700" dirty="0"/>
+            <a:endParaRPr lang="en-US" sz="650" dirty="0"/>
           </a:p>
         </p:txBody>
       </p:sp>
@@ -1445,12 +1445,12 @@
         </p:nvSpPr>
         <p:spPr>
           <a:xfrm>
-            <a:off x="2468880" y="685800"/>
-            <a:ext cx="1380744" cy="201168"/>
+            <a:off x="3991356" y="594360"/>
+            <a:ext cx="1271016" cy="182880"/>
           </a:xfrm>
           <a:prstGeom prst="roundRect">
             <a:avLst>
-              <a:gd name="adj" fmla="val 45455"/>
+              <a:gd name="adj" fmla="val 40000"/>
             </a:avLst>
           </a:prstGeom>
           <a:solidFill>
@@ -1467,8 +1467,8 @@
         </p:nvSpPr>
         <p:spPr>
           <a:xfrm>
-            <a:off x="2468880" y="685800"/>
-            <a:ext cx="1380744" cy="201168"/>
+            <a:off x="3991356" y="594360"/>
+            <a:ext cx="1271016" cy="182880"/>
           </a:xfrm>
           <a:prstGeom prst="rect">
             <a:avLst/>
@@ -1484,7 +1484,7 @@
               <a:buNone/>
             </a:pPr>
             <a:r>
-              <a:rPr lang="en-US" sz="700" b="1" dirty="0">
+              <a:rPr lang="en-US" sz="650" b="1" dirty="0">
                 <a:solidFill>
                   <a:srgbClr val="7C3AED"/>
                 </a:solidFill>
@@ -1494,7 +1494,7 @@
               </a:rPr>
               <a:t>上午讲座 下午演练</a:t>
             </a:r>
-            <a:endParaRPr lang="en-US" sz="700" dirty="0"/>
+            <a:endParaRPr lang="en-US" sz="650" dirty="0"/>
           </a:p>
         </p:txBody>
       </p:sp>
@@ -1506,8 +1506,8 @@
         </p:nvSpPr>
         <p:spPr>
           <a:xfrm>
-            <a:off x="457200" y="1097280"/>
-            <a:ext cx="5486400" cy="594360"/>
+            <a:off x="1979676" y="1005840"/>
+            <a:ext cx="8229600" cy="548640"/>
           </a:xfrm>
           <a:prstGeom prst="rect">
             <a:avLst/>
@@ -1523,7 +1523,7 @@
               <a:buNone/>
             </a:pPr>
             <a:r>
-              <a:rPr lang="en-US" sz="3800" b="1" dirty="0">
+              <a:rPr lang="en-US" sz="3600" b="1" dirty="0">
                 <a:solidFill>
                   <a:srgbClr val="1A1A2E"/>
                 </a:solidFill>
@@ -1533,7 +1533,7 @@
               </a:rPr>
               <a:t>AI Native</a:t>
             </a:r>
-            <a:endParaRPr lang="en-US" sz="3800" dirty="0"/>
+            <a:endParaRPr lang="en-US" sz="3600" dirty="0"/>
           </a:p>
         </p:txBody>
       </p:sp>
@@ -1545,8 +1545,8 @@
         </p:nvSpPr>
         <p:spPr>
           <a:xfrm>
-            <a:off x="457200" y="1645920"/>
-            <a:ext cx="7315200" cy="594360"/>
+            <a:off x="1979676" y="1508760"/>
+            <a:ext cx="8229600" cy="548640"/>
           </a:xfrm>
           <a:prstGeom prst="rect">
             <a:avLst/>
@@ -1562,7 +1562,7 @@
               <a:buNone/>
             </a:pPr>
             <a:r>
-              <a:rPr lang="en-US" sz="3800" b="1" dirty="0">
+              <a:rPr lang="en-US" sz="3600" b="1" dirty="0">
                 <a:solidFill>
                   <a:srgbClr val="2563EB"/>
                 </a:solidFill>
@@ -1572,7 +1572,7 @@
               </a:rPr>
               <a:t>实战训战营 V2</a:t>
             </a:r>
-            <a:endParaRPr lang="en-US" sz="3800" dirty="0"/>
+            <a:endParaRPr lang="en-US" sz="3600" dirty="0"/>
           </a:p>
         </p:txBody>
       </p:sp>
@@ -1584,8 +1584,8 @@
         </p:nvSpPr>
         <p:spPr>
           <a:xfrm>
-            <a:off x="457200" y="2286000"/>
-            <a:ext cx="11064240" cy="274320"/>
+            <a:off x="1979676" y="2057400"/>
+            <a:ext cx="8229600" cy="228600"/>
           </a:xfrm>
           <a:prstGeom prst="rect">
             <a:avLst/>
@@ -1597,18 +1597,18 @@
           <a:bodyPr wrap="square" lIns="0" tIns="0" rIns="0" bIns="0" rtlCol="0" anchor="ctr"/>
           <a:lstStyle/>
           <a:p>
-            <a:pPr indent="0" marL="0">
+            <a:pPr algn="ctr" indent="0" marL="0">
               <a:buNone/>
             </a:pPr>
             <a:r>
-              <a:rPr lang="en-US" sz="1200" dirty="0">
+              <a:rPr lang="en-US" sz="1100" dirty="0">
                 <a:solidFill>
                   <a:srgbClr val="64748B"/>
                 </a:solidFill>
               </a:rPr>
               <a:t>上午 9:30-12:00 讲座  |  下午 14:30-18:00 演示+演练  |  L4: 增量开发与重构</a:t>
             </a:r>
-            <a:endParaRPr lang="en-US" sz="1200" dirty="0"/>
+            <a:endParaRPr lang="en-US" sz="1100" dirty="0"/>
           </a:p>
         </p:txBody>
       </p:sp>
@@ -1620,12 +1620,12 @@
         </p:nvSpPr>
         <p:spPr>
           <a:xfrm>
-            <a:off x="457200" y="2697480"/>
-            <a:ext cx="11064240" cy="502920"/>
+            <a:off x="1979676" y="2423160"/>
+            <a:ext cx="8229600" cy="457200"/>
           </a:xfrm>
           <a:prstGeom prst="roundRect">
             <a:avLst>
-              <a:gd name="adj" fmla="val 18182"/>
+              <a:gd name="adj" fmla="val 16000"/>
             </a:avLst>
           </a:prstGeom>
           <a:solidFill>
@@ -1647,8 +1647,8 @@
         </p:nvSpPr>
         <p:spPr>
           <a:xfrm>
-            <a:off x="731520" y="2743200"/>
-            <a:ext cx="10515600" cy="411480"/>
+            <a:off x="2208276" y="2450592"/>
+            <a:ext cx="7772400" cy="402336"/>
           </a:xfrm>
           <a:prstGeom prst="rect">
             <a:avLst/>
@@ -1660,18 +1660,18 @@
           <a:bodyPr wrap="square" lIns="0" tIns="0" rIns="0" bIns="0" rtlCol="0" anchor="ctr"/>
           <a:lstStyle/>
           <a:p>
-            <a:pPr indent="0" marL="0">
+            <a:pPr algn="ctr" indent="0" marL="0">
               <a:buNone/>
             </a:pPr>
             <a:r>
-              <a:rPr lang="en-US" sz="1100" dirty="0">
+              <a:rPr lang="en-US" sz="1000" dirty="0">
                 <a:solidFill>
                   <a:srgbClr val="2563EB"/>
                 </a:solidFill>
               </a:rPr>
-              <a:t>训前(1.5h): Prompt基础 + LLM概念 + Claude Code安装 -&gt; 课堂不讲基础</a:t>
+              <a:t>训前(1.5h): Prompt基础 + LLM概念 + Claude Code安装  -&gt;  课堂不讲基础</a:t>
             </a:r>
-            <a:endParaRPr lang="en-US" sz="1100" dirty="0"/>
+            <a:endParaRPr lang="en-US" sz="1000" dirty="0"/>
           </a:p>
         </p:txBody>
       </p:sp>
@@ -1683,12 +1683,12 @@
         </p:nvSpPr>
         <p:spPr>
           <a:xfrm>
-            <a:off x="457200" y="3429000"/>
-            <a:ext cx="3566160" cy="1005840"/>
+            <a:off x="1979676" y="3063240"/>
+            <a:ext cx="2651760" cy="914400"/>
           </a:xfrm>
           <a:prstGeom prst="roundRect">
             <a:avLst>
-              <a:gd name="adj" fmla="val 9091"/>
+              <a:gd name="adj" fmla="val 8000"/>
             </a:avLst>
           </a:prstGeom>
           <a:solidFill>
@@ -1710,8 +1710,8 @@
         </p:nvSpPr>
         <p:spPr>
           <a:xfrm>
-            <a:off x="548640" y="3465576"/>
-            <a:ext cx="3383280" cy="201168"/>
+            <a:off x="2052828" y="3090672"/>
+            <a:ext cx="2505456" cy="182880"/>
           </a:xfrm>
           <a:prstGeom prst="rect">
             <a:avLst/>
@@ -1727,7 +1727,7 @@
               <a:buNone/>
             </a:pPr>
             <a:r>
-              <a:rPr lang="en-US" sz="1000" b="1" dirty="0">
+              <a:rPr lang="en-US" sz="900" b="1" dirty="0">
                 <a:solidFill>
                   <a:srgbClr val="1A1A2E"/>
                 </a:solidFill>
@@ -1735,9 +1735,9 @@
                 <a:ea typeface="Arial" pitchFamily="34" charset="-122"/>
                 <a:cs typeface="Arial" pitchFamily="34" charset="-120"/>
               </a:rPr>
-              <a:t>Day 1 范式+架构+推演</a:t>
+              <a:t>Day 1</a:t>
             </a:r>
-            <a:endParaRPr lang="en-US" sz="1000" dirty="0"/>
+            <a:endParaRPr lang="en-US" sz="900" dirty="0"/>
           </a:p>
         </p:txBody>
       </p:sp>
@@ -1749,8 +1749,8 @@
         </p:nvSpPr>
         <p:spPr>
           <a:xfrm>
-            <a:off x="548640" y="3666744"/>
-            <a:ext cx="3383280" cy="731520"/>
+            <a:off x="2052828" y="3273552"/>
+            <a:ext cx="2505456" cy="676656"/>
           </a:xfrm>
           <a:prstGeom prst="rect">
             <a:avLst/>
@@ -1764,53 +1764,53 @@
           <a:p>
             <a:pPr indent="0" marL="0">
               <a:lnSpc>
-                <a:spcPct val="115000"/>
+                <a:spcPct val="110000"/>
               </a:lnSpc>
               <a:buNone/>
             </a:pPr>
             <a:r>
-              <a:rPr lang="en-US" sz="800" dirty="0">
+              <a:rPr lang="en-US" sz="700" dirty="0">
+                <a:solidFill>
+                  <a:srgbClr val="64748B"/>
+                </a:solidFill>
+              </a:rPr>
+              <a:t>范式+架构+推演</a:t>
+            </a:r>
+            <a:endParaRPr lang="en-US" sz="700" dirty="0"/>
+          </a:p>
+          <a:p>
+            <a:pPr indent="0" marL="0">
+              <a:lnSpc>
+                <a:spcPct val="110000"/>
+              </a:lnSpc>
+              <a:buNone/>
+            </a:pPr>
+            <a:r>
+              <a:rPr lang="en-US" sz="700" dirty="0">
                 <a:solidFill>
                   <a:srgbClr val="64748B"/>
                 </a:solidFill>
               </a:rPr>
               <a:t>上午 L1+L2 讲座</a:t>
             </a:r>
-            <a:endParaRPr lang="en-US" sz="800" dirty="0"/>
+            <a:endParaRPr lang="en-US" sz="700" dirty="0"/>
           </a:p>
           <a:p>
             <a:pPr indent="0" marL="0">
               <a:lnSpc>
-                <a:spcPct val="115000"/>
+                <a:spcPct val="110000"/>
               </a:lnSpc>
               <a:buNone/>
             </a:pPr>
             <a:r>
-              <a:rPr lang="en-US" sz="800" dirty="0">
+              <a:rPr lang="en-US" sz="700" dirty="0">
                 <a:solidFill>
                   <a:srgbClr val="64748B"/>
                 </a:solidFill>
               </a:rPr>
-              <a:t>下午 L1+L2演示 W1练手</a:t>
+              <a:t>下午 演示+W1+L3</a:t>
             </a:r>
-            <a:endParaRPr lang="en-US" sz="800" dirty="0"/>
-          </a:p>
-          <a:p>
-            <a:pPr indent="0" marL="0">
-              <a:lnSpc>
-                <a:spcPct val="115000"/>
-              </a:lnSpc>
-              <a:buNone/>
-            </a:pPr>
-            <a:r>
-              <a:rPr lang="en-US" sz="800" dirty="0">
-                <a:solidFill>
-                  <a:srgbClr val="64748B"/>
-                </a:solidFill>
-              </a:rPr>
-              <a:t>L3 Live Coding 回顾</a:t>
-            </a:r>
-            <a:endParaRPr lang="en-US" sz="800" dirty="0"/>
+            <a:endParaRPr lang="en-US" sz="700" dirty="0"/>
           </a:p>
         </p:txBody>
       </p:sp>
@@ -1822,12 +1822,12 @@
         </p:nvSpPr>
         <p:spPr>
           <a:xfrm>
-            <a:off x="4206240" y="3429000"/>
-            <a:ext cx="3566160" cy="1005840"/>
+            <a:off x="4768596" y="3063240"/>
+            <a:ext cx="2651760" cy="914400"/>
           </a:xfrm>
           <a:prstGeom prst="roundRect">
             <a:avLst>
-              <a:gd name="adj" fmla="val 9091"/>
+              <a:gd name="adj" fmla="val 8000"/>
             </a:avLst>
           </a:prstGeom>
           <a:solidFill>
@@ -1849,8 +1849,8 @@
         </p:nvSpPr>
         <p:spPr>
           <a:xfrm>
-            <a:off x="4297680" y="3465576"/>
-            <a:ext cx="3383280" cy="201168"/>
+            <a:off x="4841748" y="3090672"/>
+            <a:ext cx="2505456" cy="182880"/>
           </a:xfrm>
           <a:prstGeom prst="rect">
             <a:avLst/>
@@ -1866,7 +1866,7 @@
               <a:buNone/>
             </a:pPr>
             <a:r>
-              <a:rPr lang="en-US" sz="1000" b="1" dirty="0">
+              <a:rPr lang="en-US" sz="900" b="1" dirty="0">
                 <a:solidFill>
                   <a:srgbClr val="1A1A2E"/>
                 </a:solidFill>
@@ -1874,9 +1874,9 @@
                 <a:ea typeface="Arial" pitchFamily="34" charset="-122"/>
                 <a:cs typeface="Arial" pitchFamily="34" charset="-120"/>
               </a:rPr>
-              <a:t>Day 2 增量+最佳实践</a:t>
+              <a:t>Day 2</a:t>
             </a:r>
-            <a:endParaRPr lang="en-US" sz="1000" dirty="0"/>
+            <a:endParaRPr lang="en-US" sz="900" dirty="0"/>
           </a:p>
         </p:txBody>
       </p:sp>
@@ -1888,8 +1888,8 @@
         </p:nvSpPr>
         <p:spPr>
           <a:xfrm>
-            <a:off x="4297680" y="3666744"/>
-            <a:ext cx="3383280" cy="731520"/>
+            <a:off x="4841748" y="3273552"/>
+            <a:ext cx="2505456" cy="676656"/>
           </a:xfrm>
           <a:prstGeom prst="rect">
             <a:avLst/>
@@ -1903,53 +1903,53 @@
           <a:p>
             <a:pPr indent="0" marL="0">
               <a:lnSpc>
-                <a:spcPct val="115000"/>
+                <a:spcPct val="110000"/>
               </a:lnSpc>
               <a:buNone/>
             </a:pPr>
             <a:r>
-              <a:rPr lang="en-US" sz="800" dirty="0">
+              <a:rPr lang="en-US" sz="700" dirty="0">
                 <a:solidFill>
                   <a:srgbClr val="64748B"/>
                 </a:solidFill>
               </a:rPr>
-              <a:t>上午 L4增量+L5实践 讲座</a:t>
+              <a:t>增量开发+最佳实践</a:t>
             </a:r>
-            <a:endParaRPr lang="en-US" sz="800" dirty="0"/>
+            <a:endParaRPr lang="en-US" sz="700" dirty="0"/>
           </a:p>
           <a:p>
             <a:pPr indent="0" marL="0">
               <a:lnSpc>
-                <a:spcPct val="115000"/>
+                <a:spcPct val="110000"/>
               </a:lnSpc>
               <a:buNone/>
             </a:pPr>
             <a:r>
-              <a:rPr lang="en-US" sz="800" dirty="0">
+              <a:rPr lang="en-US" sz="700" dirty="0">
                 <a:solidFill>
                   <a:srgbClr val="64748B"/>
                 </a:solidFill>
               </a:rPr>
-              <a:t>下午 W2重构(在L4后)</a:t>
+              <a:t>上午 L4增量+L5实践</a:t>
             </a:r>
-            <a:endParaRPr lang="en-US" sz="800" dirty="0"/>
+            <a:endParaRPr lang="en-US" sz="700" dirty="0"/>
           </a:p>
           <a:p>
             <a:pPr indent="0" marL="0">
               <a:lnSpc>
-                <a:spcPct val="115000"/>
+                <a:spcPct val="110000"/>
               </a:lnSpc>
               <a:buNone/>
             </a:pPr>
             <a:r>
-              <a:rPr lang="en-US" sz="800" dirty="0">
+              <a:rPr lang="en-US" sz="700" dirty="0">
                 <a:solidFill>
                   <a:srgbClr val="64748B"/>
                 </a:solidFill>
               </a:rPr>
-              <a:t>W3项目 评审 L6</a:t>
+              <a:t>下午 W2重构+W3+L6</a:t>
             </a:r>
-            <a:endParaRPr lang="en-US" sz="800" dirty="0"/>
+            <a:endParaRPr lang="en-US" sz="700" dirty="0"/>
           </a:p>
         </p:txBody>
       </p:sp>
@@ -1961,12 +1961,12 @@
         </p:nvSpPr>
         <p:spPr>
           <a:xfrm>
-            <a:off x="7955280" y="3429000"/>
-            <a:ext cx="3566160" cy="1005840"/>
+            <a:off x="7557516" y="3063240"/>
+            <a:ext cx="2651760" cy="914400"/>
           </a:xfrm>
           <a:prstGeom prst="roundRect">
             <a:avLst>
-              <a:gd name="adj" fmla="val 9091"/>
+              <a:gd name="adj" fmla="val 8000"/>
             </a:avLst>
           </a:prstGeom>
           <a:solidFill>
@@ -1988,8 +1988,8 @@
         </p:nvSpPr>
         <p:spPr>
           <a:xfrm>
-            <a:off x="8046720" y="3465576"/>
-            <a:ext cx="3383280" cy="201168"/>
+            <a:off x="7630668" y="3090672"/>
+            <a:ext cx="2505456" cy="182880"/>
           </a:xfrm>
           <a:prstGeom prst="rect">
             <a:avLst/>
@@ -2005,7 +2005,7 @@
               <a:buNone/>
             </a:pPr>
             <a:r>
-              <a:rPr lang="en-US" sz="1000" b="1" dirty="0">
+              <a:rPr lang="en-US" sz="900" b="1" dirty="0">
                 <a:solidFill>
                   <a:srgbClr val="1A1A2E"/>
                 </a:solidFill>
@@ -2015,7 +2015,7 @@
               </a:rPr>
               <a:t>设计原则</a:t>
             </a:r>
-            <a:endParaRPr lang="en-US" sz="1000" dirty="0"/>
+            <a:endParaRPr lang="en-US" sz="900" dirty="0"/>
           </a:p>
         </p:txBody>
       </p:sp>
@@ -2027,8 +2027,8 @@
         </p:nvSpPr>
         <p:spPr>
           <a:xfrm>
-            <a:off x="8046720" y="3666744"/>
-            <a:ext cx="3383280" cy="731520"/>
+            <a:off x="7630668" y="3273552"/>
+            <a:ext cx="2505456" cy="676656"/>
           </a:xfrm>
           <a:prstGeom prst="rect">
             <a:avLst/>
@@ -2042,53 +2042,53 @@
           <a:p>
             <a:pPr indent="0" marL="0">
               <a:lnSpc>
-                <a:spcPct val="115000"/>
+                <a:spcPct val="110000"/>
               </a:lnSpc>
               <a:buNone/>
             </a:pPr>
             <a:r>
-              <a:rPr lang="en-US" sz="800" dirty="0">
+              <a:rPr lang="en-US" sz="700" dirty="0">
                 <a:solidFill>
                   <a:srgbClr val="64748B"/>
                 </a:solidFill>
               </a:rPr>
-              <a:t>上午讲座(不超过12:00)</a:t>
+              <a:t>上午讲座(&lt;=12:00)</a:t>
             </a:r>
-            <a:endParaRPr lang="en-US" sz="800" dirty="0"/>
+            <a:endParaRPr lang="en-US" sz="700" dirty="0"/>
           </a:p>
           <a:p>
             <a:pPr indent="0" marL="0">
               <a:lnSpc>
-                <a:spcPct val="115000"/>
+                <a:spcPct val="110000"/>
               </a:lnSpc>
               <a:buNone/>
             </a:pPr>
             <a:r>
-              <a:rPr lang="en-US" sz="800" dirty="0">
+              <a:rPr lang="en-US" sz="700" dirty="0">
                 <a:solidFill>
                   <a:srgbClr val="64748B"/>
                 </a:solidFill>
               </a:rPr>
               <a:t>下午先演示后演练</a:t>
             </a:r>
-            <a:endParaRPr lang="en-US" sz="800" dirty="0"/>
+            <a:endParaRPr lang="en-US" sz="700" dirty="0"/>
           </a:p>
           <a:p>
             <a:pPr indent="0" marL="0">
               <a:lnSpc>
-                <a:spcPct val="115000"/>
+                <a:spcPct val="110000"/>
               </a:lnSpc>
               <a:buNone/>
             </a:pPr>
             <a:r>
-              <a:rPr lang="en-US" sz="800" dirty="0">
+              <a:rPr lang="en-US" sz="700" dirty="0">
                 <a:solidFill>
                   <a:srgbClr val="64748B"/>
                 </a:solidFill>
               </a:rPr>
-              <a:t>Workshop紧跟对应模块</a:t>
+              <a:t>Workshop紧跟模块</a:t>
             </a:r>
-            <a:endParaRPr lang="en-US" sz="800" dirty="0"/>
+            <a:endParaRPr lang="en-US" sz="700" dirty="0"/>
           </a:p>
         </p:txBody>
       </p:sp>
@@ -2132,8 +2132,8 @@
         </p:nvSpPr>
         <p:spPr>
           <a:xfrm>
-            <a:off x="457200" y="4892040"/>
-            <a:ext cx="11064240" cy="36576"/>
+            <a:off x="1979676" y="4892040"/>
+            <a:ext cx="8229600" cy="27432"/>
           </a:xfrm>
           <a:prstGeom prst="rect">
             <a:avLst/>
@@ -2152,8 +2152,8 @@
         </p:nvSpPr>
         <p:spPr>
           <a:xfrm>
-            <a:off x="457200" y="4983480"/>
-            <a:ext cx="3657600" cy="182880"/>
+            <a:off x="1979676" y="4983480"/>
+            <a:ext cx="8229600" cy="182880"/>
           </a:xfrm>
           <a:prstGeom prst="rect">
             <a:avLst/>
@@ -2162,10 +2162,10 @@
           <a:ln/>
         </p:spPr>
         <p:txBody>
-          <a:bodyPr wrap="square" rtlCol="0" anchor="ctr"/>
+          <a:bodyPr wrap="square" lIns="0" tIns="0" rIns="0" bIns="0" rtlCol="0" anchor="ctr"/>
           <a:lstStyle/>
           <a:p>
-            <a:pPr indent="0" marL="0">
+            <a:pPr algn="ctr" indent="0" marL="0">
               <a:buNone/>
             </a:pPr>
             <a:r>
@@ -2188,8 +2188,8 @@
         </p:nvSpPr>
         <p:spPr>
           <a:xfrm>
-            <a:off x="457200" y="182880"/>
-            <a:ext cx="11064240" cy="384048"/>
+            <a:off x="1979676" y="137160"/>
+            <a:ext cx="8229600" cy="365760"/>
           </a:xfrm>
           <a:prstGeom prst="rect">
             <a:avLst/>
@@ -2205,7 +2205,7 @@
               <a:buNone/>
             </a:pPr>
             <a:r>
-              <a:rPr lang="en-US" sz="2000" b="1" dirty="0">
+              <a:rPr lang="en-US" sz="1800" b="1" dirty="0">
                 <a:solidFill>
                   <a:srgbClr val="1A1A2E"/>
                 </a:solidFill>
@@ -2215,7 +2215,7 @@
               </a:rPr>
               <a:t>L1-L6 知识体系 + 两天全览</a:t>
             </a:r>
-            <a:endParaRPr lang="en-US" sz="2000" dirty="0"/>
+            <a:endParaRPr lang="en-US" sz="1800" dirty="0"/>
           </a:p>
         </p:txBody>
       </p:sp>
@@ -2227,8 +2227,8 @@
         </p:nvSpPr>
         <p:spPr>
           <a:xfrm>
-            <a:off x="457200" y="566928"/>
-            <a:ext cx="1097280" cy="27432"/>
+            <a:off x="1979676" y="502920"/>
+            <a:ext cx="914400" cy="27432"/>
           </a:xfrm>
           <a:prstGeom prst="rect">
             <a:avLst/>
@@ -2247,12 +2247,12 @@
         </p:nvSpPr>
         <p:spPr>
           <a:xfrm>
-            <a:off x="457200" y="777240"/>
-            <a:ext cx="1798320" cy="594360"/>
+            <a:off x="1979676" y="685800"/>
+            <a:ext cx="1325880" cy="530352"/>
           </a:xfrm>
           <a:prstGeom prst="roundRect">
             <a:avLst>
-              <a:gd name="adj" fmla="val 12308"/>
+              <a:gd name="adj" fmla="val 10345"/>
             </a:avLst>
           </a:prstGeom>
           <a:solidFill>
@@ -2274,8 +2274,8 @@
         </p:nvSpPr>
         <p:spPr>
           <a:xfrm>
-            <a:off x="457200" y="786384"/>
-            <a:ext cx="1798320" cy="182880"/>
+            <a:off x="1979676" y="694944"/>
+            <a:ext cx="1325880" cy="164592"/>
           </a:xfrm>
           <a:prstGeom prst="rect">
             <a:avLst/>
@@ -2291,7 +2291,7 @@
               <a:buNone/>
             </a:pPr>
             <a:r>
-              <a:rPr lang="en-US" sz="800" b="1" dirty="0">
+              <a:rPr lang="en-US" sz="750" b="1" dirty="0">
                 <a:solidFill>
                   <a:srgbClr val="2563EB"/>
                 </a:solidFill>
@@ -2301,7 +2301,7 @@
               </a:rPr>
               <a:t>L1</a:t>
             </a:r>
-            <a:endParaRPr lang="en-US" sz="800" dirty="0"/>
+            <a:endParaRPr lang="en-US" sz="750" dirty="0"/>
           </a:p>
         </p:txBody>
       </p:sp>
@@ -2313,8 +2313,8 @@
         </p:nvSpPr>
         <p:spPr>
           <a:xfrm>
-            <a:off x="457200" y="960120"/>
-            <a:ext cx="1798320" cy="182880"/>
+            <a:off x="1979676" y="850392"/>
+            <a:ext cx="1325880" cy="164592"/>
           </a:xfrm>
           <a:prstGeom prst="rect">
             <a:avLst/>
@@ -2352,8 +2352,8 @@
         </p:nvSpPr>
         <p:spPr>
           <a:xfrm>
-            <a:off x="457200" y="1152144"/>
-            <a:ext cx="1798320" cy="164592"/>
+            <a:off x="1979676" y="1005840"/>
+            <a:ext cx="1325880" cy="146304"/>
           </a:xfrm>
           <a:prstGeom prst="rect">
             <a:avLst/>
@@ -2369,14 +2369,14 @@
               <a:buNone/>
             </a:pPr>
             <a:r>
-              <a:rPr lang="en-US" sz="700" dirty="0">
+              <a:rPr lang="en-US" sz="650" dirty="0">
                 <a:solidFill>
                   <a:srgbClr val="64748B"/>
                 </a:solidFill>
               </a:rPr>
               <a:t>60m</a:t>
             </a:r>
-            <a:endParaRPr lang="en-US" sz="700" dirty="0"/>
+            <a:endParaRPr lang="en-US" sz="650" dirty="0"/>
           </a:p>
         </p:txBody>
       </p:sp>
@@ -2388,12 +2388,12 @@
         </p:nvSpPr>
         <p:spPr>
           <a:xfrm>
-            <a:off x="2310384" y="777240"/>
-            <a:ext cx="1798320" cy="594360"/>
+            <a:off x="3360420" y="685800"/>
+            <a:ext cx="1325880" cy="530352"/>
           </a:xfrm>
           <a:prstGeom prst="roundRect">
             <a:avLst>
-              <a:gd name="adj" fmla="val 12308"/>
+              <a:gd name="adj" fmla="val 10345"/>
             </a:avLst>
           </a:prstGeom>
           <a:solidFill>
@@ -2415,8 +2415,8 @@
         </p:nvSpPr>
         <p:spPr>
           <a:xfrm>
-            <a:off x="2310384" y="786384"/>
-            <a:ext cx="1798320" cy="182880"/>
+            <a:off x="3360420" y="694944"/>
+            <a:ext cx="1325880" cy="164592"/>
           </a:xfrm>
           <a:prstGeom prst="rect">
             <a:avLst/>
@@ -2432,7 +2432,7 @@
               <a:buNone/>
             </a:pPr>
             <a:r>
-              <a:rPr lang="en-US" sz="800" b="1" dirty="0">
+              <a:rPr lang="en-US" sz="750" b="1" dirty="0">
                 <a:solidFill>
                   <a:srgbClr val="2563EB"/>
                 </a:solidFill>
@@ -2442,7 +2442,7 @@
               </a:rPr>
               <a:t>L2</a:t>
             </a:r>
-            <a:endParaRPr lang="en-US" sz="800" dirty="0"/>
+            <a:endParaRPr lang="en-US" sz="750" dirty="0"/>
           </a:p>
         </p:txBody>
       </p:sp>
@@ -2454,8 +2454,8 @@
         </p:nvSpPr>
         <p:spPr>
           <a:xfrm>
-            <a:off x="2310384" y="960120"/>
-            <a:ext cx="1798320" cy="182880"/>
+            <a:off x="3360420" y="850392"/>
+            <a:ext cx="1325880" cy="164592"/>
           </a:xfrm>
           <a:prstGeom prst="rect">
             <a:avLst/>
@@ -2493,8 +2493,8 @@
         </p:nvSpPr>
         <p:spPr>
           <a:xfrm>
-            <a:off x="2310384" y="1152144"/>
-            <a:ext cx="1798320" cy="164592"/>
+            <a:off x="3360420" y="1005840"/>
+            <a:ext cx="1325880" cy="146304"/>
           </a:xfrm>
           <a:prstGeom prst="rect">
             <a:avLst/>
@@ -2510,14 +2510,14 @@
               <a:buNone/>
             </a:pPr>
             <a:r>
-              <a:rPr lang="en-US" sz="700" dirty="0">
+              <a:rPr lang="en-US" sz="650" dirty="0">
                 <a:solidFill>
                   <a:srgbClr val="64748B"/>
                 </a:solidFill>
               </a:rPr>
               <a:t>60m</a:t>
             </a:r>
-            <a:endParaRPr lang="en-US" sz="700" dirty="0"/>
+            <a:endParaRPr lang="en-US" sz="650" dirty="0"/>
           </a:p>
         </p:txBody>
       </p:sp>
@@ -2529,12 +2529,12 @@
         </p:nvSpPr>
         <p:spPr>
           <a:xfrm>
-            <a:off x="4163568" y="777240"/>
-            <a:ext cx="1798320" cy="594360"/>
+            <a:off x="4741164" y="685800"/>
+            <a:ext cx="1325880" cy="530352"/>
           </a:xfrm>
           <a:prstGeom prst="roundRect">
             <a:avLst>
-              <a:gd name="adj" fmla="val 12308"/>
+              <a:gd name="adj" fmla="val 10345"/>
             </a:avLst>
           </a:prstGeom>
           <a:solidFill>
@@ -2556,8 +2556,8 @@
         </p:nvSpPr>
         <p:spPr>
           <a:xfrm>
-            <a:off x="4163568" y="786384"/>
-            <a:ext cx="1798320" cy="182880"/>
+            <a:off x="4741164" y="694944"/>
+            <a:ext cx="1325880" cy="164592"/>
           </a:xfrm>
           <a:prstGeom prst="rect">
             <a:avLst/>
@@ -2573,7 +2573,7 @@
               <a:buNone/>
             </a:pPr>
             <a:r>
-              <a:rPr lang="en-US" sz="800" b="1" dirty="0">
+              <a:rPr lang="en-US" sz="750" b="1" dirty="0">
                 <a:solidFill>
                   <a:srgbClr val="2563EB"/>
                 </a:solidFill>
@@ -2583,7 +2583,7 @@
               </a:rPr>
               <a:t>L3</a:t>
             </a:r>
-            <a:endParaRPr lang="en-US" sz="800" dirty="0"/>
+            <a:endParaRPr lang="en-US" sz="750" dirty="0"/>
           </a:p>
         </p:txBody>
       </p:sp>
@@ -2595,8 +2595,8 @@
         </p:nvSpPr>
         <p:spPr>
           <a:xfrm>
-            <a:off x="4163568" y="960120"/>
-            <a:ext cx="1798320" cy="182880"/>
+            <a:off x="4741164" y="850392"/>
+            <a:ext cx="1325880" cy="164592"/>
           </a:xfrm>
           <a:prstGeom prst="rect">
             <a:avLst/>
@@ -2634,8 +2634,8 @@
         </p:nvSpPr>
         <p:spPr>
           <a:xfrm>
-            <a:off x="4163568" y="1152144"/>
-            <a:ext cx="1798320" cy="164592"/>
+            <a:off x="4741164" y="1005840"/>
+            <a:ext cx="1325880" cy="146304"/>
           </a:xfrm>
           <a:prstGeom prst="rect">
             <a:avLst/>
@@ -2651,14 +2651,14 @@
               <a:buNone/>
             </a:pPr>
             <a:r>
-              <a:rPr lang="en-US" sz="700" dirty="0">
+              <a:rPr lang="en-US" sz="650" dirty="0">
                 <a:solidFill>
                   <a:srgbClr val="64748B"/>
                 </a:solidFill>
               </a:rPr>
               <a:t>60m</a:t>
             </a:r>
-            <a:endParaRPr lang="en-US" sz="700" dirty="0"/>
+            <a:endParaRPr lang="en-US" sz="650" dirty="0"/>
           </a:p>
         </p:txBody>
       </p:sp>
@@ -2670,12 +2670,12 @@
         </p:nvSpPr>
         <p:spPr>
           <a:xfrm>
-            <a:off x="6016752" y="777240"/>
-            <a:ext cx="1798320" cy="594360"/>
+            <a:off x="6121908" y="685800"/>
+            <a:ext cx="1325880" cy="530352"/>
           </a:xfrm>
           <a:prstGeom prst="roundRect">
             <a:avLst>
-              <a:gd name="adj" fmla="val 12308"/>
+              <a:gd name="adj" fmla="val 10345"/>
             </a:avLst>
           </a:prstGeom>
           <a:solidFill>
@@ -2697,8 +2697,8 @@
         </p:nvSpPr>
         <p:spPr>
           <a:xfrm>
-            <a:off x="6016752" y="786384"/>
-            <a:ext cx="1798320" cy="182880"/>
+            <a:off x="6121908" y="694944"/>
+            <a:ext cx="1325880" cy="164592"/>
           </a:xfrm>
           <a:prstGeom prst="rect">
             <a:avLst/>
@@ -2714,7 +2714,7 @@
               <a:buNone/>
             </a:pPr>
             <a:r>
-              <a:rPr lang="en-US" sz="800" b="1" dirty="0">
+              <a:rPr lang="en-US" sz="750" b="1" dirty="0">
                 <a:solidFill>
                   <a:srgbClr val="2563EB"/>
                 </a:solidFill>
@@ -2724,7 +2724,7 @@
               </a:rPr>
               <a:t>L4</a:t>
             </a:r>
-            <a:endParaRPr lang="en-US" sz="800" dirty="0"/>
+            <a:endParaRPr lang="en-US" sz="750" dirty="0"/>
           </a:p>
         </p:txBody>
       </p:sp>
@@ -2736,8 +2736,8 @@
         </p:nvSpPr>
         <p:spPr>
           <a:xfrm>
-            <a:off x="6016752" y="960120"/>
-            <a:ext cx="1798320" cy="182880"/>
+            <a:off x="6121908" y="850392"/>
+            <a:ext cx="1325880" cy="164592"/>
           </a:xfrm>
           <a:prstGeom prst="rect">
             <a:avLst/>
@@ -2775,8 +2775,8 @@
         </p:nvSpPr>
         <p:spPr>
           <a:xfrm>
-            <a:off x="6016752" y="1152144"/>
-            <a:ext cx="1798320" cy="164592"/>
+            <a:off x="6121908" y="1005840"/>
+            <a:ext cx="1325880" cy="146304"/>
           </a:xfrm>
           <a:prstGeom prst="rect">
             <a:avLst/>
@@ -2792,14 +2792,14 @@
               <a:buNone/>
             </a:pPr>
             <a:r>
-              <a:rPr lang="en-US" sz="700" dirty="0">
+              <a:rPr lang="en-US" sz="650" dirty="0">
                 <a:solidFill>
                   <a:srgbClr val="64748B"/>
                 </a:solidFill>
               </a:rPr>
               <a:t>75m</a:t>
             </a:r>
-            <a:endParaRPr lang="en-US" sz="700" dirty="0"/>
+            <a:endParaRPr lang="en-US" sz="650" dirty="0"/>
           </a:p>
         </p:txBody>
       </p:sp>
@@ -2811,12 +2811,12 @@
         </p:nvSpPr>
         <p:spPr>
           <a:xfrm>
-            <a:off x="7869936" y="777240"/>
-            <a:ext cx="1798320" cy="594360"/>
+            <a:off x="7502652" y="685800"/>
+            <a:ext cx="1325880" cy="530352"/>
           </a:xfrm>
           <a:prstGeom prst="roundRect">
             <a:avLst>
-              <a:gd name="adj" fmla="val 12308"/>
+              <a:gd name="adj" fmla="val 10345"/>
             </a:avLst>
           </a:prstGeom>
           <a:solidFill>
@@ -2838,8 +2838,8 @@
         </p:nvSpPr>
         <p:spPr>
           <a:xfrm>
-            <a:off x="7869936" y="786384"/>
-            <a:ext cx="1798320" cy="182880"/>
+            <a:off x="7502652" y="694944"/>
+            <a:ext cx="1325880" cy="164592"/>
           </a:xfrm>
           <a:prstGeom prst="rect">
             <a:avLst/>
@@ -2855,7 +2855,7 @@
               <a:buNone/>
             </a:pPr>
             <a:r>
-              <a:rPr lang="en-US" sz="800" b="1" dirty="0">
+              <a:rPr lang="en-US" sz="750" b="1" dirty="0">
                 <a:solidFill>
                   <a:srgbClr val="2563EB"/>
                 </a:solidFill>
@@ -2865,7 +2865,7 @@
               </a:rPr>
               <a:t>L5</a:t>
             </a:r>
-            <a:endParaRPr lang="en-US" sz="800" dirty="0"/>
+            <a:endParaRPr lang="en-US" sz="750" dirty="0"/>
           </a:p>
         </p:txBody>
       </p:sp>
@@ -2877,8 +2877,8 @@
         </p:nvSpPr>
         <p:spPr>
           <a:xfrm>
-            <a:off x="7869936" y="960120"/>
-            <a:ext cx="1798320" cy="182880"/>
+            <a:off x="7502652" y="850392"/>
+            <a:ext cx="1325880" cy="164592"/>
           </a:xfrm>
           <a:prstGeom prst="rect">
             <a:avLst/>
@@ -2916,8 +2916,8 @@
         </p:nvSpPr>
         <p:spPr>
           <a:xfrm>
-            <a:off x="7869936" y="1152144"/>
-            <a:ext cx="1798320" cy="164592"/>
+            <a:off x="7502652" y="1005840"/>
+            <a:ext cx="1325880" cy="146304"/>
           </a:xfrm>
           <a:prstGeom prst="rect">
             <a:avLst/>
@@ -2933,14 +2933,14 @@
               <a:buNone/>
             </a:pPr>
             <a:r>
-              <a:rPr lang="en-US" sz="700" dirty="0">
+              <a:rPr lang="en-US" sz="650" dirty="0">
                 <a:solidFill>
                   <a:srgbClr val="64748B"/>
                 </a:solidFill>
               </a:rPr>
               <a:t>50m</a:t>
             </a:r>
-            <a:endParaRPr lang="en-US" sz="700" dirty="0"/>
+            <a:endParaRPr lang="en-US" sz="650" dirty="0"/>
           </a:p>
         </p:txBody>
       </p:sp>
@@ -2952,12 +2952,12 @@
         </p:nvSpPr>
         <p:spPr>
           <a:xfrm>
-            <a:off x="9723120" y="777240"/>
-            <a:ext cx="1798320" cy="594360"/>
+            <a:off x="8883396" y="685800"/>
+            <a:ext cx="1325880" cy="530352"/>
           </a:xfrm>
           <a:prstGeom prst="roundRect">
             <a:avLst>
-              <a:gd name="adj" fmla="val 12308"/>
+              <a:gd name="adj" fmla="val 10345"/>
             </a:avLst>
           </a:prstGeom>
           <a:solidFill>
@@ -2979,8 +2979,8 @@
         </p:nvSpPr>
         <p:spPr>
           <a:xfrm>
-            <a:off x="9723120" y="786384"/>
-            <a:ext cx="1798320" cy="182880"/>
+            <a:off x="8883396" y="694944"/>
+            <a:ext cx="1325880" cy="164592"/>
           </a:xfrm>
           <a:prstGeom prst="rect">
             <a:avLst/>
@@ -2996,7 +2996,7 @@
               <a:buNone/>
             </a:pPr>
             <a:r>
-              <a:rPr lang="en-US" sz="800" b="1" dirty="0">
+              <a:rPr lang="en-US" sz="750" b="1" dirty="0">
                 <a:solidFill>
                   <a:srgbClr val="2563EB"/>
                 </a:solidFill>
@@ -3006,7 +3006,7 @@
               </a:rPr>
               <a:t>L6</a:t>
             </a:r>
-            <a:endParaRPr lang="en-US" sz="800" dirty="0"/>
+            <a:endParaRPr lang="en-US" sz="750" dirty="0"/>
           </a:p>
         </p:txBody>
       </p:sp>
@@ -3018,8 +3018,8 @@
         </p:nvSpPr>
         <p:spPr>
           <a:xfrm>
-            <a:off x="9723120" y="960120"/>
-            <a:ext cx="1798320" cy="182880"/>
+            <a:off x="8883396" y="850392"/>
+            <a:ext cx="1325880" cy="164592"/>
           </a:xfrm>
           <a:prstGeom prst="rect">
             <a:avLst/>
@@ -3057,8 +3057,8 @@
         </p:nvSpPr>
         <p:spPr>
           <a:xfrm>
-            <a:off x="9723120" y="1152144"/>
-            <a:ext cx="1798320" cy="164592"/>
+            <a:off x="8883396" y="1005840"/>
+            <a:ext cx="1325880" cy="146304"/>
           </a:xfrm>
           <a:prstGeom prst="rect">
             <a:avLst/>
@@ -3074,14 +3074,14 @@
               <a:buNone/>
             </a:pPr>
             <a:r>
-              <a:rPr lang="en-US" sz="700" dirty="0">
+              <a:rPr lang="en-US" sz="650" dirty="0">
                 <a:solidFill>
                   <a:srgbClr val="64748B"/>
                 </a:solidFill>
               </a:rPr>
               <a:t>20m</a:t>
             </a:r>
-            <a:endParaRPr lang="en-US" sz="700" dirty="0"/>
+            <a:endParaRPr lang="en-US" sz="650" dirty="0"/>
           </a:p>
         </p:txBody>
       </p:sp>
@@ -3093,8 +3093,8 @@
         </p:nvSpPr>
         <p:spPr>
           <a:xfrm>
-            <a:off x="457200" y="1554480"/>
-            <a:ext cx="5486400" cy="201168"/>
+            <a:off x="1979676" y="1371600"/>
+            <a:ext cx="4046220" cy="182880"/>
           </a:xfrm>
           <a:prstGeom prst="rect">
             <a:avLst/>
@@ -3110,14 +3110,14 @@
               <a:buNone/>
             </a:pPr>
             <a:r>
-              <a:rPr lang="en-US" sz="1100" b="1" dirty="0">
+              <a:rPr lang="en-US" sz="1000" b="1" dirty="0">
                 <a:solidFill>
                   <a:srgbClr val="1A1A2E"/>
                 </a:solidFill>
               </a:rPr>
               <a:t>Day 1: 范式+架构+推演</a:t>
             </a:r>
-            <a:endParaRPr lang="en-US" sz="1100" dirty="0"/>
+            <a:endParaRPr lang="en-US" sz="1000" dirty="0"/>
           </a:p>
         </p:txBody>
       </p:sp>
@@ -3129,12 +3129,12 @@
         </p:nvSpPr>
         <p:spPr>
           <a:xfrm>
-            <a:off x="457200" y="1810512"/>
-            <a:ext cx="5440680" cy="457200"/>
+            <a:off x="1979676" y="1600200"/>
+            <a:ext cx="4046220" cy="411480"/>
           </a:xfrm>
           <a:prstGeom prst="roundRect">
             <a:avLst>
-              <a:gd name="adj" fmla="val 16000"/>
+              <a:gd name="adj" fmla="val 13333"/>
             </a:avLst>
           </a:prstGeom>
           <a:solidFill>
@@ -3156,8 +3156,8 @@
         </p:nvSpPr>
         <p:spPr>
           <a:xfrm>
-            <a:off x="457200" y="1810512"/>
-            <a:ext cx="5440680" cy="457200"/>
+            <a:off x="1979676" y="1600200"/>
+            <a:ext cx="4046220" cy="411480"/>
           </a:xfrm>
           <a:prstGeom prst="rect">
             <a:avLst/>
@@ -3173,28 +3173,28 @@
               <a:buNone/>
             </a:pPr>
             <a:r>
-              <a:rPr lang="en-US" sz="750" b="1" dirty="0">
+              <a:rPr lang="en-US" sz="700" b="1" dirty="0">
                 <a:solidFill>
                   <a:srgbClr val="2563EB"/>
                 </a:solidFill>
               </a:rPr>
               <a:t>上午 讲座 (9:30-12:00)</a:t>
             </a:r>
-            <a:endParaRPr lang="en-US" sz="750" dirty="0"/>
+            <a:endParaRPr lang="en-US" sz="700" dirty="0"/>
           </a:p>
           <a:p>
             <a:pPr algn="ctr" indent="0" marL="0">
               <a:buNone/>
             </a:pPr>
             <a:r>
-              <a:rPr lang="en-US" sz="750" b="1" dirty="0">
+              <a:rPr lang="en-US" sz="700" b="1" dirty="0">
                 <a:solidFill>
                   <a:srgbClr val="2563EB"/>
                 </a:solidFill>
               </a:rPr>
               <a:t>L1 AI Native 60min | L2 Agent 60min</a:t>
             </a:r>
-            <a:endParaRPr lang="en-US" sz="750" dirty="0"/>
+            <a:endParaRPr lang="en-US" sz="700" dirty="0"/>
           </a:p>
         </p:txBody>
       </p:sp>
@@ -3206,12 +3206,12 @@
         </p:nvSpPr>
         <p:spPr>
           <a:xfrm>
-            <a:off x="6080760" y="1810512"/>
-            <a:ext cx="5440680" cy="457200"/>
+            <a:off x="6163056" y="1600200"/>
+            <a:ext cx="4046220" cy="411480"/>
           </a:xfrm>
           <a:prstGeom prst="roundRect">
             <a:avLst>
-              <a:gd name="adj" fmla="val 16000"/>
+              <a:gd name="adj" fmla="val 13333"/>
             </a:avLst>
           </a:prstGeom>
           <a:solidFill>
@@ -3233,8 +3233,8 @@
         </p:nvSpPr>
         <p:spPr>
           <a:xfrm>
-            <a:off x="6080760" y="1810512"/>
-            <a:ext cx="5440680" cy="457200"/>
+            <a:off x="6163056" y="1600200"/>
+            <a:ext cx="4046220" cy="411480"/>
           </a:xfrm>
           <a:prstGeom prst="rect">
             <a:avLst/>
@@ -3250,42 +3250,28 @@
               <a:buNone/>
             </a:pPr>
             <a:r>
-              <a:rPr lang="en-US" sz="750" b="1" dirty="0">
+              <a:rPr lang="en-US" sz="700" b="1" dirty="0">
                 <a:solidFill>
                   <a:srgbClr val="2563EB"/>
                 </a:solidFill>
               </a:rPr>
               <a:t>下午 演示+演练 (14:30-18:00)</a:t>
             </a:r>
-            <a:endParaRPr lang="en-US" sz="750" dirty="0"/>
+            <a:endParaRPr lang="en-US" sz="700" dirty="0"/>
           </a:p>
           <a:p>
             <a:pPr algn="ctr" indent="0" marL="0">
               <a:buNone/>
             </a:pPr>
             <a:r>
-              <a:rPr lang="en-US" sz="750" b="1" dirty="0">
+              <a:rPr lang="en-US" sz="700" b="1" dirty="0">
                 <a:solidFill>
                   <a:srgbClr val="2563EB"/>
                 </a:solidFill>
               </a:rPr>
-              <a:t>L1+L2演示 45m | W1练手 60m</a:t>
+              <a:t>L1+L2演示 45m | W1 60m | L3 60m</a:t>
             </a:r>
-            <a:endParaRPr lang="en-US" sz="750" dirty="0"/>
-          </a:p>
-          <a:p>
-            <a:pPr algn="ctr" indent="0" marL="0">
-              <a:buNone/>
-            </a:pPr>
-            <a:r>
-              <a:rPr lang="en-US" sz="750" b="1" dirty="0">
-                <a:solidFill>
-                  <a:srgbClr val="2563EB"/>
-                </a:solidFill>
-              </a:rPr>
-              <a:t>L3 Live 60m | 回顾 20m</a:t>
-            </a:r>
-            <a:endParaRPr lang="en-US" sz="750" dirty="0"/>
+            <a:endParaRPr lang="en-US" sz="700" dirty="0"/>
           </a:p>
         </p:txBody>
       </p:sp>
@@ -3297,8 +3283,8 @@
         </p:nvSpPr>
         <p:spPr>
           <a:xfrm>
-            <a:off x="457200" y="2423160"/>
-            <a:ext cx="5486400" cy="201168"/>
+            <a:off x="1979676" y="2148840"/>
+            <a:ext cx="4046220" cy="182880"/>
           </a:xfrm>
           <a:prstGeom prst="rect">
             <a:avLst/>
@@ -3314,14 +3300,14 @@
               <a:buNone/>
             </a:pPr>
             <a:r>
-              <a:rPr lang="en-US" sz="1100" b="1" dirty="0">
+              <a:rPr lang="en-US" sz="1000" b="1" dirty="0">
                 <a:solidFill>
                   <a:srgbClr val="1A1A2E"/>
                 </a:solidFill>
               </a:rPr>
               <a:t>Day 2: 增量开发+最佳实践</a:t>
             </a:r>
-            <a:endParaRPr lang="en-US" sz="1100" dirty="0"/>
+            <a:endParaRPr lang="en-US" sz="1000" dirty="0"/>
           </a:p>
         </p:txBody>
       </p:sp>
@@ -3333,12 +3319,12 @@
         </p:nvSpPr>
         <p:spPr>
           <a:xfrm>
-            <a:off x="457200" y="2679192"/>
-            <a:ext cx="5440680" cy="457200"/>
+            <a:off x="1979676" y="2377440"/>
+            <a:ext cx="4046220" cy="411480"/>
           </a:xfrm>
           <a:prstGeom prst="roundRect">
             <a:avLst>
-              <a:gd name="adj" fmla="val 16000"/>
+              <a:gd name="adj" fmla="val 13333"/>
             </a:avLst>
           </a:prstGeom>
           <a:solidFill>
@@ -3360,8 +3346,8 @@
         </p:nvSpPr>
         <p:spPr>
           <a:xfrm>
-            <a:off x="457200" y="2679192"/>
-            <a:ext cx="5440680" cy="457200"/>
+            <a:off x="1979676" y="2377440"/>
+            <a:ext cx="4046220" cy="411480"/>
           </a:xfrm>
           <a:prstGeom prst="rect">
             <a:avLst/>
@@ -3377,28 +3363,28 @@
               <a:buNone/>
             </a:pPr>
             <a:r>
-              <a:rPr lang="en-US" sz="750" b="1" dirty="0">
+              <a:rPr lang="en-US" sz="700" b="1" dirty="0">
                 <a:solidFill>
                   <a:srgbClr val="2563EB"/>
                 </a:solidFill>
               </a:rPr>
               <a:t>上午 讲座 (9:30-11:50)</a:t>
             </a:r>
-            <a:endParaRPr lang="en-US" sz="750" dirty="0"/>
+            <a:endParaRPr lang="en-US" sz="700" dirty="0"/>
           </a:p>
           <a:p>
             <a:pPr algn="ctr" indent="0" marL="0">
               <a:buNone/>
             </a:pPr>
             <a:r>
-              <a:rPr lang="en-US" sz="750" b="1" dirty="0">
+              <a:rPr lang="en-US" sz="700" b="1" dirty="0">
                 <a:solidFill>
                   <a:srgbClr val="2563EB"/>
                 </a:solidFill>
               </a:rPr>
-              <a:t>L4 增量开发与重构 75min | L5 工程最佳实践 50min</a:t>
+              <a:t>L4 增量重构 75min | L5 实践 50min</a:t>
             </a:r>
-            <a:endParaRPr lang="en-US" sz="750" dirty="0"/>
+            <a:endParaRPr lang="en-US" sz="700" dirty="0"/>
           </a:p>
         </p:txBody>
       </p:sp>
@@ -3410,12 +3396,12 @@
         </p:nvSpPr>
         <p:spPr>
           <a:xfrm>
-            <a:off x="6080760" y="2679192"/>
-            <a:ext cx="5440680" cy="457200"/>
+            <a:off x="6163056" y="2377440"/>
+            <a:ext cx="4046220" cy="411480"/>
           </a:xfrm>
           <a:prstGeom prst="roundRect">
             <a:avLst>
-              <a:gd name="adj" fmla="val 16000"/>
+              <a:gd name="adj" fmla="val 13333"/>
             </a:avLst>
           </a:prstGeom>
           <a:solidFill>
@@ -3437,8 +3423,8 @@
         </p:nvSpPr>
         <p:spPr>
           <a:xfrm>
-            <a:off x="6080760" y="2679192"/>
-            <a:ext cx="5440680" cy="457200"/>
+            <a:off x="6163056" y="2377440"/>
+            <a:ext cx="4046220" cy="411480"/>
           </a:xfrm>
           <a:prstGeom prst="rect">
             <a:avLst/>
@@ -3454,42 +3440,28 @@
               <a:buNone/>
             </a:pPr>
             <a:r>
-              <a:rPr lang="en-US" sz="750" b="1" dirty="0">
+              <a:rPr lang="en-US" sz="700" b="1" dirty="0">
                 <a:solidFill>
                   <a:srgbClr val="2563EB"/>
                 </a:solidFill>
               </a:rPr>
               <a:t>下午 演练 (14:30-18:00)</a:t>
             </a:r>
-            <a:endParaRPr lang="en-US" sz="750" dirty="0"/>
+            <a:endParaRPr lang="en-US" sz="700" dirty="0"/>
           </a:p>
           <a:p>
             <a:pPr algn="ctr" indent="0" marL="0">
               <a:buNone/>
             </a:pPr>
             <a:r>
-              <a:rPr lang="en-US" sz="750" b="1" dirty="0">
+              <a:rPr lang="en-US" sz="700" b="1" dirty="0">
                 <a:solidFill>
                   <a:srgbClr val="2563EB"/>
                 </a:solidFill>
               </a:rPr>
-              <a:t>W2重构 75m | W3项目 60m</a:t>
+              <a:t>W2重构 75m | W3项目 60m | 评审+L6</a:t>
             </a:r>
-            <a:endParaRPr lang="en-US" sz="750" dirty="0"/>
-          </a:p>
-          <a:p>
-            <a:pPr algn="ctr" indent="0" marL="0">
-              <a:buNone/>
-            </a:pPr>
-            <a:r>
-              <a:rPr lang="en-US" sz="750" b="1" dirty="0">
-                <a:solidFill>
-                  <a:srgbClr val="2563EB"/>
-                </a:solidFill>
-              </a:rPr>
-              <a:t>评审 30m | L6总结 20m</a:t>
-            </a:r>
-            <a:endParaRPr lang="en-US" sz="750" dirty="0"/>
+            <a:endParaRPr lang="en-US" sz="700" dirty="0"/>
           </a:p>
         </p:txBody>
       </p:sp>
@@ -3508,28 +3480,28 @@
           </p:nvPr>
         </p:nvGraphicFramePr>
         <p:xfrm>
-          <a:off x="457200" y="3337560"/>
-          <a:ext cx="11064240" cy="914400"/>
+          <a:off x="1979676" y="2926080"/>
+          <a:ext cx="8229600" cy="914400"/>
         </p:xfrm>
         <a:graphic>
           <a:graphicData uri="http://schemas.openxmlformats.org/drawingml/2006/table">
             <a:tbl>
               <a:tblPr/>
               <a:tblGrid>
-                <a:gridCol w="2011680"/>
-                <a:gridCol w="4526280"/>
-                <a:gridCol w="4526280"/>
+                <a:gridCol w="1463040"/>
+                <a:gridCol w="3383280"/>
+                <a:gridCol w="3383280"/>
               </a:tblGrid>
-              <a:tr h="182880">
-                <a:tc>
-                  <a:txBody>
-                    <a:bodyPr/>
-                    <a:lstStyle/>
-                    <a:p>
-                      <a:pPr indent="0" marL="0">
-                        <a:buNone/>
-                      </a:pPr>
-                      <a:endParaRPr lang="en-US" sz="700" dirty="0">
+              <a:tr h="164592">
+                <a:tc>
+                  <a:txBody>
+                    <a:bodyPr/>
+                    <a:lstStyle/>
+                    <a:p>
+                      <a:pPr indent="0" marL="0">
+                        <a:buNone/>
+                      </a:pPr>
+                      <a:endParaRPr lang="en-US" sz="650" dirty="0">
                         <a:latin typeface="Arial" charset="0"/>
                         <a:ea typeface="Arial" charset="0"/>
                         <a:cs typeface="Arial" charset="0"/>
@@ -3587,7 +3559,7 @@
                         <a:buNone/>
                       </a:pPr>
                       <a:r>
-                        <a:rPr lang="en-US" sz="700" b="1" dirty="0">
+                        <a:rPr lang="en-US" sz="650" b="1" dirty="0">
                           <a:solidFill>
                             <a:srgbClr val="334155"/>
                           </a:solidFill>
@@ -3597,7 +3569,7 @@
                         </a:rPr>
                         <a:t>Day 1</a:t>
                       </a:r>
-                      <a:endParaRPr lang="en-US" sz="700" dirty="0">
+                      <a:endParaRPr lang="en-US" sz="650" dirty="0">
                         <a:latin typeface="Arial" charset="0"/>
                         <a:ea typeface="Arial" charset="0"/>
                         <a:cs typeface="Arial" charset="0"/>
@@ -3655,7 +3627,7 @@
                         <a:buNone/>
                       </a:pPr>
                       <a:r>
-                        <a:rPr lang="en-US" sz="700" b="1" dirty="0">
+                        <a:rPr lang="en-US" sz="650" b="1" dirty="0">
                           <a:solidFill>
                             <a:srgbClr val="334155"/>
                           </a:solidFill>
@@ -3665,7 +3637,7 @@
                         </a:rPr>
                         <a:t>Day 2</a:t>
                       </a:r>
-                      <a:endParaRPr lang="en-US" sz="700" dirty="0">
+                      <a:endParaRPr lang="en-US" sz="650" dirty="0">
                         <a:latin typeface="Arial" charset="0"/>
                         <a:ea typeface="Arial" charset="0"/>
                         <a:cs typeface="Arial" charset="0"/>
@@ -3715,7 +3687,7 @@
                   </a:tcPr>
                 </a:tc>
               </a:tr>
-              <a:tr h="237744">
+              <a:tr h="219456">
                 <a:tc>
                   <a:txBody>
                     <a:bodyPr/>
@@ -3725,7 +3697,7 @@
                         <a:buNone/>
                       </a:pPr>
                       <a:r>
-                        <a:rPr lang="en-US" sz="700" b="1" dirty="0">
+                        <a:rPr lang="en-US" sz="650" b="1" dirty="0">
                           <a:solidFill>
                             <a:srgbClr val="334155"/>
                           </a:solidFill>
@@ -3735,7 +3707,7 @@
                         </a:rPr>
                         <a:t>讲座</a:t>
                       </a:r>
-                      <a:endParaRPr lang="en-US" sz="700" dirty="0">
+                      <a:endParaRPr lang="en-US" sz="650" dirty="0">
                         <a:latin typeface="Arial" charset="0"/>
                         <a:ea typeface="Arial" charset="0"/>
                         <a:cs typeface="Arial" charset="0"/>
@@ -3790,7 +3762,7 @@
                         <a:buNone/>
                       </a:pPr>
                       <a:r>
-                        <a:rPr lang="en-US" sz="700" dirty="0">
+                        <a:rPr lang="en-US" sz="650" dirty="0">
                           <a:solidFill>
                             <a:srgbClr val="334155"/>
                           </a:solidFill>
@@ -3800,7 +3772,7 @@
                         </a:rPr>
                         <a:t>L1+L2 (120min)</a:t>
                       </a:r>
-                      <a:endParaRPr lang="en-US" sz="700" dirty="0">
+                      <a:endParaRPr lang="en-US" sz="650" dirty="0">
                         <a:latin typeface="Arial" charset="0"/>
                         <a:ea typeface="Arial" charset="0"/>
                         <a:cs typeface="Arial" charset="0"/>
@@ -3855,7 +3827,7 @@
                         <a:buNone/>
                       </a:pPr>
                       <a:r>
-                        <a:rPr lang="en-US" sz="700" dirty="0">
+                        <a:rPr lang="en-US" sz="650" dirty="0">
                           <a:solidFill>
                             <a:srgbClr val="334155"/>
                           </a:solidFill>
@@ -3865,7 +3837,7 @@
                         </a:rPr>
                         <a:t>L4+L5 (125min)</a:t>
                       </a:r>
-                      <a:endParaRPr lang="en-US" sz="700" dirty="0">
+                      <a:endParaRPr lang="en-US" sz="650" dirty="0">
                         <a:latin typeface="Arial" charset="0"/>
                         <a:ea typeface="Arial" charset="0"/>
                         <a:cs typeface="Arial" charset="0"/>
@@ -3912,7 +3884,7 @@
                   </a:tcPr>
                 </a:tc>
               </a:tr>
-              <a:tr h="237744">
+              <a:tr h="219456">
                 <a:tc>
                   <a:txBody>
                     <a:bodyPr/>
@@ -3922,7 +3894,7 @@
                         <a:buNone/>
                       </a:pPr>
                       <a:r>
-                        <a:rPr lang="en-US" sz="700" b="1" dirty="0">
+                        <a:rPr lang="en-US" sz="650" b="1" dirty="0">
                           <a:solidFill>
                             <a:srgbClr val="334155"/>
                           </a:solidFill>
@@ -3932,7 +3904,7 @@
                         </a:rPr>
                         <a:t>演示</a:t>
                       </a:r>
-                      <a:endParaRPr lang="en-US" sz="700" dirty="0">
+                      <a:endParaRPr lang="en-US" sz="650" dirty="0">
                         <a:latin typeface="Arial" charset="0"/>
                         <a:ea typeface="Arial" charset="0"/>
                         <a:cs typeface="Arial" charset="0"/>
@@ -3987,7 +3959,7 @@
                         <a:buNone/>
                       </a:pPr>
                       <a:r>
-                        <a:rPr lang="en-US" sz="700" dirty="0">
+                        <a:rPr lang="en-US" sz="650" dirty="0">
                           <a:solidFill>
                             <a:srgbClr val="334155"/>
                           </a:solidFill>
@@ -3997,7 +3969,7 @@
                         </a:rPr>
                         <a:t>L1+L2 Demo + L3 Live (105min)</a:t>
                       </a:r>
-                      <a:endParaRPr lang="en-US" sz="700" dirty="0">
+                      <a:endParaRPr lang="en-US" sz="650" dirty="0">
                         <a:latin typeface="Arial" charset="0"/>
                         <a:ea typeface="Arial" charset="0"/>
                         <a:cs typeface="Arial" charset="0"/>
@@ -4052,7 +4024,7 @@
                         <a:buNone/>
                       </a:pPr>
                       <a:r>
-                        <a:rPr lang="en-US" sz="700" dirty="0">
+                        <a:rPr lang="en-US" sz="650" dirty="0">
                           <a:solidFill>
                             <a:srgbClr val="334155"/>
                           </a:solidFill>
@@ -4062,7 +4034,7 @@
                         </a:rPr>
                         <a:t>--</a:t>
                       </a:r>
-                      <a:endParaRPr lang="en-US" sz="700" dirty="0">
+                      <a:endParaRPr lang="en-US" sz="650" dirty="0">
                         <a:latin typeface="Arial" charset="0"/>
                         <a:ea typeface="Arial" charset="0"/>
                         <a:cs typeface="Arial" charset="0"/>
@@ -4109,7 +4081,7 @@
                   </a:tcPr>
                 </a:tc>
               </a:tr>
-              <a:tr h="237744">
+              <a:tr h="219456">
                 <a:tc>
                   <a:txBody>
                     <a:bodyPr/>
@@ -4119,7 +4091,7 @@
                         <a:buNone/>
                       </a:pPr>
                       <a:r>
-                        <a:rPr lang="en-US" sz="700" b="1" dirty="0">
+                        <a:rPr lang="en-US" sz="650" b="1" dirty="0">
                           <a:solidFill>
                             <a:srgbClr val="334155"/>
                           </a:solidFill>
@@ -4129,7 +4101,7 @@
                         </a:rPr>
                         <a:t>演练</a:t>
                       </a:r>
-                      <a:endParaRPr lang="en-US" sz="700" dirty="0">
+                      <a:endParaRPr lang="en-US" sz="650" dirty="0">
                         <a:latin typeface="Arial" charset="0"/>
                         <a:ea typeface="Arial" charset="0"/>
                         <a:cs typeface="Arial" charset="0"/>
@@ -4184,7 +4156,7 @@
                         <a:buNone/>
                       </a:pPr>
                       <a:r>
-                        <a:rPr lang="en-US" sz="700" dirty="0">
+                        <a:rPr lang="en-US" sz="650" dirty="0">
                           <a:solidFill>
                             <a:srgbClr val="334155"/>
                           </a:solidFill>
@@ -4194,7 +4166,7 @@
                         </a:rPr>
                         <a:t>W1 练手 (60min)</a:t>
                       </a:r>
-                      <a:endParaRPr lang="en-US" sz="700" dirty="0">
+                      <a:endParaRPr lang="en-US" sz="650" dirty="0">
                         <a:latin typeface="Arial" charset="0"/>
                         <a:ea typeface="Arial" charset="0"/>
                         <a:cs typeface="Arial" charset="0"/>
@@ -4249,7 +4221,7 @@
                         <a:buNone/>
                       </a:pPr>
                       <a:r>
-                        <a:rPr lang="en-US" sz="700" dirty="0">
+                        <a:rPr lang="en-US" sz="650" dirty="0">
                           <a:solidFill>
                             <a:srgbClr val="334155"/>
                           </a:solidFill>
@@ -4259,7 +4231,7 @@
                         </a:rPr>
                         <a:t>W2 重构 + W3 项目 (135min)</a:t>
                       </a:r>
-                      <a:endParaRPr lang="en-US" sz="700" dirty="0">
+                      <a:endParaRPr lang="en-US" sz="650" dirty="0">
                         <a:latin typeface="Arial" charset="0"/>
                         <a:ea typeface="Arial" charset="0"/>
                         <a:cs typeface="Arial" charset="0"/>
@@ -4306,7 +4278,7 @@
                   </a:tcPr>
                 </a:tc>
               </a:tr>
-              <a:tr h="237744">
+              <a:tr h="219456">
                 <a:tc>
                   <a:txBody>
                     <a:bodyPr/>
@@ -4316,7 +4288,7 @@
                         <a:buNone/>
                       </a:pPr>
                       <a:r>
-                        <a:rPr lang="en-US" sz="700" b="1" dirty="0">
+                        <a:rPr lang="en-US" sz="650" b="1" dirty="0">
                           <a:solidFill>
                             <a:srgbClr val="334155"/>
                           </a:solidFill>
@@ -4326,7 +4298,7 @@
                         </a:rPr>
                         <a:t>收尾</a:t>
                       </a:r>
-                      <a:endParaRPr lang="en-US" sz="700" dirty="0">
+                      <a:endParaRPr lang="en-US" sz="650" dirty="0">
                         <a:latin typeface="Arial" charset="0"/>
                         <a:ea typeface="Arial" charset="0"/>
                         <a:cs typeface="Arial" charset="0"/>
@@ -4381,7 +4353,7 @@
                         <a:buNone/>
                       </a:pPr>
                       <a:r>
-                        <a:rPr lang="en-US" sz="700" dirty="0">
+                        <a:rPr lang="en-US" sz="650" dirty="0">
                           <a:solidFill>
                             <a:srgbClr val="334155"/>
                           </a:solidFill>
@@ -4391,7 +4363,7 @@
                         </a:rPr>
                         <a:t>回顾 (20min)</a:t>
                       </a:r>
-                      <a:endParaRPr lang="en-US" sz="700" dirty="0">
+                      <a:endParaRPr lang="en-US" sz="650" dirty="0">
                         <a:latin typeface="Arial" charset="0"/>
                         <a:ea typeface="Arial" charset="0"/>
                         <a:cs typeface="Arial" charset="0"/>
@@ -4446,7 +4418,7 @@
                         <a:buNone/>
                       </a:pPr>
                       <a:r>
-                        <a:rPr lang="en-US" sz="700" dirty="0">
+                        <a:rPr lang="en-US" sz="650" dirty="0">
                           <a:solidFill>
                             <a:srgbClr val="334155"/>
                           </a:solidFill>
@@ -4456,7 +4428,7 @@
                         </a:rPr>
                         <a:t>评审 + L6总结 (50min)</a:t>
                       </a:r>
-                      <a:endParaRPr lang="en-US" sz="700" dirty="0">
+                      <a:endParaRPr lang="en-US" sz="650" dirty="0">
                         <a:latin typeface="Arial" charset="0"/>
                         <a:ea typeface="Arial" charset="0"/>
                         <a:cs typeface="Arial" charset="0"/>
@@ -4515,8 +4487,8 @@
         </p:nvSpPr>
         <p:spPr>
           <a:xfrm>
-            <a:off x="457200" y="4572000"/>
-            <a:ext cx="11064240" cy="182880"/>
+            <a:off x="1979676" y="4251960"/>
+            <a:ext cx="8229600" cy="164592"/>
           </a:xfrm>
           <a:prstGeom prst="rect">
             <a:avLst/>
@@ -4532,14 +4504,14 @@
               <a:buNone/>
             </a:pPr>
             <a:r>
-              <a:rPr lang="en-US" sz="800" dirty="0">
+              <a:rPr lang="en-US" sz="750" dirty="0">
                 <a:solidFill>
                   <a:srgbClr val="94A3B8"/>
                 </a:solidFill>
               </a:rPr>
               <a:t>训前自学(1.5h): Prompt基础 + LLM概念 + Claude Code安装</a:t>
             </a:r>
-            <a:endParaRPr lang="en-US" sz="800" dirty="0"/>
+            <a:endParaRPr lang="en-US" sz="750" dirty="0"/>
           </a:p>
         </p:txBody>
       </p:sp>
@@ -4583,8 +4555,8 @@
         </p:nvSpPr>
         <p:spPr>
           <a:xfrm>
-            <a:off x="457200" y="4892040"/>
-            <a:ext cx="11064240" cy="36576"/>
+            <a:off x="1979676" y="4892040"/>
+            <a:ext cx="8229600" cy="27432"/>
           </a:xfrm>
           <a:prstGeom prst="rect">
             <a:avLst/>
@@ -4603,8 +4575,8 @@
         </p:nvSpPr>
         <p:spPr>
           <a:xfrm>
-            <a:off x="457200" y="4983480"/>
-            <a:ext cx="3657600" cy="182880"/>
+            <a:off x="1979676" y="4983480"/>
+            <a:ext cx="8229600" cy="182880"/>
           </a:xfrm>
           <a:prstGeom prst="rect">
             <a:avLst/>
@@ -4613,10 +4585,10 @@
           <a:ln/>
         </p:spPr>
         <p:txBody>
-          <a:bodyPr wrap="square" rtlCol="0" anchor="ctr"/>
+          <a:bodyPr wrap="square" lIns="0" tIns="0" rIns="0" bIns="0" rtlCol="0" anchor="ctr"/>
           <a:lstStyle/>
           <a:p>
-            <a:pPr indent="0" marL="0">
+            <a:pPr algn="ctr" indent="0" marL="0">
               <a:buNone/>
             </a:pPr>
             <a:r>
@@ -4639,8 +4611,8 @@
         </p:nvSpPr>
         <p:spPr>
           <a:xfrm>
-            <a:off x="457200" y="182880"/>
-            <a:ext cx="11064240" cy="384048"/>
+            <a:off x="1979676" y="137160"/>
+            <a:ext cx="8229600" cy="365760"/>
           </a:xfrm>
           <a:prstGeom prst="rect">
             <a:avLst/>
@@ -4656,7 +4628,7 @@
               <a:buNone/>
             </a:pPr>
             <a:r>
-              <a:rPr lang="en-US" sz="2000" b="1" dirty="0">
+              <a:rPr lang="en-US" sz="1800" b="1" dirty="0">
                 <a:solidFill>
                   <a:srgbClr val="1A1A2E"/>
                 </a:solidFill>
@@ -4666,7 +4638,7 @@
               </a:rPr>
               <a:t>Day 1 详细日程</a:t>
             </a:r>
-            <a:endParaRPr lang="en-US" sz="2000" dirty="0"/>
+            <a:endParaRPr lang="en-US" sz="1800" dirty="0"/>
           </a:p>
         </p:txBody>
       </p:sp>
@@ -4678,8 +4650,8 @@
         </p:nvSpPr>
         <p:spPr>
           <a:xfrm>
-            <a:off x="457200" y="566928"/>
-            <a:ext cx="1097280" cy="27432"/>
+            <a:off x="1979676" y="502920"/>
+            <a:ext cx="914400" cy="27432"/>
           </a:xfrm>
           <a:prstGeom prst="rect">
             <a:avLst/>
@@ -4698,8 +4670,8 @@
         </p:nvSpPr>
         <p:spPr>
           <a:xfrm>
-            <a:off x="457200" y="749808"/>
-            <a:ext cx="4572000" cy="182880"/>
+            <a:off x="1979676" y="658368"/>
+            <a:ext cx="4572000" cy="164592"/>
           </a:xfrm>
           <a:prstGeom prst="rect">
             <a:avLst/>
@@ -4715,14 +4687,14 @@
               <a:buNone/>
             </a:pPr>
             <a:r>
-              <a:rPr lang="en-US" sz="1000" b="1" dirty="0">
+              <a:rPr lang="en-US" sz="900" b="1" dirty="0">
                 <a:solidFill>
                   <a:srgbClr val="1A1A2E"/>
                 </a:solidFill>
               </a:rPr>
               <a:t>上午 讲座 (9:30-12:00)</a:t>
             </a:r>
-            <a:endParaRPr lang="en-US" sz="1000" dirty="0"/>
+            <a:endParaRPr lang="en-US" sz="900" dirty="0"/>
           </a:p>
         </p:txBody>
       </p:sp>
@@ -4741,19 +4713,19 @@
           </p:nvPr>
         </p:nvGraphicFramePr>
         <p:xfrm>
-          <a:off x="457200" y="1005840"/>
-          <a:ext cx="11064240" cy="914400"/>
+          <a:off x="1979676" y="868680"/>
+          <a:ext cx="8229600" cy="914400"/>
         </p:xfrm>
         <a:graphic>
           <a:graphicData uri="http://schemas.openxmlformats.org/drawingml/2006/table">
             <a:tbl>
               <a:tblPr/>
               <a:tblGrid>
-                <a:gridCol w="548640"/>
-                <a:gridCol w="2560320"/>
-                <a:gridCol w="7955280"/>
+                <a:gridCol w="502920"/>
+                <a:gridCol w="2194560"/>
+                <a:gridCol w="5532120"/>
               </a:tblGrid>
-              <a:tr h="182880">
+              <a:tr h="164592">
                 <a:tc>
                   <a:txBody>
                     <a:bodyPr/>
@@ -4763,7 +4735,7 @@
                         <a:buNone/>
                       </a:pPr>
                       <a:r>
-                        <a:rPr lang="en-US" sz="700" b="1" dirty="0">
+                        <a:rPr lang="en-US" sz="650" b="1" dirty="0">
                           <a:solidFill>
                             <a:srgbClr val="334155"/>
                           </a:solidFill>
@@ -4773,7 +4745,7 @@
                         </a:rPr>
                         <a:t>时</a:t>
                       </a:r>
-                      <a:endParaRPr lang="en-US" sz="700" dirty="0">
+                      <a:endParaRPr lang="en-US" sz="650" dirty="0">
                         <a:latin typeface="Arial" charset="0"/>
                         <a:ea typeface="Arial" charset="0"/>
                         <a:cs typeface="Arial" charset="0"/>
@@ -4831,7 +4803,7 @@
                         <a:buNone/>
                       </a:pPr>
                       <a:r>
-                        <a:rPr lang="en-US" sz="700" b="1" dirty="0">
+                        <a:rPr lang="en-US" sz="650" b="1" dirty="0">
                           <a:solidFill>
                             <a:srgbClr val="334155"/>
                           </a:solidFill>
@@ -4841,7 +4813,7 @@
                         </a:rPr>
                         <a:t>环节</a:t>
                       </a:r>
-                      <a:endParaRPr lang="en-US" sz="700" dirty="0">
+                      <a:endParaRPr lang="en-US" sz="650" dirty="0">
                         <a:latin typeface="Arial" charset="0"/>
                         <a:ea typeface="Arial" charset="0"/>
                         <a:cs typeface="Arial" charset="0"/>
@@ -4899,7 +4871,7 @@
                         <a:buNone/>
                       </a:pPr>
                       <a:r>
-                        <a:rPr lang="en-US" sz="700" b="1" dirty="0">
+                        <a:rPr lang="en-US" sz="650" b="1" dirty="0">
                           <a:solidFill>
                             <a:srgbClr val="334155"/>
                           </a:solidFill>
@@ -4909,7 +4881,7 @@
                         </a:rPr>
                         <a:t>内容</a:t>
                       </a:r>
-                      <a:endParaRPr lang="en-US" sz="700" dirty="0">
+                      <a:endParaRPr lang="en-US" sz="650" dirty="0">
                         <a:latin typeface="Arial" charset="0"/>
                         <a:ea typeface="Arial" charset="0"/>
                         <a:cs typeface="Arial" charset="0"/>
@@ -4959,7 +4931,7 @@
                   </a:tcPr>
                 </a:tc>
               </a:tr>
-              <a:tr h="274320">
+              <a:tr h="256032">
                 <a:tc>
                   <a:txBody>
                     <a:bodyPr/>
@@ -4969,7 +4941,7 @@
                         <a:buNone/>
                       </a:pPr>
                       <a:r>
-                        <a:rPr lang="en-US" sz="700" b="1" dirty="0">
+                        <a:rPr lang="en-US" sz="650" b="1" dirty="0">
                           <a:solidFill>
                             <a:srgbClr val="334155"/>
                           </a:solidFill>
@@ -4979,7 +4951,7 @@
                         </a:rPr>
                         <a:t>09:30</a:t>
                       </a:r>
-                      <a:endParaRPr lang="en-US" sz="700" dirty="0">
+                      <a:endParaRPr lang="en-US" sz="650" dirty="0">
                         <a:latin typeface="Arial" charset="0"/>
                         <a:ea typeface="Arial" charset="0"/>
                         <a:cs typeface="Arial" charset="0"/>
@@ -5034,7 +5006,7 @@
                         <a:buNone/>
                       </a:pPr>
                       <a:r>
-                        <a:rPr lang="en-US" sz="700" dirty="0">
+                        <a:rPr lang="en-US" sz="650" dirty="0">
                           <a:solidFill>
                             <a:srgbClr val="334155"/>
                           </a:solidFill>
@@ -5044,7 +5016,7 @@
                         </a:rPr>
                         <a:t>开场+破冰</a:t>
                       </a:r>
-                      <a:endParaRPr lang="en-US" sz="700" dirty="0">
+                      <a:endParaRPr lang="en-US" sz="650" dirty="0">
                         <a:latin typeface="Arial" charset="0"/>
                         <a:ea typeface="Arial" charset="0"/>
                         <a:cs typeface="Arial" charset="0"/>
@@ -5099,7 +5071,7 @@
                         <a:buNone/>
                       </a:pPr>
                       <a:r>
-                        <a:rPr lang="en-US" sz="700" dirty="0">
+                        <a:rPr lang="en-US" sz="650" dirty="0">
                           <a:solidFill>
                             <a:srgbClr val="334155"/>
                           </a:solidFill>
@@ -5109,7 +5081,7 @@
                         </a:rPr>
                         <a:t>痛点便签墙 场景代入</a:t>
                       </a:r>
-                      <a:endParaRPr lang="en-US" sz="700" dirty="0">
+                      <a:endParaRPr lang="en-US" sz="650" dirty="0">
                         <a:latin typeface="Arial" charset="0"/>
                         <a:ea typeface="Arial" charset="0"/>
                         <a:cs typeface="Arial" charset="0"/>
@@ -5156,7 +5128,7 @@
                   </a:tcPr>
                 </a:tc>
               </a:tr>
-              <a:tr h="320040">
+              <a:tr h="292608">
                 <a:tc>
                   <a:txBody>
                     <a:bodyPr/>
@@ -5166,7 +5138,7 @@
                         <a:buNone/>
                       </a:pPr>
                       <a:r>
-                        <a:rPr lang="en-US" sz="700" b="1" dirty="0">
+                        <a:rPr lang="en-US" sz="650" b="1" dirty="0">
                           <a:solidFill>
                             <a:srgbClr val="334155"/>
                           </a:solidFill>
@@ -5176,7 +5148,7 @@
                         </a:rPr>
                         <a:t>09:45</a:t>
                       </a:r>
-                      <a:endParaRPr lang="en-US" sz="700" dirty="0">
+                      <a:endParaRPr lang="en-US" sz="650" dirty="0">
                         <a:latin typeface="Arial" charset="0"/>
                         <a:ea typeface="Arial" charset="0"/>
                         <a:cs typeface="Arial" charset="0"/>
@@ -5231,7 +5203,7 @@
                         <a:buNone/>
                       </a:pPr>
                       <a:r>
-                        <a:rPr lang="en-US" sz="700" dirty="0">
+                        <a:rPr lang="en-US" sz="650" dirty="0">
                           <a:solidFill>
                             <a:srgbClr val="334155"/>
                           </a:solidFill>
@@ -5241,7 +5213,7 @@
                         </a:rPr>
                         <a:t>L1: AI Native范式 60min</a:t>
                       </a:r>
-                      <a:endParaRPr lang="en-US" sz="700" dirty="0">
+                      <a:endParaRPr lang="en-US" sz="650" dirty="0">
                         <a:latin typeface="Arial" charset="0"/>
                         <a:ea typeface="Arial" charset="0"/>
                         <a:cs typeface="Arial" charset="0"/>
@@ -5296,7 +5268,7 @@
                         <a:buNone/>
                       </a:pPr>
                       <a:r>
-                        <a:rPr lang="en-US" sz="700" dirty="0">
+                        <a:rPr lang="en-US" sz="650" dirty="0">
                           <a:solidFill>
                             <a:srgbClr val="334155"/>
                           </a:solidFill>
@@ -5306,7 +5278,7 @@
                         </a:rPr>
                         <a:t>三层模型 SDD融合 12模块数据 CRISPE速讲</a:t>
                       </a:r>
-                      <a:endParaRPr lang="en-US" sz="700" dirty="0">
+                      <a:endParaRPr lang="en-US" sz="650" dirty="0">
                         <a:latin typeface="Arial" charset="0"/>
                         <a:ea typeface="Arial" charset="0"/>
                         <a:cs typeface="Arial" charset="0"/>
@@ -5353,7 +5325,7 @@
                   </a:tcPr>
                 </a:tc>
               </a:tr>
-              <a:tr h="164592">
+              <a:tr h="146304">
                 <a:tc>
                   <a:txBody>
                     <a:bodyPr/>
@@ -5363,7 +5335,7 @@
                         <a:buNone/>
                       </a:pPr>
                       <a:r>
-                        <a:rPr lang="en-US" sz="700" b="1" dirty="0">
+                        <a:rPr lang="en-US" sz="650" b="1" dirty="0">
                           <a:solidFill>
                             <a:srgbClr val="334155"/>
                           </a:solidFill>
@@ -5373,7 +5345,7 @@
                         </a:rPr>
                         <a:t>10:45</a:t>
                       </a:r>
-                      <a:endParaRPr lang="en-US" sz="700" dirty="0">
+                      <a:endParaRPr lang="en-US" sz="650" dirty="0">
                         <a:latin typeface="Arial" charset="0"/>
                         <a:ea typeface="Arial" charset="0"/>
                         <a:cs typeface="Arial" charset="0"/>
@@ -5428,7 +5400,7 @@
                         <a:buNone/>
                       </a:pPr>
                       <a:r>
-                        <a:rPr lang="en-US" sz="700" dirty="0">
+                        <a:rPr lang="en-US" sz="650" dirty="0">
                           <a:solidFill>
                             <a:srgbClr val="334155"/>
                           </a:solidFill>
@@ -5438,61 +5410,61 @@
                         </a:rPr>
                         <a:t>休息 15min</a:t>
                       </a:r>
-                      <a:endParaRPr lang="en-US" sz="700" dirty="0">
-                        <a:latin typeface="Arial" charset="0"/>
-                        <a:ea typeface="Arial" charset="0"/>
-                        <a:cs typeface="Arial" charset="0"/>
-                      </a:endParaRPr>
-                    </a:p>
-                  </a:txBody>
-                  <a:tcPr marL="38100" marR="38100" marT="25400" marB="25400">
-                    <a:lnL w="6350" cap="flat" cmpd="sng" algn="ctr">
-                      <a:solidFill>
-                        <a:srgbClr val="666666"/>
-                      </a:solidFill>
-                      <a:prstDash val="solid"/>
-                      <a:round/>
-                      <a:headEnd type="none" w="med" len="med"/>
-                      <a:tailEnd type="none" w="med" len="med"/>
-                    </a:lnL>
-                    <a:lnR w="6350" cap="flat" cmpd="sng" algn="ctr">
-                      <a:solidFill>
-                        <a:srgbClr val="666666"/>
-                      </a:solidFill>
-                      <a:prstDash val="solid"/>
-                      <a:round/>
-                      <a:headEnd type="none" w="med" len="med"/>
-                      <a:tailEnd type="none" w="med" len="med"/>
-                    </a:lnR>
-                    <a:lnT w="6350" cap="flat" cmpd="sng" algn="ctr">
-                      <a:solidFill>
-                        <a:srgbClr val="666666"/>
-                      </a:solidFill>
-                      <a:prstDash val="solid"/>
-                      <a:round/>
-                      <a:headEnd type="none" w="med" len="med"/>
-                      <a:tailEnd type="none" w="med" len="med"/>
-                    </a:lnT>
-                    <a:lnB w="6350" cap="flat" cmpd="sng" algn="ctr">
-                      <a:solidFill>
-                        <a:srgbClr val="666666"/>
-                      </a:solidFill>
-                      <a:prstDash val="solid"/>
-                      <a:round/>
-                      <a:headEnd type="none" w="med" len="med"/>
-                      <a:tailEnd type="none" w="med" len="med"/>
-                    </a:lnB>
-                  </a:tcPr>
-                </a:tc>
-                <a:tc>
-                  <a:txBody>
-                    <a:bodyPr/>
-                    <a:lstStyle/>
-                    <a:p>
-                      <a:pPr indent="0" marL="0">
-                        <a:buNone/>
-                      </a:pPr>
-                      <a:endParaRPr lang="en-US" sz="700" dirty="0">
+                      <a:endParaRPr lang="en-US" sz="650" dirty="0">
+                        <a:latin typeface="Arial" charset="0"/>
+                        <a:ea typeface="Arial" charset="0"/>
+                        <a:cs typeface="Arial" charset="0"/>
+                      </a:endParaRPr>
+                    </a:p>
+                  </a:txBody>
+                  <a:tcPr marL="38100" marR="38100" marT="25400" marB="25400">
+                    <a:lnL w="6350" cap="flat" cmpd="sng" algn="ctr">
+                      <a:solidFill>
+                        <a:srgbClr val="666666"/>
+                      </a:solidFill>
+                      <a:prstDash val="solid"/>
+                      <a:round/>
+                      <a:headEnd type="none" w="med" len="med"/>
+                      <a:tailEnd type="none" w="med" len="med"/>
+                    </a:lnL>
+                    <a:lnR w="6350" cap="flat" cmpd="sng" algn="ctr">
+                      <a:solidFill>
+                        <a:srgbClr val="666666"/>
+                      </a:solidFill>
+                      <a:prstDash val="solid"/>
+                      <a:round/>
+                      <a:headEnd type="none" w="med" len="med"/>
+                      <a:tailEnd type="none" w="med" len="med"/>
+                    </a:lnR>
+                    <a:lnT w="6350" cap="flat" cmpd="sng" algn="ctr">
+                      <a:solidFill>
+                        <a:srgbClr val="666666"/>
+                      </a:solidFill>
+                      <a:prstDash val="solid"/>
+                      <a:round/>
+                      <a:headEnd type="none" w="med" len="med"/>
+                      <a:tailEnd type="none" w="med" len="med"/>
+                    </a:lnT>
+                    <a:lnB w="6350" cap="flat" cmpd="sng" algn="ctr">
+                      <a:solidFill>
+                        <a:srgbClr val="666666"/>
+                      </a:solidFill>
+                      <a:prstDash val="solid"/>
+                      <a:round/>
+                      <a:headEnd type="none" w="med" len="med"/>
+                      <a:tailEnd type="none" w="med" len="med"/>
+                    </a:lnB>
+                  </a:tcPr>
+                </a:tc>
+                <a:tc>
+                  <a:txBody>
+                    <a:bodyPr/>
+                    <a:lstStyle/>
+                    <a:p>
+                      <a:pPr indent="0" marL="0">
+                        <a:buNone/>
+                      </a:pPr>
+                      <a:endParaRPr lang="en-US" sz="650" dirty="0">
                         <a:latin typeface="Arial" charset="0"/>
                         <a:ea typeface="Arial" charset="0"/>
                         <a:cs typeface="Arial" charset="0"/>
@@ -5539,7 +5511,7 @@
                   </a:tcPr>
                 </a:tc>
               </a:tr>
-              <a:tr h="320040">
+              <a:tr h="292608">
                 <a:tc>
                   <a:txBody>
                     <a:bodyPr/>
@@ -5549,7 +5521,7 @@
                         <a:buNone/>
                       </a:pPr>
                       <a:r>
-                        <a:rPr lang="en-US" sz="700" b="1" dirty="0">
+                        <a:rPr lang="en-US" sz="650" b="1" dirty="0">
                           <a:solidFill>
                             <a:srgbClr val="334155"/>
                           </a:solidFill>
@@ -5559,7 +5531,7 @@
                         </a:rPr>
                         <a:t>11:00</a:t>
                       </a:r>
-                      <a:endParaRPr lang="en-US" sz="700" dirty="0">
+                      <a:endParaRPr lang="en-US" sz="650" dirty="0">
                         <a:latin typeface="Arial" charset="0"/>
                         <a:ea typeface="Arial" charset="0"/>
                         <a:cs typeface="Arial" charset="0"/>
@@ -5614,7 +5586,7 @@
                         <a:buNone/>
                       </a:pPr>
                       <a:r>
-                        <a:rPr lang="en-US" sz="700" dirty="0">
+                        <a:rPr lang="en-US" sz="650" dirty="0">
                           <a:solidFill>
                             <a:srgbClr val="334155"/>
                           </a:solidFill>
@@ -5624,7 +5596,7 @@
                         </a:rPr>
                         <a:t>L2: Agent/Claude 60min</a:t>
                       </a:r>
-                      <a:endParaRPr lang="en-US" sz="700" dirty="0">
+                      <a:endParaRPr lang="en-US" sz="650" dirty="0">
                         <a:latin typeface="Arial" charset="0"/>
                         <a:ea typeface="Arial" charset="0"/>
                         <a:cs typeface="Arial" charset="0"/>
@@ -5679,7 +5651,7 @@
                         <a:buNone/>
                       </a:pPr>
                       <a:r>
-                        <a:rPr lang="en-US" sz="700" dirty="0">
+                        <a:rPr lang="en-US" sz="650" dirty="0">
                           <a:solidFill>
                             <a:srgbClr val="334155"/>
                           </a:solidFill>
@@ -5689,7 +5661,7 @@
                         </a:rPr>
                         <a:t>四层架构 Token全景 Skills机制 选型</a:t>
                       </a:r>
-                      <a:endParaRPr lang="en-US" sz="700" dirty="0">
+                      <a:endParaRPr lang="en-US" sz="650" dirty="0">
                         <a:latin typeface="Arial" charset="0"/>
                         <a:ea typeface="Arial" charset="0"/>
                         <a:cs typeface="Arial" charset="0"/>
@@ -5748,8 +5720,8 @@
         </p:nvSpPr>
         <p:spPr>
           <a:xfrm>
-            <a:off x="457200" y="2450592"/>
-            <a:ext cx="4572000" cy="182880"/>
+            <a:off x="1979676" y="2194560"/>
+            <a:ext cx="4572000" cy="164592"/>
           </a:xfrm>
           <a:prstGeom prst="rect">
             <a:avLst/>
@@ -5765,14 +5737,14 @@
               <a:buNone/>
             </a:pPr>
             <a:r>
-              <a:rPr lang="en-US" sz="1000" b="1" dirty="0">
+              <a:rPr lang="en-US" sz="900" b="1" dirty="0">
                 <a:solidFill>
                   <a:srgbClr val="1A1A2E"/>
                 </a:solidFill>
               </a:rPr>
               <a:t>下午 演示+演练 (14:30-18:00)</a:t>
             </a:r>
-            <a:endParaRPr lang="en-US" sz="1000" dirty="0"/>
+            <a:endParaRPr lang="en-US" sz="900" dirty="0"/>
           </a:p>
         </p:txBody>
       </p:sp>
@@ -5791,19 +5763,19 @@
           </p:nvPr>
         </p:nvGraphicFramePr>
         <p:xfrm>
-          <a:off x="457200" y="2697480"/>
-          <a:ext cx="11064240" cy="914400"/>
+          <a:off x="1979676" y="2404872"/>
+          <a:ext cx="8229600" cy="914400"/>
         </p:xfrm>
         <a:graphic>
           <a:graphicData uri="http://schemas.openxmlformats.org/drawingml/2006/table">
             <a:tbl>
               <a:tblPr/>
               <a:tblGrid>
-                <a:gridCol w="548640"/>
-                <a:gridCol w="2560320"/>
-                <a:gridCol w="7955280"/>
+                <a:gridCol w="502920"/>
+                <a:gridCol w="2194560"/>
+                <a:gridCol w="5532120"/>
               </a:tblGrid>
-              <a:tr h="182880">
+              <a:tr h="164592">
                 <a:tc>
                   <a:txBody>
                     <a:bodyPr/>
@@ -5813,7 +5785,7 @@
                         <a:buNone/>
                       </a:pPr>
                       <a:r>
-                        <a:rPr lang="en-US" sz="700" b="1" dirty="0">
+                        <a:rPr lang="en-US" sz="650" b="1" dirty="0">
                           <a:solidFill>
                             <a:srgbClr val="334155"/>
                           </a:solidFill>
@@ -5823,7 +5795,7 @@
                         </a:rPr>
                         <a:t>时</a:t>
                       </a:r>
-                      <a:endParaRPr lang="en-US" sz="700" dirty="0">
+                      <a:endParaRPr lang="en-US" sz="650" dirty="0">
                         <a:latin typeface="Arial" charset="0"/>
                         <a:ea typeface="Arial" charset="0"/>
                         <a:cs typeface="Arial" charset="0"/>
@@ -5881,7 +5853,7 @@
                         <a:buNone/>
                       </a:pPr>
                       <a:r>
-                        <a:rPr lang="en-US" sz="700" b="1" dirty="0">
+                        <a:rPr lang="en-US" sz="650" b="1" dirty="0">
                           <a:solidFill>
                             <a:srgbClr val="334155"/>
                           </a:solidFill>
@@ -5891,7 +5863,7 @@
                         </a:rPr>
                         <a:t>环节</a:t>
                       </a:r>
-                      <a:endParaRPr lang="en-US" sz="700" dirty="0">
+                      <a:endParaRPr lang="en-US" sz="650" dirty="0">
                         <a:latin typeface="Arial" charset="0"/>
                         <a:ea typeface="Arial" charset="0"/>
                         <a:cs typeface="Arial" charset="0"/>
@@ -5949,7 +5921,7 @@
                         <a:buNone/>
                       </a:pPr>
                       <a:r>
-                        <a:rPr lang="en-US" sz="700" b="1" dirty="0">
+                        <a:rPr lang="en-US" sz="650" b="1" dirty="0">
                           <a:solidFill>
                             <a:srgbClr val="334155"/>
                           </a:solidFill>
@@ -5959,7 +5931,7 @@
                         </a:rPr>
                         <a:t>内容</a:t>
                       </a:r>
-                      <a:endParaRPr lang="en-US" sz="700" dirty="0">
+                      <a:endParaRPr lang="en-US" sz="650" dirty="0">
                         <a:latin typeface="Arial" charset="0"/>
                         <a:ea typeface="Arial" charset="0"/>
                         <a:cs typeface="Arial" charset="0"/>
@@ -6009,7 +5981,7 @@
                   </a:tcPr>
                 </a:tc>
               </a:tr>
-              <a:tr h="292608">
+              <a:tr h="274320">
                 <a:tc>
                   <a:txBody>
                     <a:bodyPr/>
@@ -6019,7 +5991,7 @@
                         <a:buNone/>
                       </a:pPr>
                       <a:r>
-                        <a:rPr lang="en-US" sz="700" b="1" dirty="0">
+                        <a:rPr lang="en-US" sz="650" b="1" dirty="0">
                           <a:solidFill>
                             <a:srgbClr val="334155"/>
                           </a:solidFill>
@@ -6029,7 +6001,7 @@
                         </a:rPr>
                         <a:t>14:30</a:t>
                       </a:r>
-                      <a:endParaRPr lang="en-US" sz="700" dirty="0">
+                      <a:endParaRPr lang="en-US" sz="650" dirty="0">
                         <a:latin typeface="Arial" charset="0"/>
                         <a:ea typeface="Arial" charset="0"/>
                         <a:cs typeface="Arial" charset="0"/>
@@ -6084,7 +6056,7 @@
                         <a:buNone/>
                       </a:pPr>
                       <a:r>
-                        <a:rPr lang="en-US" sz="700" dirty="0">
+                        <a:rPr lang="en-US" sz="650" dirty="0">
                           <a:solidFill>
                             <a:srgbClr val="334155"/>
                           </a:solidFill>
@@ -6092,9 +6064,9 @@
                           <a:ea typeface="Arial" pitchFamily="34" charset="-122"/>
                           <a:cs typeface="Arial" pitchFamily="34" charset="-120"/>
                         </a:rPr>
-                        <a:t>L1+L2 演示 (45min)</a:t>
+                        <a:t>L1+L2 演示 45min</a:t>
                       </a:r>
-                      <a:endParaRPr lang="en-US" sz="700" dirty="0">
+                      <a:endParaRPr lang="en-US" sz="650" dirty="0">
                         <a:latin typeface="Arial" charset="0"/>
                         <a:ea typeface="Arial" charset="0"/>
                         <a:cs typeface="Arial" charset="0"/>
@@ -6152,7 +6124,7 @@
                         <a:buNone/>
                       </a:pPr>
                       <a:r>
-                        <a:rPr lang="en-US" sz="700" dirty="0">
+                        <a:rPr lang="en-US" sz="650" dirty="0">
                           <a:solidFill>
                             <a:srgbClr val="334155"/>
                           </a:solidFill>
@@ -6162,7 +6134,7 @@
                         </a:rPr>
                         <a:t>L1: 传统vs AI Native  L2: /tokens操作</a:t>
                       </a:r>
-                      <a:endParaRPr lang="en-US" sz="700" dirty="0">
+                      <a:endParaRPr lang="en-US" sz="650" dirty="0">
                         <a:latin typeface="Arial" charset="0"/>
                         <a:ea typeface="Arial" charset="0"/>
                         <a:cs typeface="Arial" charset="0"/>
@@ -6209,7 +6181,7 @@
                   </a:tcPr>
                 </a:tc>
               </a:tr>
-              <a:tr h="146304">
+              <a:tr h="137160">
                 <a:tc>
                   <a:txBody>
                     <a:bodyPr/>
@@ -6219,7 +6191,7 @@
                         <a:buNone/>
                       </a:pPr>
                       <a:r>
-                        <a:rPr lang="en-US" sz="700" b="1" dirty="0">
+                        <a:rPr lang="en-US" sz="650" b="1" dirty="0">
                           <a:solidFill>
                             <a:srgbClr val="334155"/>
                           </a:solidFill>
@@ -6229,7 +6201,7 @@
                         </a:rPr>
                         <a:t>15:15</a:t>
                       </a:r>
-                      <a:endParaRPr lang="en-US" sz="700" dirty="0">
+                      <a:endParaRPr lang="en-US" sz="650" dirty="0">
                         <a:latin typeface="Arial" charset="0"/>
                         <a:ea typeface="Arial" charset="0"/>
                         <a:cs typeface="Arial" charset="0"/>
@@ -6284,7 +6256,7 @@
                         <a:buNone/>
                       </a:pPr>
                       <a:r>
-                        <a:rPr lang="en-US" sz="700" dirty="0">
+                        <a:rPr lang="en-US" sz="650" dirty="0">
                           <a:solidFill>
                             <a:srgbClr val="334155"/>
                           </a:solidFill>
@@ -6294,61 +6266,61 @@
                         </a:rPr>
                         <a:t>休息 15min</a:t>
                       </a:r>
-                      <a:endParaRPr lang="en-US" sz="700" dirty="0">
-                        <a:latin typeface="Arial" charset="0"/>
-                        <a:ea typeface="Arial" charset="0"/>
-                        <a:cs typeface="Arial" charset="0"/>
-                      </a:endParaRPr>
-                    </a:p>
-                  </a:txBody>
-                  <a:tcPr marL="38100" marR="38100" marT="25400" marB="25400">
-                    <a:lnL w="6350" cap="flat" cmpd="sng" algn="ctr">
-                      <a:solidFill>
-                        <a:srgbClr val="666666"/>
-                      </a:solidFill>
-                      <a:prstDash val="solid"/>
-                      <a:round/>
-                      <a:headEnd type="none" w="med" len="med"/>
-                      <a:tailEnd type="none" w="med" len="med"/>
-                    </a:lnL>
-                    <a:lnR w="6350" cap="flat" cmpd="sng" algn="ctr">
-                      <a:solidFill>
-                        <a:srgbClr val="666666"/>
-                      </a:solidFill>
-                      <a:prstDash val="solid"/>
-                      <a:round/>
-                      <a:headEnd type="none" w="med" len="med"/>
-                      <a:tailEnd type="none" w="med" len="med"/>
-                    </a:lnR>
-                    <a:lnT w="6350" cap="flat" cmpd="sng" algn="ctr">
-                      <a:solidFill>
-                        <a:srgbClr val="666666"/>
-                      </a:solidFill>
-                      <a:prstDash val="solid"/>
-                      <a:round/>
-                      <a:headEnd type="none" w="med" len="med"/>
-                      <a:tailEnd type="none" w="med" len="med"/>
-                    </a:lnT>
-                    <a:lnB w="6350" cap="flat" cmpd="sng" algn="ctr">
-                      <a:solidFill>
-                        <a:srgbClr val="666666"/>
-                      </a:solidFill>
-                      <a:prstDash val="solid"/>
-                      <a:round/>
-                      <a:headEnd type="none" w="med" len="med"/>
-                      <a:tailEnd type="none" w="med" len="med"/>
-                    </a:lnB>
-                  </a:tcPr>
-                </a:tc>
-                <a:tc>
-                  <a:txBody>
-                    <a:bodyPr/>
-                    <a:lstStyle/>
-                    <a:p>
-                      <a:pPr indent="0" marL="0">
-                        <a:buNone/>
-                      </a:pPr>
-                      <a:endParaRPr lang="en-US" sz="700" dirty="0">
+                      <a:endParaRPr lang="en-US" sz="650" dirty="0">
+                        <a:latin typeface="Arial" charset="0"/>
+                        <a:ea typeface="Arial" charset="0"/>
+                        <a:cs typeface="Arial" charset="0"/>
+                      </a:endParaRPr>
+                    </a:p>
+                  </a:txBody>
+                  <a:tcPr marL="38100" marR="38100" marT="25400" marB="25400">
+                    <a:lnL w="6350" cap="flat" cmpd="sng" algn="ctr">
+                      <a:solidFill>
+                        <a:srgbClr val="666666"/>
+                      </a:solidFill>
+                      <a:prstDash val="solid"/>
+                      <a:round/>
+                      <a:headEnd type="none" w="med" len="med"/>
+                      <a:tailEnd type="none" w="med" len="med"/>
+                    </a:lnL>
+                    <a:lnR w="6350" cap="flat" cmpd="sng" algn="ctr">
+                      <a:solidFill>
+                        <a:srgbClr val="666666"/>
+                      </a:solidFill>
+                      <a:prstDash val="solid"/>
+                      <a:round/>
+                      <a:headEnd type="none" w="med" len="med"/>
+                      <a:tailEnd type="none" w="med" len="med"/>
+                    </a:lnR>
+                    <a:lnT w="6350" cap="flat" cmpd="sng" algn="ctr">
+                      <a:solidFill>
+                        <a:srgbClr val="666666"/>
+                      </a:solidFill>
+                      <a:prstDash val="solid"/>
+                      <a:round/>
+                      <a:headEnd type="none" w="med" len="med"/>
+                      <a:tailEnd type="none" w="med" len="med"/>
+                    </a:lnT>
+                    <a:lnB w="6350" cap="flat" cmpd="sng" algn="ctr">
+                      <a:solidFill>
+                        <a:srgbClr val="666666"/>
+                      </a:solidFill>
+                      <a:prstDash val="solid"/>
+                      <a:round/>
+                      <a:headEnd type="none" w="med" len="med"/>
+                      <a:tailEnd type="none" w="med" len="med"/>
+                    </a:lnB>
+                  </a:tcPr>
+                </a:tc>
+                <a:tc>
+                  <a:txBody>
+                    <a:bodyPr/>
+                    <a:lstStyle/>
+                    <a:p>
+                      <a:pPr indent="0" marL="0">
+                        <a:buNone/>
+                      </a:pPr>
+                      <a:endParaRPr lang="en-US" sz="650" dirty="0">
                         <a:latin typeface="Arial" charset="0"/>
                         <a:ea typeface="Arial" charset="0"/>
                         <a:cs typeface="Arial" charset="0"/>
@@ -6395,7 +6367,7 @@
                   </a:tcPr>
                 </a:tc>
               </a:tr>
-              <a:tr h="292608">
+              <a:tr h="274320">
                 <a:tc>
                   <a:txBody>
                     <a:bodyPr/>
@@ -6405,7 +6377,7 @@
                         <a:buNone/>
                       </a:pPr>
                       <a:r>
-                        <a:rPr lang="en-US" sz="700" b="1" dirty="0">
+                        <a:rPr lang="en-US" sz="650" b="1" dirty="0">
                           <a:solidFill>
                             <a:srgbClr val="334155"/>
                           </a:solidFill>
@@ -6415,7 +6387,7 @@
                         </a:rPr>
                         <a:t>15:30</a:t>
                       </a:r>
-                      <a:endParaRPr lang="en-US" sz="700" dirty="0">
+                      <a:endParaRPr lang="en-US" sz="650" dirty="0">
                         <a:latin typeface="Arial" charset="0"/>
                         <a:ea typeface="Arial" charset="0"/>
                         <a:cs typeface="Arial" charset="0"/>
@@ -6470,7 +6442,7 @@
                         <a:buNone/>
                       </a:pPr>
                       <a:r>
-                        <a:rPr lang="en-US" sz="700" dirty="0">
+                        <a:rPr lang="en-US" sz="650" dirty="0">
                           <a:solidFill>
                             <a:srgbClr val="334155"/>
                           </a:solidFill>
@@ -6478,9 +6450,9 @@
                           <a:ea typeface="Arial" pitchFamily="34" charset="-122"/>
                           <a:cs typeface="Arial" pitchFamily="34" charset="-120"/>
                         </a:rPr>
-                        <a:t>Workshop 1: 练手 (60min)</a:t>
+                        <a:t>Workshop 1: 练手 60min</a:t>
                       </a:r>
-                      <a:endParaRPr lang="en-US" sz="700" dirty="0">
+                      <a:endParaRPr lang="en-US" sz="650" dirty="0">
                         <a:latin typeface="Arial" charset="0"/>
                         <a:ea typeface="Arial" charset="0"/>
                         <a:cs typeface="Arial" charset="0"/>
@@ -6538,7 +6510,7 @@
                         <a:buNone/>
                       </a:pPr>
                       <a:r>
-                        <a:rPr lang="en-US" sz="700" dirty="0">
+                        <a:rPr lang="en-US" sz="650" dirty="0">
                           <a:solidFill>
                             <a:srgbClr val="334155"/>
                           </a:solidFill>
@@ -6548,7 +6520,7 @@
                         </a:rPr>
                         <a:t>环境搭建 CLAUDE.md+Skill 首次AI修改</a:t>
                       </a:r>
-                      <a:endParaRPr lang="en-US" sz="700" dirty="0">
+                      <a:endParaRPr lang="en-US" sz="650" dirty="0">
                         <a:latin typeface="Arial" charset="0"/>
                         <a:ea typeface="Arial" charset="0"/>
                         <a:cs typeface="Arial" charset="0"/>
@@ -6595,7 +6567,7 @@
                   </a:tcPr>
                 </a:tc>
               </a:tr>
-              <a:tr h="146304">
+              <a:tr h="137160">
                 <a:tc>
                   <a:txBody>
                     <a:bodyPr/>
@@ -6605,7 +6577,7 @@
                         <a:buNone/>
                       </a:pPr>
                       <a:r>
-                        <a:rPr lang="en-US" sz="700" b="1" dirty="0">
+                        <a:rPr lang="en-US" sz="650" b="1" dirty="0">
                           <a:solidFill>
                             <a:srgbClr val="334155"/>
                           </a:solidFill>
@@ -6615,7 +6587,7 @@
                         </a:rPr>
                         <a:t>16:30</a:t>
                       </a:r>
-                      <a:endParaRPr lang="en-US" sz="700" dirty="0">
+                      <a:endParaRPr lang="en-US" sz="650" dirty="0">
                         <a:latin typeface="Arial" charset="0"/>
                         <a:ea typeface="Arial" charset="0"/>
                         <a:cs typeface="Arial" charset="0"/>
@@ -6670,7 +6642,7 @@
                         <a:buNone/>
                       </a:pPr>
                       <a:r>
-                        <a:rPr lang="en-US" sz="700" dirty="0">
+                        <a:rPr lang="en-US" sz="650" dirty="0">
                           <a:solidFill>
                             <a:srgbClr val="334155"/>
                           </a:solidFill>
@@ -6680,61 +6652,61 @@
                         </a:rPr>
                         <a:t>休息 10min</a:t>
                       </a:r>
-                      <a:endParaRPr lang="en-US" sz="700" dirty="0">
-                        <a:latin typeface="Arial" charset="0"/>
-                        <a:ea typeface="Arial" charset="0"/>
-                        <a:cs typeface="Arial" charset="0"/>
-                      </a:endParaRPr>
-                    </a:p>
-                  </a:txBody>
-                  <a:tcPr marL="38100" marR="38100" marT="25400" marB="25400">
-                    <a:lnL w="6350" cap="flat" cmpd="sng" algn="ctr">
-                      <a:solidFill>
-                        <a:srgbClr val="666666"/>
-                      </a:solidFill>
-                      <a:prstDash val="solid"/>
-                      <a:round/>
-                      <a:headEnd type="none" w="med" len="med"/>
-                      <a:tailEnd type="none" w="med" len="med"/>
-                    </a:lnL>
-                    <a:lnR w="6350" cap="flat" cmpd="sng" algn="ctr">
-                      <a:solidFill>
-                        <a:srgbClr val="666666"/>
-                      </a:solidFill>
-                      <a:prstDash val="solid"/>
-                      <a:round/>
-                      <a:headEnd type="none" w="med" len="med"/>
-                      <a:tailEnd type="none" w="med" len="med"/>
-                    </a:lnR>
-                    <a:lnT w="6350" cap="flat" cmpd="sng" algn="ctr">
-                      <a:solidFill>
-                        <a:srgbClr val="666666"/>
-                      </a:solidFill>
-                      <a:prstDash val="solid"/>
-                      <a:round/>
-                      <a:headEnd type="none" w="med" len="med"/>
-                      <a:tailEnd type="none" w="med" len="med"/>
-                    </a:lnT>
-                    <a:lnB w="6350" cap="flat" cmpd="sng" algn="ctr">
-                      <a:solidFill>
-                        <a:srgbClr val="666666"/>
-                      </a:solidFill>
-                      <a:prstDash val="solid"/>
-                      <a:round/>
-                      <a:headEnd type="none" w="med" len="med"/>
-                      <a:tailEnd type="none" w="med" len="med"/>
-                    </a:lnB>
-                  </a:tcPr>
-                </a:tc>
-                <a:tc>
-                  <a:txBody>
-                    <a:bodyPr/>
-                    <a:lstStyle/>
-                    <a:p>
-                      <a:pPr indent="0" marL="0">
-                        <a:buNone/>
-                      </a:pPr>
-                      <a:endParaRPr lang="en-US" sz="700" dirty="0">
+                      <a:endParaRPr lang="en-US" sz="650" dirty="0">
+                        <a:latin typeface="Arial" charset="0"/>
+                        <a:ea typeface="Arial" charset="0"/>
+                        <a:cs typeface="Arial" charset="0"/>
+                      </a:endParaRPr>
+                    </a:p>
+                  </a:txBody>
+                  <a:tcPr marL="38100" marR="38100" marT="25400" marB="25400">
+                    <a:lnL w="6350" cap="flat" cmpd="sng" algn="ctr">
+                      <a:solidFill>
+                        <a:srgbClr val="666666"/>
+                      </a:solidFill>
+                      <a:prstDash val="solid"/>
+                      <a:round/>
+                      <a:headEnd type="none" w="med" len="med"/>
+                      <a:tailEnd type="none" w="med" len="med"/>
+                    </a:lnL>
+                    <a:lnR w="6350" cap="flat" cmpd="sng" algn="ctr">
+                      <a:solidFill>
+                        <a:srgbClr val="666666"/>
+                      </a:solidFill>
+                      <a:prstDash val="solid"/>
+                      <a:round/>
+                      <a:headEnd type="none" w="med" len="med"/>
+                      <a:tailEnd type="none" w="med" len="med"/>
+                    </a:lnR>
+                    <a:lnT w="6350" cap="flat" cmpd="sng" algn="ctr">
+                      <a:solidFill>
+                        <a:srgbClr val="666666"/>
+                      </a:solidFill>
+                      <a:prstDash val="solid"/>
+                      <a:round/>
+                      <a:headEnd type="none" w="med" len="med"/>
+                      <a:tailEnd type="none" w="med" len="med"/>
+                    </a:lnT>
+                    <a:lnB w="6350" cap="flat" cmpd="sng" algn="ctr">
+                      <a:solidFill>
+                        <a:srgbClr val="666666"/>
+                      </a:solidFill>
+                      <a:prstDash val="solid"/>
+                      <a:round/>
+                      <a:headEnd type="none" w="med" len="med"/>
+                      <a:tailEnd type="none" w="med" len="med"/>
+                    </a:lnB>
+                  </a:tcPr>
+                </a:tc>
+                <a:tc>
+                  <a:txBody>
+                    <a:bodyPr/>
+                    <a:lstStyle/>
+                    <a:p>
+                      <a:pPr indent="0" marL="0">
+                        <a:buNone/>
+                      </a:pPr>
+                      <a:endParaRPr lang="en-US" sz="650" dirty="0">
                         <a:latin typeface="Arial" charset="0"/>
                         <a:ea typeface="Arial" charset="0"/>
                         <a:cs typeface="Arial" charset="0"/>
@@ -6781,7 +6753,7 @@
                   </a:tcPr>
                 </a:tc>
               </a:tr>
-              <a:tr h="292608">
+              <a:tr h="274320">
                 <a:tc>
                   <a:txBody>
                     <a:bodyPr/>
@@ -6791,7 +6763,7 @@
                         <a:buNone/>
                       </a:pPr>
                       <a:r>
-                        <a:rPr lang="en-US" sz="700" b="1" dirty="0">
+                        <a:rPr lang="en-US" sz="650" b="1" dirty="0">
                           <a:solidFill>
                             <a:srgbClr val="334155"/>
                           </a:solidFill>
@@ -6801,7 +6773,7 @@
                         </a:rPr>
                         <a:t>16:40</a:t>
                       </a:r>
-                      <a:endParaRPr lang="en-US" sz="700" dirty="0">
+                      <a:endParaRPr lang="en-US" sz="650" dirty="0">
                         <a:latin typeface="Arial" charset="0"/>
                         <a:ea typeface="Arial" charset="0"/>
                         <a:cs typeface="Arial" charset="0"/>
@@ -6856,7 +6828,7 @@
                         <a:buNone/>
                       </a:pPr>
                       <a:r>
-                        <a:rPr lang="en-US" sz="700" dirty="0">
+                        <a:rPr lang="en-US" sz="650" dirty="0">
                           <a:solidFill>
                             <a:srgbClr val="334155"/>
                           </a:solidFill>
@@ -6864,9 +6836,9 @@
                           <a:ea typeface="Arial" pitchFamily="34" charset="-122"/>
                           <a:cs typeface="Arial" pitchFamily="34" charset="-120"/>
                         </a:rPr>
-                        <a:t>L3 Live Coding (60min)</a:t>
+                        <a:t>L3 Live Coding 60min</a:t>
                       </a:r>
-                      <a:endParaRPr lang="en-US" sz="700" dirty="0">
+                      <a:endParaRPr lang="en-US" sz="650" dirty="0">
                         <a:latin typeface="Arial" charset="0"/>
                         <a:ea typeface="Arial" charset="0"/>
                         <a:cs typeface="Arial" charset="0"/>
@@ -6924,7 +6896,7 @@
                         <a:buNone/>
                       </a:pPr>
                       <a:r>
-                        <a:rPr lang="en-US" sz="700" dirty="0">
+                        <a:rPr lang="en-US" sz="650" dirty="0">
                           <a:solidFill>
                             <a:srgbClr val="334155"/>
                           </a:solidFill>
@@ -6934,7 +6906,7 @@
                         </a:rPr>
                         <a:t>完整演示[加单位换算] Spec-&gt;Code 不剪辑</a:t>
                       </a:r>
-                      <a:endParaRPr lang="en-US" sz="700" dirty="0">
+                      <a:endParaRPr lang="en-US" sz="650" dirty="0">
                         <a:latin typeface="Arial" charset="0"/>
                         <a:ea typeface="Arial" charset="0"/>
                         <a:cs typeface="Arial" charset="0"/>
@@ -6981,7 +6953,7 @@
                   </a:tcPr>
                 </a:tc>
               </a:tr>
-              <a:tr h="256032">
+              <a:tr h="237744">
                 <a:tc>
                   <a:txBody>
                     <a:bodyPr/>
@@ -6991,7 +6963,7 @@
                         <a:buNone/>
                       </a:pPr>
                       <a:r>
-                        <a:rPr lang="en-US" sz="700" b="1" dirty="0">
+                        <a:rPr lang="en-US" sz="650" b="1" dirty="0">
                           <a:solidFill>
                             <a:srgbClr val="334155"/>
                           </a:solidFill>
@@ -7001,7 +6973,7 @@
                         </a:rPr>
                         <a:t>17:40</a:t>
                       </a:r>
-                      <a:endParaRPr lang="en-US" sz="700" dirty="0">
+                      <a:endParaRPr lang="en-US" sz="650" dirty="0">
                         <a:latin typeface="Arial" charset="0"/>
                         <a:ea typeface="Arial" charset="0"/>
                         <a:cs typeface="Arial" charset="0"/>
@@ -7056,7 +7028,7 @@
                         <a:buNone/>
                       </a:pPr>
                       <a:r>
-                        <a:rPr lang="en-US" sz="700" dirty="0">
+                        <a:rPr lang="en-US" sz="650" dirty="0">
                           <a:solidFill>
                             <a:srgbClr val="334155"/>
                           </a:solidFill>
@@ -7066,7 +7038,7 @@
                         </a:rPr>
                         <a:t>Day1回顾+Q&amp;A 20min</a:t>
                       </a:r>
-                      <a:endParaRPr lang="en-US" sz="700" dirty="0">
+                      <a:endParaRPr lang="en-US" sz="650" dirty="0">
                         <a:latin typeface="Arial" charset="0"/>
                         <a:ea typeface="Arial" charset="0"/>
                         <a:cs typeface="Arial" charset="0"/>
@@ -7121,7 +7093,7 @@
                         <a:buNone/>
                       </a:pPr>
                       <a:r>
-                        <a:rPr lang="en-US" sz="700" dirty="0">
+                        <a:rPr lang="en-US" sz="650" dirty="0">
                           <a:solidFill>
                             <a:srgbClr val="334155"/>
                           </a:solidFill>
@@ -7131,7 +7103,7 @@
                         </a:rPr>
                         <a:t>知识点快闪 收集疑问</a:t>
                       </a:r>
-                      <a:endParaRPr lang="en-US" sz="700" dirty="0">
+                      <a:endParaRPr lang="en-US" sz="650" dirty="0">
                         <a:latin typeface="Arial" charset="0"/>
                         <a:ea typeface="Arial" charset="0"/>
                         <a:cs typeface="Arial" charset="0"/>
@@ -7222,8 +7194,8 @@
         </p:nvSpPr>
         <p:spPr>
           <a:xfrm>
-            <a:off x="457200" y="4892040"/>
-            <a:ext cx="11064240" cy="36576"/>
+            <a:off x="1979676" y="4892040"/>
+            <a:ext cx="8229600" cy="27432"/>
           </a:xfrm>
           <a:prstGeom prst="rect">
             <a:avLst/>
@@ -7242,8 +7214,8 @@
         </p:nvSpPr>
         <p:spPr>
           <a:xfrm>
-            <a:off x="457200" y="4983480"/>
-            <a:ext cx="3657600" cy="182880"/>
+            <a:off x="1979676" y="4983480"/>
+            <a:ext cx="8229600" cy="182880"/>
           </a:xfrm>
           <a:prstGeom prst="rect">
             <a:avLst/>
@@ -7252,10 +7224,10 @@
           <a:ln/>
         </p:spPr>
         <p:txBody>
-          <a:bodyPr wrap="square" rtlCol="0" anchor="ctr"/>
+          <a:bodyPr wrap="square" lIns="0" tIns="0" rIns="0" bIns="0" rtlCol="0" anchor="ctr"/>
           <a:lstStyle/>
           <a:p>
-            <a:pPr indent="0" marL="0">
+            <a:pPr algn="ctr" indent="0" marL="0">
               <a:buNone/>
             </a:pPr>
             <a:r>
@@ -7278,8 +7250,8 @@
         </p:nvSpPr>
         <p:spPr>
           <a:xfrm>
-            <a:off x="457200" y="182880"/>
-            <a:ext cx="11064240" cy="384048"/>
+            <a:off x="1979676" y="137160"/>
+            <a:ext cx="8229600" cy="365760"/>
           </a:xfrm>
           <a:prstGeom prst="rect">
             <a:avLst/>
@@ -7295,7 +7267,7 @@
               <a:buNone/>
             </a:pPr>
             <a:r>
-              <a:rPr lang="en-US" sz="2000" b="1" dirty="0">
+              <a:rPr lang="en-US" sz="1800" b="1" dirty="0">
                 <a:solidFill>
                   <a:srgbClr val="1A1A2E"/>
                 </a:solidFill>
@@ -7305,7 +7277,7 @@
               </a:rPr>
               <a:t>Day 2 详细日程</a:t>
             </a:r>
-            <a:endParaRPr lang="en-US" sz="2000" dirty="0"/>
+            <a:endParaRPr lang="en-US" sz="1800" dirty="0"/>
           </a:p>
         </p:txBody>
       </p:sp>
@@ -7317,8 +7289,8 @@
         </p:nvSpPr>
         <p:spPr>
           <a:xfrm>
-            <a:off x="457200" y="566928"/>
-            <a:ext cx="1097280" cy="27432"/>
+            <a:off x="1979676" y="502920"/>
+            <a:ext cx="914400" cy="27432"/>
           </a:xfrm>
           <a:prstGeom prst="rect">
             <a:avLst/>
@@ -7337,8 +7309,8 @@
         </p:nvSpPr>
         <p:spPr>
           <a:xfrm>
-            <a:off x="457200" y="749808"/>
-            <a:ext cx="4572000" cy="182880"/>
+            <a:off x="1979676" y="658368"/>
+            <a:ext cx="4572000" cy="164592"/>
           </a:xfrm>
           <a:prstGeom prst="rect">
             <a:avLst/>
@@ -7354,14 +7326,14 @@
               <a:buNone/>
             </a:pPr>
             <a:r>
-              <a:rPr lang="en-US" sz="1000" b="1" dirty="0">
+              <a:rPr lang="en-US" sz="900" b="1" dirty="0">
                 <a:solidFill>
                   <a:srgbClr val="1A1A2E"/>
                 </a:solidFill>
               </a:rPr>
               <a:t>上午 讲座 (9:30-11:50)</a:t>
             </a:r>
-            <a:endParaRPr lang="en-US" sz="1000" dirty="0"/>
+            <a:endParaRPr lang="en-US" sz="900" dirty="0"/>
           </a:p>
         </p:txBody>
       </p:sp>
@@ -7380,19 +7352,19 @@
           </p:nvPr>
         </p:nvGraphicFramePr>
         <p:xfrm>
-          <a:off x="457200" y="1005840"/>
-          <a:ext cx="11064240" cy="914400"/>
+          <a:off x="1979676" y="868680"/>
+          <a:ext cx="8229600" cy="914400"/>
         </p:xfrm>
         <a:graphic>
           <a:graphicData uri="http://schemas.openxmlformats.org/drawingml/2006/table">
             <a:tbl>
               <a:tblPr/>
               <a:tblGrid>
-                <a:gridCol w="548640"/>
-                <a:gridCol w="3017520"/>
-                <a:gridCol w="7498080"/>
+                <a:gridCol w="502920"/>
+                <a:gridCol w="2560320"/>
+                <a:gridCol w="5166360"/>
               </a:tblGrid>
-              <a:tr h="182880">
+              <a:tr h="164592">
                 <a:tc>
                   <a:txBody>
                     <a:bodyPr/>
@@ -7402,7 +7374,7 @@
                         <a:buNone/>
                       </a:pPr>
                       <a:r>
-                        <a:rPr lang="en-US" sz="700" b="1" dirty="0">
+                        <a:rPr lang="en-US" sz="650" b="1" dirty="0">
                           <a:solidFill>
                             <a:srgbClr val="334155"/>
                           </a:solidFill>
@@ -7412,7 +7384,7 @@
                         </a:rPr>
                         <a:t>时</a:t>
                       </a:r>
-                      <a:endParaRPr lang="en-US" sz="700" dirty="0">
+                      <a:endParaRPr lang="en-US" sz="650" dirty="0">
                         <a:latin typeface="Arial" charset="0"/>
                         <a:ea typeface="Arial" charset="0"/>
                         <a:cs typeface="Arial" charset="0"/>
@@ -7470,7 +7442,7 @@
                         <a:buNone/>
                       </a:pPr>
                       <a:r>
-                        <a:rPr lang="en-US" sz="700" b="1" dirty="0">
+                        <a:rPr lang="en-US" sz="650" b="1" dirty="0">
                           <a:solidFill>
                             <a:srgbClr val="334155"/>
                           </a:solidFill>
@@ -7480,7 +7452,7 @@
                         </a:rPr>
                         <a:t>环节</a:t>
                       </a:r>
-                      <a:endParaRPr lang="en-US" sz="700" dirty="0">
+                      <a:endParaRPr lang="en-US" sz="650" dirty="0">
                         <a:latin typeface="Arial" charset="0"/>
                         <a:ea typeface="Arial" charset="0"/>
                         <a:cs typeface="Arial" charset="0"/>
@@ -7538,7 +7510,7 @@
                         <a:buNone/>
                       </a:pPr>
                       <a:r>
-                        <a:rPr lang="en-US" sz="700" b="1" dirty="0">
+                        <a:rPr lang="en-US" sz="650" b="1" dirty="0">
                           <a:solidFill>
                             <a:srgbClr val="334155"/>
                           </a:solidFill>
@@ -7548,7 +7520,7 @@
                         </a:rPr>
                         <a:t>内容</a:t>
                       </a:r>
-                      <a:endParaRPr lang="en-US" sz="700" dirty="0">
+                      <a:endParaRPr lang="en-US" sz="650" dirty="0">
                         <a:latin typeface="Arial" charset="0"/>
                         <a:ea typeface="Arial" charset="0"/>
                         <a:cs typeface="Arial" charset="0"/>
@@ -7598,7 +7570,7 @@
                   </a:tcPr>
                 </a:tc>
               </a:tr>
-              <a:tr h="320040">
+              <a:tr h="292608">
                 <a:tc>
                   <a:txBody>
                     <a:bodyPr/>
@@ -7608,7 +7580,7 @@
                         <a:buNone/>
                       </a:pPr>
                       <a:r>
-                        <a:rPr lang="en-US" sz="700" b="1" dirty="0">
+                        <a:rPr lang="en-US" sz="650" b="1" dirty="0">
                           <a:solidFill>
                             <a:srgbClr val="334155"/>
                           </a:solidFill>
@@ -7618,7 +7590,7 @@
                         </a:rPr>
                         <a:t>09:30</a:t>
                       </a:r>
-                      <a:endParaRPr lang="en-US" sz="700" dirty="0">
+                      <a:endParaRPr lang="en-US" sz="650" dirty="0">
                         <a:latin typeface="Arial" charset="0"/>
                         <a:ea typeface="Arial" charset="0"/>
                         <a:cs typeface="Arial" charset="0"/>
@@ -7673,7 +7645,7 @@
                         <a:buNone/>
                       </a:pPr>
                       <a:r>
-                        <a:rPr lang="en-US" sz="700" dirty="0">
+                        <a:rPr lang="en-US" sz="650" dirty="0">
                           <a:solidFill>
                             <a:srgbClr val="334155"/>
                           </a:solidFill>
@@ -7683,7 +7655,7 @@
                         </a:rPr>
                         <a:t>L4: 增量开发与重构 75min</a:t>
                       </a:r>
-                      <a:endParaRPr lang="en-US" sz="700" dirty="0">
+                      <a:endParaRPr lang="en-US" sz="650" dirty="0">
                         <a:latin typeface="Arial" charset="0"/>
                         <a:ea typeface="Arial" charset="0"/>
                         <a:cs typeface="Arial" charset="0"/>
@@ -7738,7 +7710,7 @@
                         <a:buNone/>
                       </a:pPr>
                       <a:r>
-                        <a:rPr lang="en-US" sz="700" dirty="0">
+                        <a:rPr lang="en-US" sz="650" dirty="0">
                           <a:solidFill>
                             <a:srgbClr val="334155"/>
                           </a:solidFill>
@@ -7748,7 +7720,7 @@
                         </a:rPr>
                         <a:t>增量场景 AID流程 重构三原则 案例数据</a:t>
                       </a:r>
-                      <a:endParaRPr lang="en-US" sz="700" dirty="0">
+                      <a:endParaRPr lang="en-US" sz="650" dirty="0">
                         <a:latin typeface="Arial" charset="0"/>
                         <a:ea typeface="Arial" charset="0"/>
                         <a:cs typeface="Arial" charset="0"/>
@@ -7795,7 +7767,7 @@
                   </a:tcPr>
                 </a:tc>
               </a:tr>
-              <a:tr h="164592">
+              <a:tr h="146304">
                 <a:tc>
                   <a:txBody>
                     <a:bodyPr/>
@@ -7805,7 +7777,7 @@
                         <a:buNone/>
                       </a:pPr>
                       <a:r>
-                        <a:rPr lang="en-US" sz="700" b="1" dirty="0">
+                        <a:rPr lang="en-US" sz="650" b="1" dirty="0">
                           <a:solidFill>
                             <a:srgbClr val="334155"/>
                           </a:solidFill>
@@ -7815,7 +7787,7 @@
                         </a:rPr>
                         <a:t>10:45</a:t>
                       </a:r>
-                      <a:endParaRPr lang="en-US" sz="700" dirty="0">
+                      <a:endParaRPr lang="en-US" sz="650" dirty="0">
                         <a:latin typeface="Arial" charset="0"/>
                         <a:ea typeface="Arial" charset="0"/>
                         <a:cs typeface="Arial" charset="0"/>
@@ -7870,7 +7842,7 @@
                         <a:buNone/>
                       </a:pPr>
                       <a:r>
-                        <a:rPr lang="en-US" sz="700" dirty="0">
+                        <a:rPr lang="en-US" sz="650" dirty="0">
                           <a:solidFill>
                             <a:srgbClr val="334155"/>
                           </a:solidFill>
@@ -7880,61 +7852,61 @@
                         </a:rPr>
                         <a:t>休息 15min</a:t>
                       </a:r>
-                      <a:endParaRPr lang="en-US" sz="700" dirty="0">
-                        <a:latin typeface="Arial" charset="0"/>
-                        <a:ea typeface="Arial" charset="0"/>
-                        <a:cs typeface="Arial" charset="0"/>
-                      </a:endParaRPr>
-                    </a:p>
-                  </a:txBody>
-                  <a:tcPr marL="38100" marR="38100" marT="25400" marB="25400">
-                    <a:lnL w="6350" cap="flat" cmpd="sng" algn="ctr">
-                      <a:solidFill>
-                        <a:srgbClr val="666666"/>
-                      </a:solidFill>
-                      <a:prstDash val="solid"/>
-                      <a:round/>
-                      <a:headEnd type="none" w="med" len="med"/>
-                      <a:tailEnd type="none" w="med" len="med"/>
-                    </a:lnL>
-                    <a:lnR w="6350" cap="flat" cmpd="sng" algn="ctr">
-                      <a:solidFill>
-                        <a:srgbClr val="666666"/>
-                      </a:solidFill>
-                      <a:prstDash val="solid"/>
-                      <a:round/>
-                      <a:headEnd type="none" w="med" len="med"/>
-                      <a:tailEnd type="none" w="med" len="med"/>
-                    </a:lnR>
-                    <a:lnT w="6350" cap="flat" cmpd="sng" algn="ctr">
-                      <a:solidFill>
-                        <a:srgbClr val="666666"/>
-                      </a:solidFill>
-                      <a:prstDash val="solid"/>
-                      <a:round/>
-                      <a:headEnd type="none" w="med" len="med"/>
-                      <a:tailEnd type="none" w="med" len="med"/>
-                    </a:lnT>
-                    <a:lnB w="6350" cap="flat" cmpd="sng" algn="ctr">
-                      <a:solidFill>
-                        <a:srgbClr val="666666"/>
-                      </a:solidFill>
-                      <a:prstDash val="solid"/>
-                      <a:round/>
-                      <a:headEnd type="none" w="med" len="med"/>
-                      <a:tailEnd type="none" w="med" len="med"/>
-                    </a:lnB>
-                  </a:tcPr>
-                </a:tc>
-                <a:tc>
-                  <a:txBody>
-                    <a:bodyPr/>
-                    <a:lstStyle/>
-                    <a:p>
-                      <a:pPr indent="0" marL="0">
-                        <a:buNone/>
-                      </a:pPr>
-                      <a:endParaRPr lang="en-US" sz="700" dirty="0">
+                      <a:endParaRPr lang="en-US" sz="650" dirty="0">
+                        <a:latin typeface="Arial" charset="0"/>
+                        <a:ea typeface="Arial" charset="0"/>
+                        <a:cs typeface="Arial" charset="0"/>
+                      </a:endParaRPr>
+                    </a:p>
+                  </a:txBody>
+                  <a:tcPr marL="38100" marR="38100" marT="25400" marB="25400">
+                    <a:lnL w="6350" cap="flat" cmpd="sng" algn="ctr">
+                      <a:solidFill>
+                        <a:srgbClr val="666666"/>
+                      </a:solidFill>
+                      <a:prstDash val="solid"/>
+                      <a:round/>
+                      <a:headEnd type="none" w="med" len="med"/>
+                      <a:tailEnd type="none" w="med" len="med"/>
+                    </a:lnL>
+                    <a:lnR w="6350" cap="flat" cmpd="sng" algn="ctr">
+                      <a:solidFill>
+                        <a:srgbClr val="666666"/>
+                      </a:solidFill>
+                      <a:prstDash val="solid"/>
+                      <a:round/>
+                      <a:headEnd type="none" w="med" len="med"/>
+                      <a:tailEnd type="none" w="med" len="med"/>
+                    </a:lnR>
+                    <a:lnT w="6350" cap="flat" cmpd="sng" algn="ctr">
+                      <a:solidFill>
+                        <a:srgbClr val="666666"/>
+                      </a:solidFill>
+                      <a:prstDash val="solid"/>
+                      <a:round/>
+                      <a:headEnd type="none" w="med" len="med"/>
+                      <a:tailEnd type="none" w="med" len="med"/>
+                    </a:lnT>
+                    <a:lnB w="6350" cap="flat" cmpd="sng" algn="ctr">
+                      <a:solidFill>
+                        <a:srgbClr val="666666"/>
+                      </a:solidFill>
+                      <a:prstDash val="solid"/>
+                      <a:round/>
+                      <a:headEnd type="none" w="med" len="med"/>
+                      <a:tailEnd type="none" w="med" len="med"/>
+                    </a:lnB>
+                  </a:tcPr>
+                </a:tc>
+                <a:tc>
+                  <a:txBody>
+                    <a:bodyPr/>
+                    <a:lstStyle/>
+                    <a:p>
+                      <a:pPr indent="0" marL="0">
+                        <a:buNone/>
+                      </a:pPr>
+                      <a:endParaRPr lang="en-US" sz="650" dirty="0">
                         <a:latin typeface="Arial" charset="0"/>
                         <a:ea typeface="Arial" charset="0"/>
                         <a:cs typeface="Arial" charset="0"/>
@@ -7981,7 +7953,7 @@
                   </a:tcPr>
                 </a:tc>
               </a:tr>
-              <a:tr h="320040">
+              <a:tr h="292608">
                 <a:tc>
                   <a:txBody>
                     <a:bodyPr/>
@@ -7991,7 +7963,7 @@
                         <a:buNone/>
                       </a:pPr>
                       <a:r>
-                        <a:rPr lang="en-US" sz="700" b="1" dirty="0">
+                        <a:rPr lang="en-US" sz="650" b="1" dirty="0">
                           <a:solidFill>
                             <a:srgbClr val="334155"/>
                           </a:solidFill>
@@ -8001,7 +7973,7 @@
                         </a:rPr>
                         <a:t>11:00</a:t>
                       </a:r>
-                      <a:endParaRPr lang="en-US" sz="700" dirty="0">
+                      <a:endParaRPr lang="en-US" sz="650" dirty="0">
                         <a:latin typeface="Arial" charset="0"/>
                         <a:ea typeface="Arial" charset="0"/>
                         <a:cs typeface="Arial" charset="0"/>
@@ -8056,7 +8028,7 @@
                         <a:buNone/>
                       </a:pPr>
                       <a:r>
-                        <a:rPr lang="en-US" sz="700" dirty="0">
+                        <a:rPr lang="en-US" sz="650" dirty="0">
                           <a:solidFill>
                             <a:srgbClr val="334155"/>
                           </a:solidFill>
@@ -8066,7 +8038,7 @@
                         </a:rPr>
                         <a:t>L5: 工程最佳实践 50min</a:t>
                       </a:r>
-                      <a:endParaRPr lang="en-US" sz="700" dirty="0">
+                      <a:endParaRPr lang="en-US" sz="650" dirty="0">
                         <a:latin typeface="Arial" charset="0"/>
                         <a:ea typeface="Arial" charset="0"/>
                         <a:cs typeface="Arial" charset="0"/>
@@ -8121,7 +8093,7 @@
                         <a:buNone/>
                       </a:pPr>
                       <a:r>
-                        <a:rPr lang="en-US" sz="700" dirty="0">
+                        <a:rPr lang="en-US" sz="650" dirty="0">
                           <a:solidFill>
                             <a:srgbClr val="334155"/>
                           </a:solidFill>
@@ -8131,7 +8103,7 @@
                         </a:rPr>
                         <a:t>70/30法则 审查清单 三重门禁 决策矩阵</a:t>
                       </a:r>
-                      <a:endParaRPr lang="en-US" sz="700" dirty="0">
+                      <a:endParaRPr lang="en-US" sz="650" dirty="0">
                         <a:latin typeface="Arial" charset="0"/>
                         <a:ea typeface="Arial" charset="0"/>
                         <a:cs typeface="Arial" charset="0"/>
@@ -8190,8 +8162,8 @@
         </p:nvSpPr>
         <p:spPr>
           <a:xfrm>
-            <a:off x="457200" y="2176272"/>
-            <a:ext cx="4572000" cy="182880"/>
+            <a:off x="1979676" y="1965960"/>
+            <a:ext cx="4572000" cy="164592"/>
           </a:xfrm>
           <a:prstGeom prst="rect">
             <a:avLst/>
@@ -8207,14 +8179,14 @@
               <a:buNone/>
             </a:pPr>
             <a:r>
-              <a:rPr lang="en-US" sz="1000" b="1" dirty="0">
+              <a:rPr lang="en-US" sz="900" b="1" dirty="0">
                 <a:solidFill>
                   <a:srgbClr val="1A1A2E"/>
                 </a:solidFill>
               </a:rPr>
               <a:t>下午 演练 (14:30-18:00)</a:t>
             </a:r>
-            <a:endParaRPr lang="en-US" sz="1000" dirty="0"/>
+            <a:endParaRPr lang="en-US" sz="900" dirty="0"/>
           </a:p>
         </p:txBody>
       </p:sp>
@@ -8233,19 +8205,19 @@
           </p:nvPr>
         </p:nvGraphicFramePr>
         <p:xfrm>
-          <a:off x="457200" y="2423160"/>
-          <a:ext cx="11064240" cy="914400"/>
+          <a:off x="1979676" y="2176272"/>
+          <a:ext cx="8229600" cy="914400"/>
         </p:xfrm>
         <a:graphic>
           <a:graphicData uri="http://schemas.openxmlformats.org/drawingml/2006/table">
             <a:tbl>
               <a:tblPr/>
               <a:tblGrid>
-                <a:gridCol w="548640"/>
-                <a:gridCol w="3017520"/>
-                <a:gridCol w="7498080"/>
+                <a:gridCol w="502920"/>
+                <a:gridCol w="2560320"/>
+                <a:gridCol w="5166360"/>
               </a:tblGrid>
-              <a:tr h="182880">
+              <a:tr h="164592">
                 <a:tc>
                   <a:txBody>
                     <a:bodyPr/>
@@ -8255,7 +8227,7 @@
                         <a:buNone/>
                       </a:pPr>
                       <a:r>
-                        <a:rPr lang="en-US" sz="700" b="1" dirty="0">
+                        <a:rPr lang="en-US" sz="650" b="1" dirty="0">
                           <a:solidFill>
                             <a:srgbClr val="334155"/>
                           </a:solidFill>
@@ -8265,7 +8237,7 @@
                         </a:rPr>
                         <a:t>时</a:t>
                       </a:r>
-                      <a:endParaRPr lang="en-US" sz="700" dirty="0">
+                      <a:endParaRPr lang="en-US" sz="650" dirty="0">
                         <a:latin typeface="Arial" charset="0"/>
                         <a:ea typeface="Arial" charset="0"/>
                         <a:cs typeface="Arial" charset="0"/>
@@ -8323,7 +8295,7 @@
                         <a:buNone/>
                       </a:pPr>
                       <a:r>
-                        <a:rPr lang="en-US" sz="700" b="1" dirty="0">
+                        <a:rPr lang="en-US" sz="650" b="1" dirty="0">
                           <a:solidFill>
                             <a:srgbClr val="334155"/>
                           </a:solidFill>
@@ -8333,7 +8305,7 @@
                         </a:rPr>
                         <a:t>环节</a:t>
                       </a:r>
-                      <a:endParaRPr lang="en-US" sz="700" dirty="0">
+                      <a:endParaRPr lang="en-US" sz="650" dirty="0">
                         <a:latin typeface="Arial" charset="0"/>
                         <a:ea typeface="Arial" charset="0"/>
                         <a:cs typeface="Arial" charset="0"/>
@@ -8391,7 +8363,7 @@
                         <a:buNone/>
                       </a:pPr>
                       <a:r>
-                        <a:rPr lang="en-US" sz="700" b="1" dirty="0">
+                        <a:rPr lang="en-US" sz="650" b="1" dirty="0">
                           <a:solidFill>
                             <a:srgbClr val="334155"/>
                           </a:solidFill>
@@ -8401,7 +8373,7 @@
                         </a:rPr>
                         <a:t>内容</a:t>
                       </a:r>
-                      <a:endParaRPr lang="en-US" sz="700" dirty="0">
+                      <a:endParaRPr lang="en-US" sz="650" dirty="0">
                         <a:latin typeface="Arial" charset="0"/>
                         <a:ea typeface="Arial" charset="0"/>
                         <a:cs typeface="Arial" charset="0"/>
@@ -8451,7 +8423,7 @@
                   </a:tcPr>
                 </a:tc>
               </a:tr>
-              <a:tr h="292608">
+              <a:tr h="274320">
                 <a:tc>
                   <a:txBody>
                     <a:bodyPr/>
@@ -8461,7 +8433,7 @@
                         <a:buNone/>
                       </a:pPr>
                       <a:r>
-                        <a:rPr lang="en-US" sz="700" b="1" dirty="0">
+                        <a:rPr lang="en-US" sz="650" b="1" dirty="0">
                           <a:solidFill>
                             <a:srgbClr val="334155"/>
                           </a:solidFill>
@@ -8471,7 +8443,7 @@
                         </a:rPr>
                         <a:t>14:30</a:t>
                       </a:r>
-                      <a:endParaRPr lang="en-US" sz="700" dirty="0">
+                      <a:endParaRPr lang="en-US" sz="650" dirty="0">
                         <a:latin typeface="Arial" charset="0"/>
                         <a:ea typeface="Arial" charset="0"/>
                         <a:cs typeface="Arial" charset="0"/>
@@ -8526,7 +8498,7 @@
                         <a:buNone/>
                       </a:pPr>
                       <a:r>
-                        <a:rPr lang="en-US" sz="700" dirty="0">
+                        <a:rPr lang="en-US" sz="650" dirty="0">
                           <a:solidFill>
                             <a:srgbClr val="334155"/>
                           </a:solidFill>
@@ -8536,7 +8508,7 @@
                         </a:rPr>
                         <a:t>Workshop 2: 增量重构 75min</a:t>
                       </a:r>
-                      <a:endParaRPr lang="en-US" sz="700" dirty="0">
+                      <a:endParaRPr lang="en-US" sz="650" dirty="0">
                         <a:latin typeface="Arial" charset="0"/>
                         <a:ea typeface="Arial" charset="0"/>
                         <a:cs typeface="Arial" charset="0"/>
@@ -8594,7 +8566,7 @@
                         <a:buNone/>
                       </a:pPr>
                       <a:r>
-                        <a:rPr lang="en-US" sz="700" dirty="0">
+                        <a:rPr lang="en-US" sz="650" dirty="0">
                           <a:solidFill>
                             <a:srgbClr val="334155"/>
                           </a:solidFill>
@@ -8604,7 +8576,7 @@
                         </a:rPr>
                         <a:t>A组(全重写)/B组(增量)/C组(手工+AI) 策略对比</a:t>
                       </a:r>
-                      <a:endParaRPr lang="en-US" sz="700" dirty="0">
+                      <a:endParaRPr lang="en-US" sz="650" dirty="0">
                         <a:latin typeface="Arial" charset="0"/>
                         <a:ea typeface="Arial" charset="0"/>
                         <a:cs typeface="Arial" charset="0"/>
@@ -8651,7 +8623,7 @@
                   </a:tcPr>
                 </a:tc>
               </a:tr>
-              <a:tr h="146304">
+              <a:tr h="137160">
                 <a:tc>
                   <a:txBody>
                     <a:bodyPr/>
@@ -8661,7 +8633,7 @@
                         <a:buNone/>
                       </a:pPr>
                       <a:r>
-                        <a:rPr lang="en-US" sz="700" b="1" dirty="0">
+                        <a:rPr lang="en-US" sz="650" b="1" dirty="0">
                           <a:solidFill>
                             <a:srgbClr val="334155"/>
                           </a:solidFill>
@@ -8671,7 +8643,7 @@
                         </a:rPr>
                         <a:t>15:45</a:t>
                       </a:r>
-                      <a:endParaRPr lang="en-US" sz="700" dirty="0">
+                      <a:endParaRPr lang="en-US" sz="650" dirty="0">
                         <a:latin typeface="Arial" charset="0"/>
                         <a:ea typeface="Arial" charset="0"/>
                         <a:cs typeface="Arial" charset="0"/>
@@ -8726,7 +8698,7 @@
                         <a:buNone/>
                       </a:pPr>
                       <a:r>
-                        <a:rPr lang="en-US" sz="700" dirty="0">
+                        <a:rPr lang="en-US" sz="650" dirty="0">
                           <a:solidFill>
                             <a:srgbClr val="334155"/>
                           </a:solidFill>
@@ -8736,61 +8708,61 @@
                         </a:rPr>
                         <a:t>休息 15min</a:t>
                       </a:r>
-                      <a:endParaRPr lang="en-US" sz="700" dirty="0">
-                        <a:latin typeface="Arial" charset="0"/>
-                        <a:ea typeface="Arial" charset="0"/>
-                        <a:cs typeface="Arial" charset="0"/>
-                      </a:endParaRPr>
-                    </a:p>
-                  </a:txBody>
-                  <a:tcPr marL="38100" marR="38100" marT="25400" marB="25400">
-                    <a:lnL w="6350" cap="flat" cmpd="sng" algn="ctr">
-                      <a:solidFill>
-                        <a:srgbClr val="666666"/>
-                      </a:solidFill>
-                      <a:prstDash val="solid"/>
-                      <a:round/>
-                      <a:headEnd type="none" w="med" len="med"/>
-                      <a:tailEnd type="none" w="med" len="med"/>
-                    </a:lnL>
-                    <a:lnR w="6350" cap="flat" cmpd="sng" algn="ctr">
-                      <a:solidFill>
-                        <a:srgbClr val="666666"/>
-                      </a:solidFill>
-                      <a:prstDash val="solid"/>
-                      <a:round/>
-                      <a:headEnd type="none" w="med" len="med"/>
-                      <a:tailEnd type="none" w="med" len="med"/>
-                    </a:lnR>
-                    <a:lnT w="6350" cap="flat" cmpd="sng" algn="ctr">
-                      <a:solidFill>
-                        <a:srgbClr val="666666"/>
-                      </a:solidFill>
-                      <a:prstDash val="solid"/>
-                      <a:round/>
-                      <a:headEnd type="none" w="med" len="med"/>
-                      <a:tailEnd type="none" w="med" len="med"/>
-                    </a:lnT>
-                    <a:lnB w="6350" cap="flat" cmpd="sng" algn="ctr">
-                      <a:solidFill>
-                        <a:srgbClr val="666666"/>
-                      </a:solidFill>
-                      <a:prstDash val="solid"/>
-                      <a:round/>
-                      <a:headEnd type="none" w="med" len="med"/>
-                      <a:tailEnd type="none" w="med" len="med"/>
-                    </a:lnB>
-                  </a:tcPr>
-                </a:tc>
-                <a:tc>
-                  <a:txBody>
-                    <a:bodyPr/>
-                    <a:lstStyle/>
-                    <a:p>
-                      <a:pPr indent="0" marL="0">
-                        <a:buNone/>
-                      </a:pPr>
-                      <a:endParaRPr lang="en-US" sz="700" dirty="0">
+                      <a:endParaRPr lang="en-US" sz="650" dirty="0">
+                        <a:latin typeface="Arial" charset="0"/>
+                        <a:ea typeface="Arial" charset="0"/>
+                        <a:cs typeface="Arial" charset="0"/>
+                      </a:endParaRPr>
+                    </a:p>
+                  </a:txBody>
+                  <a:tcPr marL="38100" marR="38100" marT="25400" marB="25400">
+                    <a:lnL w="6350" cap="flat" cmpd="sng" algn="ctr">
+                      <a:solidFill>
+                        <a:srgbClr val="666666"/>
+                      </a:solidFill>
+                      <a:prstDash val="solid"/>
+                      <a:round/>
+                      <a:headEnd type="none" w="med" len="med"/>
+                      <a:tailEnd type="none" w="med" len="med"/>
+                    </a:lnL>
+                    <a:lnR w="6350" cap="flat" cmpd="sng" algn="ctr">
+                      <a:solidFill>
+                        <a:srgbClr val="666666"/>
+                      </a:solidFill>
+                      <a:prstDash val="solid"/>
+                      <a:round/>
+                      <a:headEnd type="none" w="med" len="med"/>
+                      <a:tailEnd type="none" w="med" len="med"/>
+                    </a:lnR>
+                    <a:lnT w="6350" cap="flat" cmpd="sng" algn="ctr">
+                      <a:solidFill>
+                        <a:srgbClr val="666666"/>
+                      </a:solidFill>
+                      <a:prstDash val="solid"/>
+                      <a:round/>
+                      <a:headEnd type="none" w="med" len="med"/>
+                      <a:tailEnd type="none" w="med" len="med"/>
+                    </a:lnT>
+                    <a:lnB w="6350" cap="flat" cmpd="sng" algn="ctr">
+                      <a:solidFill>
+                        <a:srgbClr val="666666"/>
+                      </a:solidFill>
+                      <a:prstDash val="solid"/>
+                      <a:round/>
+                      <a:headEnd type="none" w="med" len="med"/>
+                      <a:tailEnd type="none" w="med" len="med"/>
+                    </a:lnB>
+                  </a:tcPr>
+                </a:tc>
+                <a:tc>
+                  <a:txBody>
+                    <a:bodyPr/>
+                    <a:lstStyle/>
+                    <a:p>
+                      <a:pPr indent="0" marL="0">
+                        <a:buNone/>
+                      </a:pPr>
+                      <a:endParaRPr lang="en-US" sz="650" dirty="0">
                         <a:latin typeface="Arial" charset="0"/>
                         <a:ea typeface="Arial" charset="0"/>
                         <a:cs typeface="Arial" charset="0"/>
@@ -8837,7 +8809,7 @@
                   </a:tcPr>
                 </a:tc>
               </a:tr>
-              <a:tr h="292608">
+              <a:tr h="274320">
                 <a:tc>
                   <a:txBody>
                     <a:bodyPr/>
@@ -8847,7 +8819,7 @@
                         <a:buNone/>
                       </a:pPr>
                       <a:r>
-                        <a:rPr lang="en-US" sz="700" b="1" dirty="0">
+                        <a:rPr lang="en-US" sz="650" b="1" dirty="0">
                           <a:solidFill>
                             <a:srgbClr val="334155"/>
                           </a:solidFill>
@@ -8857,7 +8829,7 @@
                         </a:rPr>
                         <a:t>16:00</a:t>
                       </a:r>
-                      <a:endParaRPr lang="en-US" sz="700" dirty="0">
+                      <a:endParaRPr lang="en-US" sz="650" dirty="0">
                         <a:latin typeface="Arial" charset="0"/>
                         <a:ea typeface="Arial" charset="0"/>
                         <a:cs typeface="Arial" charset="0"/>
@@ -8912,7 +8884,7 @@
                         <a:buNone/>
                       </a:pPr>
                       <a:r>
-                        <a:rPr lang="en-US" sz="700" dirty="0">
+                        <a:rPr lang="en-US" sz="650" dirty="0">
                           <a:solidFill>
                             <a:srgbClr val="334155"/>
                           </a:solidFill>
@@ -8922,7 +8894,7 @@
                         </a:rPr>
                         <a:t>Workshop 3: 端到端 60min</a:t>
                       </a:r>
-                      <a:endParaRPr lang="en-US" sz="700" dirty="0">
+                      <a:endParaRPr lang="en-US" sz="650" dirty="0">
                         <a:latin typeface="Arial" charset="0"/>
                         <a:ea typeface="Arial" charset="0"/>
                         <a:cs typeface="Arial" charset="0"/>
@@ -8980,7 +8952,7 @@
                         <a:buNone/>
                       </a:pPr>
                       <a:r>
-                        <a:rPr lang="en-US" sz="700" dirty="0">
+                        <a:rPr lang="en-US" sz="650" dirty="0">
                           <a:solidFill>
                             <a:srgbClr val="334155"/>
                           </a:solidFill>
@@ -8990,7 +8962,7 @@
                         </a:rPr>
                         <a:t>三档自选: 小费计算器/历史搜索/程序员 AID流程</a:t>
                       </a:r>
-                      <a:endParaRPr lang="en-US" sz="700" dirty="0">
+                      <a:endParaRPr lang="en-US" sz="650" dirty="0">
                         <a:latin typeface="Arial" charset="0"/>
                         <a:ea typeface="Arial" charset="0"/>
                         <a:cs typeface="Arial" charset="0"/>
@@ -9037,7 +9009,7 @@
                   </a:tcPr>
                 </a:tc>
               </a:tr>
-              <a:tr h="256032">
+              <a:tr h="237744">
                 <a:tc>
                   <a:txBody>
                     <a:bodyPr/>
@@ -9047,7 +9019,7 @@
                         <a:buNone/>
                       </a:pPr>
                       <a:r>
-                        <a:rPr lang="en-US" sz="700" b="1" dirty="0">
+                        <a:rPr lang="en-US" sz="650" b="1" dirty="0">
                           <a:solidFill>
                             <a:srgbClr val="334155"/>
                           </a:solidFill>
@@ -9057,7 +9029,7 @@
                         </a:rPr>
                         <a:t>17:00</a:t>
                       </a:r>
-                      <a:endParaRPr lang="en-US" sz="700" dirty="0">
+                      <a:endParaRPr lang="en-US" sz="650" dirty="0">
                         <a:latin typeface="Arial" charset="0"/>
                         <a:ea typeface="Arial" charset="0"/>
                         <a:cs typeface="Arial" charset="0"/>
@@ -9112,7 +9084,7 @@
                         <a:buNone/>
                       </a:pPr>
                       <a:r>
-                        <a:rPr lang="en-US" sz="700" dirty="0">
+                        <a:rPr lang="en-US" sz="650" dirty="0">
                           <a:solidFill>
                             <a:srgbClr val="334155"/>
                           </a:solidFill>
@@ -9122,7 +9094,7 @@
                         </a:rPr>
                         <a:t>方案对比+同行评审 30min</a:t>
                       </a:r>
-                      <a:endParaRPr lang="en-US" sz="700" dirty="0">
+                      <a:endParaRPr lang="en-US" sz="650" dirty="0">
                         <a:latin typeface="Arial" charset="0"/>
                         <a:ea typeface="Arial" charset="0"/>
                         <a:cs typeface="Arial" charset="0"/>
@@ -9180,7 +9152,7 @@
                         <a:buNone/>
                       </a:pPr>
                       <a:r>
-                        <a:rPr lang="en-US" sz="700" dirty="0">
+                        <a:rPr lang="en-US" sz="650" dirty="0">
                           <a:solidFill>
                             <a:srgbClr val="334155"/>
                           </a:solidFill>
@@ -9190,7 +9162,7 @@
                         </a:rPr>
                         <a:t>W2+W3成果展示 审查清单评审</a:t>
                       </a:r>
-                      <a:endParaRPr lang="en-US" sz="700" dirty="0">
+                      <a:endParaRPr lang="en-US" sz="650" dirty="0">
                         <a:latin typeface="Arial" charset="0"/>
                         <a:ea typeface="Arial" charset="0"/>
                         <a:cs typeface="Arial" charset="0"/>
@@ -9237,7 +9209,7 @@
                   </a:tcPr>
                 </a:tc>
               </a:tr>
-              <a:tr h="256032">
+              <a:tr h="237744">
                 <a:tc>
                   <a:txBody>
                     <a:bodyPr/>
@@ -9247,7 +9219,7 @@
                         <a:buNone/>
                       </a:pPr>
                       <a:r>
-                        <a:rPr lang="en-US" sz="700" b="1" dirty="0">
+                        <a:rPr lang="en-US" sz="650" b="1" dirty="0">
                           <a:solidFill>
                             <a:srgbClr val="334155"/>
                           </a:solidFill>
@@ -9257,7 +9229,7 @@
                         </a:rPr>
                         <a:t>17:30</a:t>
                       </a:r>
-                      <a:endParaRPr lang="en-US" sz="700" dirty="0">
+                      <a:endParaRPr lang="en-US" sz="650" dirty="0">
                         <a:latin typeface="Arial" charset="0"/>
                         <a:ea typeface="Arial" charset="0"/>
                         <a:cs typeface="Arial" charset="0"/>
@@ -9312,7 +9284,7 @@
                         <a:buNone/>
                       </a:pPr>
                       <a:r>
-                        <a:rPr lang="en-US" sz="700" dirty="0">
+                        <a:rPr lang="en-US" sz="650" dirty="0">
                           <a:solidFill>
                             <a:srgbClr val="334155"/>
                           </a:solidFill>
@@ -9322,7 +9294,7 @@
                         </a:rPr>
                         <a:t>L6: 落地策略+总结 20min</a:t>
                       </a:r>
-                      <a:endParaRPr lang="en-US" sz="700" dirty="0">
+                      <a:endParaRPr lang="en-US" sz="650" dirty="0">
                         <a:latin typeface="Arial" charset="0"/>
                         <a:ea typeface="Arial" charset="0"/>
                         <a:cs typeface="Arial" charset="0"/>
@@ -9377,7 +9349,7 @@
                         <a:buNone/>
                       </a:pPr>
                       <a:r>
-                        <a:rPr lang="en-US" sz="700" dirty="0">
+                        <a:rPr lang="en-US" sz="650" dirty="0">
                           <a:solidFill>
                             <a:srgbClr val="334155"/>
                           </a:solidFill>
@@ -9387,7 +9359,7 @@
                         </a:rPr>
                         <a:t>8项资产 Token三步法 30天路线 痛点回顾</a:t>
                       </a:r>
-                      <a:endParaRPr lang="en-US" sz="700" dirty="0">
+                      <a:endParaRPr lang="en-US" sz="650" dirty="0">
                         <a:latin typeface="Arial" charset="0"/>
                         <a:ea typeface="Arial" charset="0"/>
                         <a:cs typeface="Arial" charset="0"/>
@@ -9434,7 +9406,7 @@
                   </a:tcPr>
                 </a:tc>
               </a:tr>
-              <a:tr h="219456">
+              <a:tr h="201168">
                 <a:tc>
                   <a:txBody>
                     <a:bodyPr/>
@@ -9444,7 +9416,7 @@
                         <a:buNone/>
                       </a:pPr>
                       <a:r>
-                        <a:rPr lang="en-US" sz="700" b="1" dirty="0">
+                        <a:rPr lang="en-US" sz="650" b="1" dirty="0">
                           <a:solidFill>
                             <a:srgbClr val="334155"/>
                           </a:solidFill>
@@ -9454,7 +9426,7 @@
                         </a:rPr>
                         <a:t>17:50</a:t>
                       </a:r>
-                      <a:endParaRPr lang="en-US" sz="700" dirty="0">
+                      <a:endParaRPr lang="en-US" sz="650" dirty="0">
                         <a:latin typeface="Arial" charset="0"/>
                         <a:ea typeface="Arial" charset="0"/>
                         <a:cs typeface="Arial" charset="0"/>
@@ -9509,7 +9481,7 @@
                         <a:buNone/>
                       </a:pPr>
                       <a:r>
-                        <a:rPr lang="en-US" sz="700" dirty="0">
+                        <a:rPr lang="en-US" sz="650" dirty="0">
                           <a:solidFill>
                             <a:srgbClr val="334155"/>
                           </a:solidFill>
@@ -9519,7 +9491,7 @@
                         </a:rPr>
                         <a:t>开放空间</a:t>
                       </a:r>
-                      <a:endParaRPr lang="en-US" sz="700" dirty="0">
+                      <a:endParaRPr lang="en-US" sz="650" dirty="0">
                         <a:latin typeface="Arial" charset="0"/>
                         <a:ea typeface="Arial" charset="0"/>
                         <a:cs typeface="Arial" charset="0"/>
@@ -9577,7 +9549,7 @@
                         <a:buNone/>
                       </a:pPr>
                       <a:r>
-                        <a:rPr lang="en-US" sz="700" dirty="0">
+                        <a:rPr lang="en-US" sz="650" dirty="0">
                           <a:solidFill>
                             <a:srgbClr val="334155"/>
                           </a:solidFill>
@@ -9587,7 +9559,7 @@
                         </a:rPr>
                         <a:t>自由交流 一对一答疑</a:t>
                       </a:r>
-                      <a:endParaRPr lang="en-US" sz="700" dirty="0">
+                      <a:endParaRPr lang="en-US" sz="650" dirty="0">
                         <a:latin typeface="Arial" charset="0"/>
                         <a:ea typeface="Arial" charset="0"/>
                         <a:cs typeface="Arial" charset="0"/>
@@ -9678,8 +9650,8 @@
         </p:nvSpPr>
         <p:spPr>
           <a:xfrm>
-            <a:off x="457200" y="4892040"/>
-            <a:ext cx="11064240" cy="36576"/>
+            <a:off x="1979676" y="4892040"/>
+            <a:ext cx="8229600" cy="27432"/>
           </a:xfrm>
           <a:prstGeom prst="rect">
             <a:avLst/>
@@ -9698,8 +9670,8 @@
         </p:nvSpPr>
         <p:spPr>
           <a:xfrm>
-            <a:off x="457200" y="4983480"/>
-            <a:ext cx="3657600" cy="182880"/>
+            <a:off x="1979676" y="4983480"/>
+            <a:ext cx="8229600" cy="182880"/>
           </a:xfrm>
           <a:prstGeom prst="rect">
             <a:avLst/>
@@ -9708,10 +9680,10 @@
           <a:ln/>
         </p:spPr>
         <p:txBody>
-          <a:bodyPr wrap="square" rtlCol="0" anchor="ctr"/>
+          <a:bodyPr wrap="square" lIns="0" tIns="0" rIns="0" bIns="0" rtlCol="0" anchor="ctr"/>
           <a:lstStyle/>
           <a:p>
-            <a:pPr indent="0" marL="0">
+            <a:pPr algn="ctr" indent="0" marL="0">
               <a:buNone/>
             </a:pPr>
             <a:r>
@@ -9734,8 +9706,8 @@
         </p:nvSpPr>
         <p:spPr>
           <a:xfrm>
-            <a:off x="457200" y="182880"/>
-            <a:ext cx="11064240" cy="384048"/>
+            <a:off x="1979676" y="137160"/>
+            <a:ext cx="8229600" cy="365760"/>
           </a:xfrm>
           <a:prstGeom prst="rect">
             <a:avLst/>
@@ -9751,7 +9723,7 @@
               <a:buNone/>
             </a:pPr>
             <a:r>
-              <a:rPr lang="en-US" sz="2000" b="1" dirty="0">
+              <a:rPr lang="en-US" sz="1800" b="1" dirty="0">
                 <a:solidFill>
                   <a:srgbClr val="1A1A2E"/>
                 </a:solidFill>
@@ -9761,7 +9733,7 @@
               </a:rPr>
               <a:t>L1-L6 模块详解 + 交付物</a:t>
             </a:r>
-            <a:endParaRPr lang="en-US" sz="2000" dirty="0"/>
+            <a:endParaRPr lang="en-US" sz="1800" dirty="0"/>
           </a:p>
         </p:txBody>
       </p:sp>
@@ -9773,8 +9745,8 @@
         </p:nvSpPr>
         <p:spPr>
           <a:xfrm>
-            <a:off x="457200" y="566928"/>
-            <a:ext cx="1097280" cy="27432"/>
+            <a:off x="1979676" y="502920"/>
+            <a:ext cx="914400" cy="27432"/>
           </a:xfrm>
           <a:prstGeom prst="rect">
             <a:avLst/>
@@ -9793,12 +9765,12 @@
         </p:nvSpPr>
         <p:spPr>
           <a:xfrm>
-            <a:off x="457200" y="749808"/>
-            <a:ext cx="3566160" cy="868680"/>
+            <a:off x="1979676" y="658368"/>
+            <a:ext cx="2670048" cy="777240"/>
           </a:xfrm>
           <a:prstGeom prst="roundRect">
             <a:avLst>
-              <a:gd name="adj" fmla="val 10526"/>
+              <a:gd name="adj" fmla="val 9412"/>
             </a:avLst>
           </a:prstGeom>
           <a:solidFill>
@@ -9820,8 +9792,8 @@
         </p:nvSpPr>
         <p:spPr>
           <a:xfrm>
-            <a:off x="548640" y="786384"/>
-            <a:ext cx="3383280" cy="201168"/>
+            <a:off x="2052828" y="685800"/>
+            <a:ext cx="2523744" cy="182880"/>
           </a:xfrm>
           <a:prstGeom prst="rect">
             <a:avLst/>
@@ -9837,7 +9809,7 @@
               <a:buNone/>
             </a:pPr>
             <a:r>
-              <a:rPr lang="en-US" sz="1000" b="1" dirty="0">
+              <a:rPr lang="en-US" sz="900" b="1" dirty="0">
                 <a:solidFill>
                   <a:srgbClr val="1A1A2E"/>
                 </a:solidFill>
@@ -9845,9 +9817,9 @@
                 <a:ea typeface="Arial" pitchFamily="34" charset="-122"/>
                 <a:cs typeface="Arial" pitchFamily="34" charset="-120"/>
               </a:rPr>
-              <a:t>L1: AI Native范式 60min</a:t>
+              <a:t>L1: AI Native范式</a:t>
             </a:r>
-            <a:endParaRPr lang="en-US" sz="1000" dirty="0"/>
+            <a:endParaRPr lang="en-US" sz="900" dirty="0"/>
           </a:p>
         </p:txBody>
       </p:sp>
@@ -9859,8 +9831,8 @@
         </p:nvSpPr>
         <p:spPr>
           <a:xfrm>
-            <a:off x="548640" y="987552"/>
-            <a:ext cx="3383280" cy="594360"/>
+            <a:off x="2052828" y="868680"/>
+            <a:ext cx="2523744" cy="539496"/>
           </a:xfrm>
           <a:prstGeom prst="rect">
             <a:avLst/>
@@ -9874,36 +9846,36 @@
           <a:p>
             <a:pPr indent="0" marL="0">
               <a:lnSpc>
-                <a:spcPct val="115000"/>
+                <a:spcPct val="110000"/>
               </a:lnSpc>
               <a:buNone/>
             </a:pPr>
             <a:r>
-              <a:rPr lang="en-US" sz="800" dirty="0">
+              <a:rPr lang="en-US" sz="700" dirty="0">
                 <a:solidFill>
                   <a:srgbClr val="64748B"/>
                 </a:solidFill>
               </a:rPr>
-              <a:t>三层范式 三角色模型</a:t>
+              <a:t>三层范式 三角色</a:t>
             </a:r>
-            <a:endParaRPr lang="en-US" sz="800" dirty="0"/>
+            <a:endParaRPr lang="en-US" sz="700" dirty="0"/>
           </a:p>
           <a:p>
             <a:pPr indent="0" marL="0">
               <a:lnSpc>
-                <a:spcPct val="115000"/>
+                <a:spcPct val="110000"/>
               </a:lnSpc>
               <a:buNone/>
             </a:pPr>
             <a:r>
-              <a:rPr lang="en-US" sz="800" dirty="0">
+              <a:rPr lang="en-US" sz="700" dirty="0">
                 <a:solidFill>
                   <a:srgbClr val="64748B"/>
                 </a:solidFill>
               </a:rPr>
               <a:t>SDD+AI融合 CRISPE</a:t>
             </a:r>
-            <a:endParaRPr lang="en-US" sz="800" dirty="0"/>
+            <a:endParaRPr lang="en-US" sz="700" dirty="0"/>
           </a:p>
         </p:txBody>
       </p:sp>
@@ -9915,12 +9887,12 @@
         </p:nvSpPr>
         <p:spPr>
           <a:xfrm>
-            <a:off x="4206240" y="749808"/>
-            <a:ext cx="3566160" cy="868680"/>
+            <a:off x="4759452" y="658368"/>
+            <a:ext cx="2670048" cy="777240"/>
           </a:xfrm>
           <a:prstGeom prst="roundRect">
             <a:avLst>
-              <a:gd name="adj" fmla="val 10526"/>
+              <a:gd name="adj" fmla="val 9412"/>
             </a:avLst>
           </a:prstGeom>
           <a:solidFill>
@@ -9942,8 +9914,8 @@
         </p:nvSpPr>
         <p:spPr>
           <a:xfrm>
-            <a:off x="4297680" y="786384"/>
-            <a:ext cx="3383280" cy="201168"/>
+            <a:off x="4832604" y="685800"/>
+            <a:ext cx="2523744" cy="182880"/>
           </a:xfrm>
           <a:prstGeom prst="rect">
             <a:avLst/>
@@ -9959,7 +9931,7 @@
               <a:buNone/>
             </a:pPr>
             <a:r>
-              <a:rPr lang="en-US" sz="1000" b="1" dirty="0">
+              <a:rPr lang="en-US" sz="900" b="1" dirty="0">
                 <a:solidFill>
                   <a:srgbClr val="1A1A2E"/>
                 </a:solidFill>
@@ -9967,9 +9939,9 @@
                 <a:ea typeface="Arial" pitchFamily="34" charset="-122"/>
                 <a:cs typeface="Arial" pitchFamily="34" charset="-120"/>
               </a:rPr>
-              <a:t>L2: Agent/Claude 60min</a:t>
+              <a:t>L2: Agent/Claude</a:t>
             </a:r>
-            <a:endParaRPr lang="en-US" sz="1000" dirty="0"/>
+            <a:endParaRPr lang="en-US" sz="900" dirty="0"/>
           </a:p>
         </p:txBody>
       </p:sp>
@@ -9981,8 +9953,8 @@
         </p:nvSpPr>
         <p:spPr>
           <a:xfrm>
-            <a:off x="4297680" y="987552"/>
-            <a:ext cx="3383280" cy="594360"/>
+            <a:off x="4832604" y="868680"/>
+            <a:ext cx="2523744" cy="539496"/>
           </a:xfrm>
           <a:prstGeom prst="rect">
             <a:avLst/>
@@ -9996,36 +9968,36 @@
           <a:p>
             <a:pPr indent="0" marL="0">
               <a:lnSpc>
-                <a:spcPct val="115000"/>
+                <a:spcPct val="110000"/>
               </a:lnSpc>
               <a:buNone/>
             </a:pPr>
             <a:r>
-              <a:rPr lang="en-US" sz="800" dirty="0">
+              <a:rPr lang="en-US" sz="700" dirty="0">
                 <a:solidFill>
                   <a:srgbClr val="64748B"/>
                 </a:solidFill>
               </a:rPr>
               <a:t>四层架构 Token全景</a:t>
             </a:r>
-            <a:endParaRPr lang="en-US" sz="800" dirty="0"/>
+            <a:endParaRPr lang="en-US" sz="700" dirty="0"/>
           </a:p>
           <a:p>
             <a:pPr indent="0" marL="0">
               <a:lnSpc>
-                <a:spcPct val="115000"/>
+                <a:spcPct val="110000"/>
               </a:lnSpc>
               <a:buNone/>
             </a:pPr>
             <a:r>
-              <a:rPr lang="en-US" sz="800" dirty="0">
+              <a:rPr lang="en-US" sz="700" dirty="0">
                 <a:solidFill>
                   <a:srgbClr val="64748B"/>
                 </a:solidFill>
               </a:rPr>
               <a:t>/compact Skills三原则</a:t>
             </a:r>
-            <a:endParaRPr lang="en-US" sz="800" dirty="0"/>
+            <a:endParaRPr lang="en-US" sz="700" dirty="0"/>
           </a:p>
         </p:txBody>
       </p:sp>
@@ -10037,12 +10009,12 @@
         </p:nvSpPr>
         <p:spPr>
           <a:xfrm>
-            <a:off x="7955280" y="749808"/>
-            <a:ext cx="3566160" cy="868680"/>
+            <a:off x="7539228" y="658368"/>
+            <a:ext cx="2670048" cy="777240"/>
           </a:xfrm>
           <a:prstGeom prst="roundRect">
             <a:avLst>
-              <a:gd name="adj" fmla="val 10526"/>
+              <a:gd name="adj" fmla="val 9412"/>
             </a:avLst>
           </a:prstGeom>
           <a:solidFill>
@@ -10064,8 +10036,8 @@
         </p:nvSpPr>
         <p:spPr>
           <a:xfrm>
-            <a:off x="8046720" y="786384"/>
-            <a:ext cx="3383280" cy="201168"/>
+            <a:off x="7612380" y="685800"/>
+            <a:ext cx="2523744" cy="182880"/>
           </a:xfrm>
           <a:prstGeom prst="rect">
             <a:avLst/>
@@ -10081,7 +10053,7 @@
               <a:buNone/>
             </a:pPr>
             <a:r>
-              <a:rPr lang="en-US" sz="1000" b="1" dirty="0">
+              <a:rPr lang="en-US" sz="900" b="1" dirty="0">
                 <a:solidFill>
                   <a:srgbClr val="1A1A2E"/>
                 </a:solidFill>
@@ -10089,9 +10061,9 @@
                 <a:ea typeface="Arial" pitchFamily="34" charset="-122"/>
                 <a:cs typeface="Arial" pitchFamily="34" charset="-120"/>
               </a:rPr>
-              <a:t>L3: 全流程推演 60min</a:t>
+              <a:t>L3: 全流程推演</a:t>
             </a:r>
-            <a:endParaRPr lang="en-US" sz="1000" dirty="0"/>
+            <a:endParaRPr lang="en-US" sz="900" dirty="0"/>
           </a:p>
         </p:txBody>
       </p:sp>
@@ -10103,8 +10075,8 @@
         </p:nvSpPr>
         <p:spPr>
           <a:xfrm>
-            <a:off x="8046720" y="987552"/>
-            <a:ext cx="3383280" cy="594360"/>
+            <a:off x="7612380" y="868680"/>
+            <a:ext cx="2523744" cy="539496"/>
           </a:xfrm>
           <a:prstGeom prst="rect">
             <a:avLst/>
@@ -10118,36 +10090,36 @@
           <a:p>
             <a:pPr indent="0" marL="0">
               <a:lnSpc>
-                <a:spcPct val="115000"/>
+                <a:spcPct val="110000"/>
               </a:lnSpc>
               <a:buNone/>
             </a:pPr>
             <a:r>
-              <a:rPr lang="en-US" sz="800" dirty="0">
+              <a:rPr lang="en-US" sz="700" dirty="0">
                 <a:solidFill>
                   <a:srgbClr val="64748B"/>
                 </a:solidFill>
               </a:rPr>
               <a:t>Live Coding完整演示</a:t>
             </a:r>
-            <a:endParaRPr lang="en-US" sz="800" dirty="0"/>
+            <a:endParaRPr lang="en-US" sz="700" dirty="0"/>
           </a:p>
           <a:p>
             <a:pPr indent="0" marL="0">
               <a:lnSpc>
-                <a:spcPct val="115000"/>
+                <a:spcPct val="110000"/>
               </a:lnSpc>
               <a:buNone/>
             </a:pPr>
             <a:r>
-              <a:rPr lang="en-US" sz="800" dirty="0">
+              <a:rPr lang="en-US" sz="700" dirty="0">
                 <a:solidFill>
                   <a:srgbClr val="64748B"/>
                 </a:solidFill>
               </a:rPr>
               <a:t>一句话需求-&gt;代码</a:t>
             </a:r>
-            <a:endParaRPr lang="en-US" sz="800" dirty="0"/>
+            <a:endParaRPr lang="en-US" sz="700" dirty="0"/>
           </a:p>
         </p:txBody>
       </p:sp>
@@ -10159,12 +10131,12 @@
         </p:nvSpPr>
         <p:spPr>
           <a:xfrm>
-            <a:off x="457200" y="1728216"/>
-            <a:ext cx="3566160" cy="868680"/>
+            <a:off x="1979676" y="1527048"/>
+            <a:ext cx="2670048" cy="777240"/>
           </a:xfrm>
           <a:prstGeom prst="roundRect">
             <a:avLst>
-              <a:gd name="adj" fmla="val 10526"/>
+              <a:gd name="adj" fmla="val 9412"/>
             </a:avLst>
           </a:prstGeom>
           <a:solidFill>
@@ -10186,8 +10158,8 @@
         </p:nvSpPr>
         <p:spPr>
           <a:xfrm>
-            <a:off x="548640" y="1764792"/>
-            <a:ext cx="3383280" cy="201168"/>
+            <a:off x="2052828" y="1554480"/>
+            <a:ext cx="2523744" cy="182880"/>
           </a:xfrm>
           <a:prstGeom prst="rect">
             <a:avLst/>
@@ -10203,7 +10175,7 @@
               <a:buNone/>
             </a:pPr>
             <a:r>
-              <a:rPr lang="en-US" sz="1000" b="1" dirty="0">
+              <a:rPr lang="en-US" sz="900" b="1" dirty="0">
                 <a:solidFill>
                   <a:srgbClr val="1A1A2E"/>
                 </a:solidFill>
@@ -10211,9 +10183,9 @@
                 <a:ea typeface="Arial" pitchFamily="34" charset="-122"/>
                 <a:cs typeface="Arial" pitchFamily="34" charset="-120"/>
               </a:rPr>
-              <a:t>L4: 增量开发与重构 75min</a:t>
+              <a:t>L4: 增量开发与重构</a:t>
             </a:r>
-            <a:endParaRPr lang="en-US" sz="1000" dirty="0"/>
+            <a:endParaRPr lang="en-US" sz="900" dirty="0"/>
           </a:p>
         </p:txBody>
       </p:sp>
@@ -10225,8 +10197,8 @@
         </p:nvSpPr>
         <p:spPr>
           <a:xfrm>
-            <a:off x="548640" y="1965960"/>
-            <a:ext cx="3383280" cy="594360"/>
+            <a:off x="2052828" y="1737360"/>
+            <a:ext cx="2523744" cy="539496"/>
           </a:xfrm>
           <a:prstGeom prst="rect">
             <a:avLst/>
@@ -10240,36 +10212,36 @@
           <a:p>
             <a:pPr indent="0" marL="0">
               <a:lnSpc>
-                <a:spcPct val="115000"/>
+                <a:spcPct val="110000"/>
               </a:lnSpc>
               <a:buNone/>
             </a:pPr>
             <a:r>
-              <a:rPr lang="en-US" sz="800" dirty="0">
+              <a:rPr lang="en-US" sz="700" dirty="0">
                 <a:solidFill>
                   <a:srgbClr val="64748B"/>
                 </a:solidFill>
               </a:rPr>
               <a:t>增量场景 AID流程</a:t>
             </a:r>
-            <a:endParaRPr lang="en-US" sz="800" dirty="0"/>
+            <a:endParaRPr lang="en-US" sz="700" dirty="0"/>
           </a:p>
           <a:p>
             <a:pPr indent="0" marL="0">
               <a:lnSpc>
-                <a:spcPct val="115000"/>
+                <a:spcPct val="110000"/>
               </a:lnSpc>
               <a:buNone/>
             </a:pPr>
             <a:r>
-              <a:rPr lang="en-US" sz="800" dirty="0">
+              <a:rPr lang="en-US" sz="700" dirty="0">
                 <a:solidFill>
                   <a:srgbClr val="64748B"/>
                 </a:solidFill>
               </a:rPr>
               <a:t>重构三原则 案例数据</a:t>
             </a:r>
-            <a:endParaRPr lang="en-US" sz="800" dirty="0"/>
+            <a:endParaRPr lang="en-US" sz="700" dirty="0"/>
           </a:p>
         </p:txBody>
       </p:sp>
@@ -10281,12 +10253,12 @@
         </p:nvSpPr>
         <p:spPr>
           <a:xfrm>
-            <a:off x="4206240" y="1728216"/>
-            <a:ext cx="3566160" cy="868680"/>
+            <a:off x="4759452" y="1527048"/>
+            <a:ext cx="2670048" cy="777240"/>
           </a:xfrm>
           <a:prstGeom prst="roundRect">
             <a:avLst>
-              <a:gd name="adj" fmla="val 10526"/>
+              <a:gd name="adj" fmla="val 9412"/>
             </a:avLst>
           </a:prstGeom>
           <a:solidFill>
@@ -10308,8 +10280,8 @@
         </p:nvSpPr>
         <p:spPr>
           <a:xfrm>
-            <a:off x="4297680" y="1764792"/>
-            <a:ext cx="3383280" cy="201168"/>
+            <a:off x="4832604" y="1554480"/>
+            <a:ext cx="2523744" cy="182880"/>
           </a:xfrm>
           <a:prstGeom prst="rect">
             <a:avLst/>
@@ -10325,7 +10297,7 @@
               <a:buNone/>
             </a:pPr>
             <a:r>
-              <a:rPr lang="en-US" sz="1000" b="1" dirty="0">
+              <a:rPr lang="en-US" sz="900" b="1" dirty="0">
                 <a:solidFill>
                   <a:srgbClr val="1A1A2E"/>
                 </a:solidFill>
@@ -10333,9 +10305,9 @@
                 <a:ea typeface="Arial" pitchFamily="34" charset="-122"/>
                 <a:cs typeface="Arial" pitchFamily="34" charset="-120"/>
               </a:rPr>
-              <a:t>L5: 工程最佳实践 50min</a:t>
+              <a:t>L5: 工程最佳实践</a:t>
             </a:r>
-            <a:endParaRPr lang="en-US" sz="1000" dirty="0"/>
+            <a:endParaRPr lang="en-US" sz="900" dirty="0"/>
           </a:p>
         </p:txBody>
       </p:sp>
@@ -10347,8 +10319,8 @@
         </p:nvSpPr>
         <p:spPr>
           <a:xfrm>
-            <a:off x="4297680" y="1965960"/>
-            <a:ext cx="3383280" cy="594360"/>
+            <a:off x="4832604" y="1737360"/>
+            <a:ext cx="2523744" cy="539496"/>
           </a:xfrm>
           <a:prstGeom prst="rect">
             <a:avLst/>
@@ -10362,36 +10334,36 @@
           <a:p>
             <a:pPr indent="0" marL="0">
               <a:lnSpc>
-                <a:spcPct val="115000"/>
+                <a:spcPct val="110000"/>
               </a:lnSpc>
               <a:buNone/>
             </a:pPr>
             <a:r>
-              <a:rPr lang="en-US" sz="800" dirty="0">
+              <a:rPr lang="en-US" sz="700" dirty="0">
                 <a:solidFill>
                   <a:srgbClr val="64748B"/>
                 </a:solidFill>
               </a:rPr>
               <a:t>70/30法则 7+3清单</a:t>
             </a:r>
-            <a:endParaRPr lang="en-US" sz="800" dirty="0"/>
+            <a:endParaRPr lang="en-US" sz="700" dirty="0"/>
           </a:p>
           <a:p>
             <a:pPr indent="0" marL="0">
               <a:lnSpc>
-                <a:spcPct val="115000"/>
+                <a:spcPct val="110000"/>
               </a:lnSpc>
               <a:buNone/>
             </a:pPr>
             <a:r>
-              <a:rPr lang="en-US" sz="800" dirty="0">
+              <a:rPr lang="en-US" sz="700" dirty="0">
                 <a:solidFill>
                   <a:srgbClr val="64748B"/>
                 </a:solidFill>
               </a:rPr>
               <a:t>三重门禁 决策矩阵</a:t>
             </a:r>
-            <a:endParaRPr lang="en-US" sz="800" dirty="0"/>
+            <a:endParaRPr lang="en-US" sz="700" dirty="0"/>
           </a:p>
         </p:txBody>
       </p:sp>
@@ -10403,12 +10375,12 @@
         </p:nvSpPr>
         <p:spPr>
           <a:xfrm>
-            <a:off x="7955280" y="1728216"/>
-            <a:ext cx="3566160" cy="868680"/>
+            <a:off x="7539228" y="1527048"/>
+            <a:ext cx="2670048" cy="777240"/>
           </a:xfrm>
           <a:prstGeom prst="roundRect">
             <a:avLst>
-              <a:gd name="adj" fmla="val 10526"/>
+              <a:gd name="adj" fmla="val 9412"/>
             </a:avLst>
           </a:prstGeom>
           <a:solidFill>
@@ -10430,8 +10402,8 @@
         </p:nvSpPr>
         <p:spPr>
           <a:xfrm>
-            <a:off x="8046720" y="1764792"/>
-            <a:ext cx="3383280" cy="201168"/>
+            <a:off x="7612380" y="1554480"/>
+            <a:ext cx="2523744" cy="182880"/>
           </a:xfrm>
           <a:prstGeom prst="rect">
             <a:avLst/>
@@ -10447,7 +10419,7 @@
               <a:buNone/>
             </a:pPr>
             <a:r>
-              <a:rPr lang="en-US" sz="1000" b="1" dirty="0">
+              <a:rPr lang="en-US" sz="900" b="1" dirty="0">
                 <a:solidFill>
                   <a:srgbClr val="1A1A2E"/>
                 </a:solidFill>
@@ -10455,9 +10427,9 @@
                 <a:ea typeface="Arial" pitchFamily="34" charset="-122"/>
                 <a:cs typeface="Arial" pitchFamily="34" charset="-120"/>
               </a:rPr>
-              <a:t>L6: 落地策略 20min</a:t>
+              <a:t>L6: 落地策略</a:t>
             </a:r>
-            <a:endParaRPr lang="en-US" sz="1000" dirty="0"/>
+            <a:endParaRPr lang="en-US" sz="900" dirty="0"/>
           </a:p>
         </p:txBody>
       </p:sp>
@@ -10469,8 +10441,8 @@
         </p:nvSpPr>
         <p:spPr>
           <a:xfrm>
-            <a:off x="8046720" y="1965960"/>
-            <a:ext cx="3383280" cy="594360"/>
+            <a:off x="7612380" y="1737360"/>
+            <a:ext cx="2523744" cy="539496"/>
           </a:xfrm>
           <a:prstGeom prst="rect">
             <a:avLst/>
@@ -10484,36 +10456,36 @@
           <a:p>
             <a:pPr indent="0" marL="0">
               <a:lnSpc>
-                <a:spcPct val="115000"/>
+                <a:spcPct val="110000"/>
               </a:lnSpc>
               <a:buNone/>
             </a:pPr>
             <a:r>
-              <a:rPr lang="en-US" sz="800" dirty="0">
+              <a:rPr lang="en-US" sz="700" dirty="0">
                 <a:solidFill>
                   <a:srgbClr val="64748B"/>
                 </a:solidFill>
               </a:rPr>
               <a:t>8项资产 Token三步法</a:t>
             </a:r>
-            <a:endParaRPr lang="en-US" sz="800" dirty="0"/>
+            <a:endParaRPr lang="en-US" sz="700" dirty="0"/>
           </a:p>
           <a:p>
             <a:pPr indent="0" marL="0">
               <a:lnSpc>
-                <a:spcPct val="115000"/>
+                <a:spcPct val="110000"/>
               </a:lnSpc>
               <a:buNone/>
             </a:pPr>
             <a:r>
-              <a:rPr lang="en-US" sz="800" dirty="0">
+              <a:rPr lang="en-US" sz="700" dirty="0">
                 <a:solidFill>
                   <a:srgbClr val="64748B"/>
                 </a:solidFill>
               </a:rPr>
               <a:t>30天路线 团队推行</a:t>
             </a:r>
-            <a:endParaRPr lang="en-US" sz="800" dirty="0"/>
+            <a:endParaRPr lang="en-US" sz="700" dirty="0"/>
           </a:p>
         </p:txBody>
       </p:sp>
@@ -10525,8 +10497,8 @@
         </p:nvSpPr>
         <p:spPr>
           <a:xfrm>
-            <a:off x="457200" y="2706624"/>
-            <a:ext cx="5440680" cy="182880"/>
+            <a:off x="1979676" y="2395728"/>
+            <a:ext cx="4046220" cy="164592"/>
           </a:xfrm>
           <a:prstGeom prst="rect">
             <a:avLst/>
@@ -10542,14 +10514,14 @@
               <a:buNone/>
             </a:pPr>
             <a:r>
-              <a:rPr lang="en-US" sz="1000" b="1" dirty="0">
+              <a:rPr lang="en-US" sz="900" b="1" dirty="0">
                 <a:solidFill>
                   <a:srgbClr val="1A1A2E"/>
                 </a:solidFill>
               </a:rPr>
               <a:t>核心交付物</a:t>
             </a:r>
-            <a:endParaRPr lang="en-US" sz="1000" dirty="0"/>
+            <a:endParaRPr lang="en-US" sz="900" dirty="0"/>
           </a:p>
         </p:txBody>
       </p:sp>
@@ -10568,19 +10540,19 @@
           </p:nvPr>
         </p:nvGraphicFramePr>
         <p:xfrm>
-          <a:off x="457200" y="2935224"/>
-          <a:ext cx="5440680" cy="914400"/>
+          <a:off x="1979676" y="2596896"/>
+          <a:ext cx="4046220" cy="914400"/>
         </p:xfrm>
         <a:graphic>
           <a:graphicData uri="http://schemas.openxmlformats.org/drawingml/2006/table">
             <a:tbl>
               <a:tblPr/>
               <a:tblGrid>
-                <a:gridCol w="274320"/>
-                <a:gridCol w="2377440"/>
-                <a:gridCol w="1097280"/>
+                <a:gridCol w="228600"/>
+                <a:gridCol w="1920240"/>
+                <a:gridCol w="914400"/>
               </a:tblGrid>
-              <a:tr h="146304">
+              <a:tr h="137160">
                 <a:tc>
                   <a:txBody>
                     <a:bodyPr/>
@@ -10590,7 +10562,7 @@
                         <a:buNone/>
                       </a:pPr>
                       <a:r>
-                        <a:rPr lang="en-US" sz="700" b="1" dirty="0">
+                        <a:rPr lang="en-US" sz="650" b="1" dirty="0">
                           <a:solidFill>
                             <a:srgbClr val="334155"/>
                           </a:solidFill>
@@ -10600,7 +10572,7 @@
                         </a:rPr>
                         <a:t>#</a:t>
                       </a:r>
-                      <a:endParaRPr lang="en-US" sz="700" dirty="0">
+                      <a:endParaRPr lang="en-US" sz="650" dirty="0">
                         <a:latin typeface="Arial" charset="0"/>
                         <a:ea typeface="Arial" charset="0"/>
                         <a:cs typeface="Arial" charset="0"/>
@@ -10658,7 +10630,7 @@
                         <a:buNone/>
                       </a:pPr>
                       <a:r>
-                        <a:rPr lang="en-US" sz="700" b="1" dirty="0">
+                        <a:rPr lang="en-US" sz="650" b="1" dirty="0">
                           <a:solidFill>
                             <a:srgbClr val="334155"/>
                           </a:solidFill>
@@ -10668,7 +10640,7 @@
                         </a:rPr>
                         <a:t>交付物</a:t>
                       </a:r>
-                      <a:endParaRPr lang="en-US" sz="700" dirty="0">
+                      <a:endParaRPr lang="en-US" sz="650" dirty="0">
                         <a:latin typeface="Arial" charset="0"/>
                         <a:ea typeface="Arial" charset="0"/>
                         <a:cs typeface="Arial" charset="0"/>
@@ -10726,7 +10698,7 @@
                         <a:buNone/>
                       </a:pPr>
                       <a:r>
-                        <a:rPr lang="en-US" sz="700" b="1" dirty="0">
+                        <a:rPr lang="en-US" sz="650" b="1" dirty="0">
                           <a:solidFill>
                             <a:srgbClr val="334155"/>
                           </a:solidFill>
@@ -10736,7 +10708,7 @@
                         </a:rPr>
                         <a:t>形式</a:t>
                       </a:r>
-                      <a:endParaRPr lang="en-US" sz="700" dirty="0">
+                      <a:endParaRPr lang="en-US" sz="650" dirty="0">
                         <a:latin typeface="Arial" charset="0"/>
                         <a:ea typeface="Arial" charset="0"/>
                         <a:cs typeface="Arial" charset="0"/>
@@ -10786,7 +10758,7 @@
                   </a:tcPr>
                 </a:tc>
               </a:tr>
-              <a:tr h="146304">
+              <a:tr h="137160">
                 <a:tc>
                   <a:txBody>
                     <a:bodyPr/>
@@ -10796,7 +10768,7 @@
                         <a:buNone/>
                       </a:pPr>
                       <a:r>
-                        <a:rPr lang="en-US" sz="700" dirty="0">
+                        <a:rPr lang="en-US" sz="650" dirty="0">
                           <a:solidFill>
                             <a:srgbClr val="334155"/>
                           </a:solidFill>
@@ -10806,7 +10778,7 @@
                         </a:rPr>
                         <a:t>1</a:t>
                       </a:r>
-                      <a:endParaRPr lang="en-US" sz="700" dirty="0">
+                      <a:endParaRPr lang="en-US" sz="650" dirty="0">
                         <a:latin typeface="Arial" charset="0"/>
                         <a:ea typeface="Arial" charset="0"/>
                         <a:cs typeface="Arial" charset="0"/>
@@ -10861,7 +10833,7 @@
                         <a:buNone/>
                       </a:pPr>
                       <a:r>
-                        <a:rPr lang="en-US" sz="700" dirty="0">
+                        <a:rPr lang="en-US" sz="650" dirty="0">
                           <a:solidFill>
                             <a:srgbClr val="334155"/>
                           </a:solidFill>
@@ -10871,7 +10843,7 @@
                         </a:rPr>
                         <a:t>AI心智模型图</a:t>
                       </a:r>
-                      <a:endParaRPr lang="en-US" sz="700" dirty="0">
+                      <a:endParaRPr lang="en-US" sz="650" dirty="0">
                         <a:latin typeface="Arial" charset="0"/>
                         <a:ea typeface="Arial" charset="0"/>
                         <a:cs typeface="Arial" charset="0"/>
@@ -10926,7 +10898,7 @@
                         <a:buNone/>
                       </a:pPr>
                       <a:r>
-                        <a:rPr lang="en-US" sz="700" dirty="0">
+                        <a:rPr lang="en-US" sz="650" dirty="0">
                           <a:solidFill>
                             <a:srgbClr val="334155"/>
                           </a:solidFill>
@@ -10936,7 +10908,7 @@
                         </a:rPr>
                         <a:t>图解</a:t>
                       </a:r>
-                      <a:endParaRPr lang="en-US" sz="700" dirty="0">
+                      <a:endParaRPr lang="en-US" sz="650" dirty="0">
                         <a:latin typeface="Arial" charset="0"/>
                         <a:ea typeface="Arial" charset="0"/>
                         <a:cs typeface="Arial" charset="0"/>
@@ -10983,7 +10955,7 @@
                   </a:tcPr>
                 </a:tc>
               </a:tr>
-              <a:tr h="146304">
+              <a:tr h="137160">
                 <a:tc>
                   <a:txBody>
                     <a:bodyPr/>
@@ -10993,7 +10965,7 @@
                         <a:buNone/>
                       </a:pPr>
                       <a:r>
-                        <a:rPr lang="en-US" sz="700" dirty="0">
+                        <a:rPr lang="en-US" sz="650" dirty="0">
                           <a:solidFill>
                             <a:srgbClr val="334155"/>
                           </a:solidFill>
@@ -11003,7 +10975,7 @@
                         </a:rPr>
                         <a:t>2</a:t>
                       </a:r>
-                      <a:endParaRPr lang="en-US" sz="700" dirty="0">
+                      <a:endParaRPr lang="en-US" sz="650" dirty="0">
                         <a:latin typeface="Arial" charset="0"/>
                         <a:ea typeface="Arial" charset="0"/>
                         <a:cs typeface="Arial" charset="0"/>
@@ -11058,7 +11030,7 @@
                         <a:buNone/>
                       </a:pPr>
                       <a:r>
-                        <a:rPr lang="en-US" sz="700" dirty="0">
+                        <a:rPr lang="en-US" sz="650" dirty="0">
                           <a:solidFill>
                             <a:srgbClr val="334155"/>
                           </a:solidFill>
@@ -11068,7 +11040,7 @@
                         </a:rPr>
                         <a:t>Skill模板仓库</a:t>
                       </a:r>
-                      <a:endParaRPr lang="en-US" sz="700" dirty="0">
+                      <a:endParaRPr lang="en-US" sz="650" dirty="0">
                         <a:latin typeface="Arial" charset="0"/>
                         <a:ea typeface="Arial" charset="0"/>
                         <a:cs typeface="Arial" charset="0"/>
@@ -11123,7 +11095,7 @@
                         <a:buNone/>
                       </a:pPr>
                       <a:r>
-                        <a:rPr lang="en-US" sz="700" dirty="0">
+                        <a:rPr lang="en-US" sz="650" dirty="0">
                           <a:solidFill>
                             <a:srgbClr val="334155"/>
                           </a:solidFill>
@@ -11133,7 +11105,7 @@
                         </a:rPr>
                         <a:t>MD</a:t>
                       </a:r>
-                      <a:endParaRPr lang="en-US" sz="700" dirty="0">
+                      <a:endParaRPr lang="en-US" sz="650" dirty="0">
                         <a:latin typeface="Arial" charset="0"/>
                         <a:ea typeface="Arial" charset="0"/>
                         <a:cs typeface="Arial" charset="0"/>
@@ -11180,7 +11152,7 @@
                   </a:tcPr>
                 </a:tc>
               </a:tr>
-              <a:tr h="146304">
+              <a:tr h="137160">
                 <a:tc>
                   <a:txBody>
                     <a:bodyPr/>
@@ -11190,7 +11162,7 @@
                         <a:buNone/>
                       </a:pPr>
                       <a:r>
-                        <a:rPr lang="en-US" sz="700" dirty="0">
+                        <a:rPr lang="en-US" sz="650" dirty="0">
                           <a:solidFill>
                             <a:srgbClr val="334155"/>
                           </a:solidFill>
@@ -11200,7 +11172,7 @@
                         </a:rPr>
                         <a:t>3</a:t>
                       </a:r>
-                      <a:endParaRPr lang="en-US" sz="700" dirty="0">
+                      <a:endParaRPr lang="en-US" sz="650" dirty="0">
                         <a:latin typeface="Arial" charset="0"/>
                         <a:ea typeface="Arial" charset="0"/>
                         <a:cs typeface="Arial" charset="0"/>
@@ -11255,7 +11227,7 @@
                         <a:buNone/>
                       </a:pPr>
                       <a:r>
-                        <a:rPr lang="en-US" sz="700" dirty="0">
+                        <a:rPr lang="en-US" sz="650" dirty="0">
                           <a:solidFill>
                             <a:srgbClr val="334155"/>
                           </a:solidFill>
@@ -11265,7 +11237,7 @@
                         </a:rPr>
                         <a:t>AI审查清单(7+3)</a:t>
                       </a:r>
-                      <a:endParaRPr lang="en-US" sz="700" dirty="0">
+                      <a:endParaRPr lang="en-US" sz="650" dirty="0">
                         <a:latin typeface="Arial" charset="0"/>
                         <a:ea typeface="Arial" charset="0"/>
                         <a:cs typeface="Arial" charset="0"/>
@@ -11320,7 +11292,7 @@
                         <a:buNone/>
                       </a:pPr>
                       <a:r>
-                        <a:rPr lang="en-US" sz="700" dirty="0">
+                        <a:rPr lang="en-US" sz="650" dirty="0">
                           <a:solidFill>
                             <a:srgbClr val="334155"/>
                           </a:solidFill>
@@ -11330,7 +11302,7 @@
                         </a:rPr>
                         <a:t>清单</a:t>
                       </a:r>
-                      <a:endParaRPr lang="en-US" sz="700" dirty="0">
+                      <a:endParaRPr lang="en-US" sz="650" dirty="0">
                         <a:latin typeface="Arial" charset="0"/>
                         <a:ea typeface="Arial" charset="0"/>
                         <a:cs typeface="Arial" charset="0"/>
@@ -11377,7 +11349,7 @@
                   </a:tcPr>
                 </a:tc>
               </a:tr>
-              <a:tr h="146304">
+              <a:tr h="137160">
                 <a:tc>
                   <a:txBody>
                     <a:bodyPr/>
@@ -11387,7 +11359,7 @@
                         <a:buNone/>
                       </a:pPr>
                       <a:r>
-                        <a:rPr lang="en-US" sz="700" dirty="0">
+                        <a:rPr lang="en-US" sz="650" dirty="0">
                           <a:solidFill>
                             <a:srgbClr val="334155"/>
                           </a:solidFill>
@@ -11397,7 +11369,7 @@
                         </a:rPr>
                         <a:t>4</a:t>
                       </a:r>
-                      <a:endParaRPr lang="en-US" sz="700" dirty="0">
+                      <a:endParaRPr lang="en-US" sz="650" dirty="0">
                         <a:latin typeface="Arial" charset="0"/>
                         <a:ea typeface="Arial" charset="0"/>
                         <a:cs typeface="Arial" charset="0"/>
@@ -11452,7 +11424,7 @@
                         <a:buNone/>
                       </a:pPr>
                       <a:r>
-                        <a:rPr lang="en-US" sz="700" dirty="0">
+                        <a:rPr lang="en-US" sz="650" dirty="0">
                           <a:solidFill>
                             <a:srgbClr val="334155"/>
                           </a:solidFill>
@@ -11462,7 +11434,7 @@
                         </a:rPr>
                         <a:t>CLAUDE.md模板</a:t>
                       </a:r>
-                      <a:endParaRPr lang="en-US" sz="700" dirty="0">
+                      <a:endParaRPr lang="en-US" sz="650" dirty="0">
                         <a:latin typeface="Arial" charset="0"/>
                         <a:ea typeface="Arial" charset="0"/>
                         <a:cs typeface="Arial" charset="0"/>
@@ -11517,7 +11489,7 @@
                         <a:buNone/>
                       </a:pPr>
                       <a:r>
-                        <a:rPr lang="en-US" sz="700" dirty="0">
+                        <a:rPr lang="en-US" sz="650" dirty="0">
                           <a:solidFill>
                             <a:srgbClr val="334155"/>
                           </a:solidFill>
@@ -11525,9 +11497,9 @@
                           <a:ea typeface="Arial" pitchFamily="34" charset="-122"/>
                           <a:cs typeface="Arial" pitchFamily="34" charset="-120"/>
                         </a:rPr>
-                        <a:t>可定制</a:t>
+                        <a:t>配置</a:t>
                       </a:r>
-                      <a:endParaRPr lang="en-US" sz="700" dirty="0">
+                      <a:endParaRPr lang="en-US" sz="650" dirty="0">
                         <a:latin typeface="Arial" charset="0"/>
                         <a:ea typeface="Arial" charset="0"/>
                         <a:cs typeface="Arial" charset="0"/>
@@ -11574,7 +11546,7 @@
                   </a:tcPr>
                 </a:tc>
               </a:tr>
-              <a:tr h="146304">
+              <a:tr h="137160">
                 <a:tc>
                   <a:txBody>
                     <a:bodyPr/>
@@ -11584,7 +11556,7 @@
                         <a:buNone/>
                       </a:pPr>
                       <a:r>
-                        <a:rPr lang="en-US" sz="700" dirty="0">
+                        <a:rPr lang="en-US" sz="650" dirty="0">
                           <a:solidFill>
                             <a:srgbClr val="334155"/>
                           </a:solidFill>
@@ -11594,7 +11566,7 @@
                         </a:rPr>
                         <a:t>5</a:t>
                       </a:r>
-                      <a:endParaRPr lang="en-US" sz="700" dirty="0">
+                      <a:endParaRPr lang="en-US" sz="650" dirty="0">
                         <a:latin typeface="Arial" charset="0"/>
                         <a:ea typeface="Arial" charset="0"/>
                         <a:cs typeface="Arial" charset="0"/>
@@ -11649,7 +11621,7 @@
                         <a:buNone/>
                       </a:pPr>
                       <a:r>
-                        <a:rPr lang="en-US" sz="700" dirty="0">
+                        <a:rPr lang="en-US" sz="650" dirty="0">
                           <a:solidFill>
                             <a:srgbClr val="334155"/>
                           </a:solidFill>
@@ -11659,7 +11631,7 @@
                         </a:rPr>
                         <a:t>Token速查卡</a:t>
                       </a:r>
-                      <a:endParaRPr lang="en-US" sz="700" dirty="0">
+                      <a:endParaRPr lang="en-US" sz="650" dirty="0">
                         <a:latin typeface="Arial" charset="0"/>
                         <a:ea typeface="Arial" charset="0"/>
                         <a:cs typeface="Arial" charset="0"/>
@@ -11714,7 +11686,7 @@
                         <a:buNone/>
                       </a:pPr>
                       <a:r>
-                        <a:rPr lang="en-US" sz="700" dirty="0">
+                        <a:rPr lang="en-US" sz="650" dirty="0">
                           <a:solidFill>
                             <a:srgbClr val="334155"/>
                           </a:solidFill>
@@ -11724,7 +11696,7 @@
                         </a:rPr>
                         <a:t>A5卡</a:t>
                       </a:r>
-                      <a:endParaRPr lang="en-US" sz="700" dirty="0">
+                      <a:endParaRPr lang="en-US" sz="650" dirty="0">
                         <a:latin typeface="Arial" charset="0"/>
                         <a:ea typeface="Arial" charset="0"/>
                         <a:cs typeface="Arial" charset="0"/>
@@ -11771,7 +11743,7 @@
                   </a:tcPr>
                 </a:tc>
               </a:tr>
-              <a:tr h="146304">
+              <a:tr h="137160">
                 <a:tc>
                   <a:txBody>
                     <a:bodyPr/>
@@ -11781,7 +11753,7 @@
                         <a:buNone/>
                       </a:pPr>
                       <a:r>
-                        <a:rPr lang="en-US" sz="700" dirty="0">
+                        <a:rPr lang="en-US" sz="650" dirty="0">
                           <a:solidFill>
                             <a:srgbClr val="334155"/>
                           </a:solidFill>
@@ -11791,7 +11763,7 @@
                         </a:rPr>
                         <a:t>6</a:t>
                       </a:r>
-                      <a:endParaRPr lang="en-US" sz="700" dirty="0">
+                      <a:endParaRPr lang="en-US" sz="650" dirty="0">
                         <a:latin typeface="Arial" charset="0"/>
                         <a:ea typeface="Arial" charset="0"/>
                         <a:cs typeface="Arial" charset="0"/>
@@ -11846,7 +11818,7 @@
                         <a:buNone/>
                       </a:pPr>
                       <a:r>
-                        <a:rPr lang="en-US" sz="700" dirty="0">
+                        <a:rPr lang="en-US" sz="650" dirty="0">
                           <a:solidFill>
                             <a:srgbClr val="334155"/>
                           </a:solidFill>
@@ -11856,7 +11828,7 @@
                         </a:rPr>
                         <a:t>Prompt模板集</a:t>
                       </a:r>
-                      <a:endParaRPr lang="en-US" sz="700" dirty="0">
+                      <a:endParaRPr lang="en-US" sz="650" dirty="0">
                         <a:latin typeface="Arial" charset="0"/>
                         <a:ea typeface="Arial" charset="0"/>
                         <a:cs typeface="Arial" charset="0"/>
@@ -11911,7 +11883,7 @@
                         <a:buNone/>
                       </a:pPr>
                       <a:r>
-                        <a:rPr lang="en-US" sz="700" dirty="0">
+                        <a:rPr lang="en-US" sz="650" dirty="0">
                           <a:solidFill>
                             <a:srgbClr val="334155"/>
                           </a:solidFill>
@@ -11921,7 +11893,7 @@
                         </a:rPr>
                         <a:t>按场景</a:t>
                       </a:r>
-                      <a:endParaRPr lang="en-US" sz="700" dirty="0">
+                      <a:endParaRPr lang="en-US" sz="650" dirty="0">
                         <a:latin typeface="Arial" charset="0"/>
                         <a:ea typeface="Arial" charset="0"/>
                         <a:cs typeface="Arial" charset="0"/>
@@ -11968,7 +11940,7 @@
                   </a:tcPr>
                 </a:tc>
               </a:tr>
-              <a:tr h="146304">
+              <a:tr h="137160">
                 <a:tc>
                   <a:txBody>
                     <a:bodyPr/>
@@ -11978,7 +11950,7 @@
                         <a:buNone/>
                       </a:pPr>
                       <a:r>
-                        <a:rPr lang="en-US" sz="700" dirty="0">
+                        <a:rPr lang="en-US" sz="650" dirty="0">
                           <a:solidFill>
                             <a:srgbClr val="334155"/>
                           </a:solidFill>
@@ -11988,7 +11960,7 @@
                         </a:rPr>
                         <a:t>7</a:t>
                       </a:r>
-                      <a:endParaRPr lang="en-US" sz="700" dirty="0">
+                      <a:endParaRPr lang="en-US" sz="650" dirty="0">
                         <a:latin typeface="Arial" charset="0"/>
                         <a:ea typeface="Arial" charset="0"/>
                         <a:cs typeface="Arial" charset="0"/>
@@ -12043,7 +12015,7 @@
                         <a:buNone/>
                       </a:pPr>
                       <a:r>
-                        <a:rPr lang="en-US" sz="700" dirty="0">
+                        <a:rPr lang="en-US" sz="650" dirty="0">
                           <a:solidFill>
                             <a:srgbClr val="334155"/>
                           </a:solidFill>
@@ -12053,7 +12025,7 @@
                         </a:rPr>
                         <a:t>AID工作流页</a:t>
                       </a:r>
-                      <a:endParaRPr lang="en-US" sz="700" dirty="0">
+                      <a:endParaRPr lang="en-US" sz="650" dirty="0">
                         <a:latin typeface="Arial" charset="0"/>
                         <a:ea typeface="Arial" charset="0"/>
                         <a:cs typeface="Arial" charset="0"/>
@@ -12108,7 +12080,7 @@
                         <a:buNone/>
                       </a:pPr>
                       <a:r>
-                        <a:rPr lang="en-US" sz="700" dirty="0">
+                        <a:rPr lang="en-US" sz="650" dirty="0">
                           <a:solidFill>
                             <a:srgbClr val="334155"/>
                           </a:solidFill>
@@ -12118,7 +12090,7 @@
                         </a:rPr>
                         <a:t>门控图</a:t>
                       </a:r>
-                      <a:endParaRPr lang="en-US" sz="700" dirty="0">
+                      <a:endParaRPr lang="en-US" sz="650" dirty="0">
                         <a:latin typeface="Arial" charset="0"/>
                         <a:ea typeface="Arial" charset="0"/>
                         <a:cs typeface="Arial" charset="0"/>
@@ -12165,7 +12137,7 @@
                   </a:tcPr>
                 </a:tc>
               </a:tr>
-              <a:tr h="146304">
+              <a:tr h="137160">
                 <a:tc>
                   <a:txBody>
                     <a:bodyPr/>
@@ -12175,7 +12147,7 @@
                         <a:buNone/>
                       </a:pPr>
                       <a:r>
-                        <a:rPr lang="en-US" sz="700" dirty="0">
+                        <a:rPr lang="en-US" sz="650" dirty="0">
                           <a:solidFill>
                             <a:srgbClr val="334155"/>
                           </a:solidFill>
@@ -12185,7 +12157,7 @@
                         </a:rPr>
                         <a:t>8</a:t>
                       </a:r>
-                      <a:endParaRPr lang="en-US" sz="700" dirty="0">
+                      <a:endParaRPr lang="en-US" sz="650" dirty="0">
                         <a:latin typeface="Arial" charset="0"/>
                         <a:ea typeface="Arial" charset="0"/>
                         <a:cs typeface="Arial" charset="0"/>
@@ -12240,7 +12212,7 @@
                         <a:buNone/>
                       </a:pPr>
                       <a:r>
-                        <a:rPr lang="en-US" sz="700" dirty="0">
+                        <a:rPr lang="en-US" sz="650" dirty="0">
                           <a:solidFill>
                             <a:srgbClr val="334155"/>
                           </a:solidFill>
@@ -12250,7 +12222,7 @@
                         </a:rPr>
                         <a:t>30天路线图</a:t>
                       </a:r>
-                      <a:endParaRPr lang="en-US" sz="700" dirty="0">
+                      <a:endParaRPr lang="en-US" sz="650" dirty="0">
                         <a:latin typeface="Arial" charset="0"/>
                         <a:ea typeface="Arial" charset="0"/>
                         <a:cs typeface="Arial" charset="0"/>
@@ -12305,7 +12277,7 @@
                         <a:buNone/>
                       </a:pPr>
                       <a:r>
-                        <a:rPr lang="en-US" sz="700" dirty="0">
+                        <a:rPr lang="en-US" sz="650" dirty="0">
                           <a:solidFill>
                             <a:srgbClr val="334155"/>
                           </a:solidFill>
@@ -12315,7 +12287,7 @@
                         </a:rPr>
                         <a:t>路线</a:t>
                       </a:r>
-                      <a:endParaRPr lang="en-US" sz="700" dirty="0">
+                      <a:endParaRPr lang="en-US" sz="650" dirty="0">
                         <a:latin typeface="Arial" charset="0"/>
                         <a:ea typeface="Arial" charset="0"/>
                         <a:cs typeface="Arial" charset="0"/>
@@ -12374,8 +12346,8 @@
         </p:nvSpPr>
         <p:spPr>
           <a:xfrm>
-            <a:off x="6080760" y="2706624"/>
-            <a:ext cx="5440680" cy="182880"/>
+            <a:off x="6163056" y="2395728"/>
+            <a:ext cx="4046220" cy="164592"/>
           </a:xfrm>
           <a:prstGeom prst="rect">
             <a:avLst/>
@@ -12391,14 +12363,14 @@
               <a:buNone/>
             </a:pPr>
             <a:r>
-              <a:rPr lang="en-US" sz="1000" b="1" dirty="0">
+              <a:rPr lang="en-US" sz="900" b="1" dirty="0">
                 <a:solidFill>
                   <a:srgbClr val="1A1A2E"/>
                 </a:solidFill>
               </a:rPr>
               <a:t>3个 Workshop</a:t>
             </a:r>
-            <a:endParaRPr lang="en-US" sz="1000" dirty="0"/>
+            <a:endParaRPr lang="en-US" sz="900" dirty="0"/>
           </a:p>
         </p:txBody>
       </p:sp>
@@ -12410,12 +12382,12 @@
         </p:nvSpPr>
         <p:spPr>
           <a:xfrm>
-            <a:off x="6080760" y="2935224"/>
-            <a:ext cx="5440680" cy="356616"/>
+            <a:off x="6163056" y="2596896"/>
+            <a:ext cx="4046220" cy="310896"/>
           </a:xfrm>
           <a:prstGeom prst="roundRect">
             <a:avLst>
-              <a:gd name="adj" fmla="val 25641"/>
+              <a:gd name="adj" fmla="val 23529"/>
             </a:avLst>
           </a:prstGeom>
           <a:solidFill>
@@ -12437,8 +12409,8 @@
         </p:nvSpPr>
         <p:spPr>
           <a:xfrm>
-            <a:off x="6172200" y="2971800"/>
-            <a:ext cx="5257800" cy="201168"/>
+            <a:off x="6236208" y="2624328"/>
+            <a:ext cx="3899916" cy="182880"/>
           </a:xfrm>
           <a:prstGeom prst="rect">
             <a:avLst/>
@@ -12454,7 +12426,7 @@
               <a:buNone/>
             </a:pPr>
             <a:r>
-              <a:rPr lang="en-US" sz="1000" b="1" dirty="0">
+              <a:rPr lang="en-US" sz="900" b="1" dirty="0">
                 <a:solidFill>
                   <a:srgbClr val="1A1A2E"/>
                 </a:solidFill>
@@ -12464,7 +12436,7 @@
               </a:rPr>
               <a:t>W1 环境搭建+练手 60min</a:t>
             </a:r>
-            <a:endParaRPr lang="en-US" sz="1000" dirty="0"/>
+            <a:endParaRPr lang="en-US" sz="900" dirty="0"/>
           </a:p>
         </p:txBody>
       </p:sp>
@@ -12476,8 +12448,8 @@
         </p:nvSpPr>
         <p:spPr>
           <a:xfrm>
-            <a:off x="6172200" y="3172968"/>
-            <a:ext cx="5257800" cy="82296"/>
+            <a:off x="6236208" y="2807208"/>
+            <a:ext cx="3899916" cy="73152"/>
           </a:xfrm>
           <a:prstGeom prst="rect">
             <a:avLst/>
@@ -12491,19 +12463,19 @@
           <a:p>
             <a:pPr indent="0" marL="0">
               <a:lnSpc>
-                <a:spcPct val="115000"/>
+                <a:spcPct val="110000"/>
               </a:lnSpc>
               <a:buNone/>
             </a:pPr>
             <a:r>
-              <a:rPr lang="en-US" sz="800" dirty="0">
+              <a:rPr lang="en-US" sz="700" dirty="0">
                 <a:solidFill>
                   <a:srgbClr val="64748B"/>
                 </a:solidFill>
               </a:rPr>
               <a:t>Claude安装 CLAUDE.md+Skill</a:t>
             </a:r>
-            <a:endParaRPr lang="en-US" sz="800" dirty="0"/>
+            <a:endParaRPr lang="en-US" sz="700" dirty="0"/>
           </a:p>
         </p:txBody>
       </p:sp>
@@ -12515,12 +12487,12 @@
         </p:nvSpPr>
         <p:spPr>
           <a:xfrm>
-            <a:off x="6080760" y="3337560"/>
-            <a:ext cx="5440680" cy="356616"/>
+            <a:off x="6163056" y="2944368"/>
+            <a:ext cx="4046220" cy="310896"/>
           </a:xfrm>
           <a:prstGeom prst="roundRect">
             <a:avLst>
-              <a:gd name="adj" fmla="val 25641"/>
+              <a:gd name="adj" fmla="val 23529"/>
             </a:avLst>
           </a:prstGeom>
           <a:solidFill>
@@ -12542,8 +12514,8 @@
         </p:nvSpPr>
         <p:spPr>
           <a:xfrm>
-            <a:off x="6172200" y="3374136"/>
-            <a:ext cx="5257800" cy="201168"/>
+            <a:off x="6236208" y="2971800"/>
+            <a:ext cx="3899916" cy="182880"/>
           </a:xfrm>
           <a:prstGeom prst="rect">
             <a:avLst/>
@@ -12559,7 +12531,7 @@
               <a:buNone/>
             </a:pPr>
             <a:r>
-              <a:rPr lang="en-US" sz="1000" b="1" dirty="0">
+              <a:rPr lang="en-US" sz="900" b="1" dirty="0">
                 <a:solidFill>
                   <a:srgbClr val="1A1A2E"/>
                 </a:solidFill>
@@ -12569,7 +12541,7 @@
               </a:rPr>
               <a:t>W2 增量重构实操 75min</a:t>
             </a:r>
-            <a:endParaRPr lang="en-US" sz="1000" dirty="0"/>
+            <a:endParaRPr lang="en-US" sz="900" dirty="0"/>
           </a:p>
         </p:txBody>
       </p:sp>
@@ -12581,8 +12553,8 @@
         </p:nvSpPr>
         <p:spPr>
           <a:xfrm>
-            <a:off x="6172200" y="3575304"/>
-            <a:ext cx="5257800" cy="82296"/>
+            <a:off x="6236208" y="3154680"/>
+            <a:ext cx="3899916" cy="73152"/>
           </a:xfrm>
           <a:prstGeom prst="rect">
             <a:avLst/>
@@ -12596,19 +12568,19 @@
           <a:p>
             <a:pPr indent="0" marL="0">
               <a:lnSpc>
-                <a:spcPct val="115000"/>
+                <a:spcPct val="110000"/>
               </a:lnSpc>
               <a:buNone/>
             </a:pPr>
             <a:r>
-              <a:rPr lang="en-US" sz="800" dirty="0">
+              <a:rPr lang="en-US" sz="700" dirty="0">
                 <a:solidFill>
                   <a:srgbClr val="64748B"/>
                 </a:solidFill>
               </a:rPr>
               <a:t>A/B/C三组策略 限时增量(在L4后)</a:t>
             </a:r>
-            <a:endParaRPr lang="en-US" sz="800" dirty="0"/>
+            <a:endParaRPr lang="en-US" sz="700" dirty="0"/>
           </a:p>
         </p:txBody>
       </p:sp>
@@ -12620,12 +12592,12 @@
         </p:nvSpPr>
         <p:spPr>
           <a:xfrm>
-            <a:off x="6080760" y="3739896"/>
-            <a:ext cx="5440680" cy="356616"/>
+            <a:off x="6163056" y="3291840"/>
+            <a:ext cx="4046220" cy="310896"/>
           </a:xfrm>
           <a:prstGeom prst="roundRect">
             <a:avLst>
-              <a:gd name="adj" fmla="val 25641"/>
+              <a:gd name="adj" fmla="val 23529"/>
             </a:avLst>
           </a:prstGeom>
           <a:solidFill>
@@ -12647,8 +12619,8 @@
         </p:nvSpPr>
         <p:spPr>
           <a:xfrm>
-            <a:off x="6172200" y="3776472"/>
-            <a:ext cx="5257800" cy="201168"/>
+            <a:off x="6236208" y="3319272"/>
+            <a:ext cx="3899916" cy="182880"/>
           </a:xfrm>
           <a:prstGeom prst="rect">
             <a:avLst/>
@@ -12664,7 +12636,7 @@
               <a:buNone/>
             </a:pPr>
             <a:r>
-              <a:rPr lang="en-US" sz="1000" b="1" dirty="0">
+              <a:rPr lang="en-US" sz="900" b="1" dirty="0">
                 <a:solidFill>
                   <a:srgbClr val="1A1A2E"/>
                 </a:solidFill>
@@ -12674,7 +12646,7 @@
               </a:rPr>
               <a:t>W3 端到端项目 60min</a:t>
             </a:r>
-            <a:endParaRPr lang="en-US" sz="1000" dirty="0"/>
+            <a:endParaRPr lang="en-US" sz="900" dirty="0"/>
           </a:p>
         </p:txBody>
       </p:sp>
@@ -12686,8 +12658,8 @@
         </p:nvSpPr>
         <p:spPr>
           <a:xfrm>
-            <a:off x="6172200" y="3977640"/>
-            <a:ext cx="5257800" cy="82296"/>
+            <a:off x="6236208" y="3502152"/>
+            <a:ext cx="3899916" cy="73152"/>
           </a:xfrm>
           <a:prstGeom prst="rect">
             <a:avLst/>
@@ -12701,19 +12673,19 @@
           <a:p>
             <a:pPr indent="0" marL="0">
               <a:lnSpc>
-                <a:spcPct val="115000"/>
+                <a:spcPct val="110000"/>
               </a:lnSpc>
               <a:buNone/>
             </a:pPr>
             <a:r>
-              <a:rPr lang="en-US" sz="800" dirty="0">
+              <a:rPr lang="en-US" sz="700" dirty="0">
                 <a:solidFill>
                   <a:srgbClr val="64748B"/>
                 </a:solidFill>
               </a:rPr>
               <a:t>三档自选 完整AID流程 同行评审</a:t>
             </a:r>
-            <a:endParaRPr lang="en-US" sz="800" dirty="0"/>
+            <a:endParaRPr lang="en-US" sz="700" dirty="0"/>
           </a:p>
         </p:txBody>
       </p:sp>
@@ -12757,8 +12729,8 @@
         </p:nvSpPr>
         <p:spPr>
           <a:xfrm>
-            <a:off x="457200" y="4892040"/>
-            <a:ext cx="11064240" cy="36576"/>
+            <a:off x="1979676" y="4892040"/>
+            <a:ext cx="8229600" cy="27432"/>
           </a:xfrm>
           <a:prstGeom prst="rect">
             <a:avLst/>
@@ -12777,8 +12749,8 @@
         </p:nvSpPr>
         <p:spPr>
           <a:xfrm>
-            <a:off x="457200" y="4983480"/>
-            <a:ext cx="3657600" cy="182880"/>
+            <a:off x="1979676" y="4983480"/>
+            <a:ext cx="8229600" cy="182880"/>
           </a:xfrm>
           <a:prstGeom prst="rect">
             <a:avLst/>
@@ -12787,10 +12759,10 @@
           <a:ln/>
         </p:spPr>
         <p:txBody>
-          <a:bodyPr wrap="square" rtlCol="0" anchor="ctr"/>
+          <a:bodyPr wrap="square" lIns="0" tIns="0" rIns="0" bIns="0" rtlCol="0" anchor="ctr"/>
           <a:lstStyle/>
           <a:p>
-            <a:pPr indent="0" marL="0">
+            <a:pPr algn="ctr" indent="0" marL="0">
               <a:buNone/>
             </a:pPr>
             <a:r>
@@ -12813,8 +12785,8 @@
         </p:nvSpPr>
         <p:spPr>
           <a:xfrm>
-            <a:off x="457200" y="182880"/>
-            <a:ext cx="11064240" cy="384048"/>
+            <a:off x="1979676" y="137160"/>
+            <a:ext cx="8229600" cy="365760"/>
           </a:xfrm>
           <a:prstGeom prst="rect">
             <a:avLst/>
@@ -12830,7 +12802,7 @@
               <a:buNone/>
             </a:pPr>
             <a:r>
-              <a:rPr lang="en-US" sz="2000" b="1" dirty="0">
+              <a:rPr lang="en-US" sz="1800" b="1" dirty="0">
                 <a:solidFill>
                   <a:srgbClr val="1A1A2E"/>
                 </a:solidFill>
@@ -12840,7 +12812,7 @@
               </a:rPr>
               <a:t>两天节奏 + 关键数字</a:t>
             </a:r>
-            <a:endParaRPr lang="en-US" sz="2000" dirty="0"/>
+            <a:endParaRPr lang="en-US" sz="1800" dirty="0"/>
           </a:p>
         </p:txBody>
       </p:sp>
@@ -12852,8 +12824,8 @@
         </p:nvSpPr>
         <p:spPr>
           <a:xfrm>
-            <a:off x="457200" y="566928"/>
-            <a:ext cx="1097280" cy="27432"/>
+            <a:off x="1979676" y="502920"/>
+            <a:ext cx="914400" cy="27432"/>
           </a:xfrm>
           <a:prstGeom prst="rect">
             <a:avLst/>
@@ -12872,8 +12844,8 @@
         </p:nvSpPr>
         <p:spPr>
           <a:xfrm>
-            <a:off x="457200" y="749808"/>
-            <a:ext cx="5394960" cy="182880"/>
+            <a:off x="1979676" y="658368"/>
+            <a:ext cx="4023360" cy="164592"/>
           </a:xfrm>
           <a:prstGeom prst="rect">
             <a:avLst/>
@@ -12889,14 +12861,14 @@
               <a:buNone/>
             </a:pPr>
             <a:r>
-              <a:rPr lang="en-US" sz="1000" b="1" dirty="0">
+              <a:rPr lang="en-US" sz="900" b="1" dirty="0">
                 <a:solidFill>
                   <a:srgbClr val="1A1A2E"/>
                 </a:solidFill>
               </a:rPr>
               <a:t>Day 1 节奏</a:t>
             </a:r>
-            <a:endParaRPr lang="en-US" sz="1000" dirty="0"/>
+            <a:endParaRPr lang="en-US" sz="900" dirty="0"/>
           </a:p>
         </p:txBody>
       </p:sp>
@@ -12915,19 +12887,19 @@
           </p:nvPr>
         </p:nvGraphicFramePr>
         <p:xfrm>
-          <a:off x="457200" y="987552"/>
-          <a:ext cx="5394960" cy="914400"/>
+          <a:off x="1979676" y="868680"/>
+          <a:ext cx="4023360" cy="914400"/>
         </p:xfrm>
         <a:graphic>
           <a:graphicData uri="http://schemas.openxmlformats.org/drawingml/2006/table">
             <a:tbl>
               <a:tblPr/>
               <a:tblGrid>
-                <a:gridCol w="685800"/>
-                <a:gridCol w="1554480"/>
-                <a:gridCol w="457200"/>
+                <a:gridCol w="548640"/>
+                <a:gridCol w="1188720"/>
+                <a:gridCol w="411480"/>
               </a:tblGrid>
-              <a:tr h="150876">
+              <a:tr h="137160">
                 <a:tc>
                   <a:txBody>
                     <a:bodyPr/>
@@ -12937,7 +12909,7 @@
                         <a:buNone/>
                       </a:pPr>
                       <a:r>
-                        <a:rPr lang="en-US" sz="700" b="1" dirty="0">
+                        <a:rPr lang="en-US" sz="650" b="1" dirty="0">
                           <a:solidFill>
                             <a:srgbClr val="334155"/>
                           </a:solidFill>
@@ -12947,7 +12919,7 @@
                         </a:rPr>
                         <a:t>时间</a:t>
                       </a:r>
-                      <a:endParaRPr lang="en-US" sz="700" dirty="0">
+                      <a:endParaRPr lang="en-US" sz="650" dirty="0">
                         <a:latin typeface="Arial" charset="0"/>
                         <a:ea typeface="Arial" charset="0"/>
                         <a:cs typeface="Arial" charset="0"/>
@@ -13005,7 +12977,7 @@
                         <a:buNone/>
                       </a:pPr>
                       <a:r>
-                        <a:rPr lang="en-US" sz="700" b="1" dirty="0">
+                        <a:rPr lang="en-US" sz="650" b="1" dirty="0">
                           <a:solidFill>
                             <a:srgbClr val="334155"/>
                           </a:solidFill>
@@ -13015,7 +12987,7 @@
                         </a:rPr>
                         <a:t>环节</a:t>
                       </a:r>
-                      <a:endParaRPr lang="en-US" sz="700" dirty="0">
+                      <a:endParaRPr lang="en-US" sz="650" dirty="0">
                         <a:latin typeface="Arial" charset="0"/>
                         <a:ea typeface="Arial" charset="0"/>
                         <a:cs typeface="Arial" charset="0"/>
@@ -13073,7 +13045,7 @@
                         <a:buNone/>
                       </a:pPr>
                       <a:r>
-                        <a:rPr lang="en-US" sz="700" b="1" dirty="0">
+                        <a:rPr lang="en-US" sz="650" b="1" dirty="0">
                           <a:solidFill>
                             <a:srgbClr val="334155"/>
                           </a:solidFill>
@@ -13083,7 +13055,7 @@
                         </a:rPr>
                         <a:t>长</a:t>
                       </a:r>
-                      <a:endParaRPr lang="en-US" sz="700" dirty="0">
+                      <a:endParaRPr lang="en-US" sz="650" dirty="0">
                         <a:latin typeface="Arial" charset="0"/>
                         <a:ea typeface="Arial" charset="0"/>
                         <a:cs typeface="Arial" charset="0"/>
@@ -13133,7 +13105,7 @@
                   </a:tcPr>
                 </a:tc>
               </a:tr>
-              <a:tr h="150876">
+              <a:tr h="137160">
                 <a:tc>
                   <a:txBody>
                     <a:bodyPr/>
@@ -13143,7 +13115,7 @@
                         <a:buNone/>
                       </a:pPr>
                       <a:r>
-                        <a:rPr lang="en-US" sz="700" b="1" dirty="0">
+                        <a:rPr lang="en-US" sz="650" b="1" dirty="0">
                           <a:solidFill>
                             <a:srgbClr val="334155"/>
                           </a:solidFill>
@@ -13153,7 +13125,7 @@
                         </a:rPr>
                         <a:t>09:30</a:t>
                       </a:r>
-                      <a:endParaRPr lang="en-US" sz="700" dirty="0">
+                      <a:endParaRPr lang="en-US" sz="650" dirty="0">
                         <a:latin typeface="Arial" charset="0"/>
                         <a:ea typeface="Arial" charset="0"/>
                         <a:cs typeface="Arial" charset="0"/>
@@ -13208,7 +13180,7 @@
                         <a:buNone/>
                       </a:pPr>
                       <a:r>
-                        <a:rPr lang="en-US" sz="700" dirty="0">
+                        <a:rPr lang="en-US" sz="650" dirty="0">
                           <a:solidFill>
                             <a:srgbClr val="334155"/>
                           </a:solidFill>
@@ -13218,7 +13190,7 @@
                         </a:rPr>
                         <a:t>开场</a:t>
                       </a:r>
-                      <a:endParaRPr lang="en-US" sz="700" dirty="0">
+                      <a:endParaRPr lang="en-US" sz="650" dirty="0">
                         <a:latin typeface="Arial" charset="0"/>
                         <a:ea typeface="Arial" charset="0"/>
                         <a:cs typeface="Arial" charset="0"/>
@@ -13273,7 +13245,7 @@
                         <a:buNone/>
                       </a:pPr>
                       <a:r>
-                        <a:rPr lang="en-US" sz="700" dirty="0">
+                        <a:rPr lang="en-US" sz="650" dirty="0">
                           <a:solidFill>
                             <a:srgbClr val="334155"/>
                           </a:solidFill>
@@ -13283,7 +13255,7 @@
                         </a:rPr>
                         <a:t>-</a:t>
                       </a:r>
-                      <a:endParaRPr lang="en-US" sz="700" dirty="0">
+                      <a:endParaRPr lang="en-US" sz="650" dirty="0">
                         <a:latin typeface="Arial" charset="0"/>
                         <a:ea typeface="Arial" charset="0"/>
                         <a:cs typeface="Arial" charset="0"/>
@@ -13330,7 +13302,7 @@
                   </a:tcPr>
                 </a:tc>
               </a:tr>
-              <a:tr h="150876">
+              <a:tr h="137160">
                 <a:tc>
                   <a:txBody>
                     <a:bodyPr/>
@@ -13340,7 +13312,7 @@
                         <a:buNone/>
                       </a:pPr>
                       <a:r>
-                        <a:rPr lang="en-US" sz="700" b="1" dirty="0">
+                        <a:rPr lang="en-US" sz="650" b="1" dirty="0">
                           <a:solidFill>
                             <a:srgbClr val="334155"/>
                           </a:solidFill>
@@ -13350,7 +13322,7 @@
                         </a:rPr>
                         <a:t>09:45</a:t>
                       </a:r>
-                      <a:endParaRPr lang="en-US" sz="700" dirty="0">
+                      <a:endParaRPr lang="en-US" sz="650" dirty="0">
                         <a:latin typeface="Arial" charset="0"/>
                         <a:ea typeface="Arial" charset="0"/>
                         <a:cs typeface="Arial" charset="0"/>
@@ -13405,7 +13377,7 @@
                         <a:buNone/>
                       </a:pPr>
                       <a:r>
-                        <a:rPr lang="en-US" sz="700" dirty="0">
+                        <a:rPr lang="en-US" sz="650" dirty="0">
                           <a:solidFill>
                             <a:srgbClr val="334155"/>
                           </a:solidFill>
@@ -13415,7 +13387,7 @@
                         </a:rPr>
                         <a:t>L1讲座</a:t>
                       </a:r>
-                      <a:endParaRPr lang="en-US" sz="700" dirty="0">
+                      <a:endParaRPr lang="en-US" sz="650" dirty="0">
                         <a:latin typeface="Arial" charset="0"/>
                         <a:ea typeface="Arial" charset="0"/>
                         <a:cs typeface="Arial" charset="0"/>
@@ -13473,7 +13445,7 @@
                         <a:buNone/>
                       </a:pPr>
                       <a:r>
-                        <a:rPr lang="en-US" sz="700" dirty="0">
+                        <a:rPr lang="en-US" sz="650" dirty="0">
                           <a:solidFill>
                             <a:srgbClr val="334155"/>
                           </a:solidFill>
@@ -13483,7 +13455,7 @@
                         </a:rPr>
                         <a:t>60m</a:t>
                       </a:r>
-                      <a:endParaRPr lang="en-US" sz="700" dirty="0">
+                      <a:endParaRPr lang="en-US" sz="650" dirty="0">
                         <a:latin typeface="Arial" charset="0"/>
                         <a:ea typeface="Arial" charset="0"/>
                         <a:cs typeface="Arial" charset="0"/>
@@ -13530,7 +13502,7 @@
                   </a:tcPr>
                 </a:tc>
               </a:tr>
-              <a:tr h="150876">
+              <a:tr h="137160">
                 <a:tc>
                   <a:txBody>
                     <a:bodyPr/>
@@ -13540,7 +13512,7 @@
                         <a:buNone/>
                       </a:pPr>
                       <a:r>
-                        <a:rPr lang="en-US" sz="700" b="1" dirty="0">
+                        <a:rPr lang="en-US" sz="650" b="1" dirty="0">
                           <a:solidFill>
                             <a:srgbClr val="334155"/>
                           </a:solidFill>
@@ -13550,7 +13522,7 @@
                         </a:rPr>
                         <a:t>10:45</a:t>
                       </a:r>
-                      <a:endParaRPr lang="en-US" sz="700" dirty="0">
+                      <a:endParaRPr lang="en-US" sz="650" dirty="0">
                         <a:latin typeface="Arial" charset="0"/>
                         <a:ea typeface="Arial" charset="0"/>
                         <a:cs typeface="Arial" charset="0"/>
@@ -13605,7 +13577,7 @@
                         <a:buNone/>
                       </a:pPr>
                       <a:r>
-                        <a:rPr lang="en-US" sz="700" dirty="0">
+                        <a:rPr lang="en-US" sz="650" dirty="0">
                           <a:solidFill>
                             <a:srgbClr val="334155"/>
                           </a:solidFill>
@@ -13615,7 +13587,7 @@
                         </a:rPr>
                         <a:t>休息</a:t>
                       </a:r>
-                      <a:endParaRPr lang="en-US" sz="700" dirty="0">
+                      <a:endParaRPr lang="en-US" sz="650" dirty="0">
                         <a:latin typeface="Arial" charset="0"/>
                         <a:ea typeface="Arial" charset="0"/>
                         <a:cs typeface="Arial" charset="0"/>
@@ -13670,7 +13642,7 @@
                         <a:buNone/>
                       </a:pPr>
                       <a:r>
-                        <a:rPr lang="en-US" sz="700" dirty="0">
+                        <a:rPr lang="en-US" sz="650" dirty="0">
                           <a:solidFill>
                             <a:srgbClr val="334155"/>
                           </a:solidFill>
@@ -13680,7 +13652,7 @@
                         </a:rPr>
                         <a:t>-</a:t>
                       </a:r>
-                      <a:endParaRPr lang="en-US" sz="700" dirty="0">
+                      <a:endParaRPr lang="en-US" sz="650" dirty="0">
                         <a:latin typeface="Arial" charset="0"/>
                         <a:ea typeface="Arial" charset="0"/>
                         <a:cs typeface="Arial" charset="0"/>
@@ -13727,7 +13699,7 @@
                   </a:tcPr>
                 </a:tc>
               </a:tr>
-              <a:tr h="150876">
+              <a:tr h="137160">
                 <a:tc>
                   <a:txBody>
                     <a:bodyPr/>
@@ -13737,7 +13709,7 @@
                         <a:buNone/>
                       </a:pPr>
                       <a:r>
-                        <a:rPr lang="en-US" sz="700" b="1" dirty="0">
+                        <a:rPr lang="en-US" sz="650" b="1" dirty="0">
                           <a:solidFill>
                             <a:srgbClr val="334155"/>
                           </a:solidFill>
@@ -13747,7 +13719,7 @@
                         </a:rPr>
                         <a:t>11:00</a:t>
                       </a:r>
-                      <a:endParaRPr lang="en-US" sz="700" dirty="0">
+                      <a:endParaRPr lang="en-US" sz="650" dirty="0">
                         <a:latin typeface="Arial" charset="0"/>
                         <a:ea typeface="Arial" charset="0"/>
                         <a:cs typeface="Arial" charset="0"/>
@@ -13802,7 +13774,7 @@
                         <a:buNone/>
                       </a:pPr>
                       <a:r>
-                        <a:rPr lang="en-US" sz="700" dirty="0">
+                        <a:rPr lang="en-US" sz="650" dirty="0">
                           <a:solidFill>
                             <a:srgbClr val="334155"/>
                           </a:solidFill>
@@ -13812,7 +13784,7 @@
                         </a:rPr>
                         <a:t>L2讲座</a:t>
                       </a:r>
-                      <a:endParaRPr lang="en-US" sz="700" dirty="0">
+                      <a:endParaRPr lang="en-US" sz="650" dirty="0">
                         <a:latin typeface="Arial" charset="0"/>
                         <a:ea typeface="Arial" charset="0"/>
                         <a:cs typeface="Arial" charset="0"/>
@@ -13870,7 +13842,7 @@
                         <a:buNone/>
                       </a:pPr>
                       <a:r>
-                        <a:rPr lang="en-US" sz="700" dirty="0">
+                        <a:rPr lang="en-US" sz="650" dirty="0">
                           <a:solidFill>
                             <a:srgbClr val="334155"/>
                           </a:solidFill>
@@ -13880,7 +13852,7 @@
                         </a:rPr>
                         <a:t>60m</a:t>
                       </a:r>
-                      <a:endParaRPr lang="en-US" sz="700" dirty="0">
+                      <a:endParaRPr lang="en-US" sz="650" dirty="0">
                         <a:latin typeface="Arial" charset="0"/>
                         <a:ea typeface="Arial" charset="0"/>
                         <a:cs typeface="Arial" charset="0"/>
@@ -13927,7 +13899,7 @@
                   </a:tcPr>
                 </a:tc>
               </a:tr>
-              <a:tr h="150876">
+              <a:tr h="137160">
                 <a:tc>
                   <a:txBody>
                     <a:bodyPr/>
@@ -13937,7 +13909,7 @@
                         <a:buNone/>
                       </a:pPr>
                       <a:r>
-                        <a:rPr lang="en-US" sz="700" b="1" dirty="0">
+                        <a:rPr lang="en-US" sz="650" b="1" dirty="0">
                           <a:solidFill>
                             <a:srgbClr val="334155"/>
                           </a:solidFill>
@@ -13947,7 +13919,7 @@
                         </a:rPr>
                         <a:t>12:00</a:t>
                       </a:r>
-                      <a:endParaRPr lang="en-US" sz="700" dirty="0">
+                      <a:endParaRPr lang="en-US" sz="650" dirty="0">
                         <a:latin typeface="Arial" charset="0"/>
                         <a:ea typeface="Arial" charset="0"/>
                         <a:cs typeface="Arial" charset="0"/>
@@ -14002,7 +13974,7 @@
                         <a:buNone/>
                       </a:pPr>
                       <a:r>
-                        <a:rPr lang="en-US" sz="700" dirty="0">
+                        <a:rPr lang="en-US" sz="650" dirty="0">
                           <a:solidFill>
                             <a:srgbClr val="334155"/>
                           </a:solidFill>
@@ -14012,7 +13984,7 @@
                         </a:rPr>
                         <a:t>午餐</a:t>
                       </a:r>
-                      <a:endParaRPr lang="en-US" sz="700" dirty="0">
+                      <a:endParaRPr lang="en-US" sz="650" dirty="0">
                         <a:latin typeface="Arial" charset="0"/>
                         <a:ea typeface="Arial" charset="0"/>
                         <a:cs typeface="Arial" charset="0"/>
@@ -14067,7 +14039,7 @@
                         <a:buNone/>
                       </a:pPr>
                       <a:r>
-                        <a:rPr lang="en-US" sz="700" dirty="0">
+                        <a:rPr lang="en-US" sz="650" dirty="0">
                           <a:solidFill>
                             <a:srgbClr val="334155"/>
                           </a:solidFill>
@@ -14077,7 +14049,7 @@
                         </a:rPr>
                         <a:t>-</a:t>
                       </a:r>
-                      <a:endParaRPr lang="en-US" sz="700" dirty="0">
+                      <a:endParaRPr lang="en-US" sz="650" dirty="0">
                         <a:latin typeface="Arial" charset="0"/>
                         <a:ea typeface="Arial" charset="0"/>
                         <a:cs typeface="Arial" charset="0"/>
@@ -14124,7 +14096,7 @@
                   </a:tcPr>
                 </a:tc>
               </a:tr>
-              <a:tr h="150876">
+              <a:tr h="137160">
                 <a:tc>
                   <a:txBody>
                     <a:bodyPr/>
@@ -14134,7 +14106,7 @@
                         <a:buNone/>
                       </a:pPr>
                       <a:r>
-                        <a:rPr lang="en-US" sz="700" b="1" dirty="0">
+                        <a:rPr lang="en-US" sz="650" b="1" dirty="0">
                           <a:solidFill>
                             <a:srgbClr val="334155"/>
                           </a:solidFill>
@@ -14144,7 +14116,7 @@
                         </a:rPr>
                         <a:t>14:30</a:t>
                       </a:r>
-                      <a:endParaRPr lang="en-US" sz="700" dirty="0">
+                      <a:endParaRPr lang="en-US" sz="650" dirty="0">
                         <a:latin typeface="Arial" charset="0"/>
                         <a:ea typeface="Arial" charset="0"/>
                         <a:cs typeface="Arial" charset="0"/>
@@ -14199,7 +14171,7 @@
                         <a:buNone/>
                       </a:pPr>
                       <a:r>
-                        <a:rPr lang="en-US" sz="700" dirty="0">
+                        <a:rPr lang="en-US" sz="650" dirty="0">
                           <a:solidFill>
                             <a:srgbClr val="334155"/>
                           </a:solidFill>
@@ -14209,7 +14181,7 @@
                         </a:rPr>
                         <a:t>演示</a:t>
                       </a:r>
-                      <a:endParaRPr lang="en-US" sz="700" dirty="0">
+                      <a:endParaRPr lang="en-US" sz="650" dirty="0">
                         <a:latin typeface="Arial" charset="0"/>
                         <a:ea typeface="Arial" charset="0"/>
                         <a:cs typeface="Arial" charset="0"/>
@@ -14267,7 +14239,7 @@
                         <a:buNone/>
                       </a:pPr>
                       <a:r>
-                        <a:rPr lang="en-US" sz="700" dirty="0">
+                        <a:rPr lang="en-US" sz="650" dirty="0">
                           <a:solidFill>
                             <a:srgbClr val="334155"/>
                           </a:solidFill>
@@ -14277,7 +14249,7 @@
                         </a:rPr>
                         <a:t>45m</a:t>
                       </a:r>
-                      <a:endParaRPr lang="en-US" sz="700" dirty="0">
+                      <a:endParaRPr lang="en-US" sz="650" dirty="0">
                         <a:latin typeface="Arial" charset="0"/>
                         <a:ea typeface="Arial" charset="0"/>
                         <a:cs typeface="Arial" charset="0"/>
@@ -14324,7 +14296,7 @@
                   </a:tcPr>
                 </a:tc>
               </a:tr>
-              <a:tr h="150876">
+              <a:tr h="137160">
                 <a:tc>
                   <a:txBody>
                     <a:bodyPr/>
@@ -14334,7 +14306,7 @@
                         <a:buNone/>
                       </a:pPr>
                       <a:r>
-                        <a:rPr lang="en-US" sz="700" b="1" dirty="0">
+                        <a:rPr lang="en-US" sz="650" b="1" dirty="0">
                           <a:solidFill>
                             <a:srgbClr val="334155"/>
                           </a:solidFill>
@@ -14344,7 +14316,7 @@
                         </a:rPr>
                         <a:t>15:15</a:t>
                       </a:r>
-                      <a:endParaRPr lang="en-US" sz="700" dirty="0">
+                      <a:endParaRPr lang="en-US" sz="650" dirty="0">
                         <a:latin typeface="Arial" charset="0"/>
                         <a:ea typeface="Arial" charset="0"/>
                         <a:cs typeface="Arial" charset="0"/>
@@ -14399,7 +14371,7 @@
                         <a:buNone/>
                       </a:pPr>
                       <a:r>
-                        <a:rPr lang="en-US" sz="700" dirty="0">
+                        <a:rPr lang="en-US" sz="650" dirty="0">
                           <a:solidFill>
                             <a:srgbClr val="334155"/>
                           </a:solidFill>
@@ -14409,7 +14381,7 @@
                         </a:rPr>
                         <a:t>休息</a:t>
                       </a:r>
-                      <a:endParaRPr lang="en-US" sz="700" dirty="0">
+                      <a:endParaRPr lang="en-US" sz="650" dirty="0">
                         <a:latin typeface="Arial" charset="0"/>
                         <a:ea typeface="Arial" charset="0"/>
                         <a:cs typeface="Arial" charset="0"/>
@@ -14464,7 +14436,7 @@
                         <a:buNone/>
                       </a:pPr>
                       <a:r>
-                        <a:rPr lang="en-US" sz="700" dirty="0">
+                        <a:rPr lang="en-US" sz="650" dirty="0">
                           <a:solidFill>
                             <a:srgbClr val="334155"/>
                           </a:solidFill>
@@ -14474,7 +14446,7 @@
                         </a:rPr>
                         <a:t>-</a:t>
                       </a:r>
-                      <a:endParaRPr lang="en-US" sz="700" dirty="0">
+                      <a:endParaRPr lang="en-US" sz="650" dirty="0">
                         <a:latin typeface="Arial" charset="0"/>
                         <a:ea typeface="Arial" charset="0"/>
                         <a:cs typeface="Arial" charset="0"/>
@@ -14521,7 +14493,7 @@
                   </a:tcPr>
                 </a:tc>
               </a:tr>
-              <a:tr h="150876">
+              <a:tr h="137160">
                 <a:tc>
                   <a:txBody>
                     <a:bodyPr/>
@@ -14531,7 +14503,7 @@
                         <a:buNone/>
                       </a:pPr>
                       <a:r>
-                        <a:rPr lang="en-US" sz="700" b="1" dirty="0">
+                        <a:rPr lang="en-US" sz="650" b="1" dirty="0">
                           <a:solidFill>
                             <a:srgbClr val="334155"/>
                           </a:solidFill>
@@ -14541,7 +14513,7 @@
                         </a:rPr>
                         <a:t>15:30</a:t>
                       </a:r>
-                      <a:endParaRPr lang="en-US" sz="700" dirty="0">
+                      <a:endParaRPr lang="en-US" sz="650" dirty="0">
                         <a:latin typeface="Arial" charset="0"/>
                         <a:ea typeface="Arial" charset="0"/>
                         <a:cs typeface="Arial" charset="0"/>
@@ -14596,7 +14568,7 @@
                         <a:buNone/>
                       </a:pPr>
                       <a:r>
-                        <a:rPr lang="en-US" sz="700" dirty="0">
+                        <a:rPr lang="en-US" sz="650" dirty="0">
                           <a:solidFill>
                             <a:srgbClr val="334155"/>
                           </a:solidFill>
@@ -14606,7 +14578,7 @@
                         </a:rPr>
                         <a:t>W1练手</a:t>
                       </a:r>
-                      <a:endParaRPr lang="en-US" sz="700" dirty="0">
+                      <a:endParaRPr lang="en-US" sz="650" dirty="0">
                         <a:latin typeface="Arial" charset="0"/>
                         <a:ea typeface="Arial" charset="0"/>
                         <a:cs typeface="Arial" charset="0"/>
@@ -14664,7 +14636,7 @@
                         <a:buNone/>
                       </a:pPr>
                       <a:r>
-                        <a:rPr lang="en-US" sz="700" dirty="0">
+                        <a:rPr lang="en-US" sz="650" dirty="0">
                           <a:solidFill>
                             <a:srgbClr val="334155"/>
                           </a:solidFill>
@@ -14674,7 +14646,7 @@
                         </a:rPr>
                         <a:t>60m</a:t>
                       </a:r>
-                      <a:endParaRPr lang="en-US" sz="700" dirty="0">
+                      <a:endParaRPr lang="en-US" sz="650" dirty="0">
                         <a:latin typeface="Arial" charset="0"/>
                         <a:ea typeface="Arial" charset="0"/>
                         <a:cs typeface="Arial" charset="0"/>
@@ -14721,7 +14693,7 @@
                   </a:tcPr>
                 </a:tc>
               </a:tr>
-              <a:tr h="150876">
+              <a:tr h="137160">
                 <a:tc>
                   <a:txBody>
                     <a:bodyPr/>
@@ -14731,7 +14703,7 @@
                         <a:buNone/>
                       </a:pPr>
                       <a:r>
-                        <a:rPr lang="en-US" sz="700" b="1" dirty="0">
+                        <a:rPr lang="en-US" sz="650" b="1" dirty="0">
                           <a:solidFill>
                             <a:srgbClr val="334155"/>
                           </a:solidFill>
@@ -14741,7 +14713,7 @@
                         </a:rPr>
                         <a:t>16:30</a:t>
                       </a:r>
-                      <a:endParaRPr lang="en-US" sz="700" dirty="0">
+                      <a:endParaRPr lang="en-US" sz="650" dirty="0">
                         <a:latin typeface="Arial" charset="0"/>
                         <a:ea typeface="Arial" charset="0"/>
                         <a:cs typeface="Arial" charset="0"/>
@@ -14796,7 +14768,7 @@
                         <a:buNone/>
                       </a:pPr>
                       <a:r>
-                        <a:rPr lang="en-US" sz="700" dirty="0">
+                        <a:rPr lang="en-US" sz="650" dirty="0">
                           <a:solidFill>
                             <a:srgbClr val="334155"/>
                           </a:solidFill>
@@ -14806,7 +14778,7 @@
                         </a:rPr>
                         <a:t>休息</a:t>
                       </a:r>
-                      <a:endParaRPr lang="en-US" sz="700" dirty="0">
+                      <a:endParaRPr lang="en-US" sz="650" dirty="0">
                         <a:latin typeface="Arial" charset="0"/>
                         <a:ea typeface="Arial" charset="0"/>
                         <a:cs typeface="Arial" charset="0"/>
@@ -14861,7 +14833,7 @@
                         <a:buNone/>
                       </a:pPr>
                       <a:r>
-                        <a:rPr lang="en-US" sz="700" dirty="0">
+                        <a:rPr lang="en-US" sz="650" dirty="0">
                           <a:solidFill>
                             <a:srgbClr val="334155"/>
                           </a:solidFill>
@@ -14871,7 +14843,7 @@
                         </a:rPr>
                         <a:t>-</a:t>
                       </a:r>
-                      <a:endParaRPr lang="en-US" sz="700" dirty="0">
+                      <a:endParaRPr lang="en-US" sz="650" dirty="0">
                         <a:latin typeface="Arial" charset="0"/>
                         <a:ea typeface="Arial" charset="0"/>
                         <a:cs typeface="Arial" charset="0"/>
@@ -14918,7 +14890,7 @@
                   </a:tcPr>
                 </a:tc>
               </a:tr>
-              <a:tr h="150876">
+              <a:tr h="137160">
                 <a:tc>
                   <a:txBody>
                     <a:bodyPr/>
@@ -14928,7 +14900,7 @@
                         <a:buNone/>
                       </a:pPr>
                       <a:r>
-                        <a:rPr lang="en-US" sz="700" b="1" dirty="0">
+                        <a:rPr lang="en-US" sz="650" b="1" dirty="0">
                           <a:solidFill>
                             <a:srgbClr val="334155"/>
                           </a:solidFill>
@@ -14938,7 +14910,7 @@
                         </a:rPr>
                         <a:t>16:40</a:t>
                       </a:r>
-                      <a:endParaRPr lang="en-US" sz="700" dirty="0">
+                      <a:endParaRPr lang="en-US" sz="650" dirty="0">
                         <a:latin typeface="Arial" charset="0"/>
                         <a:ea typeface="Arial" charset="0"/>
                         <a:cs typeface="Arial" charset="0"/>
@@ -14993,7 +14965,7 @@
                         <a:buNone/>
                       </a:pPr>
                       <a:r>
-                        <a:rPr lang="en-US" sz="700" dirty="0">
+                        <a:rPr lang="en-US" sz="650" dirty="0">
                           <a:solidFill>
                             <a:srgbClr val="334155"/>
                           </a:solidFill>
@@ -15003,7 +14975,7 @@
                         </a:rPr>
                         <a:t>L3 Live</a:t>
                       </a:r>
-                      <a:endParaRPr lang="en-US" sz="700" dirty="0">
+                      <a:endParaRPr lang="en-US" sz="650" dirty="0">
                         <a:latin typeface="Arial" charset="0"/>
                         <a:ea typeface="Arial" charset="0"/>
                         <a:cs typeface="Arial" charset="0"/>
@@ -15061,7 +15033,7 @@
                         <a:buNone/>
                       </a:pPr>
                       <a:r>
-                        <a:rPr lang="en-US" sz="700" dirty="0">
+                        <a:rPr lang="en-US" sz="650" dirty="0">
                           <a:solidFill>
                             <a:srgbClr val="334155"/>
                           </a:solidFill>
@@ -15071,7 +15043,7 @@
                         </a:rPr>
                         <a:t>60m</a:t>
                       </a:r>
-                      <a:endParaRPr lang="en-US" sz="700" dirty="0">
+                      <a:endParaRPr lang="en-US" sz="650" dirty="0">
                         <a:latin typeface="Arial" charset="0"/>
                         <a:ea typeface="Arial" charset="0"/>
                         <a:cs typeface="Arial" charset="0"/>
@@ -15118,7 +15090,7 @@
                   </a:tcPr>
                 </a:tc>
               </a:tr>
-              <a:tr h="150876">
+              <a:tr h="137160">
                 <a:tc>
                   <a:txBody>
                     <a:bodyPr/>
@@ -15128,7 +15100,7 @@
                         <a:buNone/>
                       </a:pPr>
                       <a:r>
-                        <a:rPr lang="en-US" sz="700" b="1" dirty="0">
+                        <a:rPr lang="en-US" sz="650" b="1" dirty="0">
                           <a:solidFill>
                             <a:srgbClr val="334155"/>
                           </a:solidFill>
@@ -15138,7 +15110,7 @@
                         </a:rPr>
                         <a:t>17:40</a:t>
                       </a:r>
-                      <a:endParaRPr lang="en-US" sz="700" dirty="0">
+                      <a:endParaRPr lang="en-US" sz="650" dirty="0">
                         <a:latin typeface="Arial" charset="0"/>
                         <a:ea typeface="Arial" charset="0"/>
                         <a:cs typeface="Arial" charset="0"/>
@@ -15193,7 +15165,7 @@
                         <a:buNone/>
                       </a:pPr>
                       <a:r>
-                        <a:rPr lang="en-US" sz="700" dirty="0">
+                        <a:rPr lang="en-US" sz="650" dirty="0">
                           <a:solidFill>
                             <a:srgbClr val="334155"/>
                           </a:solidFill>
@@ -15203,7 +15175,7 @@
                         </a:rPr>
                         <a:t>回顾</a:t>
                       </a:r>
-                      <a:endParaRPr lang="en-US" sz="700" dirty="0">
+                      <a:endParaRPr lang="en-US" sz="650" dirty="0">
                         <a:latin typeface="Arial" charset="0"/>
                         <a:ea typeface="Arial" charset="0"/>
                         <a:cs typeface="Arial" charset="0"/>
@@ -15261,7 +15233,7 @@
                         <a:buNone/>
                       </a:pPr>
                       <a:r>
-                        <a:rPr lang="en-US" sz="700" dirty="0">
+                        <a:rPr lang="en-US" sz="650" dirty="0">
                           <a:solidFill>
                             <a:srgbClr val="334155"/>
                           </a:solidFill>
@@ -15271,7 +15243,7 @@
                         </a:rPr>
                         <a:t>20m</a:t>
                       </a:r>
-                      <a:endParaRPr lang="en-US" sz="700" dirty="0">
+                      <a:endParaRPr lang="en-US" sz="650" dirty="0">
                         <a:latin typeface="Arial" charset="0"/>
                         <a:ea typeface="Arial" charset="0"/>
                         <a:cs typeface="Arial" charset="0"/>
@@ -15330,8 +15302,8 @@
         </p:nvSpPr>
         <p:spPr>
           <a:xfrm>
-            <a:off x="6126480" y="749808"/>
-            <a:ext cx="5394960" cy="182880"/>
+            <a:off x="6185916" y="658368"/>
+            <a:ext cx="4023360" cy="164592"/>
           </a:xfrm>
           <a:prstGeom prst="rect">
             <a:avLst/>
@@ -15347,14 +15319,14 @@
               <a:buNone/>
             </a:pPr>
             <a:r>
-              <a:rPr lang="en-US" sz="1000" b="1" dirty="0">
+              <a:rPr lang="en-US" sz="900" b="1" dirty="0">
                 <a:solidFill>
                   <a:srgbClr val="1A1A2E"/>
                 </a:solidFill>
               </a:rPr>
               <a:t>Day 2 节奏</a:t>
             </a:r>
-            <a:endParaRPr lang="en-US" sz="1000" dirty="0"/>
+            <a:endParaRPr lang="en-US" sz="900" dirty="0"/>
           </a:p>
         </p:txBody>
       </p:sp>
@@ -15373,19 +15345,19 @@
           </p:nvPr>
         </p:nvGraphicFramePr>
         <p:xfrm>
-          <a:off x="6126480" y="987552"/>
-          <a:ext cx="5394960" cy="914400"/>
+          <a:off x="6185916" y="868680"/>
+          <a:ext cx="4023360" cy="914400"/>
         </p:xfrm>
         <a:graphic>
           <a:graphicData uri="http://schemas.openxmlformats.org/drawingml/2006/table">
             <a:tbl>
               <a:tblPr/>
               <a:tblGrid>
-                <a:gridCol w="685800"/>
-                <a:gridCol w="1554480"/>
-                <a:gridCol w="457200"/>
+                <a:gridCol w="548640"/>
+                <a:gridCol w="1188720"/>
+                <a:gridCol w="411480"/>
               </a:tblGrid>
-              <a:tr h="164592">
+              <a:tr h="150876">
                 <a:tc>
                   <a:txBody>
                     <a:bodyPr/>
@@ -15395,7 +15367,7 @@
                         <a:buNone/>
                       </a:pPr>
                       <a:r>
-                        <a:rPr lang="en-US" sz="700" b="1" dirty="0">
+                        <a:rPr lang="en-US" sz="650" b="1" dirty="0">
                           <a:solidFill>
                             <a:srgbClr val="334155"/>
                           </a:solidFill>
@@ -15405,7 +15377,7 @@
                         </a:rPr>
                         <a:t>时间</a:t>
                       </a:r>
-                      <a:endParaRPr lang="en-US" sz="700" dirty="0">
+                      <a:endParaRPr lang="en-US" sz="650" dirty="0">
                         <a:latin typeface="Arial" charset="0"/>
                         <a:ea typeface="Arial" charset="0"/>
                         <a:cs typeface="Arial" charset="0"/>
@@ -15463,7 +15435,7 @@
                         <a:buNone/>
                       </a:pPr>
                       <a:r>
-                        <a:rPr lang="en-US" sz="700" b="1" dirty="0">
+                        <a:rPr lang="en-US" sz="650" b="1" dirty="0">
                           <a:solidFill>
                             <a:srgbClr val="334155"/>
                           </a:solidFill>
@@ -15473,7 +15445,7 @@
                         </a:rPr>
                         <a:t>环节</a:t>
                       </a:r>
-                      <a:endParaRPr lang="en-US" sz="700" dirty="0">
+                      <a:endParaRPr lang="en-US" sz="650" dirty="0">
                         <a:latin typeface="Arial" charset="0"/>
                         <a:ea typeface="Arial" charset="0"/>
                         <a:cs typeface="Arial" charset="0"/>
@@ -15531,7 +15503,7 @@
                         <a:buNone/>
                       </a:pPr>
                       <a:r>
-                        <a:rPr lang="en-US" sz="700" b="1" dirty="0">
+                        <a:rPr lang="en-US" sz="650" b="1" dirty="0">
                           <a:solidFill>
                             <a:srgbClr val="334155"/>
                           </a:solidFill>
@@ -15541,7 +15513,7 @@
                         </a:rPr>
                         <a:t>长</a:t>
                       </a:r>
-                      <a:endParaRPr lang="en-US" sz="700" dirty="0">
+                      <a:endParaRPr lang="en-US" sz="650" dirty="0">
                         <a:latin typeface="Arial" charset="0"/>
                         <a:ea typeface="Arial" charset="0"/>
                         <a:cs typeface="Arial" charset="0"/>
@@ -15591,7 +15563,7 @@
                   </a:tcPr>
                 </a:tc>
               </a:tr>
-              <a:tr h="164592">
+              <a:tr h="150876">
                 <a:tc>
                   <a:txBody>
                     <a:bodyPr/>
@@ -15601,7 +15573,7 @@
                         <a:buNone/>
                       </a:pPr>
                       <a:r>
-                        <a:rPr lang="en-US" sz="700" b="1" dirty="0">
+                        <a:rPr lang="en-US" sz="650" b="1" dirty="0">
                           <a:solidFill>
                             <a:srgbClr val="334155"/>
                           </a:solidFill>
@@ -15611,7 +15583,7 @@
                         </a:rPr>
                         <a:t>09:30</a:t>
                       </a:r>
-                      <a:endParaRPr lang="en-US" sz="700" dirty="0">
+                      <a:endParaRPr lang="en-US" sz="650" dirty="0">
                         <a:latin typeface="Arial" charset="0"/>
                         <a:ea typeface="Arial" charset="0"/>
                         <a:cs typeface="Arial" charset="0"/>
@@ -15666,7 +15638,7 @@
                         <a:buNone/>
                       </a:pPr>
                       <a:r>
-                        <a:rPr lang="en-US" sz="700" dirty="0">
+                        <a:rPr lang="en-US" sz="650" dirty="0">
                           <a:solidFill>
                             <a:srgbClr val="334155"/>
                           </a:solidFill>
@@ -15676,7 +15648,7 @@
                         </a:rPr>
                         <a:t>L4讲座</a:t>
                       </a:r>
-                      <a:endParaRPr lang="en-US" sz="700" dirty="0">
+                      <a:endParaRPr lang="en-US" sz="650" dirty="0">
                         <a:latin typeface="Arial" charset="0"/>
                         <a:ea typeface="Arial" charset="0"/>
                         <a:cs typeface="Arial" charset="0"/>
@@ -15734,7 +15706,7 @@
                         <a:buNone/>
                       </a:pPr>
                       <a:r>
-                        <a:rPr lang="en-US" sz="700" dirty="0">
+                        <a:rPr lang="en-US" sz="650" dirty="0">
                           <a:solidFill>
                             <a:srgbClr val="334155"/>
                           </a:solidFill>
@@ -15744,7 +15716,7 @@
                         </a:rPr>
                         <a:t>75m</a:t>
                       </a:r>
-                      <a:endParaRPr lang="en-US" sz="700" dirty="0">
+                      <a:endParaRPr lang="en-US" sz="650" dirty="0">
                         <a:latin typeface="Arial" charset="0"/>
                         <a:ea typeface="Arial" charset="0"/>
                         <a:cs typeface="Arial" charset="0"/>
@@ -15791,7 +15763,7 @@
                   </a:tcPr>
                 </a:tc>
               </a:tr>
-              <a:tr h="164592">
+              <a:tr h="150876">
                 <a:tc>
                   <a:txBody>
                     <a:bodyPr/>
@@ -15801,7 +15773,7 @@
                         <a:buNone/>
                       </a:pPr>
                       <a:r>
-                        <a:rPr lang="en-US" sz="700" b="1" dirty="0">
+                        <a:rPr lang="en-US" sz="650" b="1" dirty="0">
                           <a:solidFill>
                             <a:srgbClr val="334155"/>
                           </a:solidFill>
@@ -15811,7 +15783,7 @@
                         </a:rPr>
                         <a:t>10:45</a:t>
                       </a:r>
-                      <a:endParaRPr lang="en-US" sz="700" dirty="0">
+                      <a:endParaRPr lang="en-US" sz="650" dirty="0">
                         <a:latin typeface="Arial" charset="0"/>
                         <a:ea typeface="Arial" charset="0"/>
                         <a:cs typeface="Arial" charset="0"/>
@@ -15866,7 +15838,7 @@
                         <a:buNone/>
                       </a:pPr>
                       <a:r>
-                        <a:rPr lang="en-US" sz="700" dirty="0">
+                        <a:rPr lang="en-US" sz="650" dirty="0">
                           <a:solidFill>
                             <a:srgbClr val="334155"/>
                           </a:solidFill>
@@ -15876,7 +15848,7 @@
                         </a:rPr>
                         <a:t>休息</a:t>
                       </a:r>
-                      <a:endParaRPr lang="en-US" sz="700" dirty="0">
+                      <a:endParaRPr lang="en-US" sz="650" dirty="0">
                         <a:latin typeface="Arial" charset="0"/>
                         <a:ea typeface="Arial" charset="0"/>
                         <a:cs typeface="Arial" charset="0"/>
@@ -15931,7 +15903,7 @@
                         <a:buNone/>
                       </a:pPr>
                       <a:r>
-                        <a:rPr lang="en-US" sz="700" dirty="0">
+                        <a:rPr lang="en-US" sz="650" dirty="0">
                           <a:solidFill>
                             <a:srgbClr val="334155"/>
                           </a:solidFill>
@@ -15941,7 +15913,7 @@
                         </a:rPr>
                         <a:t>-</a:t>
                       </a:r>
-                      <a:endParaRPr lang="en-US" sz="700" dirty="0">
+                      <a:endParaRPr lang="en-US" sz="650" dirty="0">
                         <a:latin typeface="Arial" charset="0"/>
                         <a:ea typeface="Arial" charset="0"/>
                         <a:cs typeface="Arial" charset="0"/>
@@ -15988,7 +15960,7 @@
                   </a:tcPr>
                 </a:tc>
               </a:tr>
-              <a:tr h="164592">
+              <a:tr h="150876">
                 <a:tc>
                   <a:txBody>
                     <a:bodyPr/>
@@ -15998,7 +15970,7 @@
                         <a:buNone/>
                       </a:pPr>
                       <a:r>
-                        <a:rPr lang="en-US" sz="700" b="1" dirty="0">
+                        <a:rPr lang="en-US" sz="650" b="1" dirty="0">
                           <a:solidFill>
                             <a:srgbClr val="334155"/>
                           </a:solidFill>
@@ -16008,7 +15980,7 @@
                         </a:rPr>
                         <a:t>11:00</a:t>
                       </a:r>
-                      <a:endParaRPr lang="en-US" sz="700" dirty="0">
+                      <a:endParaRPr lang="en-US" sz="650" dirty="0">
                         <a:latin typeface="Arial" charset="0"/>
                         <a:ea typeface="Arial" charset="0"/>
                         <a:cs typeface="Arial" charset="0"/>
@@ -16063,7 +16035,7 @@
                         <a:buNone/>
                       </a:pPr>
                       <a:r>
-                        <a:rPr lang="en-US" sz="700" dirty="0">
+                        <a:rPr lang="en-US" sz="650" dirty="0">
                           <a:solidFill>
                             <a:srgbClr val="334155"/>
                           </a:solidFill>
@@ -16073,7 +16045,7 @@
                         </a:rPr>
                         <a:t>L5讲座</a:t>
                       </a:r>
-                      <a:endParaRPr lang="en-US" sz="700" dirty="0">
+                      <a:endParaRPr lang="en-US" sz="650" dirty="0">
                         <a:latin typeface="Arial" charset="0"/>
                         <a:ea typeface="Arial" charset="0"/>
                         <a:cs typeface="Arial" charset="0"/>
@@ -16131,7 +16103,7 @@
                         <a:buNone/>
                       </a:pPr>
                       <a:r>
-                        <a:rPr lang="en-US" sz="700" dirty="0">
+                        <a:rPr lang="en-US" sz="650" dirty="0">
                           <a:solidFill>
                             <a:srgbClr val="334155"/>
                           </a:solidFill>
@@ -16141,7 +16113,7 @@
                         </a:rPr>
                         <a:t>50m</a:t>
                       </a:r>
-                      <a:endParaRPr lang="en-US" sz="700" dirty="0">
+                      <a:endParaRPr lang="en-US" sz="650" dirty="0">
                         <a:latin typeface="Arial" charset="0"/>
                         <a:ea typeface="Arial" charset="0"/>
                         <a:cs typeface="Arial" charset="0"/>
@@ -16188,7 +16160,7 @@
                   </a:tcPr>
                 </a:tc>
               </a:tr>
-              <a:tr h="164592">
+              <a:tr h="150876">
                 <a:tc>
                   <a:txBody>
                     <a:bodyPr/>
@@ -16198,7 +16170,7 @@
                         <a:buNone/>
                       </a:pPr>
                       <a:r>
-                        <a:rPr lang="en-US" sz="700" b="1" dirty="0">
+                        <a:rPr lang="en-US" sz="650" b="1" dirty="0">
                           <a:solidFill>
                             <a:srgbClr val="334155"/>
                           </a:solidFill>
@@ -16208,7 +16180,7 @@
                         </a:rPr>
                         <a:t>11:50</a:t>
                       </a:r>
-                      <a:endParaRPr lang="en-US" sz="700" dirty="0">
+                      <a:endParaRPr lang="en-US" sz="650" dirty="0">
                         <a:latin typeface="Arial" charset="0"/>
                         <a:ea typeface="Arial" charset="0"/>
                         <a:cs typeface="Arial" charset="0"/>
@@ -16263,7 +16235,7 @@
                         <a:buNone/>
                       </a:pPr>
                       <a:r>
-                        <a:rPr lang="en-US" sz="700" dirty="0">
+                        <a:rPr lang="en-US" sz="650" dirty="0">
                           <a:solidFill>
                             <a:srgbClr val="334155"/>
                           </a:solidFill>
@@ -16273,7 +16245,7 @@
                         </a:rPr>
                         <a:t>午餐</a:t>
                       </a:r>
-                      <a:endParaRPr lang="en-US" sz="700" dirty="0">
+                      <a:endParaRPr lang="en-US" sz="650" dirty="0">
                         <a:latin typeface="Arial" charset="0"/>
                         <a:ea typeface="Arial" charset="0"/>
                         <a:cs typeface="Arial" charset="0"/>
@@ -16328,7 +16300,7 @@
                         <a:buNone/>
                       </a:pPr>
                       <a:r>
-                        <a:rPr lang="en-US" sz="700" dirty="0">
+                        <a:rPr lang="en-US" sz="650" dirty="0">
                           <a:solidFill>
                             <a:srgbClr val="334155"/>
                           </a:solidFill>
@@ -16338,7 +16310,7 @@
                         </a:rPr>
                         <a:t>-</a:t>
                       </a:r>
-                      <a:endParaRPr lang="en-US" sz="700" dirty="0">
+                      <a:endParaRPr lang="en-US" sz="650" dirty="0">
                         <a:latin typeface="Arial" charset="0"/>
                         <a:ea typeface="Arial" charset="0"/>
                         <a:cs typeface="Arial" charset="0"/>
@@ -16385,7 +16357,7 @@
                   </a:tcPr>
                 </a:tc>
               </a:tr>
-              <a:tr h="164592">
+              <a:tr h="150876">
                 <a:tc>
                   <a:txBody>
                     <a:bodyPr/>
@@ -16395,7 +16367,7 @@
                         <a:buNone/>
                       </a:pPr>
                       <a:r>
-                        <a:rPr lang="en-US" sz="700" b="1" dirty="0">
+                        <a:rPr lang="en-US" sz="650" b="1" dirty="0">
                           <a:solidFill>
                             <a:srgbClr val="334155"/>
                           </a:solidFill>
@@ -16405,7 +16377,7 @@
                         </a:rPr>
                         <a:t>14:30</a:t>
                       </a:r>
-                      <a:endParaRPr lang="en-US" sz="700" dirty="0">
+                      <a:endParaRPr lang="en-US" sz="650" dirty="0">
                         <a:latin typeface="Arial" charset="0"/>
                         <a:ea typeface="Arial" charset="0"/>
                         <a:cs typeface="Arial" charset="0"/>
@@ -16460,7 +16432,7 @@
                         <a:buNone/>
                       </a:pPr>
                       <a:r>
-                        <a:rPr lang="en-US" sz="700" dirty="0">
+                        <a:rPr lang="en-US" sz="650" dirty="0">
                           <a:solidFill>
                             <a:srgbClr val="334155"/>
                           </a:solidFill>
@@ -16470,7 +16442,7 @@
                         </a:rPr>
                         <a:t>W2重构</a:t>
                       </a:r>
-                      <a:endParaRPr lang="en-US" sz="700" dirty="0">
+                      <a:endParaRPr lang="en-US" sz="650" dirty="0">
                         <a:latin typeface="Arial" charset="0"/>
                         <a:ea typeface="Arial" charset="0"/>
                         <a:cs typeface="Arial" charset="0"/>
@@ -16528,7 +16500,7 @@
                         <a:buNone/>
                       </a:pPr>
                       <a:r>
-                        <a:rPr lang="en-US" sz="700" dirty="0">
+                        <a:rPr lang="en-US" sz="650" dirty="0">
                           <a:solidFill>
                             <a:srgbClr val="334155"/>
                           </a:solidFill>
@@ -16538,7 +16510,7 @@
                         </a:rPr>
                         <a:t>75m</a:t>
                       </a:r>
-                      <a:endParaRPr lang="en-US" sz="700" dirty="0">
+                      <a:endParaRPr lang="en-US" sz="650" dirty="0">
                         <a:latin typeface="Arial" charset="0"/>
                         <a:ea typeface="Arial" charset="0"/>
                         <a:cs typeface="Arial" charset="0"/>
@@ -16585,7 +16557,7 @@
                   </a:tcPr>
                 </a:tc>
               </a:tr>
-              <a:tr h="164592">
+              <a:tr h="150876">
                 <a:tc>
                   <a:txBody>
                     <a:bodyPr/>
@@ -16595,7 +16567,7 @@
                         <a:buNone/>
                       </a:pPr>
                       <a:r>
-                        <a:rPr lang="en-US" sz="700" b="1" dirty="0">
+                        <a:rPr lang="en-US" sz="650" b="1" dirty="0">
                           <a:solidFill>
                             <a:srgbClr val="334155"/>
                           </a:solidFill>
@@ -16605,7 +16577,7 @@
                         </a:rPr>
                         <a:t>15:45</a:t>
                       </a:r>
-                      <a:endParaRPr lang="en-US" sz="700" dirty="0">
+                      <a:endParaRPr lang="en-US" sz="650" dirty="0">
                         <a:latin typeface="Arial" charset="0"/>
                         <a:ea typeface="Arial" charset="0"/>
                         <a:cs typeface="Arial" charset="0"/>
@@ -16660,7 +16632,7 @@
                         <a:buNone/>
                       </a:pPr>
                       <a:r>
-                        <a:rPr lang="en-US" sz="700" dirty="0">
+                        <a:rPr lang="en-US" sz="650" dirty="0">
                           <a:solidFill>
                             <a:srgbClr val="334155"/>
                           </a:solidFill>
@@ -16670,7 +16642,7 @@
                         </a:rPr>
                         <a:t>休息</a:t>
                       </a:r>
-                      <a:endParaRPr lang="en-US" sz="700" dirty="0">
+                      <a:endParaRPr lang="en-US" sz="650" dirty="0">
                         <a:latin typeface="Arial" charset="0"/>
                         <a:ea typeface="Arial" charset="0"/>
                         <a:cs typeface="Arial" charset="0"/>
@@ -16725,7 +16697,7 @@
                         <a:buNone/>
                       </a:pPr>
                       <a:r>
-                        <a:rPr lang="en-US" sz="700" dirty="0">
+                        <a:rPr lang="en-US" sz="650" dirty="0">
                           <a:solidFill>
                             <a:srgbClr val="334155"/>
                           </a:solidFill>
@@ -16735,7 +16707,7 @@
                         </a:rPr>
                         <a:t>-</a:t>
                       </a:r>
-                      <a:endParaRPr lang="en-US" sz="700" dirty="0">
+                      <a:endParaRPr lang="en-US" sz="650" dirty="0">
                         <a:latin typeface="Arial" charset="0"/>
                         <a:ea typeface="Arial" charset="0"/>
                         <a:cs typeface="Arial" charset="0"/>
@@ -16782,7 +16754,7 @@
                   </a:tcPr>
                 </a:tc>
               </a:tr>
-              <a:tr h="164592">
+              <a:tr h="150876">
                 <a:tc>
                   <a:txBody>
                     <a:bodyPr/>
@@ -16792,7 +16764,7 @@
                         <a:buNone/>
                       </a:pPr>
                       <a:r>
-                        <a:rPr lang="en-US" sz="700" b="1" dirty="0">
+                        <a:rPr lang="en-US" sz="650" b="1" dirty="0">
                           <a:solidFill>
                             <a:srgbClr val="334155"/>
                           </a:solidFill>
@@ -16802,7 +16774,7 @@
                         </a:rPr>
                         <a:t>16:00</a:t>
                       </a:r>
-                      <a:endParaRPr lang="en-US" sz="700" dirty="0">
+                      <a:endParaRPr lang="en-US" sz="650" dirty="0">
                         <a:latin typeface="Arial" charset="0"/>
                         <a:ea typeface="Arial" charset="0"/>
                         <a:cs typeface="Arial" charset="0"/>
@@ -16857,7 +16829,7 @@
                         <a:buNone/>
                       </a:pPr>
                       <a:r>
-                        <a:rPr lang="en-US" sz="700" dirty="0">
+                        <a:rPr lang="en-US" sz="650" dirty="0">
                           <a:solidFill>
                             <a:srgbClr val="334155"/>
                           </a:solidFill>
@@ -16867,7 +16839,7 @@
                         </a:rPr>
                         <a:t>W3项目</a:t>
                       </a:r>
-                      <a:endParaRPr lang="en-US" sz="700" dirty="0">
+                      <a:endParaRPr lang="en-US" sz="650" dirty="0">
                         <a:latin typeface="Arial" charset="0"/>
                         <a:ea typeface="Arial" charset="0"/>
                         <a:cs typeface="Arial" charset="0"/>
@@ -16925,7 +16897,7 @@
                         <a:buNone/>
                       </a:pPr>
                       <a:r>
-                        <a:rPr lang="en-US" sz="700" dirty="0">
+                        <a:rPr lang="en-US" sz="650" dirty="0">
                           <a:solidFill>
                             <a:srgbClr val="334155"/>
                           </a:solidFill>
@@ -16935,7 +16907,7 @@
                         </a:rPr>
                         <a:t>60m</a:t>
                       </a:r>
-                      <a:endParaRPr lang="en-US" sz="700" dirty="0">
+                      <a:endParaRPr lang="en-US" sz="650" dirty="0">
                         <a:latin typeface="Arial" charset="0"/>
                         <a:ea typeface="Arial" charset="0"/>
                         <a:cs typeface="Arial" charset="0"/>
@@ -16982,7 +16954,7 @@
                   </a:tcPr>
                 </a:tc>
               </a:tr>
-              <a:tr h="164592">
+              <a:tr h="150876">
                 <a:tc>
                   <a:txBody>
                     <a:bodyPr/>
@@ -16992,7 +16964,7 @@
                         <a:buNone/>
                       </a:pPr>
                       <a:r>
-                        <a:rPr lang="en-US" sz="700" b="1" dirty="0">
+                        <a:rPr lang="en-US" sz="650" b="1" dirty="0">
                           <a:solidFill>
                             <a:srgbClr val="334155"/>
                           </a:solidFill>
@@ -17002,7 +16974,7 @@
                         </a:rPr>
                         <a:t>17:00</a:t>
                       </a:r>
-                      <a:endParaRPr lang="en-US" sz="700" dirty="0">
+                      <a:endParaRPr lang="en-US" sz="650" dirty="0">
                         <a:latin typeface="Arial" charset="0"/>
                         <a:ea typeface="Arial" charset="0"/>
                         <a:cs typeface="Arial" charset="0"/>
@@ -17057,7 +17029,7 @@
                         <a:buNone/>
                       </a:pPr>
                       <a:r>
-                        <a:rPr lang="en-US" sz="700" dirty="0">
+                        <a:rPr lang="en-US" sz="650" dirty="0">
                           <a:solidFill>
                             <a:srgbClr val="334155"/>
                           </a:solidFill>
@@ -17067,7 +17039,7 @@
                         </a:rPr>
                         <a:t>评审</a:t>
                       </a:r>
-                      <a:endParaRPr lang="en-US" sz="700" dirty="0">
+                      <a:endParaRPr lang="en-US" sz="650" dirty="0">
                         <a:latin typeface="Arial" charset="0"/>
                         <a:ea typeface="Arial" charset="0"/>
                         <a:cs typeface="Arial" charset="0"/>
@@ -17125,7 +17097,7 @@
                         <a:buNone/>
                       </a:pPr>
                       <a:r>
-                        <a:rPr lang="en-US" sz="700" dirty="0">
+                        <a:rPr lang="en-US" sz="650" dirty="0">
                           <a:solidFill>
                             <a:srgbClr val="334155"/>
                           </a:solidFill>
@@ -17135,7 +17107,7 @@
                         </a:rPr>
                         <a:t>30m</a:t>
                       </a:r>
-                      <a:endParaRPr lang="en-US" sz="700" dirty="0">
+                      <a:endParaRPr lang="en-US" sz="650" dirty="0">
                         <a:latin typeface="Arial" charset="0"/>
                         <a:ea typeface="Arial" charset="0"/>
                         <a:cs typeface="Arial" charset="0"/>
@@ -17182,7 +17154,7 @@
                   </a:tcPr>
                 </a:tc>
               </a:tr>
-              <a:tr h="164592">
+              <a:tr h="150876">
                 <a:tc>
                   <a:txBody>
                     <a:bodyPr/>
@@ -17192,7 +17164,7 @@
                         <a:buNone/>
                       </a:pPr>
                       <a:r>
-                        <a:rPr lang="en-US" sz="700" b="1" dirty="0">
+                        <a:rPr lang="en-US" sz="650" b="1" dirty="0">
                           <a:solidFill>
                             <a:srgbClr val="334155"/>
                           </a:solidFill>
@@ -17202,7 +17174,7 @@
                         </a:rPr>
                         <a:t>17:30</a:t>
                       </a:r>
-                      <a:endParaRPr lang="en-US" sz="700" dirty="0">
+                      <a:endParaRPr lang="en-US" sz="650" dirty="0">
                         <a:latin typeface="Arial" charset="0"/>
                         <a:ea typeface="Arial" charset="0"/>
                         <a:cs typeface="Arial" charset="0"/>
@@ -17257,7 +17229,7 @@
                         <a:buNone/>
                       </a:pPr>
                       <a:r>
-                        <a:rPr lang="en-US" sz="700" dirty="0">
+                        <a:rPr lang="en-US" sz="650" dirty="0">
                           <a:solidFill>
                             <a:srgbClr val="334155"/>
                           </a:solidFill>
@@ -17267,7 +17239,7 @@
                         </a:rPr>
                         <a:t>L6总结</a:t>
                       </a:r>
-                      <a:endParaRPr lang="en-US" sz="700" dirty="0">
+                      <a:endParaRPr lang="en-US" sz="650" dirty="0">
                         <a:latin typeface="Arial" charset="0"/>
                         <a:ea typeface="Arial" charset="0"/>
                         <a:cs typeface="Arial" charset="0"/>
@@ -17325,7 +17297,7 @@
                         <a:buNone/>
                       </a:pPr>
                       <a:r>
-                        <a:rPr lang="en-US" sz="700" dirty="0">
+                        <a:rPr lang="en-US" sz="650" dirty="0">
                           <a:solidFill>
                             <a:srgbClr val="334155"/>
                           </a:solidFill>
@@ -17335,7 +17307,7 @@
                         </a:rPr>
                         <a:t>20m</a:t>
                       </a:r>
-                      <a:endParaRPr lang="en-US" sz="700" dirty="0">
+                      <a:endParaRPr lang="en-US" sz="650" dirty="0">
                         <a:latin typeface="Arial" charset="0"/>
                         <a:ea typeface="Arial" charset="0"/>
                         <a:cs typeface="Arial" charset="0"/>
@@ -17382,7 +17354,7 @@
                   </a:tcPr>
                 </a:tc>
               </a:tr>
-              <a:tr h="164592">
+              <a:tr h="150876">
                 <a:tc>
                   <a:txBody>
                     <a:bodyPr/>
@@ -17392,7 +17364,7 @@
                         <a:buNone/>
                       </a:pPr>
                       <a:r>
-                        <a:rPr lang="en-US" sz="700" b="1" dirty="0">
+                        <a:rPr lang="en-US" sz="650" b="1" dirty="0">
                           <a:solidFill>
                             <a:srgbClr val="334155"/>
                           </a:solidFill>
@@ -17402,7 +17374,7 @@
                         </a:rPr>
                         <a:t>17:50</a:t>
                       </a:r>
-                      <a:endParaRPr lang="en-US" sz="700" dirty="0">
+                      <a:endParaRPr lang="en-US" sz="650" dirty="0">
                         <a:latin typeface="Arial" charset="0"/>
                         <a:ea typeface="Arial" charset="0"/>
                         <a:cs typeface="Arial" charset="0"/>
@@ -17457,7 +17429,7 @@
                         <a:buNone/>
                       </a:pPr>
                       <a:r>
-                        <a:rPr lang="en-US" sz="700" dirty="0">
+                        <a:rPr lang="en-US" sz="650" dirty="0">
                           <a:solidFill>
                             <a:srgbClr val="334155"/>
                           </a:solidFill>
@@ -17467,7 +17439,7 @@
                         </a:rPr>
                         <a:t>开放</a:t>
                       </a:r>
-                      <a:endParaRPr lang="en-US" sz="700" dirty="0">
+                      <a:endParaRPr lang="en-US" sz="650" dirty="0">
                         <a:latin typeface="Arial" charset="0"/>
                         <a:ea typeface="Arial" charset="0"/>
                         <a:cs typeface="Arial" charset="0"/>
@@ -17525,7 +17497,7 @@
                         <a:buNone/>
                       </a:pPr>
                       <a:r>
-                        <a:rPr lang="en-US" sz="700" dirty="0">
+                        <a:rPr lang="en-US" sz="650" dirty="0">
                           <a:solidFill>
                             <a:srgbClr val="334155"/>
                           </a:solidFill>
@@ -17535,7 +17507,7 @@
                         </a:rPr>
                         <a:t>-</a:t>
                       </a:r>
-                      <a:endParaRPr lang="en-US" sz="700" dirty="0">
+                      <a:endParaRPr lang="en-US" sz="650" dirty="0">
                         <a:latin typeface="Arial" charset="0"/>
                         <a:ea typeface="Arial" charset="0"/>
                         <a:cs typeface="Arial" charset="0"/>
@@ -17594,8 +17566,8 @@
         </p:nvSpPr>
         <p:spPr>
           <a:xfrm>
-            <a:off x="457200" y="3200400"/>
-            <a:ext cx="11064240" cy="182880"/>
+            <a:off x="1979676" y="2880360"/>
+            <a:ext cx="8229600" cy="164592"/>
           </a:xfrm>
           <a:prstGeom prst="rect">
             <a:avLst/>
@@ -17611,14 +17583,14 @@
               <a:buNone/>
             </a:pPr>
             <a:r>
-              <a:rPr lang="en-US" sz="1000" b="1" dirty="0">
+              <a:rPr lang="en-US" sz="900" b="1" dirty="0">
                 <a:solidFill>
                   <a:srgbClr val="1A1A2E"/>
                 </a:solidFill>
               </a:rPr>
               <a:t>关键数字</a:t>
             </a:r>
-            <a:endParaRPr lang="en-US" sz="1000" dirty="0"/>
+            <a:endParaRPr lang="en-US" sz="900" dirty="0"/>
           </a:p>
         </p:txBody>
       </p:sp>
@@ -17637,18 +17609,18 @@
           </p:nvPr>
         </p:nvGraphicFramePr>
         <p:xfrm>
-          <a:off x="457200" y="3429000"/>
-          <a:ext cx="11064240" cy="914400"/>
+          <a:off x="1979676" y="3063240"/>
+          <a:ext cx="8229600" cy="914400"/>
         </p:xfrm>
         <a:graphic>
           <a:graphicData uri="http://schemas.openxmlformats.org/drawingml/2006/table">
             <a:tbl>
               <a:tblPr/>
               <a:tblGrid>
-                <a:gridCol w="1645920"/>
-                <a:gridCol w="3886200"/>
-                <a:gridCol w="1645920"/>
-                <a:gridCol w="3886200"/>
+                <a:gridCol w="1188720"/>
+                <a:gridCol w="2926080"/>
+                <a:gridCol w="1188720"/>
+                <a:gridCol w="2926080"/>
               </a:tblGrid>
               <a:tr h="164592">
                 <a:tc>
@@ -17660,7 +17632,7 @@
                         <a:buNone/>
                       </a:pPr>
                       <a:r>
-                        <a:rPr lang="en-US" sz="700" b="1" dirty="0">
+                        <a:rPr lang="en-US" sz="650" b="1" dirty="0">
                           <a:solidFill>
                             <a:srgbClr val="334155"/>
                           </a:solidFill>
@@ -17670,7 +17642,7 @@
                         </a:rPr>
                         <a:t>指标</a:t>
                       </a:r>
-                      <a:endParaRPr lang="en-US" sz="700" dirty="0">
+                      <a:endParaRPr lang="en-US" sz="650" dirty="0">
                         <a:latin typeface="Arial" charset="0"/>
                         <a:ea typeface="Arial" charset="0"/>
                         <a:cs typeface="Arial" charset="0"/>
@@ -17728,7 +17700,7 @@
                         <a:buNone/>
                       </a:pPr>
                       <a:r>
-                        <a:rPr lang="en-US" sz="700" b="1" dirty="0">
+                        <a:rPr lang="en-US" sz="650" b="1" dirty="0">
                           <a:solidFill>
                             <a:srgbClr val="334155"/>
                           </a:solidFill>
@@ -17738,7 +17710,7 @@
                         </a:rPr>
                         <a:t>数值</a:t>
                       </a:r>
-                      <a:endParaRPr lang="en-US" sz="700" dirty="0">
+                      <a:endParaRPr lang="en-US" sz="650" dirty="0">
                         <a:latin typeface="Arial" charset="0"/>
                         <a:ea typeface="Arial" charset="0"/>
                         <a:cs typeface="Arial" charset="0"/>
@@ -17796,7 +17768,7 @@
                         <a:buNone/>
                       </a:pPr>
                       <a:r>
-                        <a:rPr lang="en-US" sz="700" b="1" dirty="0">
+                        <a:rPr lang="en-US" sz="650" b="1" dirty="0">
                           <a:solidFill>
                             <a:srgbClr val="334155"/>
                           </a:solidFill>
@@ -17806,7 +17778,7 @@
                         </a:rPr>
                         <a:t>指标</a:t>
                       </a:r>
-                      <a:endParaRPr lang="en-US" sz="700" dirty="0">
+                      <a:endParaRPr lang="en-US" sz="650" dirty="0">
                         <a:latin typeface="Arial" charset="0"/>
                         <a:ea typeface="Arial" charset="0"/>
                         <a:cs typeface="Arial" charset="0"/>
@@ -17864,7 +17836,7 @@
                         <a:buNone/>
                       </a:pPr>
                       <a:r>
-                        <a:rPr lang="en-US" sz="700" b="1" dirty="0">
+                        <a:rPr lang="en-US" sz="650" b="1" dirty="0">
                           <a:solidFill>
                             <a:srgbClr val="334155"/>
                           </a:solidFill>
@@ -17874,7 +17846,7 @@
                         </a:rPr>
                         <a:t>数值</a:t>
                       </a:r>
-                      <a:endParaRPr lang="en-US" sz="700" dirty="0">
+                      <a:endParaRPr lang="en-US" sz="650" dirty="0">
                         <a:latin typeface="Arial" charset="0"/>
                         <a:ea typeface="Arial" charset="0"/>
                         <a:cs typeface="Arial" charset="0"/>
@@ -17934,7 +17906,7 @@
                         <a:buNone/>
                       </a:pPr>
                       <a:r>
-                        <a:rPr lang="en-US" sz="700" b="1" dirty="0">
+                        <a:rPr lang="en-US" sz="650" b="1" dirty="0">
                           <a:solidFill>
                             <a:srgbClr val="334155"/>
                           </a:solidFill>
@@ -17944,7 +17916,7 @@
                         </a:rPr>
                         <a:t>总时长</a:t>
                       </a:r>
-                      <a:endParaRPr lang="en-US" sz="700" dirty="0">
+                      <a:endParaRPr lang="en-US" sz="650" dirty="0">
                         <a:latin typeface="Arial" charset="0"/>
                         <a:ea typeface="Arial" charset="0"/>
                         <a:cs typeface="Arial" charset="0"/>
@@ -17999,7 +17971,7 @@
                         <a:buNone/>
                       </a:pPr>
                       <a:r>
-                        <a:rPr lang="en-US" sz="700" dirty="0">
+                        <a:rPr lang="en-US" sz="650" dirty="0">
                           <a:solidFill>
                             <a:srgbClr val="334155"/>
                           </a:solidFill>
@@ -18009,7 +17981,7 @@
                         </a:rPr>
                         <a:t>2天 ~11h</a:t>
                       </a:r>
-                      <a:endParaRPr lang="en-US" sz="700" dirty="0">
+                      <a:endParaRPr lang="en-US" sz="650" dirty="0">
                         <a:latin typeface="Arial" charset="0"/>
                         <a:ea typeface="Arial" charset="0"/>
                         <a:cs typeface="Arial" charset="0"/>
@@ -18064,7 +18036,7 @@
                         <a:buNone/>
                       </a:pPr>
                       <a:r>
-                        <a:rPr lang="en-US" sz="700" b="1" dirty="0">
+                        <a:rPr lang="en-US" sz="650" b="1" dirty="0">
                           <a:solidFill>
                             <a:srgbClr val="334155"/>
                           </a:solidFill>
@@ -18074,7 +18046,7 @@
                         </a:rPr>
                         <a:t>讲座占比</a:t>
                       </a:r>
-                      <a:endParaRPr lang="en-US" sz="700" dirty="0">
+                      <a:endParaRPr lang="en-US" sz="650" dirty="0">
                         <a:latin typeface="Arial" charset="0"/>
                         <a:ea typeface="Arial" charset="0"/>
                         <a:cs typeface="Arial" charset="0"/>
@@ -18129,7 +18101,7 @@
                         <a:buNone/>
                       </a:pPr>
                       <a:r>
-                        <a:rPr lang="en-US" sz="700" dirty="0">
+                        <a:rPr lang="en-US" sz="650" dirty="0">
                           <a:solidFill>
                             <a:srgbClr val="334155"/>
                           </a:solidFill>
@@ -18139,7 +18111,7 @@
                         </a:rPr>
                         <a:t>~40% (上午)</a:t>
                       </a:r>
-                      <a:endParaRPr lang="en-US" sz="700" dirty="0">
+                      <a:endParaRPr lang="en-US" sz="650" dirty="0">
                         <a:latin typeface="Arial" charset="0"/>
                         <a:ea typeface="Arial" charset="0"/>
                         <a:cs typeface="Arial" charset="0"/>
@@ -18196,7 +18168,7 @@
                         <a:buNone/>
                       </a:pPr>
                       <a:r>
-                        <a:rPr lang="en-US" sz="700" b="1" dirty="0">
+                        <a:rPr lang="en-US" sz="650" b="1" dirty="0">
                           <a:solidFill>
                             <a:srgbClr val="334155"/>
                           </a:solidFill>
@@ -18206,7 +18178,7 @@
                         </a:rPr>
                         <a:t>演示总长</a:t>
                       </a:r>
-                      <a:endParaRPr lang="en-US" sz="700" dirty="0">
+                      <a:endParaRPr lang="en-US" sz="650" dirty="0">
                         <a:latin typeface="Arial" charset="0"/>
                         <a:ea typeface="Arial" charset="0"/>
                         <a:cs typeface="Arial" charset="0"/>
@@ -18261,7 +18233,7 @@
                         <a:buNone/>
                       </a:pPr>
                       <a:r>
-                        <a:rPr lang="en-US" sz="700" dirty="0">
+                        <a:rPr lang="en-US" sz="650" dirty="0">
                           <a:solidFill>
                             <a:srgbClr val="334155"/>
                           </a:solidFill>
@@ -18271,7 +18243,7 @@
                         </a:rPr>
                         <a:t>105min</a:t>
                       </a:r>
-                      <a:endParaRPr lang="en-US" sz="700" dirty="0">
+                      <a:endParaRPr lang="en-US" sz="650" dirty="0">
                         <a:latin typeface="Arial" charset="0"/>
                         <a:ea typeface="Arial" charset="0"/>
                         <a:cs typeface="Arial" charset="0"/>
@@ -18326,7 +18298,7 @@
                         <a:buNone/>
                       </a:pPr>
                       <a:r>
-                        <a:rPr lang="en-US" sz="700" b="1" dirty="0">
+                        <a:rPr lang="en-US" sz="650" b="1" dirty="0">
                           <a:solidFill>
                             <a:srgbClr val="334155"/>
                           </a:solidFill>
@@ -18336,7 +18308,7 @@
                         </a:rPr>
                         <a:t>演练总长</a:t>
                       </a:r>
-                      <a:endParaRPr lang="en-US" sz="700" dirty="0">
+                      <a:endParaRPr lang="en-US" sz="650" dirty="0">
                         <a:latin typeface="Arial" charset="0"/>
                         <a:ea typeface="Arial" charset="0"/>
                         <a:cs typeface="Arial" charset="0"/>
@@ -18391,7 +18363,7 @@
                         <a:buNone/>
                       </a:pPr>
                       <a:r>
-                        <a:rPr lang="en-US" sz="700" dirty="0">
+                        <a:rPr lang="en-US" sz="650" dirty="0">
                           <a:solidFill>
                             <a:srgbClr val="334155"/>
                           </a:solidFill>
@@ -18401,7 +18373,7 @@
                         </a:rPr>
                         <a:t>195min (3 Workshop)</a:t>
                       </a:r>
-                      <a:endParaRPr lang="en-US" sz="700" dirty="0">
+                      <a:endParaRPr lang="en-US" sz="650" dirty="0">
                         <a:latin typeface="Arial" charset="0"/>
                         <a:ea typeface="Arial" charset="0"/>
                         <a:cs typeface="Arial" charset="0"/>
@@ -18458,7 +18430,7 @@
                         <a:buNone/>
                       </a:pPr>
                       <a:r>
-                        <a:rPr lang="en-US" sz="700" b="1" dirty="0">
+                        <a:rPr lang="en-US" sz="650" b="1" dirty="0">
                           <a:solidFill>
                             <a:srgbClr val="334155"/>
                           </a:solidFill>
@@ -18468,7 +18440,7 @@
                         </a:rPr>
                         <a:t>L1-L6</a:t>
                       </a:r>
-                      <a:endParaRPr lang="en-US" sz="700" dirty="0">
+                      <a:endParaRPr lang="en-US" sz="650" dirty="0">
                         <a:latin typeface="Arial" charset="0"/>
                         <a:ea typeface="Arial" charset="0"/>
                         <a:cs typeface="Arial" charset="0"/>
@@ -18523,7 +18495,7 @@
                         <a:buNone/>
                       </a:pPr>
                       <a:r>
-                        <a:rPr lang="en-US" sz="700" dirty="0">
+                        <a:rPr lang="en-US" sz="650" dirty="0">
                           <a:solidFill>
                             <a:srgbClr val="334155"/>
                           </a:solidFill>
@@ -18533,7 +18505,7 @@
                         </a:rPr>
                         <a:t>6个 系统化</a:t>
                       </a:r>
-                      <a:endParaRPr lang="en-US" sz="700" dirty="0">
+                      <a:endParaRPr lang="en-US" sz="650" dirty="0">
                         <a:latin typeface="Arial" charset="0"/>
                         <a:ea typeface="Arial" charset="0"/>
                         <a:cs typeface="Arial" charset="0"/>
@@ -18588,7 +18560,7 @@
                         <a:buNone/>
                       </a:pPr>
                       <a:r>
-                        <a:rPr lang="en-US" sz="700" b="1" dirty="0">
+                        <a:rPr lang="en-US" sz="650" b="1" dirty="0">
                           <a:solidFill>
                             <a:srgbClr val="334155"/>
                           </a:solidFill>
@@ -18598,7 +18570,7 @@
                         </a:rPr>
                         <a:t>交付物</a:t>
                       </a:r>
-                      <a:endParaRPr lang="en-US" sz="700" dirty="0">
+                      <a:endParaRPr lang="en-US" sz="650" dirty="0">
                         <a:latin typeface="Arial" charset="0"/>
                         <a:ea typeface="Arial" charset="0"/>
                         <a:cs typeface="Arial" charset="0"/>
@@ -18653,7 +18625,7 @@
                         <a:buNone/>
                       </a:pPr>
                       <a:r>
-                        <a:rPr lang="en-US" sz="700" dirty="0">
+                        <a:rPr lang="en-US" sz="650" dirty="0">
                           <a:solidFill>
                             <a:srgbClr val="334155"/>
                           </a:solidFill>
@@ -18663,269 +18635,7 @@
                         </a:rPr>
                         <a:t>8项可复用</a:t>
                       </a:r>
-                      <a:endParaRPr lang="en-US" sz="700" dirty="0">
-                        <a:latin typeface="Arial" charset="0"/>
-                        <a:ea typeface="Arial" charset="0"/>
-                        <a:cs typeface="Arial" charset="0"/>
-                      </a:endParaRPr>
-                    </a:p>
-                  </a:txBody>
-                  <a:tcPr marL="38100" marR="38100" marT="25400" marB="25400">
-                    <a:lnL w="6350" cap="flat" cmpd="sng" algn="ctr">
-                      <a:solidFill>
-                        <a:srgbClr val="666666"/>
-                      </a:solidFill>
-                      <a:prstDash val="solid"/>
-                      <a:round/>
-                      <a:headEnd type="none" w="med" len="med"/>
-                      <a:tailEnd type="none" w="med" len="med"/>
-                    </a:lnL>
-                    <a:lnR w="6350" cap="flat" cmpd="sng" algn="ctr">
-                      <a:solidFill>
-                        <a:srgbClr val="666666"/>
-                      </a:solidFill>
-                      <a:prstDash val="solid"/>
-                      <a:round/>
-                      <a:headEnd type="none" w="med" len="med"/>
-                      <a:tailEnd type="none" w="med" len="med"/>
-                    </a:lnR>
-                    <a:lnT w="6350" cap="flat" cmpd="sng" algn="ctr">
-                      <a:solidFill>
-                        <a:srgbClr val="666666"/>
-                      </a:solidFill>
-                      <a:prstDash val="solid"/>
-                      <a:round/>
-                      <a:headEnd type="none" w="med" len="med"/>
-                      <a:tailEnd type="none" w="med" len="med"/>
-                    </a:lnT>
-                    <a:lnB w="6350" cap="flat" cmpd="sng" algn="ctr">
-                      <a:solidFill>
-                        <a:srgbClr val="666666"/>
-                      </a:solidFill>
-                      <a:prstDash val="solid"/>
-                      <a:round/>
-                      <a:headEnd type="none" w="med" len="med"/>
-                      <a:tailEnd type="none" w="med" len="med"/>
-                    </a:lnB>
-                  </a:tcPr>
-                </a:tc>
-              </a:tr>
-              <a:tr h="201168">
-                <a:tc>
-                  <a:txBody>
-                    <a:bodyPr/>
-                    <a:lstStyle/>
-                    <a:p>
-                      <a:pPr indent="0" marL="0">
-                        <a:buNone/>
-                      </a:pPr>
-                      <a:r>
-                        <a:rPr lang="en-US" sz="700" b="1" dirty="0">
-                          <a:solidFill>
-                            <a:srgbClr val="334155"/>
-                          </a:solidFill>
-                          <a:latin typeface="Arial" pitchFamily="34" charset="0"/>
-                          <a:ea typeface="Arial" pitchFamily="34" charset="-122"/>
-                          <a:cs typeface="Arial" pitchFamily="34" charset="-120"/>
-                        </a:rPr>
-                        <a:t>上午讲座</a:t>
-                      </a:r>
-                      <a:endParaRPr lang="en-US" sz="700" dirty="0">
-                        <a:latin typeface="Arial" charset="0"/>
-                        <a:ea typeface="Arial" charset="0"/>
-                        <a:cs typeface="Arial" charset="0"/>
-                      </a:endParaRPr>
-                    </a:p>
-                  </a:txBody>
-                  <a:tcPr marL="38100" marR="38100" marT="25400" marB="25400">
-                    <a:lnL w="6350" cap="flat" cmpd="sng" algn="ctr">
-                      <a:solidFill>
-                        <a:srgbClr val="666666"/>
-                      </a:solidFill>
-                      <a:prstDash val="solid"/>
-                      <a:round/>
-                      <a:headEnd type="none" w="med" len="med"/>
-                      <a:tailEnd type="none" w="med" len="med"/>
-                    </a:lnL>
-                    <a:lnR w="6350" cap="flat" cmpd="sng" algn="ctr">
-                      <a:solidFill>
-                        <a:srgbClr val="666666"/>
-                      </a:solidFill>
-                      <a:prstDash val="solid"/>
-                      <a:round/>
-                      <a:headEnd type="none" w="med" len="med"/>
-                      <a:tailEnd type="none" w="med" len="med"/>
-                    </a:lnR>
-                    <a:lnT w="6350" cap="flat" cmpd="sng" algn="ctr">
-                      <a:solidFill>
-                        <a:srgbClr val="666666"/>
-                      </a:solidFill>
-                      <a:prstDash val="solid"/>
-                      <a:round/>
-                      <a:headEnd type="none" w="med" len="med"/>
-                      <a:tailEnd type="none" w="med" len="med"/>
-                    </a:lnT>
-                    <a:lnB w="6350" cap="flat" cmpd="sng" algn="ctr">
-                      <a:solidFill>
-                        <a:srgbClr val="666666"/>
-                      </a:solidFill>
-                      <a:prstDash val="solid"/>
-                      <a:round/>
-                      <a:headEnd type="none" w="med" len="med"/>
-                      <a:tailEnd type="none" w="med" len="med"/>
-                    </a:lnB>
-                  </a:tcPr>
-                </a:tc>
-                <a:tc>
-                  <a:txBody>
-                    <a:bodyPr/>
-                    <a:lstStyle/>
-                    <a:p>
-                      <a:pPr indent="0" marL="0">
-                        <a:buNone/>
-                      </a:pPr>
-                      <a:r>
-                        <a:rPr lang="en-US" sz="700" dirty="0">
-                          <a:solidFill>
-                            <a:srgbClr val="334155"/>
-                          </a:solidFill>
-                          <a:latin typeface="Arial" pitchFamily="34" charset="0"/>
-                          <a:ea typeface="Arial" pitchFamily="34" charset="-122"/>
-                          <a:cs typeface="Arial" pitchFamily="34" charset="-120"/>
-                        </a:rPr>
-                        <a:t>不超过12:00</a:t>
-                      </a:r>
-                      <a:endParaRPr lang="en-US" sz="700" dirty="0">
-                        <a:latin typeface="Arial" charset="0"/>
-                        <a:ea typeface="Arial" charset="0"/>
-                        <a:cs typeface="Arial" charset="0"/>
-                      </a:endParaRPr>
-                    </a:p>
-                  </a:txBody>
-                  <a:tcPr marL="38100" marR="38100" marT="25400" marB="25400">
-                    <a:lnL w="6350" cap="flat" cmpd="sng" algn="ctr">
-                      <a:solidFill>
-                        <a:srgbClr val="666666"/>
-                      </a:solidFill>
-                      <a:prstDash val="solid"/>
-                      <a:round/>
-                      <a:headEnd type="none" w="med" len="med"/>
-                      <a:tailEnd type="none" w="med" len="med"/>
-                    </a:lnL>
-                    <a:lnR w="6350" cap="flat" cmpd="sng" algn="ctr">
-                      <a:solidFill>
-                        <a:srgbClr val="666666"/>
-                      </a:solidFill>
-                      <a:prstDash val="solid"/>
-                      <a:round/>
-                      <a:headEnd type="none" w="med" len="med"/>
-                      <a:tailEnd type="none" w="med" len="med"/>
-                    </a:lnR>
-                    <a:lnT w="6350" cap="flat" cmpd="sng" algn="ctr">
-                      <a:solidFill>
-                        <a:srgbClr val="666666"/>
-                      </a:solidFill>
-                      <a:prstDash val="solid"/>
-                      <a:round/>
-                      <a:headEnd type="none" w="med" len="med"/>
-                      <a:tailEnd type="none" w="med" len="med"/>
-                    </a:lnT>
-                    <a:lnB w="6350" cap="flat" cmpd="sng" algn="ctr">
-                      <a:solidFill>
-                        <a:srgbClr val="666666"/>
-                      </a:solidFill>
-                      <a:prstDash val="solid"/>
-                      <a:round/>
-                      <a:headEnd type="none" w="med" len="med"/>
-                      <a:tailEnd type="none" w="med" len="med"/>
-                    </a:lnB>
-                  </a:tcPr>
-                </a:tc>
-                <a:tc>
-                  <a:txBody>
-                    <a:bodyPr/>
-                    <a:lstStyle/>
-                    <a:p>
-                      <a:pPr indent="0" marL="0">
-                        <a:buNone/>
-                      </a:pPr>
-                      <a:r>
-                        <a:rPr lang="en-US" sz="700" b="1" dirty="0">
-                          <a:solidFill>
-                            <a:srgbClr val="334155"/>
-                          </a:solidFill>
-                          <a:latin typeface="Arial" pitchFamily="34" charset="0"/>
-                          <a:ea typeface="Arial" pitchFamily="34" charset="-122"/>
-                          <a:cs typeface="Arial" pitchFamily="34" charset="-120"/>
-                        </a:rPr>
-                        <a:t>演示+演练</a:t>
-                      </a:r>
-                      <a:endParaRPr lang="en-US" sz="700" dirty="0">
-                        <a:latin typeface="Arial" charset="0"/>
-                        <a:ea typeface="Arial" charset="0"/>
-                        <a:cs typeface="Arial" charset="0"/>
-                      </a:endParaRPr>
-                    </a:p>
-                  </a:txBody>
-                  <a:tcPr marL="38100" marR="38100" marT="25400" marB="25400">
-                    <a:lnL w="6350" cap="flat" cmpd="sng" algn="ctr">
-                      <a:solidFill>
-                        <a:srgbClr val="666666"/>
-                      </a:solidFill>
-                      <a:prstDash val="solid"/>
-                      <a:round/>
-                      <a:headEnd type="none" w="med" len="med"/>
-                      <a:tailEnd type="none" w="med" len="med"/>
-                    </a:lnL>
-                    <a:lnR w="6350" cap="flat" cmpd="sng" algn="ctr">
-                      <a:solidFill>
-                        <a:srgbClr val="666666"/>
-                      </a:solidFill>
-                      <a:prstDash val="solid"/>
-                      <a:round/>
-                      <a:headEnd type="none" w="med" len="med"/>
-                      <a:tailEnd type="none" w="med" len="med"/>
-                    </a:lnR>
-                    <a:lnT w="6350" cap="flat" cmpd="sng" algn="ctr">
-                      <a:solidFill>
-                        <a:srgbClr val="666666"/>
-                      </a:solidFill>
-                      <a:prstDash val="solid"/>
-                      <a:round/>
-                      <a:headEnd type="none" w="med" len="med"/>
-                      <a:tailEnd type="none" w="med" len="med"/>
-                    </a:lnT>
-                    <a:lnB w="6350" cap="flat" cmpd="sng" algn="ctr">
-                      <a:solidFill>
-                        <a:srgbClr val="666666"/>
-                      </a:solidFill>
-                      <a:prstDash val="solid"/>
-                      <a:round/>
-                      <a:headEnd type="none" w="med" len="med"/>
-                      <a:tailEnd type="none" w="med" len="med"/>
-                    </a:lnB>
-                  </a:tcPr>
-                </a:tc>
-                <a:tc>
-                  <a:txBody>
-                    <a:bodyPr/>
-                    <a:lstStyle/>
-                    <a:p>
-                      <a:pPr indent="0" marL="0">
-                        <a:buNone/>
-                      </a:pPr>
-                      <a:r>
-                        <a:rPr lang="en-US" sz="700" dirty="0">
-                          <a:solidFill>
-                            <a:srgbClr val="334155"/>
-                          </a:solidFill>
-                          <a:latin typeface="Arial" pitchFamily="34" charset="0"/>
-                          <a:ea typeface="Arial" pitchFamily="34" charset="-122"/>
-                          <a:cs typeface="Arial" pitchFamily="34" charset="-120"/>
-                        </a:rPr>
-                        <a:t>下午进行</a:t>
-                      </a:r>
-                      <a:endParaRPr lang="en-US" sz="700" dirty="0">
+                      <a:endParaRPr lang="en-US" sz="650" dirty="0">
                         <a:latin typeface="Arial" charset="0"/>
                         <a:ea typeface="Arial" charset="0"/>
                         <a:cs typeface="Arial" charset="0"/>
@@ -18984,12 +18694,12 @@
         </p:nvSpPr>
         <p:spPr>
           <a:xfrm>
-            <a:off x="457200" y="4434840"/>
-            <a:ext cx="11064240" cy="274320"/>
+            <a:off x="1979676" y="4069080"/>
+            <a:ext cx="8229600" cy="256032"/>
           </a:xfrm>
           <a:prstGeom prst="roundRect">
             <a:avLst>
-              <a:gd name="adj" fmla="val 26667"/>
+              <a:gd name="adj" fmla="val 21429"/>
             </a:avLst>
           </a:prstGeom>
           <a:solidFill>
@@ -19011,8 +18721,8 @@
         </p:nvSpPr>
         <p:spPr>
           <a:xfrm>
-            <a:off x="640080" y="4443984"/>
-            <a:ext cx="10698480" cy="256032"/>
+            <a:off x="2116836" y="4078224"/>
+            <a:ext cx="7955280" cy="237744"/>
           </a:xfrm>
           <a:prstGeom prst="rect">
             <a:avLst/>
@@ -19028,14 +18738,14 @@
               <a:buNone/>
             </a:pPr>
             <a:r>
-              <a:rPr lang="en-US" sz="1000" b="1" dirty="0">
+              <a:rPr lang="en-US" sz="900" b="1" dirty="0">
                 <a:solidFill>
                   <a:srgbClr val="2563EB"/>
                 </a:solidFill>
               </a:rPr>
               <a:t>上午讲座(到12:00)  下午先演示后演练  Workshop紧跟对应模块</a:t>
             </a:r>
-            <a:endParaRPr lang="en-US" sz="1000" dirty="0"/>
+            <a:endParaRPr lang="en-US" sz="900" dirty="0"/>
           </a:p>
         </p:txBody>
       </p:sp>

--- a/docs/AI-Native-训战营-介绍与日程.pptx
+++ b/docs/AI-Native-训战营-介绍与日程.pptx
@@ -1328,7 +1328,7 @@
         </p:nvSpPr>
         <p:spPr>
           <a:xfrm>
-            <a:off x="1979676" y="4892040"/>
+            <a:off x="1260043" y="4892040"/>
             <a:ext cx="8229600" cy="27432"/>
           </a:xfrm>
           <a:prstGeom prst="rect">
@@ -1348,7 +1348,7 @@
         </p:nvSpPr>
         <p:spPr>
           <a:xfrm>
-            <a:off x="1979676" y="4983480"/>
+            <a:off x="1260043" y="4983480"/>
             <a:ext cx="8229600" cy="182880"/>
           </a:xfrm>
           <a:prstGeom prst="rect">
@@ -1384,7 +1384,7 @@
         </p:nvSpPr>
         <p:spPr>
           <a:xfrm>
-            <a:off x="1979676" y="594360"/>
+            <a:off x="1260043" y="594360"/>
             <a:ext cx="1389888" cy="182880"/>
           </a:xfrm>
           <a:prstGeom prst="roundRect">
@@ -1406,7 +1406,7 @@
         </p:nvSpPr>
         <p:spPr>
           <a:xfrm>
-            <a:off x="1979676" y="594360"/>
+            <a:off x="1260043" y="594360"/>
             <a:ext cx="1389888" cy="182880"/>
           </a:xfrm>
           <a:prstGeom prst="rect">
@@ -1445,7 +1445,7 @@
         </p:nvSpPr>
         <p:spPr>
           <a:xfrm>
-            <a:off x="3991356" y="594360"/>
+            <a:off x="3271723" y="594360"/>
             <a:ext cx="1271016" cy="182880"/>
           </a:xfrm>
           <a:prstGeom prst="roundRect">
@@ -1467,7 +1467,7 @@
         </p:nvSpPr>
         <p:spPr>
           <a:xfrm>
-            <a:off x="3991356" y="594360"/>
+            <a:off x="3271723" y="594360"/>
             <a:ext cx="1271016" cy="182880"/>
           </a:xfrm>
           <a:prstGeom prst="rect">
@@ -1506,7 +1506,7 @@
         </p:nvSpPr>
         <p:spPr>
           <a:xfrm>
-            <a:off x="1979676" y="1005840"/>
+            <a:off x="1260043" y="1005840"/>
             <a:ext cx="8229600" cy="548640"/>
           </a:xfrm>
           <a:prstGeom prst="rect">
@@ -1545,7 +1545,7 @@
         </p:nvSpPr>
         <p:spPr>
           <a:xfrm>
-            <a:off x="1979676" y="1508760"/>
+            <a:off x="1260043" y="1508760"/>
             <a:ext cx="8229600" cy="548640"/>
           </a:xfrm>
           <a:prstGeom prst="rect">
@@ -1584,7 +1584,7 @@
         </p:nvSpPr>
         <p:spPr>
           <a:xfrm>
-            <a:off x="1979676" y="2057400"/>
+            <a:off x="1260043" y="2057400"/>
             <a:ext cx="8229600" cy="228600"/>
           </a:xfrm>
           <a:prstGeom prst="rect">
@@ -1620,7 +1620,7 @@
         </p:nvSpPr>
         <p:spPr>
           <a:xfrm>
-            <a:off x="1979676" y="2423160"/>
+            <a:off x="1260043" y="2423160"/>
             <a:ext cx="8229600" cy="457200"/>
           </a:xfrm>
           <a:prstGeom prst="roundRect">
@@ -1647,7 +1647,7 @@
         </p:nvSpPr>
         <p:spPr>
           <a:xfrm>
-            <a:off x="2208276" y="2450592"/>
+            <a:off x="1488643" y="2450592"/>
             <a:ext cx="7772400" cy="402336"/>
           </a:xfrm>
           <a:prstGeom prst="rect">
@@ -1683,7 +1683,7 @@
         </p:nvSpPr>
         <p:spPr>
           <a:xfrm>
-            <a:off x="1979676" y="3063240"/>
+            <a:off x="1260043" y="3063240"/>
             <a:ext cx="2651760" cy="914400"/>
           </a:xfrm>
           <a:prstGeom prst="roundRect">
@@ -1710,7 +1710,7 @@
         </p:nvSpPr>
         <p:spPr>
           <a:xfrm>
-            <a:off x="2052828" y="3090672"/>
+            <a:off x="1333195" y="3090672"/>
             <a:ext cx="2505456" cy="182880"/>
           </a:xfrm>
           <a:prstGeom prst="rect">
@@ -1749,7 +1749,7 @@
         </p:nvSpPr>
         <p:spPr>
           <a:xfrm>
-            <a:off x="2052828" y="3273552"/>
+            <a:off x="1333195" y="3273552"/>
             <a:ext cx="2505456" cy="676656"/>
           </a:xfrm>
           <a:prstGeom prst="rect">
@@ -1822,7 +1822,7 @@
         </p:nvSpPr>
         <p:spPr>
           <a:xfrm>
-            <a:off x="4768596" y="3063240"/>
+            <a:off x="4048963" y="3063240"/>
             <a:ext cx="2651760" cy="914400"/>
           </a:xfrm>
           <a:prstGeom prst="roundRect">
@@ -1849,7 +1849,7 @@
         </p:nvSpPr>
         <p:spPr>
           <a:xfrm>
-            <a:off x="4841748" y="3090672"/>
+            <a:off x="4122115" y="3090672"/>
             <a:ext cx="2505456" cy="182880"/>
           </a:xfrm>
           <a:prstGeom prst="rect">
@@ -1888,7 +1888,7 @@
         </p:nvSpPr>
         <p:spPr>
           <a:xfrm>
-            <a:off x="4841748" y="3273552"/>
+            <a:off x="4122115" y="3273552"/>
             <a:ext cx="2505456" cy="676656"/>
           </a:xfrm>
           <a:prstGeom prst="rect">
@@ -1961,7 +1961,7 @@
         </p:nvSpPr>
         <p:spPr>
           <a:xfrm>
-            <a:off x="7557516" y="3063240"/>
+            <a:off x="6837883" y="3063240"/>
             <a:ext cx="2651760" cy="914400"/>
           </a:xfrm>
           <a:prstGeom prst="roundRect">
@@ -1988,7 +1988,7 @@
         </p:nvSpPr>
         <p:spPr>
           <a:xfrm>
-            <a:off x="7630668" y="3090672"/>
+            <a:off x="6911035" y="3090672"/>
             <a:ext cx="2505456" cy="182880"/>
           </a:xfrm>
           <a:prstGeom prst="rect">
@@ -2027,7 +2027,7 @@
         </p:nvSpPr>
         <p:spPr>
           <a:xfrm>
-            <a:off x="7630668" y="3273552"/>
+            <a:off x="6911035" y="3273552"/>
             <a:ext cx="2505456" cy="676656"/>
           </a:xfrm>
           <a:prstGeom prst="rect">
@@ -2132,7 +2132,7 @@
         </p:nvSpPr>
         <p:spPr>
           <a:xfrm>
-            <a:off x="1979676" y="4892040"/>
+            <a:off x="1260043" y="4892040"/>
             <a:ext cx="8229600" cy="27432"/>
           </a:xfrm>
           <a:prstGeom prst="rect">
@@ -2152,7 +2152,7 @@
         </p:nvSpPr>
         <p:spPr>
           <a:xfrm>
-            <a:off x="1979676" y="4983480"/>
+            <a:off x="1260043" y="4983480"/>
             <a:ext cx="8229600" cy="182880"/>
           </a:xfrm>
           <a:prstGeom prst="rect">
@@ -2188,7 +2188,7 @@
         </p:nvSpPr>
         <p:spPr>
           <a:xfrm>
-            <a:off x="1979676" y="137160"/>
+            <a:off x="1260043" y="137160"/>
             <a:ext cx="8229600" cy="365760"/>
           </a:xfrm>
           <a:prstGeom prst="rect">
@@ -2227,7 +2227,7 @@
         </p:nvSpPr>
         <p:spPr>
           <a:xfrm>
-            <a:off x="1979676" y="502920"/>
+            <a:off x="1260043" y="502920"/>
             <a:ext cx="914400" cy="27432"/>
           </a:xfrm>
           <a:prstGeom prst="rect">
@@ -2247,7 +2247,7 @@
         </p:nvSpPr>
         <p:spPr>
           <a:xfrm>
-            <a:off x="1979676" y="685800"/>
+            <a:off x="1260043" y="685800"/>
             <a:ext cx="1325880" cy="530352"/>
           </a:xfrm>
           <a:prstGeom prst="roundRect">
@@ -2274,7 +2274,7 @@
         </p:nvSpPr>
         <p:spPr>
           <a:xfrm>
-            <a:off x="1979676" y="694944"/>
+            <a:off x="1260043" y="694944"/>
             <a:ext cx="1325880" cy="164592"/>
           </a:xfrm>
           <a:prstGeom prst="rect">
@@ -2313,7 +2313,7 @@
         </p:nvSpPr>
         <p:spPr>
           <a:xfrm>
-            <a:off x="1979676" y="850392"/>
+            <a:off x="1260043" y="850392"/>
             <a:ext cx="1325880" cy="164592"/>
           </a:xfrm>
           <a:prstGeom prst="rect">
@@ -2352,7 +2352,7 @@
         </p:nvSpPr>
         <p:spPr>
           <a:xfrm>
-            <a:off x="1979676" y="1005840"/>
+            <a:off x="1260043" y="1005840"/>
             <a:ext cx="1325880" cy="146304"/>
           </a:xfrm>
           <a:prstGeom prst="rect">
@@ -2388,7 +2388,7 @@
         </p:nvSpPr>
         <p:spPr>
           <a:xfrm>
-            <a:off x="3360420" y="685800"/>
+            <a:off x="2640787" y="685800"/>
             <a:ext cx="1325880" cy="530352"/>
           </a:xfrm>
           <a:prstGeom prst="roundRect">
@@ -2415,7 +2415,7 @@
         </p:nvSpPr>
         <p:spPr>
           <a:xfrm>
-            <a:off x="3360420" y="694944"/>
+            <a:off x="2640787" y="694944"/>
             <a:ext cx="1325880" cy="164592"/>
           </a:xfrm>
           <a:prstGeom prst="rect">
@@ -2454,7 +2454,7 @@
         </p:nvSpPr>
         <p:spPr>
           <a:xfrm>
-            <a:off x="3360420" y="850392"/>
+            <a:off x="2640787" y="850392"/>
             <a:ext cx="1325880" cy="164592"/>
           </a:xfrm>
           <a:prstGeom prst="rect">
@@ -2493,7 +2493,7 @@
         </p:nvSpPr>
         <p:spPr>
           <a:xfrm>
-            <a:off x="3360420" y="1005840"/>
+            <a:off x="2640787" y="1005840"/>
             <a:ext cx="1325880" cy="146304"/>
           </a:xfrm>
           <a:prstGeom prst="rect">
@@ -2529,7 +2529,7 @@
         </p:nvSpPr>
         <p:spPr>
           <a:xfrm>
-            <a:off x="4741164" y="685800"/>
+            <a:off x="4021531" y="685800"/>
             <a:ext cx="1325880" cy="530352"/>
           </a:xfrm>
           <a:prstGeom prst="roundRect">
@@ -2556,7 +2556,7 @@
         </p:nvSpPr>
         <p:spPr>
           <a:xfrm>
-            <a:off x="4741164" y="694944"/>
+            <a:off x="4021531" y="694944"/>
             <a:ext cx="1325880" cy="164592"/>
           </a:xfrm>
           <a:prstGeom prst="rect">
@@ -2595,7 +2595,7 @@
         </p:nvSpPr>
         <p:spPr>
           <a:xfrm>
-            <a:off x="4741164" y="850392"/>
+            <a:off x="4021531" y="850392"/>
             <a:ext cx="1325880" cy="164592"/>
           </a:xfrm>
           <a:prstGeom prst="rect">
@@ -2634,7 +2634,7 @@
         </p:nvSpPr>
         <p:spPr>
           <a:xfrm>
-            <a:off x="4741164" y="1005840"/>
+            <a:off x="4021531" y="1005840"/>
             <a:ext cx="1325880" cy="146304"/>
           </a:xfrm>
           <a:prstGeom prst="rect">
@@ -2670,7 +2670,7 @@
         </p:nvSpPr>
         <p:spPr>
           <a:xfrm>
-            <a:off x="6121908" y="685800"/>
+            <a:off x="5402275" y="685800"/>
             <a:ext cx="1325880" cy="530352"/>
           </a:xfrm>
           <a:prstGeom prst="roundRect">
@@ -2697,7 +2697,7 @@
         </p:nvSpPr>
         <p:spPr>
           <a:xfrm>
-            <a:off x="6121908" y="694944"/>
+            <a:off x="5402275" y="694944"/>
             <a:ext cx="1325880" cy="164592"/>
           </a:xfrm>
           <a:prstGeom prst="rect">
@@ -2736,7 +2736,7 @@
         </p:nvSpPr>
         <p:spPr>
           <a:xfrm>
-            <a:off x="6121908" y="850392"/>
+            <a:off x="5402275" y="850392"/>
             <a:ext cx="1325880" cy="164592"/>
           </a:xfrm>
           <a:prstGeom prst="rect">
@@ -2775,7 +2775,7 @@
         </p:nvSpPr>
         <p:spPr>
           <a:xfrm>
-            <a:off x="6121908" y="1005840"/>
+            <a:off x="5402275" y="1005840"/>
             <a:ext cx="1325880" cy="146304"/>
           </a:xfrm>
           <a:prstGeom prst="rect">
@@ -2811,7 +2811,7 @@
         </p:nvSpPr>
         <p:spPr>
           <a:xfrm>
-            <a:off x="7502652" y="685800"/>
+            <a:off x="6783019" y="685800"/>
             <a:ext cx="1325880" cy="530352"/>
           </a:xfrm>
           <a:prstGeom prst="roundRect">
@@ -2838,7 +2838,7 @@
         </p:nvSpPr>
         <p:spPr>
           <a:xfrm>
-            <a:off x="7502652" y="694944"/>
+            <a:off x="6783019" y="694944"/>
             <a:ext cx="1325880" cy="164592"/>
           </a:xfrm>
           <a:prstGeom prst="rect">
@@ -2877,7 +2877,7 @@
         </p:nvSpPr>
         <p:spPr>
           <a:xfrm>
-            <a:off x="7502652" y="850392"/>
+            <a:off x="6783019" y="850392"/>
             <a:ext cx="1325880" cy="164592"/>
           </a:xfrm>
           <a:prstGeom prst="rect">
@@ -2916,7 +2916,7 @@
         </p:nvSpPr>
         <p:spPr>
           <a:xfrm>
-            <a:off x="7502652" y="1005840"/>
+            <a:off x="6783019" y="1005840"/>
             <a:ext cx="1325880" cy="146304"/>
           </a:xfrm>
           <a:prstGeom prst="rect">
@@ -2952,7 +2952,7 @@
         </p:nvSpPr>
         <p:spPr>
           <a:xfrm>
-            <a:off x="8883396" y="685800"/>
+            <a:off x="8163763" y="685800"/>
             <a:ext cx="1325880" cy="530352"/>
           </a:xfrm>
           <a:prstGeom prst="roundRect">
@@ -2979,7 +2979,7 @@
         </p:nvSpPr>
         <p:spPr>
           <a:xfrm>
-            <a:off x="8883396" y="694944"/>
+            <a:off x="8163763" y="694944"/>
             <a:ext cx="1325880" cy="164592"/>
           </a:xfrm>
           <a:prstGeom prst="rect">
@@ -3018,7 +3018,7 @@
         </p:nvSpPr>
         <p:spPr>
           <a:xfrm>
-            <a:off x="8883396" y="850392"/>
+            <a:off x="8163763" y="850392"/>
             <a:ext cx="1325880" cy="164592"/>
           </a:xfrm>
           <a:prstGeom prst="rect">
@@ -3057,7 +3057,7 @@
         </p:nvSpPr>
         <p:spPr>
           <a:xfrm>
-            <a:off x="8883396" y="1005840"/>
+            <a:off x="8163763" y="1005840"/>
             <a:ext cx="1325880" cy="146304"/>
           </a:xfrm>
           <a:prstGeom prst="rect">
@@ -3093,7 +3093,7 @@
         </p:nvSpPr>
         <p:spPr>
           <a:xfrm>
-            <a:off x="1979676" y="1371600"/>
+            <a:off x="1260043" y="1371600"/>
             <a:ext cx="4046220" cy="182880"/>
           </a:xfrm>
           <a:prstGeom prst="rect">
@@ -3129,7 +3129,7 @@
         </p:nvSpPr>
         <p:spPr>
           <a:xfrm>
-            <a:off x="1979676" y="1600200"/>
+            <a:off x="1260043" y="1600200"/>
             <a:ext cx="4046220" cy="411480"/>
           </a:xfrm>
           <a:prstGeom prst="roundRect">
@@ -3156,7 +3156,7 @@
         </p:nvSpPr>
         <p:spPr>
           <a:xfrm>
-            <a:off x="1979676" y="1600200"/>
+            <a:off x="1260043" y="1600200"/>
             <a:ext cx="4046220" cy="411480"/>
           </a:xfrm>
           <a:prstGeom prst="rect">
@@ -3206,7 +3206,7 @@
         </p:nvSpPr>
         <p:spPr>
           <a:xfrm>
-            <a:off x="6163056" y="1600200"/>
+            <a:off x="5443423" y="1600200"/>
             <a:ext cx="4046220" cy="411480"/>
           </a:xfrm>
           <a:prstGeom prst="roundRect">
@@ -3233,7 +3233,7 @@
         </p:nvSpPr>
         <p:spPr>
           <a:xfrm>
-            <a:off x="6163056" y="1600200"/>
+            <a:off x="5443423" y="1600200"/>
             <a:ext cx="4046220" cy="411480"/>
           </a:xfrm>
           <a:prstGeom prst="rect">
@@ -3283,7 +3283,7 @@
         </p:nvSpPr>
         <p:spPr>
           <a:xfrm>
-            <a:off x="1979676" y="2148840"/>
+            <a:off x="1260043" y="2148840"/>
             <a:ext cx="4046220" cy="182880"/>
           </a:xfrm>
           <a:prstGeom prst="rect">
@@ -3319,7 +3319,7 @@
         </p:nvSpPr>
         <p:spPr>
           <a:xfrm>
-            <a:off x="1979676" y="2377440"/>
+            <a:off x="1260043" y="2377440"/>
             <a:ext cx="4046220" cy="411480"/>
           </a:xfrm>
           <a:prstGeom prst="roundRect">
@@ -3346,7 +3346,7 @@
         </p:nvSpPr>
         <p:spPr>
           <a:xfrm>
-            <a:off x="1979676" y="2377440"/>
+            <a:off x="1260043" y="2377440"/>
             <a:ext cx="4046220" cy="411480"/>
           </a:xfrm>
           <a:prstGeom prst="rect">
@@ -3396,7 +3396,7 @@
         </p:nvSpPr>
         <p:spPr>
           <a:xfrm>
-            <a:off x="6163056" y="2377440"/>
+            <a:off x="5443423" y="2377440"/>
             <a:ext cx="4046220" cy="411480"/>
           </a:xfrm>
           <a:prstGeom prst="roundRect">
@@ -3423,7 +3423,7 @@
         </p:nvSpPr>
         <p:spPr>
           <a:xfrm>
-            <a:off x="6163056" y="2377440"/>
+            <a:off x="5443423" y="2377440"/>
             <a:ext cx="4046220" cy="411480"/>
           </a:xfrm>
           <a:prstGeom prst="rect">
@@ -3480,7 +3480,7 @@
           </p:nvPr>
         </p:nvGraphicFramePr>
         <p:xfrm>
-          <a:off x="1979676" y="2926080"/>
+          <a:off x="1260043" y="2926080"/>
           <a:ext cx="8229600" cy="914400"/>
         </p:xfrm>
         <a:graphic>
@@ -4487,7 +4487,7 @@
         </p:nvSpPr>
         <p:spPr>
           <a:xfrm>
-            <a:off x="1979676" y="4251960"/>
+            <a:off x="1260043" y="4251960"/>
             <a:ext cx="8229600" cy="164592"/>
           </a:xfrm>
           <a:prstGeom prst="rect">
@@ -4555,7 +4555,7 @@
         </p:nvSpPr>
         <p:spPr>
           <a:xfrm>
-            <a:off x="1979676" y="4892040"/>
+            <a:off x="1260043" y="4892040"/>
             <a:ext cx="8229600" cy="27432"/>
           </a:xfrm>
           <a:prstGeom prst="rect">
@@ -4575,7 +4575,7 @@
         </p:nvSpPr>
         <p:spPr>
           <a:xfrm>
-            <a:off x="1979676" y="4983480"/>
+            <a:off x="1260043" y="4983480"/>
             <a:ext cx="8229600" cy="182880"/>
           </a:xfrm>
           <a:prstGeom prst="rect">
@@ -4611,7 +4611,7 @@
         </p:nvSpPr>
         <p:spPr>
           <a:xfrm>
-            <a:off x="1979676" y="137160"/>
+            <a:off x="1260043" y="137160"/>
             <a:ext cx="8229600" cy="365760"/>
           </a:xfrm>
           <a:prstGeom prst="rect">
@@ -4650,7 +4650,7 @@
         </p:nvSpPr>
         <p:spPr>
           <a:xfrm>
-            <a:off x="1979676" y="502920"/>
+            <a:off x="1260043" y="502920"/>
             <a:ext cx="914400" cy="27432"/>
           </a:xfrm>
           <a:prstGeom prst="rect">
@@ -4670,7 +4670,7 @@
         </p:nvSpPr>
         <p:spPr>
           <a:xfrm>
-            <a:off x="1979676" y="658368"/>
+            <a:off x="1260043" y="658368"/>
             <a:ext cx="4572000" cy="164592"/>
           </a:xfrm>
           <a:prstGeom prst="rect">
@@ -4713,7 +4713,7 @@
           </p:nvPr>
         </p:nvGraphicFramePr>
         <p:xfrm>
-          <a:off x="1979676" y="868680"/>
+          <a:off x="1260043" y="868680"/>
           <a:ext cx="8229600" cy="914400"/>
         </p:xfrm>
         <a:graphic>
@@ -5720,7 +5720,7 @@
         </p:nvSpPr>
         <p:spPr>
           <a:xfrm>
-            <a:off x="1979676" y="2194560"/>
+            <a:off x="1260043" y="2194560"/>
             <a:ext cx="4572000" cy="164592"/>
           </a:xfrm>
           <a:prstGeom prst="rect">
@@ -5763,7 +5763,7 @@
           </p:nvPr>
         </p:nvGraphicFramePr>
         <p:xfrm>
-          <a:off x="1979676" y="2404872"/>
+          <a:off x="1260043" y="2404872"/>
           <a:ext cx="8229600" cy="914400"/>
         </p:xfrm>
         <a:graphic>
@@ -7194,7 +7194,7 @@
         </p:nvSpPr>
         <p:spPr>
           <a:xfrm>
-            <a:off x="1979676" y="4892040"/>
+            <a:off x="1260043" y="4892040"/>
             <a:ext cx="8229600" cy="27432"/>
           </a:xfrm>
           <a:prstGeom prst="rect">
@@ -7214,7 +7214,7 @@
         </p:nvSpPr>
         <p:spPr>
           <a:xfrm>
-            <a:off x="1979676" y="4983480"/>
+            <a:off x="1260043" y="4983480"/>
             <a:ext cx="8229600" cy="182880"/>
           </a:xfrm>
           <a:prstGeom prst="rect">
@@ -7250,7 +7250,7 @@
         </p:nvSpPr>
         <p:spPr>
           <a:xfrm>
-            <a:off x="1979676" y="137160"/>
+            <a:off x="1260043" y="137160"/>
             <a:ext cx="8229600" cy="365760"/>
           </a:xfrm>
           <a:prstGeom prst="rect">
@@ -7289,7 +7289,7 @@
         </p:nvSpPr>
         <p:spPr>
           <a:xfrm>
-            <a:off x="1979676" y="502920"/>
+            <a:off x="1260043" y="502920"/>
             <a:ext cx="914400" cy="27432"/>
           </a:xfrm>
           <a:prstGeom prst="rect">
@@ -7309,7 +7309,7 @@
         </p:nvSpPr>
         <p:spPr>
           <a:xfrm>
-            <a:off x="1979676" y="658368"/>
+            <a:off x="1260043" y="658368"/>
             <a:ext cx="4572000" cy="164592"/>
           </a:xfrm>
           <a:prstGeom prst="rect">
@@ -7352,7 +7352,7 @@
           </p:nvPr>
         </p:nvGraphicFramePr>
         <p:xfrm>
-          <a:off x="1979676" y="868680"/>
+          <a:off x="1260043" y="868680"/>
           <a:ext cx="8229600" cy="914400"/>
         </p:xfrm>
         <a:graphic>
@@ -8162,7 +8162,7 @@
         </p:nvSpPr>
         <p:spPr>
           <a:xfrm>
-            <a:off x="1979676" y="1965960"/>
+            <a:off x="1260043" y="1965960"/>
             <a:ext cx="4572000" cy="164592"/>
           </a:xfrm>
           <a:prstGeom prst="rect">
@@ -8205,7 +8205,7 @@
           </p:nvPr>
         </p:nvGraphicFramePr>
         <p:xfrm>
-          <a:off x="1979676" y="2176272"/>
+          <a:off x="1260043" y="2176272"/>
           <a:ext cx="8229600" cy="914400"/>
         </p:xfrm>
         <a:graphic>
@@ -9650,7 +9650,7 @@
         </p:nvSpPr>
         <p:spPr>
           <a:xfrm>
-            <a:off x="1979676" y="4892040"/>
+            <a:off x="1260043" y="4892040"/>
             <a:ext cx="8229600" cy="27432"/>
           </a:xfrm>
           <a:prstGeom prst="rect">
@@ -9670,7 +9670,7 @@
         </p:nvSpPr>
         <p:spPr>
           <a:xfrm>
-            <a:off x="1979676" y="4983480"/>
+            <a:off x="1260043" y="4983480"/>
             <a:ext cx="8229600" cy="182880"/>
           </a:xfrm>
           <a:prstGeom prst="rect">
@@ -9706,7 +9706,7 @@
         </p:nvSpPr>
         <p:spPr>
           <a:xfrm>
-            <a:off x="1979676" y="137160"/>
+            <a:off x="1260043" y="137160"/>
             <a:ext cx="8229600" cy="365760"/>
           </a:xfrm>
           <a:prstGeom prst="rect">
@@ -9745,7 +9745,7 @@
         </p:nvSpPr>
         <p:spPr>
           <a:xfrm>
-            <a:off x="1979676" y="502920"/>
+            <a:off x="1260043" y="502920"/>
             <a:ext cx="914400" cy="27432"/>
           </a:xfrm>
           <a:prstGeom prst="rect">
@@ -9765,7 +9765,7 @@
         </p:nvSpPr>
         <p:spPr>
           <a:xfrm>
-            <a:off x="1979676" y="658368"/>
+            <a:off x="1260043" y="658368"/>
             <a:ext cx="2670048" cy="777240"/>
           </a:xfrm>
           <a:prstGeom prst="roundRect">
@@ -9792,7 +9792,7 @@
         </p:nvSpPr>
         <p:spPr>
           <a:xfrm>
-            <a:off x="2052828" y="685800"/>
+            <a:off x="1333195" y="685800"/>
             <a:ext cx="2523744" cy="182880"/>
           </a:xfrm>
           <a:prstGeom prst="rect">
@@ -9831,7 +9831,7 @@
         </p:nvSpPr>
         <p:spPr>
           <a:xfrm>
-            <a:off x="2052828" y="868680"/>
+            <a:off x="1333195" y="868680"/>
             <a:ext cx="2523744" cy="539496"/>
           </a:xfrm>
           <a:prstGeom prst="rect">
@@ -9887,7 +9887,7 @@
         </p:nvSpPr>
         <p:spPr>
           <a:xfrm>
-            <a:off x="4759452" y="658368"/>
+            <a:off x="4039819" y="658368"/>
             <a:ext cx="2670048" cy="777240"/>
           </a:xfrm>
           <a:prstGeom prst="roundRect">
@@ -9914,7 +9914,7 @@
         </p:nvSpPr>
         <p:spPr>
           <a:xfrm>
-            <a:off x="4832604" y="685800"/>
+            <a:off x="4112971" y="685800"/>
             <a:ext cx="2523744" cy="182880"/>
           </a:xfrm>
           <a:prstGeom prst="rect">
@@ -9953,7 +9953,7 @@
         </p:nvSpPr>
         <p:spPr>
           <a:xfrm>
-            <a:off x="4832604" y="868680"/>
+            <a:off x="4112971" y="868680"/>
             <a:ext cx="2523744" cy="539496"/>
           </a:xfrm>
           <a:prstGeom prst="rect">
@@ -10009,7 +10009,7 @@
         </p:nvSpPr>
         <p:spPr>
           <a:xfrm>
-            <a:off x="7539228" y="658368"/>
+            <a:off x="6819595" y="658368"/>
             <a:ext cx="2670048" cy="777240"/>
           </a:xfrm>
           <a:prstGeom prst="roundRect">
@@ -10036,7 +10036,7 @@
         </p:nvSpPr>
         <p:spPr>
           <a:xfrm>
-            <a:off x="7612380" y="685800"/>
+            <a:off x="6892747" y="685800"/>
             <a:ext cx="2523744" cy="182880"/>
           </a:xfrm>
           <a:prstGeom prst="rect">
@@ -10075,7 +10075,7 @@
         </p:nvSpPr>
         <p:spPr>
           <a:xfrm>
-            <a:off x="7612380" y="868680"/>
+            <a:off x="6892747" y="868680"/>
             <a:ext cx="2523744" cy="539496"/>
           </a:xfrm>
           <a:prstGeom prst="rect">
@@ -10131,7 +10131,7 @@
         </p:nvSpPr>
         <p:spPr>
           <a:xfrm>
-            <a:off x="1979676" y="1527048"/>
+            <a:off x="1260043" y="1527048"/>
             <a:ext cx="2670048" cy="777240"/>
           </a:xfrm>
           <a:prstGeom prst="roundRect">
@@ -10158,7 +10158,7 @@
         </p:nvSpPr>
         <p:spPr>
           <a:xfrm>
-            <a:off x="2052828" y="1554480"/>
+            <a:off x="1333195" y="1554480"/>
             <a:ext cx="2523744" cy="182880"/>
           </a:xfrm>
           <a:prstGeom prst="rect">
@@ -10197,7 +10197,7 @@
         </p:nvSpPr>
         <p:spPr>
           <a:xfrm>
-            <a:off x="2052828" y="1737360"/>
+            <a:off x="1333195" y="1737360"/>
             <a:ext cx="2523744" cy="539496"/>
           </a:xfrm>
           <a:prstGeom prst="rect">
@@ -10253,7 +10253,7 @@
         </p:nvSpPr>
         <p:spPr>
           <a:xfrm>
-            <a:off x="4759452" y="1527048"/>
+            <a:off x="4039819" y="1527048"/>
             <a:ext cx="2670048" cy="777240"/>
           </a:xfrm>
           <a:prstGeom prst="roundRect">
@@ -10280,7 +10280,7 @@
         </p:nvSpPr>
         <p:spPr>
           <a:xfrm>
-            <a:off x="4832604" y="1554480"/>
+            <a:off x="4112971" y="1554480"/>
             <a:ext cx="2523744" cy="182880"/>
           </a:xfrm>
           <a:prstGeom prst="rect">
@@ -10319,7 +10319,7 @@
         </p:nvSpPr>
         <p:spPr>
           <a:xfrm>
-            <a:off x="4832604" y="1737360"/>
+            <a:off x="4112971" y="1737360"/>
             <a:ext cx="2523744" cy="539496"/>
           </a:xfrm>
           <a:prstGeom prst="rect">
@@ -10375,7 +10375,7 @@
         </p:nvSpPr>
         <p:spPr>
           <a:xfrm>
-            <a:off x="7539228" y="1527048"/>
+            <a:off x="6819595" y="1527048"/>
             <a:ext cx="2670048" cy="777240"/>
           </a:xfrm>
           <a:prstGeom prst="roundRect">
@@ -10402,7 +10402,7 @@
         </p:nvSpPr>
         <p:spPr>
           <a:xfrm>
-            <a:off x="7612380" y="1554480"/>
+            <a:off x="6892747" y="1554480"/>
             <a:ext cx="2523744" cy="182880"/>
           </a:xfrm>
           <a:prstGeom prst="rect">
@@ -10441,7 +10441,7 @@
         </p:nvSpPr>
         <p:spPr>
           <a:xfrm>
-            <a:off x="7612380" y="1737360"/>
+            <a:off x="6892747" y="1737360"/>
             <a:ext cx="2523744" cy="539496"/>
           </a:xfrm>
           <a:prstGeom prst="rect">
@@ -10497,7 +10497,7 @@
         </p:nvSpPr>
         <p:spPr>
           <a:xfrm>
-            <a:off x="1979676" y="2395728"/>
+            <a:off x="1260043" y="2395728"/>
             <a:ext cx="4046220" cy="164592"/>
           </a:xfrm>
           <a:prstGeom prst="rect">
@@ -10540,7 +10540,7 @@
           </p:nvPr>
         </p:nvGraphicFramePr>
         <p:xfrm>
-          <a:off x="1979676" y="2596896"/>
+          <a:off x="1260043" y="2596896"/>
           <a:ext cx="4046220" cy="914400"/>
         </p:xfrm>
         <a:graphic>
@@ -12346,7 +12346,7 @@
         </p:nvSpPr>
         <p:spPr>
           <a:xfrm>
-            <a:off x="6163056" y="2395728"/>
+            <a:off x="5443423" y="2395728"/>
             <a:ext cx="4046220" cy="164592"/>
           </a:xfrm>
           <a:prstGeom prst="rect">
@@ -12382,7 +12382,7 @@
         </p:nvSpPr>
         <p:spPr>
           <a:xfrm>
-            <a:off x="6163056" y="2596896"/>
+            <a:off x="5443423" y="2596896"/>
             <a:ext cx="4046220" cy="310896"/>
           </a:xfrm>
           <a:prstGeom prst="roundRect">
@@ -12409,7 +12409,7 @@
         </p:nvSpPr>
         <p:spPr>
           <a:xfrm>
-            <a:off x="6236208" y="2624328"/>
+            <a:off x="5516575" y="2624328"/>
             <a:ext cx="3899916" cy="182880"/>
           </a:xfrm>
           <a:prstGeom prst="rect">
@@ -12448,7 +12448,7 @@
         </p:nvSpPr>
         <p:spPr>
           <a:xfrm>
-            <a:off x="6236208" y="2807208"/>
+            <a:off x="5516575" y="2807208"/>
             <a:ext cx="3899916" cy="73152"/>
           </a:xfrm>
           <a:prstGeom prst="rect">
@@ -12487,7 +12487,7 @@
         </p:nvSpPr>
         <p:spPr>
           <a:xfrm>
-            <a:off x="6163056" y="2944368"/>
+            <a:off x="5443423" y="2944368"/>
             <a:ext cx="4046220" cy="310896"/>
           </a:xfrm>
           <a:prstGeom prst="roundRect">
@@ -12514,7 +12514,7 @@
         </p:nvSpPr>
         <p:spPr>
           <a:xfrm>
-            <a:off x="6236208" y="2971800"/>
+            <a:off x="5516575" y="2971800"/>
             <a:ext cx="3899916" cy="182880"/>
           </a:xfrm>
           <a:prstGeom prst="rect">
@@ -12553,7 +12553,7 @@
         </p:nvSpPr>
         <p:spPr>
           <a:xfrm>
-            <a:off x="6236208" y="3154680"/>
+            <a:off x="5516575" y="3154680"/>
             <a:ext cx="3899916" cy="73152"/>
           </a:xfrm>
           <a:prstGeom prst="rect">
@@ -12592,7 +12592,7 @@
         </p:nvSpPr>
         <p:spPr>
           <a:xfrm>
-            <a:off x="6163056" y="3291840"/>
+            <a:off x="5443423" y="3291840"/>
             <a:ext cx="4046220" cy="310896"/>
           </a:xfrm>
           <a:prstGeom prst="roundRect">
@@ -12619,7 +12619,7 @@
         </p:nvSpPr>
         <p:spPr>
           <a:xfrm>
-            <a:off x="6236208" y="3319272"/>
+            <a:off x="5516575" y="3319272"/>
             <a:ext cx="3899916" cy="182880"/>
           </a:xfrm>
           <a:prstGeom prst="rect">
@@ -12658,7 +12658,7 @@
         </p:nvSpPr>
         <p:spPr>
           <a:xfrm>
-            <a:off x="6236208" y="3502152"/>
+            <a:off x="5516575" y="3502152"/>
             <a:ext cx="3899916" cy="73152"/>
           </a:xfrm>
           <a:prstGeom prst="rect">
@@ -12729,7 +12729,7 @@
         </p:nvSpPr>
         <p:spPr>
           <a:xfrm>
-            <a:off x="1979676" y="4892040"/>
+            <a:off x="1260043" y="4892040"/>
             <a:ext cx="8229600" cy="27432"/>
           </a:xfrm>
           <a:prstGeom prst="rect">
@@ -12749,7 +12749,7 @@
         </p:nvSpPr>
         <p:spPr>
           <a:xfrm>
-            <a:off x="1979676" y="4983480"/>
+            <a:off x="1260043" y="4983480"/>
             <a:ext cx="8229600" cy="182880"/>
           </a:xfrm>
           <a:prstGeom prst="rect">
@@ -12785,7 +12785,7 @@
         </p:nvSpPr>
         <p:spPr>
           <a:xfrm>
-            <a:off x="1979676" y="137160"/>
+            <a:off x="1260043" y="137160"/>
             <a:ext cx="8229600" cy="365760"/>
           </a:xfrm>
           <a:prstGeom prst="rect">
@@ -12824,7 +12824,7 @@
         </p:nvSpPr>
         <p:spPr>
           <a:xfrm>
-            <a:off x="1979676" y="502920"/>
+            <a:off x="1260043" y="502920"/>
             <a:ext cx="914400" cy="27432"/>
           </a:xfrm>
           <a:prstGeom prst="rect">
@@ -12844,7 +12844,7 @@
         </p:nvSpPr>
         <p:spPr>
           <a:xfrm>
-            <a:off x="1979676" y="658368"/>
+            <a:off x="1260043" y="658368"/>
             <a:ext cx="4023360" cy="164592"/>
           </a:xfrm>
           <a:prstGeom prst="rect">
@@ -12887,7 +12887,7 @@
           </p:nvPr>
         </p:nvGraphicFramePr>
         <p:xfrm>
-          <a:off x="1979676" y="868680"/>
+          <a:off x="1260043" y="868680"/>
           <a:ext cx="4023360" cy="914400"/>
         </p:xfrm>
         <a:graphic>
@@ -15302,7 +15302,7 @@
         </p:nvSpPr>
         <p:spPr>
           <a:xfrm>
-            <a:off x="6185916" y="658368"/>
+            <a:off x="5466283" y="658368"/>
             <a:ext cx="4023360" cy="164592"/>
           </a:xfrm>
           <a:prstGeom prst="rect">
@@ -15345,7 +15345,7 @@
           </p:nvPr>
         </p:nvGraphicFramePr>
         <p:xfrm>
-          <a:off x="6185916" y="868680"/>
+          <a:off x="5466283" y="868680"/>
           <a:ext cx="4023360" cy="914400"/>
         </p:xfrm>
         <a:graphic>
@@ -17566,7 +17566,7 @@
         </p:nvSpPr>
         <p:spPr>
           <a:xfrm>
-            <a:off x="1979676" y="2880360"/>
+            <a:off x="1260043" y="2880360"/>
             <a:ext cx="8229600" cy="164592"/>
           </a:xfrm>
           <a:prstGeom prst="rect">
@@ -17609,7 +17609,7 @@
           </p:nvPr>
         </p:nvGraphicFramePr>
         <p:xfrm>
-          <a:off x="1979676" y="3063240"/>
+          <a:off x="1260043" y="3063240"/>
           <a:ext cx="8229600" cy="914400"/>
         </p:xfrm>
         <a:graphic>
@@ -18694,7 +18694,7 @@
         </p:nvSpPr>
         <p:spPr>
           <a:xfrm>
-            <a:off x="1979676" y="4069080"/>
+            <a:off x="1260043" y="4069080"/>
             <a:ext cx="8229600" cy="256032"/>
           </a:xfrm>
           <a:prstGeom prst="roundRect">
@@ -18721,7 +18721,7 @@
         </p:nvSpPr>
         <p:spPr>
           <a:xfrm>
-            <a:off x="2116836" y="4078224"/>
+            <a:off x="1397203" y="4078224"/>
             <a:ext cx="7955280" cy="237744"/>
           </a:xfrm>
           <a:prstGeom prst="rect">

--- a/docs/AI-Native-训战营-介绍与日程.pptx
+++ b/docs/AI-Native-训战营-介绍与日程.pptx
@@ -1328,7 +1328,7 @@
         </p:nvSpPr>
         <p:spPr>
           <a:xfrm>
-            <a:off x="1260043" y="4892040"/>
+            <a:off x="457200" y="4892040"/>
             <a:ext cx="8229600" cy="27432"/>
           </a:xfrm>
           <a:prstGeom prst="rect">
@@ -1348,7 +1348,7 @@
         </p:nvSpPr>
         <p:spPr>
           <a:xfrm>
-            <a:off x="1260043" y="4983480"/>
+            <a:off x="457200" y="4983480"/>
             <a:ext cx="8229600" cy="182880"/>
           </a:xfrm>
           <a:prstGeom prst="rect">
@@ -1384,7 +1384,7 @@
         </p:nvSpPr>
         <p:spPr>
           <a:xfrm>
-            <a:off x="1260043" y="594360"/>
+            <a:off x="457200" y="594360"/>
             <a:ext cx="1389888" cy="182880"/>
           </a:xfrm>
           <a:prstGeom prst="roundRect">
@@ -1406,7 +1406,7 @@
         </p:nvSpPr>
         <p:spPr>
           <a:xfrm>
-            <a:off x="1260043" y="594360"/>
+            <a:off x="457200" y="594360"/>
             <a:ext cx="1389888" cy="182880"/>
           </a:xfrm>
           <a:prstGeom prst="rect">
@@ -1445,7 +1445,7 @@
         </p:nvSpPr>
         <p:spPr>
           <a:xfrm>
-            <a:off x="3271723" y="594360"/>
+            <a:off x="2468880" y="594360"/>
             <a:ext cx="1271016" cy="182880"/>
           </a:xfrm>
           <a:prstGeom prst="roundRect">
@@ -1467,7 +1467,7 @@
         </p:nvSpPr>
         <p:spPr>
           <a:xfrm>
-            <a:off x="3271723" y="594360"/>
+            <a:off x="2468880" y="594360"/>
             <a:ext cx="1271016" cy="182880"/>
           </a:xfrm>
           <a:prstGeom prst="rect">
@@ -1506,7 +1506,7 @@
         </p:nvSpPr>
         <p:spPr>
           <a:xfrm>
-            <a:off x="1260043" y="1005840"/>
+            <a:off x="457200" y="1005840"/>
             <a:ext cx="8229600" cy="548640"/>
           </a:xfrm>
           <a:prstGeom prst="rect">
@@ -1545,7 +1545,7 @@
         </p:nvSpPr>
         <p:spPr>
           <a:xfrm>
-            <a:off x="1260043" y="1508760"/>
+            <a:off x="457200" y="1508760"/>
             <a:ext cx="8229600" cy="548640"/>
           </a:xfrm>
           <a:prstGeom prst="rect">
@@ -1584,7 +1584,7 @@
         </p:nvSpPr>
         <p:spPr>
           <a:xfrm>
-            <a:off x="1260043" y="2057400"/>
+            <a:off x="457200" y="2057400"/>
             <a:ext cx="8229600" cy="228600"/>
           </a:xfrm>
           <a:prstGeom prst="rect">
@@ -1620,7 +1620,7 @@
         </p:nvSpPr>
         <p:spPr>
           <a:xfrm>
-            <a:off x="1260043" y="2423160"/>
+            <a:off x="457200" y="2423160"/>
             <a:ext cx="8229600" cy="457200"/>
           </a:xfrm>
           <a:prstGeom prst="roundRect">
@@ -1647,7 +1647,7 @@
         </p:nvSpPr>
         <p:spPr>
           <a:xfrm>
-            <a:off x="1488643" y="2450592"/>
+            <a:off x="685800" y="2450592"/>
             <a:ext cx="7772400" cy="402336"/>
           </a:xfrm>
           <a:prstGeom prst="rect">
@@ -1683,7 +1683,7 @@
         </p:nvSpPr>
         <p:spPr>
           <a:xfrm>
-            <a:off x="1260043" y="3063240"/>
+            <a:off x="457200" y="3063240"/>
             <a:ext cx="2651760" cy="914400"/>
           </a:xfrm>
           <a:prstGeom prst="roundRect">
@@ -1710,7 +1710,7 @@
         </p:nvSpPr>
         <p:spPr>
           <a:xfrm>
-            <a:off x="1333195" y="3090672"/>
+            <a:off x="530352" y="3090672"/>
             <a:ext cx="2505456" cy="182880"/>
           </a:xfrm>
           <a:prstGeom prst="rect">
@@ -1749,7 +1749,7 @@
         </p:nvSpPr>
         <p:spPr>
           <a:xfrm>
-            <a:off x="1333195" y="3273552"/>
+            <a:off x="530352" y="3273552"/>
             <a:ext cx="2505456" cy="676656"/>
           </a:xfrm>
           <a:prstGeom prst="rect">
@@ -1822,7 +1822,7 @@
         </p:nvSpPr>
         <p:spPr>
           <a:xfrm>
-            <a:off x="4048963" y="3063240"/>
+            <a:off x="3246120" y="3063240"/>
             <a:ext cx="2651760" cy="914400"/>
           </a:xfrm>
           <a:prstGeom prst="roundRect">
@@ -1849,7 +1849,7 @@
         </p:nvSpPr>
         <p:spPr>
           <a:xfrm>
-            <a:off x="4122115" y="3090672"/>
+            <a:off x="3319272" y="3090672"/>
             <a:ext cx="2505456" cy="182880"/>
           </a:xfrm>
           <a:prstGeom prst="rect">
@@ -1888,7 +1888,7 @@
         </p:nvSpPr>
         <p:spPr>
           <a:xfrm>
-            <a:off x="4122115" y="3273552"/>
+            <a:off x="3319272" y="3273552"/>
             <a:ext cx="2505456" cy="676656"/>
           </a:xfrm>
           <a:prstGeom prst="rect">
@@ -1961,7 +1961,7 @@
         </p:nvSpPr>
         <p:spPr>
           <a:xfrm>
-            <a:off x="6837883" y="3063240"/>
+            <a:off x="6035040" y="3063240"/>
             <a:ext cx="2651760" cy="914400"/>
           </a:xfrm>
           <a:prstGeom prst="roundRect">
@@ -1988,7 +1988,7 @@
         </p:nvSpPr>
         <p:spPr>
           <a:xfrm>
-            <a:off x="6911035" y="3090672"/>
+            <a:off x="6108192" y="3090672"/>
             <a:ext cx="2505456" cy="182880"/>
           </a:xfrm>
           <a:prstGeom prst="rect">
@@ -2027,7 +2027,7 @@
         </p:nvSpPr>
         <p:spPr>
           <a:xfrm>
-            <a:off x="6911035" y="3273552"/>
+            <a:off x="6108192" y="3273552"/>
             <a:ext cx="2505456" cy="676656"/>
           </a:xfrm>
           <a:prstGeom prst="rect">
@@ -2132,7 +2132,7 @@
         </p:nvSpPr>
         <p:spPr>
           <a:xfrm>
-            <a:off x="1260043" y="4892040"/>
+            <a:off x="457200" y="4892040"/>
             <a:ext cx="8229600" cy="27432"/>
           </a:xfrm>
           <a:prstGeom prst="rect">
@@ -2152,7 +2152,7 @@
         </p:nvSpPr>
         <p:spPr>
           <a:xfrm>
-            <a:off x="1260043" y="4983480"/>
+            <a:off x="457200" y="4983480"/>
             <a:ext cx="8229600" cy="182880"/>
           </a:xfrm>
           <a:prstGeom prst="rect">
@@ -2188,7 +2188,7 @@
         </p:nvSpPr>
         <p:spPr>
           <a:xfrm>
-            <a:off x="1260043" y="137160"/>
+            <a:off x="457200" y="137160"/>
             <a:ext cx="8229600" cy="365760"/>
           </a:xfrm>
           <a:prstGeom prst="rect">
@@ -2227,7 +2227,7 @@
         </p:nvSpPr>
         <p:spPr>
           <a:xfrm>
-            <a:off x="1260043" y="502920"/>
+            <a:off x="457200" y="502920"/>
             <a:ext cx="914400" cy="27432"/>
           </a:xfrm>
           <a:prstGeom prst="rect">
@@ -2247,7 +2247,7 @@
         </p:nvSpPr>
         <p:spPr>
           <a:xfrm>
-            <a:off x="1260043" y="685800"/>
+            <a:off x="457200" y="685800"/>
             <a:ext cx="1325880" cy="530352"/>
           </a:xfrm>
           <a:prstGeom prst="roundRect">
@@ -2274,7 +2274,7 @@
         </p:nvSpPr>
         <p:spPr>
           <a:xfrm>
-            <a:off x="1260043" y="694944"/>
+            <a:off x="457200" y="694944"/>
             <a:ext cx="1325880" cy="164592"/>
           </a:xfrm>
           <a:prstGeom prst="rect">
@@ -2313,7 +2313,7 @@
         </p:nvSpPr>
         <p:spPr>
           <a:xfrm>
-            <a:off x="1260043" y="850392"/>
+            <a:off x="457200" y="850392"/>
             <a:ext cx="1325880" cy="164592"/>
           </a:xfrm>
           <a:prstGeom prst="rect">
@@ -2352,7 +2352,7 @@
         </p:nvSpPr>
         <p:spPr>
           <a:xfrm>
-            <a:off x="1260043" y="1005840"/>
+            <a:off x="457200" y="1005840"/>
             <a:ext cx="1325880" cy="146304"/>
           </a:xfrm>
           <a:prstGeom prst="rect">
@@ -2388,7 +2388,7 @@
         </p:nvSpPr>
         <p:spPr>
           <a:xfrm>
-            <a:off x="2640787" y="685800"/>
+            <a:off x="1837944" y="685800"/>
             <a:ext cx="1325880" cy="530352"/>
           </a:xfrm>
           <a:prstGeom prst="roundRect">
@@ -2415,7 +2415,7 @@
         </p:nvSpPr>
         <p:spPr>
           <a:xfrm>
-            <a:off x="2640787" y="694944"/>
+            <a:off x="1837944" y="694944"/>
             <a:ext cx="1325880" cy="164592"/>
           </a:xfrm>
           <a:prstGeom prst="rect">
@@ -2454,7 +2454,7 @@
         </p:nvSpPr>
         <p:spPr>
           <a:xfrm>
-            <a:off x="2640787" y="850392"/>
+            <a:off x="1837944" y="850392"/>
             <a:ext cx="1325880" cy="164592"/>
           </a:xfrm>
           <a:prstGeom prst="rect">
@@ -2493,7 +2493,7 @@
         </p:nvSpPr>
         <p:spPr>
           <a:xfrm>
-            <a:off x="2640787" y="1005840"/>
+            <a:off x="1837944" y="1005840"/>
             <a:ext cx="1325880" cy="146304"/>
           </a:xfrm>
           <a:prstGeom prst="rect">
@@ -2529,7 +2529,7 @@
         </p:nvSpPr>
         <p:spPr>
           <a:xfrm>
-            <a:off x="4021531" y="685800"/>
+            <a:off x="3218688" y="685800"/>
             <a:ext cx="1325880" cy="530352"/>
           </a:xfrm>
           <a:prstGeom prst="roundRect">
@@ -2556,7 +2556,7 @@
         </p:nvSpPr>
         <p:spPr>
           <a:xfrm>
-            <a:off x="4021531" y="694944"/>
+            <a:off x="3218688" y="694944"/>
             <a:ext cx="1325880" cy="164592"/>
           </a:xfrm>
           <a:prstGeom prst="rect">
@@ -2595,7 +2595,7 @@
         </p:nvSpPr>
         <p:spPr>
           <a:xfrm>
-            <a:off x="4021531" y="850392"/>
+            <a:off x="3218688" y="850392"/>
             <a:ext cx="1325880" cy="164592"/>
           </a:xfrm>
           <a:prstGeom prst="rect">
@@ -2634,7 +2634,7 @@
         </p:nvSpPr>
         <p:spPr>
           <a:xfrm>
-            <a:off x="4021531" y="1005840"/>
+            <a:off x="3218688" y="1005840"/>
             <a:ext cx="1325880" cy="146304"/>
           </a:xfrm>
           <a:prstGeom prst="rect">
@@ -2670,7 +2670,7 @@
         </p:nvSpPr>
         <p:spPr>
           <a:xfrm>
-            <a:off x="5402275" y="685800"/>
+            <a:off x="4599432" y="685800"/>
             <a:ext cx="1325880" cy="530352"/>
           </a:xfrm>
           <a:prstGeom prst="roundRect">
@@ -2697,7 +2697,7 @@
         </p:nvSpPr>
         <p:spPr>
           <a:xfrm>
-            <a:off x="5402275" y="694944"/>
+            <a:off x="4599432" y="694944"/>
             <a:ext cx="1325880" cy="164592"/>
           </a:xfrm>
           <a:prstGeom prst="rect">
@@ -2736,7 +2736,7 @@
         </p:nvSpPr>
         <p:spPr>
           <a:xfrm>
-            <a:off x="5402275" y="850392"/>
+            <a:off x="4599432" y="850392"/>
             <a:ext cx="1325880" cy="164592"/>
           </a:xfrm>
           <a:prstGeom prst="rect">
@@ -2775,7 +2775,7 @@
         </p:nvSpPr>
         <p:spPr>
           <a:xfrm>
-            <a:off x="5402275" y="1005840"/>
+            <a:off x="4599432" y="1005840"/>
             <a:ext cx="1325880" cy="146304"/>
           </a:xfrm>
           <a:prstGeom prst="rect">
@@ -2811,7 +2811,7 @@
         </p:nvSpPr>
         <p:spPr>
           <a:xfrm>
-            <a:off x="6783019" y="685800"/>
+            <a:off x="5980176" y="685800"/>
             <a:ext cx="1325880" cy="530352"/>
           </a:xfrm>
           <a:prstGeom prst="roundRect">
@@ -2838,7 +2838,7 @@
         </p:nvSpPr>
         <p:spPr>
           <a:xfrm>
-            <a:off x="6783019" y="694944"/>
+            <a:off x="5980176" y="694944"/>
             <a:ext cx="1325880" cy="164592"/>
           </a:xfrm>
           <a:prstGeom prst="rect">
@@ -2877,7 +2877,7 @@
         </p:nvSpPr>
         <p:spPr>
           <a:xfrm>
-            <a:off x="6783019" y="850392"/>
+            <a:off x="5980176" y="850392"/>
             <a:ext cx="1325880" cy="164592"/>
           </a:xfrm>
           <a:prstGeom prst="rect">
@@ -2916,7 +2916,7 @@
         </p:nvSpPr>
         <p:spPr>
           <a:xfrm>
-            <a:off x="6783019" y="1005840"/>
+            <a:off x="5980176" y="1005840"/>
             <a:ext cx="1325880" cy="146304"/>
           </a:xfrm>
           <a:prstGeom prst="rect">
@@ -2952,7 +2952,7 @@
         </p:nvSpPr>
         <p:spPr>
           <a:xfrm>
-            <a:off x="8163763" y="685800"/>
+            <a:off x="7360920" y="685800"/>
             <a:ext cx="1325880" cy="530352"/>
           </a:xfrm>
           <a:prstGeom prst="roundRect">
@@ -2979,7 +2979,7 @@
         </p:nvSpPr>
         <p:spPr>
           <a:xfrm>
-            <a:off x="8163763" y="694944"/>
+            <a:off x="7360920" y="694944"/>
             <a:ext cx="1325880" cy="164592"/>
           </a:xfrm>
           <a:prstGeom prst="rect">
@@ -3018,7 +3018,7 @@
         </p:nvSpPr>
         <p:spPr>
           <a:xfrm>
-            <a:off x="8163763" y="850392"/>
+            <a:off x="7360920" y="850392"/>
             <a:ext cx="1325880" cy="164592"/>
           </a:xfrm>
           <a:prstGeom prst="rect">
@@ -3057,7 +3057,7 @@
         </p:nvSpPr>
         <p:spPr>
           <a:xfrm>
-            <a:off x="8163763" y="1005840"/>
+            <a:off x="7360920" y="1005840"/>
             <a:ext cx="1325880" cy="146304"/>
           </a:xfrm>
           <a:prstGeom prst="rect">
@@ -3093,7 +3093,7 @@
         </p:nvSpPr>
         <p:spPr>
           <a:xfrm>
-            <a:off x="1260043" y="1371600"/>
+            <a:off x="457200" y="1371600"/>
             <a:ext cx="4046220" cy="182880"/>
           </a:xfrm>
           <a:prstGeom prst="rect">
@@ -3129,7 +3129,7 @@
         </p:nvSpPr>
         <p:spPr>
           <a:xfrm>
-            <a:off x="1260043" y="1600200"/>
+            <a:off x="457200" y="1600200"/>
             <a:ext cx="4046220" cy="411480"/>
           </a:xfrm>
           <a:prstGeom prst="roundRect">
@@ -3156,7 +3156,7 @@
         </p:nvSpPr>
         <p:spPr>
           <a:xfrm>
-            <a:off x="1260043" y="1600200"/>
+            <a:off x="457200" y="1600200"/>
             <a:ext cx="4046220" cy="411480"/>
           </a:xfrm>
           <a:prstGeom prst="rect">
@@ -3206,7 +3206,7 @@
         </p:nvSpPr>
         <p:spPr>
           <a:xfrm>
-            <a:off x="5443423" y="1600200"/>
+            <a:off x="4640580" y="1600200"/>
             <a:ext cx="4046220" cy="411480"/>
           </a:xfrm>
           <a:prstGeom prst="roundRect">
@@ -3233,7 +3233,7 @@
         </p:nvSpPr>
         <p:spPr>
           <a:xfrm>
-            <a:off x="5443423" y="1600200"/>
+            <a:off x="4640580" y="1600200"/>
             <a:ext cx="4046220" cy="411480"/>
           </a:xfrm>
           <a:prstGeom prst="rect">
@@ -3283,7 +3283,7 @@
         </p:nvSpPr>
         <p:spPr>
           <a:xfrm>
-            <a:off x="1260043" y="2148840"/>
+            <a:off x="457200" y="2148840"/>
             <a:ext cx="4046220" cy="182880"/>
           </a:xfrm>
           <a:prstGeom prst="rect">
@@ -3319,7 +3319,7 @@
         </p:nvSpPr>
         <p:spPr>
           <a:xfrm>
-            <a:off x="1260043" y="2377440"/>
+            <a:off x="457200" y="2377440"/>
             <a:ext cx="4046220" cy="411480"/>
           </a:xfrm>
           <a:prstGeom prst="roundRect">
@@ -3346,7 +3346,7 @@
         </p:nvSpPr>
         <p:spPr>
           <a:xfrm>
-            <a:off x="1260043" y="2377440"/>
+            <a:off x="457200" y="2377440"/>
             <a:ext cx="4046220" cy="411480"/>
           </a:xfrm>
           <a:prstGeom prst="rect">
@@ -3396,7 +3396,7 @@
         </p:nvSpPr>
         <p:spPr>
           <a:xfrm>
-            <a:off x="5443423" y="2377440"/>
+            <a:off x="4640580" y="2377440"/>
             <a:ext cx="4046220" cy="411480"/>
           </a:xfrm>
           <a:prstGeom prst="roundRect">
@@ -3423,7 +3423,7 @@
         </p:nvSpPr>
         <p:spPr>
           <a:xfrm>
-            <a:off x="5443423" y="2377440"/>
+            <a:off x="4640580" y="2377440"/>
             <a:ext cx="4046220" cy="411480"/>
           </a:xfrm>
           <a:prstGeom prst="rect">
@@ -3480,7 +3480,7 @@
           </p:nvPr>
         </p:nvGraphicFramePr>
         <p:xfrm>
-          <a:off x="1260043" y="2926080"/>
+          <a:off x="457200" y="2926080"/>
           <a:ext cx="8229600" cy="914400"/>
         </p:xfrm>
         <a:graphic>
@@ -4487,7 +4487,7 @@
         </p:nvSpPr>
         <p:spPr>
           <a:xfrm>
-            <a:off x="1260043" y="4251960"/>
+            <a:off x="457200" y="4251960"/>
             <a:ext cx="8229600" cy="164592"/>
           </a:xfrm>
           <a:prstGeom prst="rect">
@@ -4555,7 +4555,7 @@
         </p:nvSpPr>
         <p:spPr>
           <a:xfrm>
-            <a:off x="1260043" y="4892040"/>
+            <a:off x="457200" y="4892040"/>
             <a:ext cx="8229600" cy="27432"/>
           </a:xfrm>
           <a:prstGeom prst="rect">
@@ -4575,7 +4575,7 @@
         </p:nvSpPr>
         <p:spPr>
           <a:xfrm>
-            <a:off x="1260043" y="4983480"/>
+            <a:off x="457200" y="4983480"/>
             <a:ext cx="8229600" cy="182880"/>
           </a:xfrm>
           <a:prstGeom prst="rect">
@@ -4611,7 +4611,7 @@
         </p:nvSpPr>
         <p:spPr>
           <a:xfrm>
-            <a:off x="1260043" y="137160"/>
+            <a:off x="457200" y="137160"/>
             <a:ext cx="8229600" cy="365760"/>
           </a:xfrm>
           <a:prstGeom prst="rect">
@@ -4650,7 +4650,7 @@
         </p:nvSpPr>
         <p:spPr>
           <a:xfrm>
-            <a:off x="1260043" y="502920"/>
+            <a:off x="457200" y="502920"/>
             <a:ext cx="914400" cy="27432"/>
           </a:xfrm>
           <a:prstGeom prst="rect">
@@ -4670,7 +4670,7 @@
         </p:nvSpPr>
         <p:spPr>
           <a:xfrm>
-            <a:off x="1260043" y="658368"/>
+            <a:off x="457200" y="658368"/>
             <a:ext cx="4572000" cy="164592"/>
           </a:xfrm>
           <a:prstGeom prst="rect">
@@ -4713,7 +4713,7 @@
           </p:nvPr>
         </p:nvGraphicFramePr>
         <p:xfrm>
-          <a:off x="1260043" y="868680"/>
+          <a:off x="457200" y="868680"/>
           <a:ext cx="8229600" cy="914400"/>
         </p:xfrm>
         <a:graphic>
@@ -5720,7 +5720,7 @@
         </p:nvSpPr>
         <p:spPr>
           <a:xfrm>
-            <a:off x="1260043" y="2194560"/>
+            <a:off x="457200" y="2194560"/>
             <a:ext cx="4572000" cy="164592"/>
           </a:xfrm>
           <a:prstGeom prst="rect">
@@ -5763,7 +5763,7 @@
           </p:nvPr>
         </p:nvGraphicFramePr>
         <p:xfrm>
-          <a:off x="1260043" y="2404872"/>
+          <a:off x="457200" y="2404872"/>
           <a:ext cx="8229600" cy="914400"/>
         </p:xfrm>
         <a:graphic>
@@ -7194,7 +7194,7 @@
         </p:nvSpPr>
         <p:spPr>
           <a:xfrm>
-            <a:off x="1260043" y="4892040"/>
+            <a:off x="457200" y="4892040"/>
             <a:ext cx="8229600" cy="27432"/>
           </a:xfrm>
           <a:prstGeom prst="rect">
@@ -7214,7 +7214,7 @@
         </p:nvSpPr>
         <p:spPr>
           <a:xfrm>
-            <a:off x="1260043" y="4983480"/>
+            <a:off x="457200" y="4983480"/>
             <a:ext cx="8229600" cy="182880"/>
           </a:xfrm>
           <a:prstGeom prst="rect">
@@ -7250,7 +7250,7 @@
         </p:nvSpPr>
         <p:spPr>
           <a:xfrm>
-            <a:off x="1260043" y="137160"/>
+            <a:off x="457200" y="137160"/>
             <a:ext cx="8229600" cy="365760"/>
           </a:xfrm>
           <a:prstGeom prst="rect">
@@ -7289,7 +7289,7 @@
         </p:nvSpPr>
         <p:spPr>
           <a:xfrm>
-            <a:off x="1260043" y="502920"/>
+            <a:off x="457200" y="502920"/>
             <a:ext cx="914400" cy="27432"/>
           </a:xfrm>
           <a:prstGeom prst="rect">
@@ -7309,7 +7309,7 @@
         </p:nvSpPr>
         <p:spPr>
           <a:xfrm>
-            <a:off x="1260043" y="658368"/>
+            <a:off x="457200" y="658368"/>
             <a:ext cx="4572000" cy="164592"/>
           </a:xfrm>
           <a:prstGeom prst="rect">
@@ -7352,7 +7352,7 @@
           </p:nvPr>
         </p:nvGraphicFramePr>
         <p:xfrm>
-          <a:off x="1260043" y="868680"/>
+          <a:off x="457200" y="868680"/>
           <a:ext cx="8229600" cy="914400"/>
         </p:xfrm>
         <a:graphic>
@@ -8162,7 +8162,7 @@
         </p:nvSpPr>
         <p:spPr>
           <a:xfrm>
-            <a:off x="1260043" y="1965960"/>
+            <a:off x="457200" y="1965960"/>
             <a:ext cx="4572000" cy="164592"/>
           </a:xfrm>
           <a:prstGeom prst="rect">
@@ -8205,7 +8205,7 @@
           </p:nvPr>
         </p:nvGraphicFramePr>
         <p:xfrm>
-          <a:off x="1260043" y="2176272"/>
+          <a:off x="457200" y="2176272"/>
           <a:ext cx="8229600" cy="914400"/>
         </p:xfrm>
         <a:graphic>
@@ -9650,7 +9650,7 @@
         </p:nvSpPr>
         <p:spPr>
           <a:xfrm>
-            <a:off x="1260043" y="4892040"/>
+            <a:off x="457200" y="4892040"/>
             <a:ext cx="8229600" cy="27432"/>
           </a:xfrm>
           <a:prstGeom prst="rect">
@@ -9670,7 +9670,7 @@
         </p:nvSpPr>
         <p:spPr>
           <a:xfrm>
-            <a:off x="1260043" y="4983480"/>
+            <a:off x="457200" y="4983480"/>
             <a:ext cx="8229600" cy="182880"/>
           </a:xfrm>
           <a:prstGeom prst="rect">
@@ -9706,7 +9706,7 @@
         </p:nvSpPr>
         <p:spPr>
           <a:xfrm>
-            <a:off x="1260043" y="137160"/>
+            <a:off x="457200" y="137160"/>
             <a:ext cx="8229600" cy="365760"/>
           </a:xfrm>
           <a:prstGeom prst="rect">
@@ -9745,7 +9745,7 @@
         </p:nvSpPr>
         <p:spPr>
           <a:xfrm>
-            <a:off x="1260043" y="502920"/>
+            <a:off x="457200" y="502920"/>
             <a:ext cx="914400" cy="27432"/>
           </a:xfrm>
           <a:prstGeom prst="rect">
@@ -9765,7 +9765,7 @@
         </p:nvSpPr>
         <p:spPr>
           <a:xfrm>
-            <a:off x="1260043" y="658368"/>
+            <a:off x="457200" y="658368"/>
             <a:ext cx="2670048" cy="777240"/>
           </a:xfrm>
           <a:prstGeom prst="roundRect">
@@ -9792,7 +9792,7 @@
         </p:nvSpPr>
         <p:spPr>
           <a:xfrm>
-            <a:off x="1333195" y="685800"/>
+            <a:off x="530352" y="685800"/>
             <a:ext cx="2523744" cy="182880"/>
           </a:xfrm>
           <a:prstGeom prst="rect">
@@ -9831,7 +9831,7 @@
         </p:nvSpPr>
         <p:spPr>
           <a:xfrm>
-            <a:off x="1333195" y="868680"/>
+            <a:off x="530352" y="868680"/>
             <a:ext cx="2523744" cy="539496"/>
           </a:xfrm>
           <a:prstGeom prst="rect">
@@ -9887,7 +9887,7 @@
         </p:nvSpPr>
         <p:spPr>
           <a:xfrm>
-            <a:off x="4039819" y="658368"/>
+            <a:off x="3236976" y="658368"/>
             <a:ext cx="2670048" cy="777240"/>
           </a:xfrm>
           <a:prstGeom prst="roundRect">
@@ -9914,7 +9914,7 @@
         </p:nvSpPr>
         <p:spPr>
           <a:xfrm>
-            <a:off x="4112971" y="685800"/>
+            <a:off x="3310128" y="685800"/>
             <a:ext cx="2523744" cy="182880"/>
           </a:xfrm>
           <a:prstGeom prst="rect">
@@ -9953,7 +9953,7 @@
         </p:nvSpPr>
         <p:spPr>
           <a:xfrm>
-            <a:off x="4112971" y="868680"/>
+            <a:off x="3310128" y="868680"/>
             <a:ext cx="2523744" cy="539496"/>
           </a:xfrm>
           <a:prstGeom prst="rect">
@@ -10009,7 +10009,7 @@
         </p:nvSpPr>
         <p:spPr>
           <a:xfrm>
-            <a:off x="6819595" y="658368"/>
+            <a:off x="6016752" y="658368"/>
             <a:ext cx="2670048" cy="777240"/>
           </a:xfrm>
           <a:prstGeom prst="roundRect">
@@ -10036,7 +10036,7 @@
         </p:nvSpPr>
         <p:spPr>
           <a:xfrm>
-            <a:off x="6892747" y="685800"/>
+            <a:off x="6089904" y="685800"/>
             <a:ext cx="2523744" cy="182880"/>
           </a:xfrm>
           <a:prstGeom prst="rect">
@@ -10075,7 +10075,7 @@
         </p:nvSpPr>
         <p:spPr>
           <a:xfrm>
-            <a:off x="6892747" y="868680"/>
+            <a:off x="6089904" y="868680"/>
             <a:ext cx="2523744" cy="539496"/>
           </a:xfrm>
           <a:prstGeom prst="rect">
@@ -10131,7 +10131,7 @@
         </p:nvSpPr>
         <p:spPr>
           <a:xfrm>
-            <a:off x="1260043" y="1527048"/>
+            <a:off x="457200" y="1527048"/>
             <a:ext cx="2670048" cy="777240"/>
           </a:xfrm>
           <a:prstGeom prst="roundRect">
@@ -10158,7 +10158,7 @@
         </p:nvSpPr>
         <p:spPr>
           <a:xfrm>
-            <a:off x="1333195" y="1554480"/>
+            <a:off x="530352" y="1554480"/>
             <a:ext cx="2523744" cy="182880"/>
           </a:xfrm>
           <a:prstGeom prst="rect">
@@ -10197,7 +10197,7 @@
         </p:nvSpPr>
         <p:spPr>
           <a:xfrm>
-            <a:off x="1333195" y="1737360"/>
+            <a:off x="530352" y="1737360"/>
             <a:ext cx="2523744" cy="539496"/>
           </a:xfrm>
           <a:prstGeom prst="rect">
@@ -10253,7 +10253,7 @@
         </p:nvSpPr>
         <p:spPr>
           <a:xfrm>
-            <a:off x="4039819" y="1527048"/>
+            <a:off x="3236976" y="1527048"/>
             <a:ext cx="2670048" cy="777240"/>
           </a:xfrm>
           <a:prstGeom prst="roundRect">
@@ -10280,7 +10280,7 @@
         </p:nvSpPr>
         <p:spPr>
           <a:xfrm>
-            <a:off x="4112971" y="1554480"/>
+            <a:off x="3310128" y="1554480"/>
             <a:ext cx="2523744" cy="182880"/>
           </a:xfrm>
           <a:prstGeom prst="rect">
@@ -10319,7 +10319,7 @@
         </p:nvSpPr>
         <p:spPr>
           <a:xfrm>
-            <a:off x="4112971" y="1737360"/>
+            <a:off x="3310128" y="1737360"/>
             <a:ext cx="2523744" cy="539496"/>
           </a:xfrm>
           <a:prstGeom prst="rect">
@@ -10375,7 +10375,7 @@
         </p:nvSpPr>
         <p:spPr>
           <a:xfrm>
-            <a:off x="6819595" y="1527048"/>
+            <a:off x="6016752" y="1527048"/>
             <a:ext cx="2670048" cy="777240"/>
           </a:xfrm>
           <a:prstGeom prst="roundRect">
@@ -10402,7 +10402,7 @@
         </p:nvSpPr>
         <p:spPr>
           <a:xfrm>
-            <a:off x="6892747" y="1554480"/>
+            <a:off x="6089904" y="1554480"/>
             <a:ext cx="2523744" cy="182880"/>
           </a:xfrm>
           <a:prstGeom prst="rect">
@@ -10441,7 +10441,7 @@
         </p:nvSpPr>
         <p:spPr>
           <a:xfrm>
-            <a:off x="6892747" y="1737360"/>
+            <a:off x="6089904" y="1737360"/>
             <a:ext cx="2523744" cy="539496"/>
           </a:xfrm>
           <a:prstGeom prst="rect">
@@ -10497,7 +10497,7 @@
         </p:nvSpPr>
         <p:spPr>
           <a:xfrm>
-            <a:off x="1260043" y="2395728"/>
+            <a:off x="457200" y="2395728"/>
             <a:ext cx="4046220" cy="164592"/>
           </a:xfrm>
           <a:prstGeom prst="rect">
@@ -10540,7 +10540,7 @@
           </p:nvPr>
         </p:nvGraphicFramePr>
         <p:xfrm>
-          <a:off x="1260043" y="2596896"/>
+          <a:off x="457200" y="2596896"/>
           <a:ext cx="4046220" cy="914400"/>
         </p:xfrm>
         <a:graphic>
@@ -12346,7 +12346,7 @@
         </p:nvSpPr>
         <p:spPr>
           <a:xfrm>
-            <a:off x="5443423" y="2395728"/>
+            <a:off x="4640580" y="2395728"/>
             <a:ext cx="4046220" cy="164592"/>
           </a:xfrm>
           <a:prstGeom prst="rect">
@@ -12382,7 +12382,7 @@
         </p:nvSpPr>
         <p:spPr>
           <a:xfrm>
-            <a:off x="5443423" y="2596896"/>
+            <a:off x="4640580" y="2596896"/>
             <a:ext cx="4046220" cy="310896"/>
           </a:xfrm>
           <a:prstGeom prst="roundRect">
@@ -12409,7 +12409,7 @@
         </p:nvSpPr>
         <p:spPr>
           <a:xfrm>
-            <a:off x="5516575" y="2624328"/>
+            <a:off x="4713732" y="2624328"/>
             <a:ext cx="3899916" cy="182880"/>
           </a:xfrm>
           <a:prstGeom prst="rect">
@@ -12448,7 +12448,7 @@
         </p:nvSpPr>
         <p:spPr>
           <a:xfrm>
-            <a:off x="5516575" y="2807208"/>
+            <a:off x="4713732" y="2807208"/>
             <a:ext cx="3899916" cy="73152"/>
           </a:xfrm>
           <a:prstGeom prst="rect">
@@ -12487,7 +12487,7 @@
         </p:nvSpPr>
         <p:spPr>
           <a:xfrm>
-            <a:off x="5443423" y="2944368"/>
+            <a:off x="4640580" y="2944368"/>
             <a:ext cx="4046220" cy="310896"/>
           </a:xfrm>
           <a:prstGeom prst="roundRect">
@@ -12514,7 +12514,7 @@
         </p:nvSpPr>
         <p:spPr>
           <a:xfrm>
-            <a:off x="5516575" y="2971800"/>
+            <a:off x="4713732" y="2971800"/>
             <a:ext cx="3899916" cy="182880"/>
           </a:xfrm>
           <a:prstGeom prst="rect">
@@ -12553,7 +12553,7 @@
         </p:nvSpPr>
         <p:spPr>
           <a:xfrm>
-            <a:off x="5516575" y="3154680"/>
+            <a:off x="4713732" y="3154680"/>
             <a:ext cx="3899916" cy="73152"/>
           </a:xfrm>
           <a:prstGeom prst="rect">
@@ -12592,7 +12592,7 @@
         </p:nvSpPr>
         <p:spPr>
           <a:xfrm>
-            <a:off x="5443423" y="3291840"/>
+            <a:off x="4640580" y="3291840"/>
             <a:ext cx="4046220" cy="310896"/>
           </a:xfrm>
           <a:prstGeom prst="roundRect">
@@ -12619,7 +12619,7 @@
         </p:nvSpPr>
         <p:spPr>
           <a:xfrm>
-            <a:off x="5516575" y="3319272"/>
+            <a:off x="4713732" y="3319272"/>
             <a:ext cx="3899916" cy="182880"/>
           </a:xfrm>
           <a:prstGeom prst="rect">
@@ -12658,7 +12658,7 @@
         </p:nvSpPr>
         <p:spPr>
           <a:xfrm>
-            <a:off x="5516575" y="3502152"/>
+            <a:off x="4713732" y="3502152"/>
             <a:ext cx="3899916" cy="73152"/>
           </a:xfrm>
           <a:prstGeom prst="rect">
@@ -12729,7 +12729,7 @@
         </p:nvSpPr>
         <p:spPr>
           <a:xfrm>
-            <a:off x="1260043" y="4892040"/>
+            <a:off x="457200" y="4892040"/>
             <a:ext cx="8229600" cy="27432"/>
           </a:xfrm>
           <a:prstGeom prst="rect">
@@ -12749,7 +12749,7 @@
         </p:nvSpPr>
         <p:spPr>
           <a:xfrm>
-            <a:off x="1260043" y="4983480"/>
+            <a:off x="457200" y="4983480"/>
             <a:ext cx="8229600" cy="182880"/>
           </a:xfrm>
           <a:prstGeom prst="rect">
@@ -12785,7 +12785,7 @@
         </p:nvSpPr>
         <p:spPr>
           <a:xfrm>
-            <a:off x="1260043" y="137160"/>
+            <a:off x="457200" y="137160"/>
             <a:ext cx="8229600" cy="365760"/>
           </a:xfrm>
           <a:prstGeom prst="rect">
@@ -12824,7 +12824,7 @@
         </p:nvSpPr>
         <p:spPr>
           <a:xfrm>
-            <a:off x="1260043" y="502920"/>
+            <a:off x="457200" y="502920"/>
             <a:ext cx="914400" cy="27432"/>
           </a:xfrm>
           <a:prstGeom prst="rect">
@@ -12844,7 +12844,7 @@
         </p:nvSpPr>
         <p:spPr>
           <a:xfrm>
-            <a:off x="1260043" y="658368"/>
+            <a:off x="457200" y="658368"/>
             <a:ext cx="4023360" cy="164592"/>
           </a:xfrm>
           <a:prstGeom prst="rect">
@@ -12887,7 +12887,7 @@
           </p:nvPr>
         </p:nvGraphicFramePr>
         <p:xfrm>
-          <a:off x="1260043" y="868680"/>
+          <a:off x="457200" y="868680"/>
           <a:ext cx="4023360" cy="914400"/>
         </p:xfrm>
         <a:graphic>
@@ -15302,7 +15302,7 @@
         </p:nvSpPr>
         <p:spPr>
           <a:xfrm>
-            <a:off x="5466283" y="658368"/>
+            <a:off x="4663440" y="658368"/>
             <a:ext cx="4023360" cy="164592"/>
           </a:xfrm>
           <a:prstGeom prst="rect">
@@ -15345,7 +15345,7 @@
           </p:nvPr>
         </p:nvGraphicFramePr>
         <p:xfrm>
-          <a:off x="5466283" y="868680"/>
+          <a:off x="4663440" y="868680"/>
           <a:ext cx="4023360" cy="914400"/>
         </p:xfrm>
         <a:graphic>
@@ -17566,7 +17566,7 @@
         </p:nvSpPr>
         <p:spPr>
           <a:xfrm>
-            <a:off x="1260043" y="2880360"/>
+            <a:off x="457200" y="2880360"/>
             <a:ext cx="8229600" cy="164592"/>
           </a:xfrm>
           <a:prstGeom prst="rect">
@@ -17609,7 +17609,7 @@
           </p:nvPr>
         </p:nvGraphicFramePr>
         <p:xfrm>
-          <a:off x="1260043" y="3063240"/>
+          <a:off x="457200" y="3063240"/>
           <a:ext cx="8229600" cy="914400"/>
         </p:xfrm>
         <a:graphic>
@@ -18694,7 +18694,7 @@
         </p:nvSpPr>
         <p:spPr>
           <a:xfrm>
-            <a:off x="1260043" y="4069080"/>
+            <a:off x="457200" y="4069080"/>
             <a:ext cx="8229600" cy="256032"/>
           </a:xfrm>
           <a:prstGeom prst="roundRect">
@@ -18721,7 +18721,7 @@
         </p:nvSpPr>
         <p:spPr>
           <a:xfrm>
-            <a:off x="1397203" y="4078224"/>
+            <a:off x="594360" y="4078224"/>
             <a:ext cx="7955280" cy="237744"/>
           </a:xfrm>
           <a:prstGeom prst="rect">

--- a/docs/AI-Native-训战营-介绍与日程.pptx
+++ b/docs/AI-Native-训战营-介绍与日程.pptx
@@ -1328,7 +1328,7 @@
         </p:nvSpPr>
         <p:spPr>
           <a:xfrm>
-            <a:off x="457200" y="4892040"/>
+            <a:off x="457200" y="5010912"/>
             <a:ext cx="8229600" cy="27432"/>
           </a:xfrm>
           <a:prstGeom prst="rect">
@@ -1348,7 +1348,7 @@
         </p:nvSpPr>
         <p:spPr>
           <a:xfrm>
-            <a:off x="457200" y="4983480"/>
+            <a:off x="457200" y="5084064"/>
             <a:ext cx="8229600" cy="182880"/>
           </a:xfrm>
           <a:prstGeom prst="rect">
@@ -2132,7 +2132,7 @@
         </p:nvSpPr>
         <p:spPr>
           <a:xfrm>
-            <a:off x="457200" y="4892040"/>
+            <a:off x="457200" y="5010912"/>
             <a:ext cx="8229600" cy="27432"/>
           </a:xfrm>
           <a:prstGeom prst="rect">
@@ -2152,7 +2152,7 @@
         </p:nvSpPr>
         <p:spPr>
           <a:xfrm>
-            <a:off x="457200" y="4983480"/>
+            <a:off x="457200" y="5084064"/>
             <a:ext cx="8229600" cy="182880"/>
           </a:xfrm>
           <a:prstGeom prst="rect">
@@ -3687,7 +3687,7 @@
                   </a:tcPr>
                 </a:tc>
               </a:tr>
-              <a:tr h="219456">
+              <a:tr h="256032">
                 <a:tc>
                   <a:txBody>
                     <a:bodyPr/>
@@ -3884,7 +3884,7 @@
                   </a:tcPr>
                 </a:tc>
               </a:tr>
-              <a:tr h="219456">
+              <a:tr h="256032">
                 <a:tc>
                   <a:txBody>
                     <a:bodyPr/>
@@ -4081,7 +4081,7 @@
                   </a:tcPr>
                 </a:tc>
               </a:tr>
-              <a:tr h="219456">
+              <a:tr h="256032">
                 <a:tc>
                   <a:txBody>
                     <a:bodyPr/>
@@ -4278,7 +4278,7 @@
                   </a:tcPr>
                 </a:tc>
               </a:tr>
-              <a:tr h="219456">
+              <a:tr h="256032">
                 <a:tc>
                   <a:txBody>
                     <a:bodyPr/>
@@ -4487,7 +4487,7 @@
         </p:nvSpPr>
         <p:spPr>
           <a:xfrm>
-            <a:off x="457200" y="4251960"/>
+            <a:off x="457200" y="4389120"/>
             <a:ext cx="8229600" cy="164592"/>
           </a:xfrm>
           <a:prstGeom prst="rect">
@@ -4555,7 +4555,7 @@
         </p:nvSpPr>
         <p:spPr>
           <a:xfrm>
-            <a:off x="457200" y="4892040"/>
+            <a:off x="457200" y="5010912"/>
             <a:ext cx="8229600" cy="27432"/>
           </a:xfrm>
           <a:prstGeom prst="rect">
@@ -4575,7 +4575,7 @@
         </p:nvSpPr>
         <p:spPr>
           <a:xfrm>
-            <a:off x="457200" y="4983480"/>
+            <a:off x="457200" y="5084064"/>
             <a:ext cx="8229600" cy="182880"/>
           </a:xfrm>
           <a:prstGeom prst="rect">
@@ -4931,7 +4931,7 @@
                   </a:tcPr>
                 </a:tc>
               </a:tr>
-              <a:tr h="256032">
+              <a:tr h="292608">
                 <a:tc>
                   <a:txBody>
                     <a:bodyPr/>
@@ -5128,7 +5128,7 @@
                   </a:tcPr>
                 </a:tc>
               </a:tr>
-              <a:tr h="292608">
+              <a:tr h="329184">
                 <a:tc>
                   <a:txBody>
                     <a:bodyPr/>
@@ -5325,7 +5325,7 @@
                   </a:tcPr>
                 </a:tc>
               </a:tr>
-              <a:tr h="146304">
+              <a:tr h="164592">
                 <a:tc>
                   <a:txBody>
                     <a:bodyPr/>
@@ -5511,7 +5511,7 @@
                   </a:tcPr>
                 </a:tc>
               </a:tr>
-              <a:tr h="292608">
+              <a:tr h="329184">
                 <a:tc>
                   <a:txBody>
                     <a:bodyPr/>
@@ -5720,7 +5720,7 @@
         </p:nvSpPr>
         <p:spPr>
           <a:xfrm>
-            <a:off x="457200" y="2194560"/>
+            <a:off x="457200" y="2331720"/>
             <a:ext cx="4572000" cy="164592"/>
           </a:xfrm>
           <a:prstGeom prst="rect">
@@ -5763,7 +5763,7 @@
           </p:nvPr>
         </p:nvGraphicFramePr>
         <p:xfrm>
-          <a:off x="457200" y="2404872"/>
+          <a:off x="457200" y="2560320"/>
           <a:ext cx="8229600" cy="914400"/>
         </p:xfrm>
         <a:graphic>
@@ -5981,7 +5981,7 @@
                   </a:tcPr>
                 </a:tc>
               </a:tr>
-              <a:tr h="274320">
+              <a:tr h="310896">
                 <a:tc>
                   <a:txBody>
                     <a:bodyPr/>
@@ -6181,7 +6181,7 @@
                   </a:tcPr>
                 </a:tc>
               </a:tr>
-              <a:tr h="137160">
+              <a:tr h="155448">
                 <a:tc>
                   <a:txBody>
                     <a:bodyPr/>
@@ -6367,7 +6367,7 @@
                   </a:tcPr>
                 </a:tc>
               </a:tr>
-              <a:tr h="274320">
+              <a:tr h="310896">
                 <a:tc>
                   <a:txBody>
                     <a:bodyPr/>
@@ -6567,7 +6567,7 @@
                   </a:tcPr>
                 </a:tc>
               </a:tr>
-              <a:tr h="137160">
+              <a:tr h="155448">
                 <a:tc>
                   <a:txBody>
                     <a:bodyPr/>
@@ -6753,7 +6753,7 @@
                   </a:tcPr>
                 </a:tc>
               </a:tr>
-              <a:tr h="274320">
+              <a:tr h="310896">
                 <a:tc>
                   <a:txBody>
                     <a:bodyPr/>
@@ -6953,7 +6953,7 @@
                   </a:tcPr>
                 </a:tc>
               </a:tr>
-              <a:tr h="237744">
+              <a:tr h="274320">
                 <a:tc>
                   <a:txBody>
                     <a:bodyPr/>
@@ -7194,7 +7194,7 @@
         </p:nvSpPr>
         <p:spPr>
           <a:xfrm>
-            <a:off x="457200" y="4892040"/>
+            <a:off x="457200" y="5010912"/>
             <a:ext cx="8229600" cy="27432"/>
           </a:xfrm>
           <a:prstGeom prst="rect">
@@ -7214,7 +7214,7 @@
         </p:nvSpPr>
         <p:spPr>
           <a:xfrm>
-            <a:off x="457200" y="4983480"/>
+            <a:off x="457200" y="5084064"/>
             <a:ext cx="8229600" cy="182880"/>
           </a:xfrm>
           <a:prstGeom prst="rect">
@@ -7570,7 +7570,7 @@
                   </a:tcPr>
                 </a:tc>
               </a:tr>
-              <a:tr h="292608">
+              <a:tr h="329184">
                 <a:tc>
                   <a:txBody>
                     <a:bodyPr/>
@@ -7767,7 +7767,7 @@
                   </a:tcPr>
                 </a:tc>
               </a:tr>
-              <a:tr h="146304">
+              <a:tr h="164592">
                 <a:tc>
                   <a:txBody>
                     <a:bodyPr/>
@@ -7953,7 +7953,7 @@
                   </a:tcPr>
                 </a:tc>
               </a:tr>
-              <a:tr h="292608">
+              <a:tr h="329184">
                 <a:tc>
                   <a:txBody>
                     <a:bodyPr/>
@@ -8162,7 +8162,7 @@
         </p:nvSpPr>
         <p:spPr>
           <a:xfrm>
-            <a:off x="457200" y="1965960"/>
+            <a:off x="457200" y="2103120"/>
             <a:ext cx="4572000" cy="164592"/>
           </a:xfrm>
           <a:prstGeom prst="rect">
@@ -8205,7 +8205,7 @@
           </p:nvPr>
         </p:nvGraphicFramePr>
         <p:xfrm>
-          <a:off x="457200" y="2176272"/>
+          <a:off x="457200" y="2331720"/>
           <a:ext cx="8229600" cy="914400"/>
         </p:xfrm>
         <a:graphic>
@@ -8423,7 +8423,7 @@
                   </a:tcPr>
                 </a:tc>
               </a:tr>
-              <a:tr h="274320">
+              <a:tr h="310896">
                 <a:tc>
                   <a:txBody>
                     <a:bodyPr/>
@@ -8623,7 +8623,7 @@
                   </a:tcPr>
                 </a:tc>
               </a:tr>
-              <a:tr h="137160">
+              <a:tr h="155448">
                 <a:tc>
                   <a:txBody>
                     <a:bodyPr/>
@@ -8809,7 +8809,7 @@
                   </a:tcPr>
                 </a:tc>
               </a:tr>
-              <a:tr h="274320">
+              <a:tr h="310896">
                 <a:tc>
                   <a:txBody>
                     <a:bodyPr/>
@@ -9009,7 +9009,7 @@
                   </a:tcPr>
                 </a:tc>
               </a:tr>
-              <a:tr h="237744">
+              <a:tr h="274320">
                 <a:tc>
                   <a:txBody>
                     <a:bodyPr/>
@@ -9209,7 +9209,7 @@
                   </a:tcPr>
                 </a:tc>
               </a:tr>
-              <a:tr h="237744">
+              <a:tr h="274320">
                 <a:tc>
                   <a:txBody>
                     <a:bodyPr/>
@@ -9406,7 +9406,7 @@
                   </a:tcPr>
                 </a:tc>
               </a:tr>
-              <a:tr h="201168">
+              <a:tr h="237744">
                 <a:tc>
                   <a:txBody>
                     <a:bodyPr/>
@@ -9650,7 +9650,7 @@
         </p:nvSpPr>
         <p:spPr>
           <a:xfrm>
-            <a:off x="457200" y="4892040"/>
+            <a:off x="457200" y="5010912"/>
             <a:ext cx="8229600" cy="27432"/>
           </a:xfrm>
           <a:prstGeom prst="rect">
@@ -9670,7 +9670,7 @@
         </p:nvSpPr>
         <p:spPr>
           <a:xfrm>
-            <a:off x="457200" y="4983480"/>
+            <a:off x="457200" y="5084064"/>
             <a:ext cx="8229600" cy="182880"/>
           </a:xfrm>
           <a:prstGeom prst="rect">
@@ -9766,11 +9766,11 @@
         <p:spPr>
           <a:xfrm>
             <a:off x="457200" y="658368"/>
-            <a:ext cx="2670048" cy="777240"/>
+            <a:ext cx="2670048" cy="868680"/>
           </a:xfrm>
           <a:prstGeom prst="roundRect">
             <a:avLst>
-              <a:gd name="adj" fmla="val 9412"/>
+              <a:gd name="adj" fmla="val 8421"/>
             </a:avLst>
           </a:prstGeom>
           <a:solidFill>
@@ -9832,7 +9832,7 @@
         <p:spPr>
           <a:xfrm>
             <a:off x="530352" y="868680"/>
-            <a:ext cx="2523744" cy="539496"/>
+            <a:ext cx="2523744" cy="630936"/>
           </a:xfrm>
           <a:prstGeom prst="rect">
             <a:avLst/>
@@ -9888,11 +9888,11 @@
         <p:spPr>
           <a:xfrm>
             <a:off x="3236976" y="658368"/>
-            <a:ext cx="2670048" cy="777240"/>
+            <a:ext cx="2670048" cy="868680"/>
           </a:xfrm>
           <a:prstGeom prst="roundRect">
             <a:avLst>
-              <a:gd name="adj" fmla="val 9412"/>
+              <a:gd name="adj" fmla="val 8421"/>
             </a:avLst>
           </a:prstGeom>
           <a:solidFill>
@@ -9954,7 +9954,7 @@
         <p:spPr>
           <a:xfrm>
             <a:off x="3310128" y="868680"/>
-            <a:ext cx="2523744" cy="539496"/>
+            <a:ext cx="2523744" cy="630936"/>
           </a:xfrm>
           <a:prstGeom prst="rect">
             <a:avLst/>
@@ -10010,11 +10010,11 @@
         <p:spPr>
           <a:xfrm>
             <a:off x="6016752" y="658368"/>
-            <a:ext cx="2670048" cy="777240"/>
+            <a:ext cx="2670048" cy="868680"/>
           </a:xfrm>
           <a:prstGeom prst="roundRect">
             <a:avLst>
-              <a:gd name="adj" fmla="val 9412"/>
+              <a:gd name="adj" fmla="val 8421"/>
             </a:avLst>
           </a:prstGeom>
           <a:solidFill>
@@ -10076,7 +10076,7 @@
         <p:spPr>
           <a:xfrm>
             <a:off x="6089904" y="868680"/>
-            <a:ext cx="2523744" cy="539496"/>
+            <a:ext cx="2523744" cy="630936"/>
           </a:xfrm>
           <a:prstGeom prst="rect">
             <a:avLst/>
@@ -10131,12 +10131,12 @@
         </p:nvSpPr>
         <p:spPr>
           <a:xfrm>
-            <a:off x="457200" y="1527048"/>
-            <a:ext cx="2670048" cy="777240"/>
+            <a:off x="457200" y="1618488"/>
+            <a:ext cx="2670048" cy="868680"/>
           </a:xfrm>
           <a:prstGeom prst="roundRect">
             <a:avLst>
-              <a:gd name="adj" fmla="val 9412"/>
+              <a:gd name="adj" fmla="val 8421"/>
             </a:avLst>
           </a:prstGeom>
           <a:solidFill>
@@ -10158,7 +10158,7 @@
         </p:nvSpPr>
         <p:spPr>
           <a:xfrm>
-            <a:off x="530352" y="1554480"/>
+            <a:off x="530352" y="1645920"/>
             <a:ext cx="2523744" cy="182880"/>
           </a:xfrm>
           <a:prstGeom prst="rect">
@@ -10197,8 +10197,8 @@
         </p:nvSpPr>
         <p:spPr>
           <a:xfrm>
-            <a:off x="530352" y="1737360"/>
-            <a:ext cx="2523744" cy="539496"/>
+            <a:off x="530352" y="1828800"/>
+            <a:ext cx="2523744" cy="630936"/>
           </a:xfrm>
           <a:prstGeom prst="rect">
             <a:avLst/>
@@ -10253,12 +10253,12 @@
         </p:nvSpPr>
         <p:spPr>
           <a:xfrm>
-            <a:off x="3236976" y="1527048"/>
-            <a:ext cx="2670048" cy="777240"/>
+            <a:off x="3236976" y="1618488"/>
+            <a:ext cx="2670048" cy="868680"/>
           </a:xfrm>
           <a:prstGeom prst="roundRect">
             <a:avLst>
-              <a:gd name="adj" fmla="val 9412"/>
+              <a:gd name="adj" fmla="val 8421"/>
             </a:avLst>
           </a:prstGeom>
           <a:solidFill>
@@ -10280,7 +10280,7 @@
         </p:nvSpPr>
         <p:spPr>
           <a:xfrm>
-            <a:off x="3310128" y="1554480"/>
+            <a:off x="3310128" y="1645920"/>
             <a:ext cx="2523744" cy="182880"/>
           </a:xfrm>
           <a:prstGeom prst="rect">
@@ -10319,8 +10319,8 @@
         </p:nvSpPr>
         <p:spPr>
           <a:xfrm>
-            <a:off x="3310128" y="1737360"/>
-            <a:ext cx="2523744" cy="539496"/>
+            <a:off x="3310128" y="1828800"/>
+            <a:ext cx="2523744" cy="630936"/>
           </a:xfrm>
           <a:prstGeom prst="rect">
             <a:avLst/>
@@ -10375,12 +10375,12 @@
         </p:nvSpPr>
         <p:spPr>
           <a:xfrm>
-            <a:off x="6016752" y="1527048"/>
-            <a:ext cx="2670048" cy="777240"/>
+            <a:off x="6016752" y="1618488"/>
+            <a:ext cx="2670048" cy="868680"/>
           </a:xfrm>
           <a:prstGeom prst="roundRect">
             <a:avLst>
-              <a:gd name="adj" fmla="val 9412"/>
+              <a:gd name="adj" fmla="val 8421"/>
             </a:avLst>
           </a:prstGeom>
           <a:solidFill>
@@ -10402,7 +10402,7 @@
         </p:nvSpPr>
         <p:spPr>
           <a:xfrm>
-            <a:off x="6089904" y="1554480"/>
+            <a:off x="6089904" y="1645920"/>
             <a:ext cx="2523744" cy="182880"/>
           </a:xfrm>
           <a:prstGeom prst="rect">
@@ -10441,8 +10441,8 @@
         </p:nvSpPr>
         <p:spPr>
           <a:xfrm>
-            <a:off x="6089904" y="1737360"/>
-            <a:ext cx="2523744" cy="539496"/>
+            <a:off x="6089904" y="1828800"/>
+            <a:ext cx="2523744" cy="630936"/>
           </a:xfrm>
           <a:prstGeom prst="rect">
             <a:avLst/>
@@ -10497,7 +10497,7 @@
         </p:nvSpPr>
         <p:spPr>
           <a:xfrm>
-            <a:off x="457200" y="2395728"/>
+            <a:off x="457200" y="2578608"/>
             <a:ext cx="4046220" cy="164592"/>
           </a:xfrm>
           <a:prstGeom prst="rect">
@@ -10540,7 +10540,7 @@
           </p:nvPr>
         </p:nvGraphicFramePr>
         <p:xfrm>
-          <a:off x="457200" y="2596896"/>
+          <a:off x="457200" y="2779776"/>
           <a:ext cx="4046220" cy="914400"/>
         </p:xfrm>
         <a:graphic>
@@ -12346,7 +12346,7 @@
         </p:nvSpPr>
         <p:spPr>
           <a:xfrm>
-            <a:off x="4640580" y="2395728"/>
+            <a:off x="4640580" y="2578608"/>
             <a:ext cx="4046220" cy="164592"/>
           </a:xfrm>
           <a:prstGeom prst="rect">
@@ -12382,7 +12382,7 @@
         </p:nvSpPr>
         <p:spPr>
           <a:xfrm>
-            <a:off x="4640580" y="2596896"/>
+            <a:off x="4640580" y="2779776"/>
             <a:ext cx="4046220" cy="310896"/>
           </a:xfrm>
           <a:prstGeom prst="roundRect">
@@ -12409,7 +12409,7 @@
         </p:nvSpPr>
         <p:spPr>
           <a:xfrm>
-            <a:off x="4713732" y="2624328"/>
+            <a:off x="4713732" y="2807208"/>
             <a:ext cx="3899916" cy="182880"/>
           </a:xfrm>
           <a:prstGeom prst="rect">
@@ -12448,7 +12448,7 @@
         </p:nvSpPr>
         <p:spPr>
           <a:xfrm>
-            <a:off x="4713732" y="2807208"/>
+            <a:off x="4713732" y="2990088"/>
             <a:ext cx="3899916" cy="73152"/>
           </a:xfrm>
           <a:prstGeom prst="rect">
@@ -12487,7 +12487,7 @@
         </p:nvSpPr>
         <p:spPr>
           <a:xfrm>
-            <a:off x="4640580" y="2944368"/>
+            <a:off x="4640580" y="3127248"/>
             <a:ext cx="4046220" cy="310896"/>
           </a:xfrm>
           <a:prstGeom prst="roundRect">
@@ -12514,7 +12514,7 @@
         </p:nvSpPr>
         <p:spPr>
           <a:xfrm>
-            <a:off x="4713732" y="2971800"/>
+            <a:off x="4713732" y="3154680"/>
             <a:ext cx="3899916" cy="182880"/>
           </a:xfrm>
           <a:prstGeom prst="rect">
@@ -12553,7 +12553,7 @@
         </p:nvSpPr>
         <p:spPr>
           <a:xfrm>
-            <a:off x="4713732" y="3154680"/>
+            <a:off x="4713732" y="3337560"/>
             <a:ext cx="3899916" cy="73152"/>
           </a:xfrm>
           <a:prstGeom prst="rect">
@@ -12592,7 +12592,7 @@
         </p:nvSpPr>
         <p:spPr>
           <a:xfrm>
-            <a:off x="4640580" y="3291840"/>
+            <a:off x="4640580" y="3474720"/>
             <a:ext cx="4046220" cy="310896"/>
           </a:xfrm>
           <a:prstGeom prst="roundRect">
@@ -12619,7 +12619,7 @@
         </p:nvSpPr>
         <p:spPr>
           <a:xfrm>
-            <a:off x="4713732" y="3319272"/>
+            <a:off x="4713732" y="3502152"/>
             <a:ext cx="3899916" cy="182880"/>
           </a:xfrm>
           <a:prstGeom prst="rect">
@@ -12658,7 +12658,7 @@
         </p:nvSpPr>
         <p:spPr>
           <a:xfrm>
-            <a:off x="4713732" y="3502152"/>
+            <a:off x="4713732" y="3685032"/>
             <a:ext cx="3899916" cy="73152"/>
           </a:xfrm>
           <a:prstGeom prst="rect">
@@ -12729,7 +12729,7 @@
         </p:nvSpPr>
         <p:spPr>
           <a:xfrm>
-            <a:off x="457200" y="4892040"/>
+            <a:off x="457200" y="5010912"/>
             <a:ext cx="8229600" cy="27432"/>
           </a:xfrm>
           <a:prstGeom prst="rect">
@@ -12749,7 +12749,7 @@
         </p:nvSpPr>
         <p:spPr>
           <a:xfrm>
-            <a:off x="457200" y="4983480"/>
+            <a:off x="457200" y="5084064"/>
             <a:ext cx="8229600" cy="182880"/>
           </a:xfrm>
           <a:prstGeom prst="rect">
@@ -17566,7 +17566,7 @@
         </p:nvSpPr>
         <p:spPr>
           <a:xfrm>
-            <a:off x="457200" y="2880360"/>
+            <a:off x="457200" y="2971800"/>
             <a:ext cx="8229600" cy="164592"/>
           </a:xfrm>
           <a:prstGeom prst="rect">
@@ -17609,7 +17609,7 @@
           </p:nvPr>
         </p:nvGraphicFramePr>
         <p:xfrm>
-          <a:off x="457200" y="3063240"/>
+          <a:off x="457200" y="3182112"/>
           <a:ext cx="8229600" cy="914400"/>
         </p:xfrm>
         <a:graphic>
@@ -17896,7 +17896,7 @@
                   </a:tcPr>
                 </a:tc>
               </a:tr>
-              <a:tr h="201168">
+              <a:tr h="219456">
                 <a:tc>
                   <a:txBody>
                     <a:bodyPr/>
@@ -18158,7 +18158,7 @@
                   </a:tcPr>
                 </a:tc>
               </a:tr>
-              <a:tr h="201168">
+              <a:tr h="219456">
                 <a:tc>
                   <a:txBody>
                     <a:bodyPr/>
@@ -18420,7 +18420,7 @@
                   </a:tcPr>
                 </a:tc>
               </a:tr>
-              <a:tr h="201168">
+              <a:tr h="219456">
                 <a:tc>
                   <a:txBody>
                     <a:bodyPr/>
@@ -18694,7 +18694,7 @@
         </p:nvSpPr>
         <p:spPr>
           <a:xfrm>
-            <a:off x="457200" y="4069080"/>
+            <a:off x="457200" y="4297680"/>
             <a:ext cx="8229600" cy="256032"/>
           </a:xfrm>
           <a:prstGeom prst="roundRect">
@@ -18721,7 +18721,7 @@
         </p:nvSpPr>
         <p:spPr>
           <a:xfrm>
-            <a:off x="594360" y="4078224"/>
+            <a:off x="594360" y="4306824"/>
             <a:ext cx="7955280" cy="237744"/>
           </a:xfrm>
           <a:prstGeom prst="rect">

--- a/docs/AI-Native-训战营-介绍与日程.pptx
+++ b/docs/AI-Native-训战营-介绍与日程.pptx
@@ -1506,7 +1506,7 @@
         </p:nvSpPr>
         <p:spPr>
           <a:xfrm>
-            <a:off x="457200" y="1005840"/>
+            <a:off x="457200" y="1362456"/>
             <a:ext cx="8229600" cy="548640"/>
           </a:xfrm>
           <a:prstGeom prst="rect">
@@ -1545,7 +1545,7 @@
         </p:nvSpPr>
         <p:spPr>
           <a:xfrm>
-            <a:off x="457200" y="1508760"/>
+            <a:off x="457200" y="1865376"/>
             <a:ext cx="8229600" cy="548640"/>
           </a:xfrm>
           <a:prstGeom prst="rect">
@@ -1584,7 +1584,7 @@
         </p:nvSpPr>
         <p:spPr>
           <a:xfrm>
-            <a:off x="457200" y="2057400"/>
+            <a:off x="457200" y="2414016"/>
             <a:ext cx="8229600" cy="228600"/>
           </a:xfrm>
           <a:prstGeom prst="rect">
@@ -1620,7 +1620,7 @@
         </p:nvSpPr>
         <p:spPr>
           <a:xfrm>
-            <a:off x="457200" y="2423160"/>
+            <a:off x="457200" y="2779776"/>
             <a:ext cx="8229600" cy="457200"/>
           </a:xfrm>
           <a:prstGeom prst="roundRect">
@@ -1647,7 +1647,7 @@
         </p:nvSpPr>
         <p:spPr>
           <a:xfrm>
-            <a:off x="685800" y="2450592"/>
+            <a:off x="685800" y="2807208"/>
             <a:ext cx="7772400" cy="402336"/>
           </a:xfrm>
           <a:prstGeom prst="rect">
@@ -2247,7 +2247,7 @@
         </p:nvSpPr>
         <p:spPr>
           <a:xfrm>
-            <a:off x="457200" y="685800"/>
+            <a:off x="457200" y="1042416"/>
             <a:ext cx="1325880" cy="530352"/>
           </a:xfrm>
           <a:prstGeom prst="roundRect">
@@ -2274,7 +2274,7 @@
         </p:nvSpPr>
         <p:spPr>
           <a:xfrm>
-            <a:off x="457200" y="694944"/>
+            <a:off x="457200" y="1051560"/>
             <a:ext cx="1325880" cy="164592"/>
           </a:xfrm>
           <a:prstGeom prst="rect">
@@ -2313,7 +2313,7 @@
         </p:nvSpPr>
         <p:spPr>
           <a:xfrm>
-            <a:off x="457200" y="850392"/>
+            <a:off x="457200" y="1207008"/>
             <a:ext cx="1325880" cy="164592"/>
           </a:xfrm>
           <a:prstGeom prst="rect">
@@ -2352,7 +2352,7 @@
         </p:nvSpPr>
         <p:spPr>
           <a:xfrm>
-            <a:off x="457200" y="1005840"/>
+            <a:off x="457200" y="1362456"/>
             <a:ext cx="1325880" cy="146304"/>
           </a:xfrm>
           <a:prstGeom prst="rect">
@@ -2388,7 +2388,7 @@
         </p:nvSpPr>
         <p:spPr>
           <a:xfrm>
-            <a:off x="1837944" y="685800"/>
+            <a:off x="1837944" y="1042416"/>
             <a:ext cx="1325880" cy="530352"/>
           </a:xfrm>
           <a:prstGeom prst="roundRect">
@@ -2415,7 +2415,7 @@
         </p:nvSpPr>
         <p:spPr>
           <a:xfrm>
-            <a:off x="1837944" y="694944"/>
+            <a:off x="1837944" y="1051560"/>
             <a:ext cx="1325880" cy="164592"/>
           </a:xfrm>
           <a:prstGeom prst="rect">
@@ -2454,7 +2454,7 @@
         </p:nvSpPr>
         <p:spPr>
           <a:xfrm>
-            <a:off x="1837944" y="850392"/>
+            <a:off x="1837944" y="1207008"/>
             <a:ext cx="1325880" cy="164592"/>
           </a:xfrm>
           <a:prstGeom prst="rect">
@@ -2493,7 +2493,7 @@
         </p:nvSpPr>
         <p:spPr>
           <a:xfrm>
-            <a:off x="1837944" y="1005840"/>
+            <a:off x="1837944" y="1362456"/>
             <a:ext cx="1325880" cy="146304"/>
           </a:xfrm>
           <a:prstGeom prst="rect">
@@ -2529,7 +2529,7 @@
         </p:nvSpPr>
         <p:spPr>
           <a:xfrm>
-            <a:off x="3218688" y="685800"/>
+            <a:off x="3218688" y="1042416"/>
             <a:ext cx="1325880" cy="530352"/>
           </a:xfrm>
           <a:prstGeom prst="roundRect">
@@ -2556,7 +2556,7 @@
         </p:nvSpPr>
         <p:spPr>
           <a:xfrm>
-            <a:off x="3218688" y="694944"/>
+            <a:off x="3218688" y="1051560"/>
             <a:ext cx="1325880" cy="164592"/>
           </a:xfrm>
           <a:prstGeom prst="rect">
@@ -2595,7 +2595,7 @@
         </p:nvSpPr>
         <p:spPr>
           <a:xfrm>
-            <a:off x="3218688" y="850392"/>
+            <a:off x="3218688" y="1207008"/>
             <a:ext cx="1325880" cy="164592"/>
           </a:xfrm>
           <a:prstGeom prst="rect">
@@ -2634,7 +2634,7 @@
         </p:nvSpPr>
         <p:spPr>
           <a:xfrm>
-            <a:off x="3218688" y="1005840"/>
+            <a:off x="3218688" y="1362456"/>
             <a:ext cx="1325880" cy="146304"/>
           </a:xfrm>
           <a:prstGeom prst="rect">
@@ -2670,7 +2670,7 @@
         </p:nvSpPr>
         <p:spPr>
           <a:xfrm>
-            <a:off x="4599432" y="685800"/>
+            <a:off x="4599432" y="1042416"/>
             <a:ext cx="1325880" cy="530352"/>
           </a:xfrm>
           <a:prstGeom prst="roundRect">
@@ -2697,7 +2697,7 @@
         </p:nvSpPr>
         <p:spPr>
           <a:xfrm>
-            <a:off x="4599432" y="694944"/>
+            <a:off x="4599432" y="1051560"/>
             <a:ext cx="1325880" cy="164592"/>
           </a:xfrm>
           <a:prstGeom prst="rect">
@@ -2736,7 +2736,7 @@
         </p:nvSpPr>
         <p:spPr>
           <a:xfrm>
-            <a:off x="4599432" y="850392"/>
+            <a:off x="4599432" y="1207008"/>
             <a:ext cx="1325880" cy="164592"/>
           </a:xfrm>
           <a:prstGeom prst="rect">
@@ -2775,7 +2775,7 @@
         </p:nvSpPr>
         <p:spPr>
           <a:xfrm>
-            <a:off x="4599432" y="1005840"/>
+            <a:off x="4599432" y="1362456"/>
             <a:ext cx="1325880" cy="146304"/>
           </a:xfrm>
           <a:prstGeom prst="rect">
@@ -2811,7 +2811,7 @@
         </p:nvSpPr>
         <p:spPr>
           <a:xfrm>
-            <a:off x="5980176" y="685800"/>
+            <a:off x="5980176" y="1042416"/>
             <a:ext cx="1325880" cy="530352"/>
           </a:xfrm>
           <a:prstGeom prst="roundRect">
@@ -2838,7 +2838,7 @@
         </p:nvSpPr>
         <p:spPr>
           <a:xfrm>
-            <a:off x="5980176" y="694944"/>
+            <a:off x="5980176" y="1051560"/>
             <a:ext cx="1325880" cy="164592"/>
           </a:xfrm>
           <a:prstGeom prst="rect">
@@ -2877,7 +2877,7 @@
         </p:nvSpPr>
         <p:spPr>
           <a:xfrm>
-            <a:off x="5980176" y="850392"/>
+            <a:off x="5980176" y="1207008"/>
             <a:ext cx="1325880" cy="164592"/>
           </a:xfrm>
           <a:prstGeom prst="rect">
@@ -2916,7 +2916,7 @@
         </p:nvSpPr>
         <p:spPr>
           <a:xfrm>
-            <a:off x="5980176" y="1005840"/>
+            <a:off x="5980176" y="1362456"/>
             <a:ext cx="1325880" cy="146304"/>
           </a:xfrm>
           <a:prstGeom prst="rect">
@@ -2952,7 +2952,7 @@
         </p:nvSpPr>
         <p:spPr>
           <a:xfrm>
-            <a:off x="7360920" y="685800"/>
+            <a:off x="7360920" y="1042416"/>
             <a:ext cx="1325880" cy="530352"/>
           </a:xfrm>
           <a:prstGeom prst="roundRect">
@@ -2979,7 +2979,7 @@
         </p:nvSpPr>
         <p:spPr>
           <a:xfrm>
-            <a:off x="7360920" y="694944"/>
+            <a:off x="7360920" y="1051560"/>
             <a:ext cx="1325880" cy="164592"/>
           </a:xfrm>
           <a:prstGeom prst="rect">
@@ -3018,7 +3018,7 @@
         </p:nvSpPr>
         <p:spPr>
           <a:xfrm>
-            <a:off x="7360920" y="850392"/>
+            <a:off x="7360920" y="1207008"/>
             <a:ext cx="1325880" cy="164592"/>
           </a:xfrm>
           <a:prstGeom prst="rect">
@@ -3057,7 +3057,7 @@
         </p:nvSpPr>
         <p:spPr>
           <a:xfrm>
-            <a:off x="7360920" y="1005840"/>
+            <a:off x="7360920" y="1362456"/>
             <a:ext cx="1325880" cy="146304"/>
           </a:xfrm>
           <a:prstGeom prst="rect">
@@ -3093,7 +3093,7 @@
         </p:nvSpPr>
         <p:spPr>
           <a:xfrm>
-            <a:off x="457200" y="1371600"/>
+            <a:off x="457200" y="1728216"/>
             <a:ext cx="4046220" cy="182880"/>
           </a:xfrm>
           <a:prstGeom prst="rect">
@@ -3283,7 +3283,7 @@
         </p:nvSpPr>
         <p:spPr>
           <a:xfrm>
-            <a:off x="457200" y="2148840"/>
+            <a:off x="457200" y="2505456"/>
             <a:ext cx="4046220" cy="182880"/>
           </a:xfrm>
           <a:prstGeom prst="rect">
@@ -4487,7 +4487,7 @@
         </p:nvSpPr>
         <p:spPr>
           <a:xfrm>
-            <a:off x="457200" y="4389120"/>
+            <a:off x="457200" y="4745736"/>
             <a:ext cx="8229600" cy="164592"/>
           </a:xfrm>
           <a:prstGeom prst="rect">
@@ -4670,7 +4670,7 @@
         </p:nvSpPr>
         <p:spPr>
           <a:xfrm>
-            <a:off x="457200" y="658368"/>
+            <a:off x="457200" y="1014984"/>
             <a:ext cx="4572000" cy="164592"/>
           </a:xfrm>
           <a:prstGeom prst="rect">
@@ -5720,7 +5720,7 @@
         </p:nvSpPr>
         <p:spPr>
           <a:xfrm>
-            <a:off x="457200" y="2331720"/>
+            <a:off x="457200" y="2688336"/>
             <a:ext cx="4572000" cy="164592"/>
           </a:xfrm>
           <a:prstGeom prst="rect">
@@ -7309,7 +7309,7 @@
         </p:nvSpPr>
         <p:spPr>
           <a:xfrm>
-            <a:off x="457200" y="658368"/>
+            <a:off x="457200" y="1014984"/>
             <a:ext cx="4572000" cy="164592"/>
           </a:xfrm>
           <a:prstGeom prst="rect">
@@ -8162,7 +8162,7 @@
         </p:nvSpPr>
         <p:spPr>
           <a:xfrm>
-            <a:off x="457200" y="2103120"/>
+            <a:off x="457200" y="2459736"/>
             <a:ext cx="4572000" cy="164592"/>
           </a:xfrm>
           <a:prstGeom prst="rect">
@@ -12844,7 +12844,7 @@
         </p:nvSpPr>
         <p:spPr>
           <a:xfrm>
-            <a:off x="457200" y="658368"/>
+            <a:off x="457200" y="1014984"/>
             <a:ext cx="4023360" cy="164592"/>
           </a:xfrm>
           <a:prstGeom prst="rect">
@@ -15302,7 +15302,7 @@
         </p:nvSpPr>
         <p:spPr>
           <a:xfrm>
-            <a:off x="4663440" y="658368"/>
+            <a:off x="4663440" y="1014984"/>
             <a:ext cx="4023360" cy="164592"/>
           </a:xfrm>
           <a:prstGeom prst="rect">
@@ -17566,7 +17566,7 @@
         </p:nvSpPr>
         <p:spPr>
           <a:xfrm>
-            <a:off x="457200" y="2971800"/>
+            <a:off x="457200" y="3328416"/>
             <a:ext cx="8229600" cy="164592"/>
           </a:xfrm>
           <a:prstGeom prst="rect">
@@ -18694,7 +18694,7 @@
         </p:nvSpPr>
         <p:spPr>
           <a:xfrm>
-            <a:off x="457200" y="4297680"/>
+            <a:off x="457200" y="4654296"/>
             <a:ext cx="8229600" cy="256032"/>
           </a:xfrm>
           <a:prstGeom prst="roundRect">
@@ -18721,7 +18721,7 @@
         </p:nvSpPr>
         <p:spPr>
           <a:xfrm>
-            <a:off x="594360" y="4306824"/>
+            <a:off x="594360" y="4663440"/>
             <a:ext cx="7955280" cy="237744"/>
           </a:xfrm>
           <a:prstGeom prst="rect">

--- a/docs/AI-Native-训战营-介绍与日程.pptx
+++ b/docs/AI-Native-训战营-介绍与日程.pptx
@@ -1506,7 +1506,7 @@
         </p:nvSpPr>
         <p:spPr>
           <a:xfrm>
-            <a:off x="457200" y="1362456"/>
+            <a:off x="457200" y="1719072"/>
             <a:ext cx="8229600" cy="548640"/>
           </a:xfrm>
           <a:prstGeom prst="rect">
@@ -1545,7 +1545,7 @@
         </p:nvSpPr>
         <p:spPr>
           <a:xfrm>
-            <a:off x="457200" y="1865376"/>
+            <a:off x="457200" y="2221992"/>
             <a:ext cx="8229600" cy="548640"/>
           </a:xfrm>
           <a:prstGeom prst="rect">
@@ -1584,7 +1584,7 @@
         </p:nvSpPr>
         <p:spPr>
           <a:xfrm>
-            <a:off x="457200" y="2414016"/>
+            <a:off x="457200" y="2770632"/>
             <a:ext cx="8229600" cy="228600"/>
           </a:xfrm>
           <a:prstGeom prst="rect">
@@ -1647,7 +1647,7 @@
         </p:nvSpPr>
         <p:spPr>
           <a:xfrm>
-            <a:off x="685800" y="2807208"/>
+            <a:off x="685800" y="3163824"/>
             <a:ext cx="7772400" cy="402336"/>
           </a:xfrm>
           <a:prstGeom prst="rect">
@@ -3093,7 +3093,7 @@
         </p:nvSpPr>
         <p:spPr>
           <a:xfrm>
-            <a:off x="457200" y="1728216"/>
+            <a:off x="457200" y="2084832"/>
             <a:ext cx="4046220" cy="182880"/>
           </a:xfrm>
           <a:prstGeom prst="rect">
@@ -3129,7 +3129,7 @@
         </p:nvSpPr>
         <p:spPr>
           <a:xfrm>
-            <a:off x="457200" y="1600200"/>
+            <a:off x="457200" y="1956816"/>
             <a:ext cx="4046220" cy="411480"/>
           </a:xfrm>
           <a:prstGeom prst="roundRect">
@@ -3156,7 +3156,7 @@
         </p:nvSpPr>
         <p:spPr>
           <a:xfrm>
-            <a:off x="457200" y="1600200"/>
+            <a:off x="457200" y="1956816"/>
             <a:ext cx="4046220" cy="411480"/>
           </a:xfrm>
           <a:prstGeom prst="rect">
@@ -3283,7 +3283,7 @@
         </p:nvSpPr>
         <p:spPr>
           <a:xfrm>
-            <a:off x="457200" y="2505456"/>
+            <a:off x="457200" y="2862072"/>
             <a:ext cx="4046220" cy="182880"/>
           </a:xfrm>
           <a:prstGeom prst="rect">
@@ -3319,7 +3319,7 @@
         </p:nvSpPr>
         <p:spPr>
           <a:xfrm>
-            <a:off x="457200" y="2377440"/>
+            <a:off x="457200" y="2734056"/>
             <a:ext cx="4046220" cy="411480"/>
           </a:xfrm>
           <a:prstGeom prst="roundRect">
@@ -3346,7 +3346,7 @@
         </p:nvSpPr>
         <p:spPr>
           <a:xfrm>
-            <a:off x="457200" y="2377440"/>
+            <a:off x="457200" y="2734056"/>
             <a:ext cx="4046220" cy="411480"/>
           </a:xfrm>
           <a:prstGeom prst="rect">
@@ -3480,7 +3480,7 @@
           </p:nvPr>
         </p:nvGraphicFramePr>
         <p:xfrm>
-          <a:off x="457200" y="2926080"/>
+          <a:off x="457200" y="3282696"/>
           <a:ext cx="8229600" cy="914400"/>
         </p:xfrm>
         <a:graphic>
@@ -4670,7 +4670,7 @@
         </p:nvSpPr>
         <p:spPr>
           <a:xfrm>
-            <a:off x="457200" y="1014984"/>
+            <a:off x="457200" y="1371600"/>
             <a:ext cx="4572000" cy="164592"/>
           </a:xfrm>
           <a:prstGeom prst="rect">
@@ -4713,7 +4713,7 @@
           </p:nvPr>
         </p:nvGraphicFramePr>
         <p:xfrm>
-          <a:off x="457200" y="868680"/>
+          <a:off x="457200" y="1225296"/>
           <a:ext cx="8229600" cy="914400"/>
         </p:xfrm>
         <a:graphic>
@@ -5720,7 +5720,7 @@
         </p:nvSpPr>
         <p:spPr>
           <a:xfrm>
-            <a:off x="457200" y="2688336"/>
+            <a:off x="457200" y="3044952"/>
             <a:ext cx="4572000" cy="164592"/>
           </a:xfrm>
           <a:prstGeom prst="rect">
@@ -5763,7 +5763,7 @@
           </p:nvPr>
         </p:nvGraphicFramePr>
         <p:xfrm>
-          <a:off x="457200" y="2560320"/>
+          <a:off x="457200" y="2916936"/>
           <a:ext cx="8229600" cy="914400"/>
         </p:xfrm>
         <a:graphic>
@@ -7309,7 +7309,7 @@
         </p:nvSpPr>
         <p:spPr>
           <a:xfrm>
-            <a:off x="457200" y="1014984"/>
+            <a:off x="457200" y="1371600"/>
             <a:ext cx="4572000" cy="164592"/>
           </a:xfrm>
           <a:prstGeom prst="rect">
@@ -7352,7 +7352,7 @@
           </p:nvPr>
         </p:nvGraphicFramePr>
         <p:xfrm>
-          <a:off x="457200" y="868680"/>
+          <a:off x="457200" y="1225296"/>
           <a:ext cx="8229600" cy="914400"/>
         </p:xfrm>
         <a:graphic>
@@ -8162,7 +8162,7 @@
         </p:nvSpPr>
         <p:spPr>
           <a:xfrm>
-            <a:off x="457200" y="2459736"/>
+            <a:off x="457200" y="2816352"/>
             <a:ext cx="4572000" cy="164592"/>
           </a:xfrm>
           <a:prstGeom prst="rect">
@@ -8205,7 +8205,7 @@
           </p:nvPr>
         </p:nvGraphicFramePr>
         <p:xfrm>
-          <a:off x="457200" y="2331720"/>
+          <a:off x="457200" y="2688336"/>
           <a:ext cx="8229600" cy="914400"/>
         </p:xfrm>
         <a:graphic>
@@ -12844,7 +12844,7 @@
         </p:nvSpPr>
         <p:spPr>
           <a:xfrm>
-            <a:off x="457200" y="1014984"/>
+            <a:off x="457200" y="1371600"/>
             <a:ext cx="4023360" cy="164592"/>
           </a:xfrm>
           <a:prstGeom prst="rect">
@@ -12887,7 +12887,7 @@
           </p:nvPr>
         </p:nvGraphicFramePr>
         <p:xfrm>
-          <a:off x="457200" y="868680"/>
+          <a:off x="457200" y="1225296"/>
           <a:ext cx="4023360" cy="914400"/>
         </p:xfrm>
         <a:graphic>
@@ -15302,7 +15302,7 @@
         </p:nvSpPr>
         <p:spPr>
           <a:xfrm>
-            <a:off x="4663440" y="1014984"/>
+            <a:off x="4663440" y="1371600"/>
             <a:ext cx="4023360" cy="164592"/>
           </a:xfrm>
           <a:prstGeom prst="rect">
@@ -17566,7 +17566,7 @@
         </p:nvSpPr>
         <p:spPr>
           <a:xfrm>
-            <a:off x="457200" y="3328416"/>
+            <a:off x="457200" y="3685032"/>
             <a:ext cx="8229600" cy="164592"/>
           </a:xfrm>
           <a:prstGeom prst="rect">
@@ -17609,7 +17609,7 @@
           </p:nvPr>
         </p:nvGraphicFramePr>
         <p:xfrm>
-          <a:off x="457200" y="3182112"/>
+          <a:off x="457200" y="3538728"/>
           <a:ext cx="8229600" cy="914400"/>
         </p:xfrm>
         <a:graphic>

--- a/docs/AI-Native-训战营-介绍与日程.pptx
+++ b/docs/AI-Native-训战营-介绍与日程.pptx
@@ -1384,7 +1384,7 @@
         </p:nvSpPr>
         <p:spPr>
           <a:xfrm>
-            <a:off x="457200" y="594360"/>
+            <a:off x="457200" y="950976"/>
             <a:ext cx="1389888" cy="182880"/>
           </a:xfrm>
           <a:prstGeom prst="roundRect">
@@ -1406,7 +1406,7 @@
         </p:nvSpPr>
         <p:spPr>
           <a:xfrm>
-            <a:off x="457200" y="594360"/>
+            <a:off x="457200" y="950976"/>
             <a:ext cx="1389888" cy="182880"/>
           </a:xfrm>
           <a:prstGeom prst="rect">
@@ -1445,7 +1445,7 @@
         </p:nvSpPr>
         <p:spPr>
           <a:xfrm>
-            <a:off x="2468880" y="594360"/>
+            <a:off x="2468880" y="950976"/>
             <a:ext cx="1271016" cy="182880"/>
           </a:xfrm>
           <a:prstGeom prst="roundRect">
@@ -1467,7 +1467,7 @@
         </p:nvSpPr>
         <p:spPr>
           <a:xfrm>
-            <a:off x="2468880" y="594360"/>
+            <a:off x="2468880" y="950976"/>
             <a:ext cx="1271016" cy="182880"/>
           </a:xfrm>
           <a:prstGeom prst="rect">
@@ -1506,7 +1506,7 @@
         </p:nvSpPr>
         <p:spPr>
           <a:xfrm>
-            <a:off x="457200" y="1719072"/>
+            <a:off x="457200" y="1362456"/>
             <a:ext cx="8229600" cy="548640"/>
           </a:xfrm>
           <a:prstGeom prst="rect">
@@ -1545,7 +1545,7 @@
         </p:nvSpPr>
         <p:spPr>
           <a:xfrm>
-            <a:off x="457200" y="2221992"/>
+            <a:off x="457200" y="1865376"/>
             <a:ext cx="8229600" cy="548640"/>
           </a:xfrm>
           <a:prstGeom prst="rect">
@@ -1584,7 +1584,7 @@
         </p:nvSpPr>
         <p:spPr>
           <a:xfrm>
-            <a:off x="457200" y="2770632"/>
+            <a:off x="457200" y="2414016"/>
             <a:ext cx="8229600" cy="228600"/>
           </a:xfrm>
           <a:prstGeom prst="rect">
@@ -1647,7 +1647,7 @@
         </p:nvSpPr>
         <p:spPr>
           <a:xfrm>
-            <a:off x="685800" y="3163824"/>
+            <a:off x="685800" y="2807208"/>
             <a:ext cx="7772400" cy="402336"/>
           </a:xfrm>
           <a:prstGeom prst="rect">
@@ -1683,7 +1683,7 @@
         </p:nvSpPr>
         <p:spPr>
           <a:xfrm>
-            <a:off x="457200" y="3063240"/>
+            <a:off x="457200" y="3419856"/>
             <a:ext cx="2651760" cy="914400"/>
           </a:xfrm>
           <a:prstGeom prst="roundRect">
@@ -1710,7 +1710,7 @@
         </p:nvSpPr>
         <p:spPr>
           <a:xfrm>
-            <a:off x="530352" y="3090672"/>
+            <a:off x="530352" y="3447288"/>
             <a:ext cx="2505456" cy="182880"/>
           </a:xfrm>
           <a:prstGeom prst="rect">
@@ -1749,7 +1749,7 @@
         </p:nvSpPr>
         <p:spPr>
           <a:xfrm>
-            <a:off x="530352" y="3273552"/>
+            <a:off x="530352" y="3630168"/>
             <a:ext cx="2505456" cy="676656"/>
           </a:xfrm>
           <a:prstGeom prst="rect">
@@ -1822,7 +1822,7 @@
         </p:nvSpPr>
         <p:spPr>
           <a:xfrm>
-            <a:off x="3246120" y="3063240"/>
+            <a:off x="3246120" y="3419856"/>
             <a:ext cx="2651760" cy="914400"/>
           </a:xfrm>
           <a:prstGeom prst="roundRect">
@@ -1849,7 +1849,7 @@
         </p:nvSpPr>
         <p:spPr>
           <a:xfrm>
-            <a:off x="3319272" y="3090672"/>
+            <a:off x="3319272" y="3447288"/>
             <a:ext cx="2505456" cy="182880"/>
           </a:xfrm>
           <a:prstGeom prst="rect">
@@ -1888,7 +1888,7 @@
         </p:nvSpPr>
         <p:spPr>
           <a:xfrm>
-            <a:off x="3319272" y="3273552"/>
+            <a:off x="3319272" y="3630168"/>
             <a:ext cx="2505456" cy="676656"/>
           </a:xfrm>
           <a:prstGeom prst="rect">
@@ -1961,7 +1961,7 @@
         </p:nvSpPr>
         <p:spPr>
           <a:xfrm>
-            <a:off x="6035040" y="3063240"/>
+            <a:off x="6035040" y="3419856"/>
             <a:ext cx="2651760" cy="914400"/>
           </a:xfrm>
           <a:prstGeom prst="roundRect">
@@ -1988,7 +1988,7 @@
         </p:nvSpPr>
         <p:spPr>
           <a:xfrm>
-            <a:off x="6108192" y="3090672"/>
+            <a:off x="6108192" y="3447288"/>
             <a:ext cx="2505456" cy="182880"/>
           </a:xfrm>
           <a:prstGeom prst="rect">
@@ -2027,7 +2027,7 @@
         </p:nvSpPr>
         <p:spPr>
           <a:xfrm>
-            <a:off x="6108192" y="3273552"/>
+            <a:off x="6108192" y="3630168"/>
             <a:ext cx="2505456" cy="676656"/>
           </a:xfrm>
           <a:prstGeom prst="rect">
@@ -3093,7 +3093,7 @@
         </p:nvSpPr>
         <p:spPr>
           <a:xfrm>
-            <a:off x="457200" y="2084832"/>
+            <a:off x="457200" y="1728216"/>
             <a:ext cx="4046220" cy="182880"/>
           </a:xfrm>
           <a:prstGeom prst="rect">
@@ -3206,7 +3206,7 @@
         </p:nvSpPr>
         <p:spPr>
           <a:xfrm>
-            <a:off x="4640580" y="1600200"/>
+            <a:off x="4640580" y="1956816"/>
             <a:ext cx="4046220" cy="411480"/>
           </a:xfrm>
           <a:prstGeom prst="roundRect">
@@ -3233,7 +3233,7 @@
         </p:nvSpPr>
         <p:spPr>
           <a:xfrm>
-            <a:off x="4640580" y="1600200"/>
+            <a:off x="4640580" y="1956816"/>
             <a:ext cx="4046220" cy="411480"/>
           </a:xfrm>
           <a:prstGeom prst="rect">
@@ -3283,7 +3283,7 @@
         </p:nvSpPr>
         <p:spPr>
           <a:xfrm>
-            <a:off x="457200" y="2862072"/>
+            <a:off x="457200" y="2505456"/>
             <a:ext cx="4046220" cy="182880"/>
           </a:xfrm>
           <a:prstGeom prst="rect">
@@ -3396,7 +3396,7 @@
         </p:nvSpPr>
         <p:spPr>
           <a:xfrm>
-            <a:off x="4640580" y="2377440"/>
+            <a:off x="4640580" y="2734056"/>
             <a:ext cx="4046220" cy="411480"/>
           </a:xfrm>
           <a:prstGeom prst="roundRect">
@@ -3423,7 +3423,7 @@
         </p:nvSpPr>
         <p:spPr>
           <a:xfrm>
-            <a:off x="4640580" y="2377440"/>
+            <a:off x="4640580" y="2734056"/>
             <a:ext cx="4046220" cy="411480"/>
           </a:xfrm>
           <a:prstGeom prst="rect">
@@ -4670,7 +4670,7 @@
         </p:nvSpPr>
         <p:spPr>
           <a:xfrm>
-            <a:off x="457200" y="1371600"/>
+            <a:off x="457200" y="1014984"/>
             <a:ext cx="4572000" cy="164592"/>
           </a:xfrm>
           <a:prstGeom prst="rect">
@@ -5720,7 +5720,7 @@
         </p:nvSpPr>
         <p:spPr>
           <a:xfrm>
-            <a:off x="457200" y="3044952"/>
+            <a:off x="457200" y="2688336"/>
             <a:ext cx="4572000" cy="164592"/>
           </a:xfrm>
           <a:prstGeom prst="rect">
@@ -7309,7 +7309,7 @@
         </p:nvSpPr>
         <p:spPr>
           <a:xfrm>
-            <a:off x="457200" y="1371600"/>
+            <a:off x="457200" y="1014984"/>
             <a:ext cx="4572000" cy="164592"/>
           </a:xfrm>
           <a:prstGeom prst="rect">
@@ -8162,7 +8162,7 @@
         </p:nvSpPr>
         <p:spPr>
           <a:xfrm>
-            <a:off x="457200" y="2816352"/>
+            <a:off x="457200" y="2459736"/>
             <a:ext cx="4572000" cy="164592"/>
           </a:xfrm>
           <a:prstGeom prst="rect">
@@ -9765,7 +9765,7 @@
         </p:nvSpPr>
         <p:spPr>
           <a:xfrm>
-            <a:off x="457200" y="658368"/>
+            <a:off x="457200" y="1014984"/>
             <a:ext cx="2670048" cy="868680"/>
           </a:xfrm>
           <a:prstGeom prst="roundRect">
@@ -9792,7 +9792,7 @@
         </p:nvSpPr>
         <p:spPr>
           <a:xfrm>
-            <a:off x="530352" y="685800"/>
+            <a:off x="530352" y="1042416"/>
             <a:ext cx="2523744" cy="182880"/>
           </a:xfrm>
           <a:prstGeom prst="rect">
@@ -9831,7 +9831,7 @@
         </p:nvSpPr>
         <p:spPr>
           <a:xfrm>
-            <a:off x="530352" y="868680"/>
+            <a:off x="530352" y="1225296"/>
             <a:ext cx="2523744" cy="630936"/>
           </a:xfrm>
           <a:prstGeom prst="rect">
@@ -9887,7 +9887,7 @@
         </p:nvSpPr>
         <p:spPr>
           <a:xfrm>
-            <a:off x="3236976" y="658368"/>
+            <a:off x="3236976" y="1014984"/>
             <a:ext cx="2670048" cy="868680"/>
           </a:xfrm>
           <a:prstGeom prst="roundRect">
@@ -9914,7 +9914,7 @@
         </p:nvSpPr>
         <p:spPr>
           <a:xfrm>
-            <a:off x="3310128" y="685800"/>
+            <a:off x="3310128" y="1042416"/>
             <a:ext cx="2523744" cy="182880"/>
           </a:xfrm>
           <a:prstGeom prst="rect">
@@ -9953,7 +9953,7 @@
         </p:nvSpPr>
         <p:spPr>
           <a:xfrm>
-            <a:off x="3310128" y="868680"/>
+            <a:off x="3310128" y="1225296"/>
             <a:ext cx="2523744" cy="630936"/>
           </a:xfrm>
           <a:prstGeom prst="rect">
@@ -10009,7 +10009,7 @@
         </p:nvSpPr>
         <p:spPr>
           <a:xfrm>
-            <a:off x="6016752" y="658368"/>
+            <a:off x="6016752" y="1014984"/>
             <a:ext cx="2670048" cy="868680"/>
           </a:xfrm>
           <a:prstGeom prst="roundRect">
@@ -10036,7 +10036,7 @@
         </p:nvSpPr>
         <p:spPr>
           <a:xfrm>
-            <a:off x="6089904" y="685800"/>
+            <a:off x="6089904" y="1042416"/>
             <a:ext cx="2523744" cy="182880"/>
           </a:xfrm>
           <a:prstGeom prst="rect">
@@ -10075,7 +10075,7 @@
         </p:nvSpPr>
         <p:spPr>
           <a:xfrm>
-            <a:off x="6089904" y="868680"/>
+            <a:off x="6089904" y="1225296"/>
             <a:ext cx="2523744" cy="630936"/>
           </a:xfrm>
           <a:prstGeom prst="rect">
@@ -10131,7 +10131,7 @@
         </p:nvSpPr>
         <p:spPr>
           <a:xfrm>
-            <a:off x="457200" y="1618488"/>
+            <a:off x="457200" y="1975104"/>
             <a:ext cx="2670048" cy="868680"/>
           </a:xfrm>
           <a:prstGeom prst="roundRect">
@@ -10158,7 +10158,7 @@
         </p:nvSpPr>
         <p:spPr>
           <a:xfrm>
-            <a:off x="530352" y="1645920"/>
+            <a:off x="530352" y="2002536"/>
             <a:ext cx="2523744" cy="182880"/>
           </a:xfrm>
           <a:prstGeom prst="rect">
@@ -10197,7 +10197,7 @@
         </p:nvSpPr>
         <p:spPr>
           <a:xfrm>
-            <a:off x="530352" y="1828800"/>
+            <a:off x="530352" y="2185416"/>
             <a:ext cx="2523744" cy="630936"/>
           </a:xfrm>
           <a:prstGeom prst="rect">
@@ -10253,7 +10253,7 @@
         </p:nvSpPr>
         <p:spPr>
           <a:xfrm>
-            <a:off x="3236976" y="1618488"/>
+            <a:off x="3236976" y="1975104"/>
             <a:ext cx="2670048" cy="868680"/>
           </a:xfrm>
           <a:prstGeom prst="roundRect">
@@ -10280,7 +10280,7 @@
         </p:nvSpPr>
         <p:spPr>
           <a:xfrm>
-            <a:off x="3310128" y="1645920"/>
+            <a:off x="3310128" y="2002536"/>
             <a:ext cx="2523744" cy="182880"/>
           </a:xfrm>
           <a:prstGeom prst="rect">
@@ -10319,7 +10319,7 @@
         </p:nvSpPr>
         <p:spPr>
           <a:xfrm>
-            <a:off x="3310128" y="1828800"/>
+            <a:off x="3310128" y="2185416"/>
             <a:ext cx="2523744" cy="630936"/>
           </a:xfrm>
           <a:prstGeom prst="rect">
@@ -10375,7 +10375,7 @@
         </p:nvSpPr>
         <p:spPr>
           <a:xfrm>
-            <a:off x="6016752" y="1618488"/>
+            <a:off x="6016752" y="1975104"/>
             <a:ext cx="2670048" cy="868680"/>
           </a:xfrm>
           <a:prstGeom prst="roundRect">
@@ -10402,7 +10402,7 @@
         </p:nvSpPr>
         <p:spPr>
           <a:xfrm>
-            <a:off x="6089904" y="1645920"/>
+            <a:off x="6089904" y="2002536"/>
             <a:ext cx="2523744" cy="182880"/>
           </a:xfrm>
           <a:prstGeom prst="rect">
@@ -10441,7 +10441,7 @@
         </p:nvSpPr>
         <p:spPr>
           <a:xfrm>
-            <a:off x="6089904" y="1828800"/>
+            <a:off x="6089904" y="2185416"/>
             <a:ext cx="2523744" cy="630936"/>
           </a:xfrm>
           <a:prstGeom prst="rect">
@@ -10497,7 +10497,7 @@
         </p:nvSpPr>
         <p:spPr>
           <a:xfrm>
-            <a:off x="457200" y="2578608"/>
+            <a:off x="457200" y="2935224"/>
             <a:ext cx="4046220" cy="164592"/>
           </a:xfrm>
           <a:prstGeom prst="rect">
@@ -10540,7 +10540,7 @@
           </p:nvPr>
         </p:nvGraphicFramePr>
         <p:xfrm>
-          <a:off x="457200" y="2779776"/>
+          <a:off x="457200" y="3136392"/>
           <a:ext cx="4046220" cy="914400"/>
         </p:xfrm>
         <a:graphic>
@@ -12346,7 +12346,7 @@
         </p:nvSpPr>
         <p:spPr>
           <a:xfrm>
-            <a:off x="4640580" y="2578608"/>
+            <a:off x="4640580" y="2935224"/>
             <a:ext cx="4046220" cy="164592"/>
           </a:xfrm>
           <a:prstGeom prst="rect">
@@ -12382,7 +12382,7 @@
         </p:nvSpPr>
         <p:spPr>
           <a:xfrm>
-            <a:off x="4640580" y="2779776"/>
+            <a:off x="4640580" y="3136392"/>
             <a:ext cx="4046220" cy="310896"/>
           </a:xfrm>
           <a:prstGeom prst="roundRect">
@@ -12409,7 +12409,7 @@
         </p:nvSpPr>
         <p:spPr>
           <a:xfrm>
-            <a:off x="4713732" y="2807208"/>
+            <a:off x="4713732" y="3163824"/>
             <a:ext cx="3899916" cy="182880"/>
           </a:xfrm>
           <a:prstGeom prst="rect">
@@ -12448,7 +12448,7 @@
         </p:nvSpPr>
         <p:spPr>
           <a:xfrm>
-            <a:off x="4713732" y="2990088"/>
+            <a:off x="4713732" y="3346704"/>
             <a:ext cx="3899916" cy="73152"/>
           </a:xfrm>
           <a:prstGeom prst="rect">
@@ -12487,7 +12487,7 @@
         </p:nvSpPr>
         <p:spPr>
           <a:xfrm>
-            <a:off x="4640580" y="3127248"/>
+            <a:off x="4640580" y="3483864"/>
             <a:ext cx="4046220" cy="310896"/>
           </a:xfrm>
           <a:prstGeom prst="roundRect">
@@ -12514,7 +12514,7 @@
         </p:nvSpPr>
         <p:spPr>
           <a:xfrm>
-            <a:off x="4713732" y="3154680"/>
+            <a:off x="4713732" y="3511296"/>
             <a:ext cx="3899916" cy="182880"/>
           </a:xfrm>
           <a:prstGeom prst="rect">
@@ -12553,7 +12553,7 @@
         </p:nvSpPr>
         <p:spPr>
           <a:xfrm>
-            <a:off x="4713732" y="3337560"/>
+            <a:off x="4713732" y="3694176"/>
             <a:ext cx="3899916" cy="73152"/>
           </a:xfrm>
           <a:prstGeom prst="rect">
@@ -12592,7 +12592,7 @@
         </p:nvSpPr>
         <p:spPr>
           <a:xfrm>
-            <a:off x="4640580" y="3474720"/>
+            <a:off x="4640580" y="3831336"/>
             <a:ext cx="4046220" cy="310896"/>
           </a:xfrm>
           <a:prstGeom prst="roundRect">
@@ -12619,7 +12619,7 @@
         </p:nvSpPr>
         <p:spPr>
           <a:xfrm>
-            <a:off x="4713732" y="3502152"/>
+            <a:off x="4713732" y="3858768"/>
             <a:ext cx="3899916" cy="182880"/>
           </a:xfrm>
           <a:prstGeom prst="rect">
@@ -12658,7 +12658,7 @@
         </p:nvSpPr>
         <p:spPr>
           <a:xfrm>
-            <a:off x="4713732" y="3685032"/>
+            <a:off x="4713732" y="4041648"/>
             <a:ext cx="3899916" cy="73152"/>
           </a:xfrm>
           <a:prstGeom prst="rect">
@@ -12844,7 +12844,7 @@
         </p:nvSpPr>
         <p:spPr>
           <a:xfrm>
-            <a:off x="457200" y="1371600"/>
+            <a:off x="457200" y="1014984"/>
             <a:ext cx="4023360" cy="164592"/>
           </a:xfrm>
           <a:prstGeom prst="rect">
@@ -15302,7 +15302,7 @@
         </p:nvSpPr>
         <p:spPr>
           <a:xfrm>
-            <a:off x="4663440" y="1371600"/>
+            <a:off x="4663440" y="1014984"/>
             <a:ext cx="4023360" cy="164592"/>
           </a:xfrm>
           <a:prstGeom prst="rect">
@@ -15345,7 +15345,7 @@
           </p:nvPr>
         </p:nvGraphicFramePr>
         <p:xfrm>
-          <a:off x="4663440" y="868680"/>
+          <a:off x="4663440" y="1225296"/>
           <a:ext cx="4023360" cy="914400"/>
         </p:xfrm>
         <a:graphic>
@@ -17566,7 +17566,7 @@
         </p:nvSpPr>
         <p:spPr>
           <a:xfrm>
-            <a:off x="457200" y="3685032"/>
+            <a:off x="457200" y="3328416"/>
             <a:ext cx="8229600" cy="164592"/>
           </a:xfrm>
           <a:prstGeom prst="rect">

--- a/docs/AI-Native-训战营-介绍与日程.pptx
+++ b/docs/AI-Native-训战营-介绍与日程.pptx
@@ -6450,7 +6450,7 @@
                           <a:ea typeface="Arial" pitchFamily="34" charset="-122"/>
                           <a:cs typeface="Arial" pitchFamily="34" charset="-120"/>
                         </a:rPr>
-                        <a:t>Workshop 1: 练手 60min</a:t>
+                        <a:t>Workshop 1: 高级实战 60min</a:t>
                       </a:r>
                       <a:endParaRPr lang="en-US" sz="650" dirty="0">
                         <a:latin typeface="Arial" charset="0"/>
@@ -6518,7 +6518,7 @@
                           <a:ea typeface="Arial" pitchFamily="34" charset="-122"/>
                           <a:cs typeface="Arial" pitchFamily="34" charset="-120"/>
                         </a:rPr>
-                        <a:t>环境搭建 CLAUDE.md+Skill 首次AI修改</a:t>
+                        <a:t>hooks/自定义命令/多模型 · 工作流搭建 · 增量实战</a:t>
                       </a:r>
                       <a:endParaRPr lang="en-US" sz="650" dirty="0">
                         <a:latin typeface="Arial" charset="0"/>
@@ -9092,7 +9092,7 @@
                           <a:ea typeface="Arial" pitchFamily="34" charset="-122"/>
                           <a:cs typeface="Arial" pitchFamily="34" charset="-120"/>
                         </a:rPr>
-                        <a:t>方案对比+同行评审 30min</a:t>
+                        <a:t>疑问解答+评审 30min</a:t>
                       </a:r>
                       <a:endParaRPr lang="en-US" sz="650" dirty="0">
                         <a:latin typeface="Arial" charset="0"/>
@@ -9160,7 +9160,7 @@
                           <a:ea typeface="Arial" pitchFamily="34" charset="-122"/>
                           <a:cs typeface="Arial" pitchFamily="34" charset="-120"/>
                         </a:rPr>
-                        <a:t>W2+W3成果展示 审查清单评审</a:t>
+                        <a:t>Day1疑问集中解答 · 成果展示 · 审查清单评审</a:t>
                       </a:r>
                       <a:endParaRPr lang="en-US" sz="650" dirty="0">
                         <a:latin typeface="Arial" charset="0"/>
@@ -12434,7 +12434,7 @@
                 <a:ea typeface="Arial" pitchFamily="34" charset="-122"/>
                 <a:cs typeface="Arial" pitchFamily="34" charset="-120"/>
               </a:rPr>
-              <a:t>W1 环境搭建+练手 60min</a:t>
+              <a:t>W1 Claude高级实战 60min</a:t>
             </a:r>
             <a:endParaRPr lang="en-US" sz="900" dirty="0"/>
           </a:p>
@@ -12473,7 +12473,7 @@
                   <a:srgbClr val="64748B"/>
                 </a:solidFill>
               </a:rPr>
-              <a:t>Claude安装 CLAUDE.md+Skill</a:t>
+              <a:t>hooks 自定义命令 工作流搭建</a:t>
             </a:r>
             <a:endParaRPr lang="en-US" sz="700" dirty="0"/>
           </a:p>

--- a/docs/AI-Native-训战营-介绍与日程.pptx
+++ b/docs/AI-Native-训战营-介绍与日程.pptx
@@ -6518,7 +6518,7 @@
                           <a:ea typeface="Arial" pitchFamily="34" charset="-122"/>
                           <a:cs typeface="Arial" pitchFamily="34" charset="-120"/>
                         </a:rPr>
-                        <a:t>hooks/自定义命令/多模型 · 工作流搭建 · 增量实战</a:t>
+                        <a:t>hooks/上下文/Token · 工作流搭建 · 增量实战</a:t>
                       </a:r>
                       <a:endParaRPr lang="en-US" sz="650" dirty="0">
                         <a:latin typeface="Arial" charset="0"/>
@@ -8892,7 +8892,7 @@
                           <a:ea typeface="Arial" pitchFamily="34" charset="-122"/>
                           <a:cs typeface="Arial" pitchFamily="34" charset="-120"/>
                         </a:rPr>
-                        <a:t>Workshop 3: 端到端 60min</a:t>
+                        <a:t>Workshop 3: 带项目实战 60min</a:t>
                       </a:r>
                       <a:endParaRPr lang="en-US" sz="650" dirty="0">
                         <a:latin typeface="Arial" charset="0"/>
@@ -8960,7 +8960,7 @@
                           <a:ea typeface="Arial" pitchFamily="34" charset="-122"/>
                           <a:cs typeface="Arial" pitchFamily="34" charset="-120"/>
                         </a:rPr>
-                        <a:t>三档自选: 小费计算器/历史搜索/程序员 AID流程</a:t>
+                        <a:t>自带项目实验(或三档练习可选) 讲师巡场支持</a:t>
                       </a:r>
                       <a:endParaRPr lang="en-US" sz="650" dirty="0">
                         <a:latin typeface="Arial" charset="0"/>
@@ -9092,7 +9092,7 @@
                           <a:ea typeface="Arial" pitchFamily="34" charset="-122"/>
                           <a:cs typeface="Arial" pitchFamily="34" charset="-120"/>
                         </a:rPr>
-                        <a:t>疑问解答+评审 30min</a:t>
+                        <a:t>疑问总结 30min</a:t>
                       </a:r>
                       <a:endParaRPr lang="en-US" sz="650" dirty="0">
                         <a:latin typeface="Arial" charset="0"/>
@@ -9160,7 +9160,7 @@
                           <a:ea typeface="Arial" pitchFamily="34" charset="-122"/>
                           <a:cs typeface="Arial" pitchFamily="34" charset="-120"/>
                         </a:rPr>
-                        <a:t>Day1疑问集中解答 · 成果展示 · 审查清单评审</a:t>
+                        <a:t>Day1疑问解答 · 两天问题总结 · 成果展示点评</a:t>
                       </a:r>
                       <a:endParaRPr lang="en-US" sz="650" dirty="0">
                         <a:latin typeface="Arial" charset="0"/>
@@ -12473,7 +12473,7 @@
                   <a:srgbClr val="64748B"/>
                 </a:solidFill>
               </a:rPr>
-              <a:t>hooks 自定义命令 工作流搭建</a:t>
+              <a:t>hooks 上下文管理 Token优化 工作流</a:t>
             </a:r>
             <a:endParaRPr lang="en-US" sz="700" dirty="0"/>
           </a:p>
@@ -12644,7 +12644,7 @@
                 <a:ea typeface="Arial" pitchFamily="34" charset="-122"/>
                 <a:cs typeface="Arial" pitchFamily="34" charset="-120"/>
               </a:rPr>
-              <a:t>W3 端到端项目 60min</a:t>
+              <a:t>W3 带项目实战 60min</a:t>
             </a:r>
             <a:endParaRPr lang="en-US" sz="900" dirty="0"/>
           </a:p>
@@ -12683,7 +12683,7 @@
                   <a:srgbClr val="64748B"/>
                 </a:solidFill>
               </a:rPr>
-              <a:t>三档自选 完整AID流程 同行评审</a:t>
+              <a:t>自带项目实验 讲师巡场支持</a:t>
             </a:r>
             <a:endParaRPr lang="en-US" sz="700" dirty="0"/>
           </a:p>

--- a/docs/AI-Native-训战营-介绍与日程.pptx
+++ b/docs/AI-Native-训战营-介绍与日程.pptx
@@ -6064,7 +6064,7 @@
                           <a:ea typeface="Arial" pitchFamily="34" charset="-122"/>
                           <a:cs typeface="Arial" pitchFamily="34" charset="-120"/>
                         </a:rPr>
-                        <a:t>L1+L2 演示 45min</a:t>
+                        <a:t>L3 全流程推演 45min</a:t>
                       </a:r>
                       <a:endParaRPr lang="en-US" sz="650" dirty="0">
                         <a:latin typeface="Arial" charset="0"/>
@@ -6132,7 +6132,7 @@
                           <a:ea typeface="Arial" pitchFamily="34" charset="-122"/>
                           <a:cs typeface="Arial" pitchFamily="34" charset="-120"/>
                         </a:rPr>
-                        <a:t>L1: 传统vs AI Native  L2: /tokens操作</a:t>
+                        <a:t>完整推演[加单位换算] Spec-&gt;Code 不剪辑</a:t>
                       </a:r>
                       <a:endParaRPr lang="en-US" sz="650" dirty="0">
                         <a:latin typeface="Arial" charset="0"/>
@@ -6450,7 +6450,7 @@
                           <a:ea typeface="Arial" pitchFamily="34" charset="-122"/>
                           <a:cs typeface="Arial" pitchFamily="34" charset="-120"/>
                         </a:rPr>
-                        <a:t>Workshop 1: 高级实战 60min</a:t>
+                        <a:t>L3 Live Coding 60min</a:t>
                       </a:r>
                       <a:endParaRPr lang="en-US" sz="650" dirty="0">
                         <a:latin typeface="Arial" charset="0"/>
@@ -6497,7 +6497,7 @@
                       <a:tailEnd type="none" w="med" len="med"/>
                     </a:lnB>
                     <a:solidFill>
-                      <a:srgbClr val="FFF7ED"/>
+                      <a:srgbClr val="EFF6FF"/>
                     </a:solidFill>
                   </a:tcPr>
                 </a:tc>
@@ -6518,7 +6518,7 @@
                           <a:ea typeface="Arial" pitchFamily="34" charset="-122"/>
                           <a:cs typeface="Arial" pitchFamily="34" charset="-120"/>
                         </a:rPr>
-                        <a:t>hooks/上下文/Token · 工作流搭建 · 增量实战</a:t>
+                        <a:t>学员跟做: 在自己的终端完成同一需求 · 对比点评</a:t>
                       </a:r>
                       <a:endParaRPr lang="en-US" sz="650" dirty="0">
                         <a:latin typeface="Arial" charset="0"/>
@@ -6836,7 +6836,7 @@
                           <a:ea typeface="Arial" pitchFamily="34" charset="-122"/>
                           <a:cs typeface="Arial" pitchFamily="34" charset="-120"/>
                         </a:rPr>
-                        <a:t>L3 Live Coding 60min</a:t>
+                        <a:t>Workshop 1: 高级实战 60min</a:t>
                       </a:r>
                       <a:endParaRPr lang="en-US" sz="650" dirty="0">
                         <a:latin typeface="Arial" charset="0"/>
@@ -6883,7 +6883,7 @@
                       <a:tailEnd type="none" w="med" len="med"/>
                     </a:lnB>
                     <a:solidFill>
-                      <a:srgbClr val="EFF6FF"/>
+                      <a:srgbClr val="FFF7ED"/>
                     </a:solidFill>
                   </a:tcPr>
                 </a:tc>
@@ -6904,7 +6904,7 @@
                           <a:ea typeface="Arial" pitchFamily="34" charset="-122"/>
                           <a:cs typeface="Arial" pitchFamily="34" charset="-120"/>
                         </a:rPr>
-                        <a:t>完整演示[加单位换算] Spec-&gt;Code 不剪辑</a:t>
+                        <a:t>hooks/上下文/Token · 工作流搭建 · 增量实战</a:t>
                       </a:r>
                       <a:endParaRPr lang="en-US" sz="650" dirty="0">
                         <a:latin typeface="Arial" charset="0"/>

--- a/docs/AI-Native-训战营-介绍与日程.pptx
+++ b/docs/AI-Native-训战营-介绍与日程.pptx
@@ -3255,21 +3255,7 @@
                   <a:srgbClr val="2563EB"/>
                 </a:solidFill>
               </a:rPr>
-              <a:t>下午 演示+演练 (14:30-18:00)</a:t>
-            </a:r>
-            <a:endParaRPr lang="en-US" sz="700" dirty="0"/>
-          </a:p>
-          <a:p>
-            <a:pPr algn="ctr" indent="0" marL="0">
-              <a:buNone/>
-            </a:pPr>
-            <a:r>
-              <a:rPr lang="en-US" sz="700" b="1" dirty="0">
-                <a:solidFill>
-                  <a:srgbClr val="2563EB"/>
-                </a:solidFill>
-              </a:rPr>
-              <a:t>L1+L2演示 45m | W1 60m | L3 60m</a:t>
+              <a:t>下午 演示+演练 (14:30-18:00)\nL3推演 45m | L3 Live 60m | W1 60m</a:t>
             </a:r>
             <a:endParaRPr lang="en-US" sz="700" dirty="0"/>
           </a:p>
@@ -3445,21 +3431,7 @@
                   <a:srgbClr val="2563EB"/>
                 </a:solidFill>
               </a:rPr>
-              <a:t>下午 演练 (14:30-18:00)</a:t>
-            </a:r>
-            <a:endParaRPr lang="en-US" sz="700" dirty="0"/>
-          </a:p>
-          <a:p>
-            <a:pPr algn="ctr" indent="0" marL="0">
-              <a:buNone/>
-            </a:pPr>
-            <a:r>
-              <a:rPr lang="en-US" sz="700" b="1" dirty="0">
-                <a:solidFill>
-                  <a:srgbClr val="2563EB"/>
-                </a:solidFill>
-              </a:rPr>
-              <a:t>W2重构 75m | W3项目 60m | 评审+L6</a:t>
+              <a:t>下午 演练 (14:30-18:00)\nW2重构 75m | W3项目 60m | 评审+L6</a:t>
             </a:r>
             <a:endParaRPr lang="en-US" sz="700" dirty="0"/>
           </a:p>
@@ -3967,7 +3939,7 @@
                           <a:ea typeface="Arial" pitchFamily="34" charset="-122"/>
                           <a:cs typeface="Arial" pitchFamily="34" charset="-120"/>
                         </a:rPr>
-                        <a:t>L1+L2 Demo + L3 Live (105min)</a:t>
+                        <a:t>L3 推演 + L3 Live (105min)</a:t>
                       </a:r>
                       <a:endParaRPr lang="en-US" sz="650" dirty="0">
                         <a:latin typeface="Arial" charset="0"/>

--- a/docs/AI-Native-训战营-介绍与日程.pptx
+++ b/docs/AI-Native-训战营-介绍与日程.pptx
@@ -3255,7 +3255,7 @@
                   <a:srgbClr val="2563EB"/>
                 </a:solidFill>
               </a:rPr>
-              <a:t>下午 演示+演练 (14:30-18:00)\nL3推演 45m | L3 Live 60m | W1 60m</a:t>
+              <a:t>下午 演示+演练 (14:30-18:00)\nL3推演+跟做 105m | W1 60m</a:t>
             </a:r>
             <a:endParaRPr lang="en-US" sz="700" dirty="0"/>
           </a:p>
@@ -3939,7 +3939,7 @@
                           <a:ea typeface="Arial" pitchFamily="34" charset="-122"/>
                           <a:cs typeface="Arial" pitchFamily="34" charset="-120"/>
                         </a:rPr>
-                        <a:t>L3 推演 + L3 Live (105min)</a:t>
+                        <a:t>L3 推演+跟做 (105min)</a:t>
                       </a:r>
                       <a:endParaRPr lang="en-US" sz="650" dirty="0">
                         <a:latin typeface="Arial" charset="0"/>
@@ -5953,7 +5953,7 @@
                   </a:tcPr>
                 </a:tc>
               </a:tr>
-              <a:tr h="310896">
+              <a:tr h="384048">
                 <a:tc>
                   <a:txBody>
                     <a:bodyPr/>
@@ -6036,7 +6036,7 @@
                           <a:ea typeface="Arial" pitchFamily="34" charset="-122"/>
                           <a:cs typeface="Arial" pitchFamily="34" charset="-120"/>
                         </a:rPr>
-                        <a:t>L3 全流程推演 45min</a:t>
+                        <a:t>L3: 全流程推演 105min</a:t>
                       </a:r>
                       <a:endParaRPr lang="en-US" sz="650" dirty="0">
                         <a:latin typeface="Arial" charset="0"/>
@@ -6104,393 +6104,7 @@
                           <a:ea typeface="Arial" pitchFamily="34" charset="-122"/>
                           <a:cs typeface="Arial" pitchFamily="34" charset="-120"/>
                         </a:rPr>
-                        <a:t>完整推演[加单位换算] Spec-&gt;Code 不剪辑</a:t>
-                      </a:r>
-                      <a:endParaRPr lang="en-US" sz="650" dirty="0">
-                        <a:latin typeface="Arial" charset="0"/>
-                        <a:ea typeface="Arial" charset="0"/>
-                        <a:cs typeface="Arial" charset="0"/>
-                      </a:endParaRPr>
-                    </a:p>
-                  </a:txBody>
-                  <a:tcPr marL="38100" marR="38100" marT="25400" marB="25400">
-                    <a:lnL w="6350" cap="flat" cmpd="sng" algn="ctr">
-                      <a:solidFill>
-                        <a:srgbClr val="666666"/>
-                      </a:solidFill>
-                      <a:prstDash val="solid"/>
-                      <a:round/>
-                      <a:headEnd type="none" w="med" len="med"/>
-                      <a:tailEnd type="none" w="med" len="med"/>
-                    </a:lnL>
-                    <a:lnR w="6350" cap="flat" cmpd="sng" algn="ctr">
-                      <a:solidFill>
-                        <a:srgbClr val="666666"/>
-                      </a:solidFill>
-                      <a:prstDash val="solid"/>
-                      <a:round/>
-                      <a:headEnd type="none" w="med" len="med"/>
-                      <a:tailEnd type="none" w="med" len="med"/>
-                    </a:lnR>
-                    <a:lnT w="6350" cap="flat" cmpd="sng" algn="ctr">
-                      <a:solidFill>
-                        <a:srgbClr val="666666"/>
-                      </a:solidFill>
-                      <a:prstDash val="solid"/>
-                      <a:round/>
-                      <a:headEnd type="none" w="med" len="med"/>
-                      <a:tailEnd type="none" w="med" len="med"/>
-                    </a:lnT>
-                    <a:lnB w="6350" cap="flat" cmpd="sng" algn="ctr">
-                      <a:solidFill>
-                        <a:srgbClr val="666666"/>
-                      </a:solidFill>
-                      <a:prstDash val="solid"/>
-                      <a:round/>
-                      <a:headEnd type="none" w="med" len="med"/>
-                      <a:tailEnd type="none" w="med" len="med"/>
-                    </a:lnB>
-                  </a:tcPr>
-                </a:tc>
-              </a:tr>
-              <a:tr h="155448">
-                <a:tc>
-                  <a:txBody>
-                    <a:bodyPr/>
-                    <a:lstStyle/>
-                    <a:p>
-                      <a:pPr indent="0" marL="0">
-                        <a:buNone/>
-                      </a:pPr>
-                      <a:r>
-                        <a:rPr lang="en-US" sz="650" b="1" dirty="0">
-                          <a:solidFill>
-                            <a:srgbClr val="334155"/>
-                          </a:solidFill>
-                          <a:latin typeface="Arial" pitchFamily="34" charset="0"/>
-                          <a:ea typeface="Arial" pitchFamily="34" charset="-122"/>
-                          <a:cs typeface="Arial" pitchFamily="34" charset="-120"/>
-                        </a:rPr>
-                        <a:t>15:15</a:t>
-                      </a:r>
-                      <a:endParaRPr lang="en-US" sz="650" dirty="0">
-                        <a:latin typeface="Arial" charset="0"/>
-                        <a:ea typeface="Arial" charset="0"/>
-                        <a:cs typeface="Arial" charset="0"/>
-                      </a:endParaRPr>
-                    </a:p>
-                  </a:txBody>
-                  <a:tcPr marL="38100" marR="38100" marT="25400" marB="25400">
-                    <a:lnL w="6350" cap="flat" cmpd="sng" algn="ctr">
-                      <a:solidFill>
-                        <a:srgbClr val="666666"/>
-                      </a:solidFill>
-                      <a:prstDash val="solid"/>
-                      <a:round/>
-                      <a:headEnd type="none" w="med" len="med"/>
-                      <a:tailEnd type="none" w="med" len="med"/>
-                    </a:lnL>
-                    <a:lnR w="6350" cap="flat" cmpd="sng" algn="ctr">
-                      <a:solidFill>
-                        <a:srgbClr val="666666"/>
-                      </a:solidFill>
-                      <a:prstDash val="solid"/>
-                      <a:round/>
-                      <a:headEnd type="none" w="med" len="med"/>
-                      <a:tailEnd type="none" w="med" len="med"/>
-                    </a:lnR>
-                    <a:lnT w="6350" cap="flat" cmpd="sng" algn="ctr">
-                      <a:solidFill>
-                        <a:srgbClr val="666666"/>
-                      </a:solidFill>
-                      <a:prstDash val="solid"/>
-                      <a:round/>
-                      <a:headEnd type="none" w="med" len="med"/>
-                      <a:tailEnd type="none" w="med" len="med"/>
-                    </a:lnT>
-                    <a:lnB w="6350" cap="flat" cmpd="sng" algn="ctr">
-                      <a:solidFill>
-                        <a:srgbClr val="666666"/>
-                      </a:solidFill>
-                      <a:prstDash val="solid"/>
-                      <a:round/>
-                      <a:headEnd type="none" w="med" len="med"/>
-                      <a:tailEnd type="none" w="med" len="med"/>
-                    </a:lnB>
-                  </a:tcPr>
-                </a:tc>
-                <a:tc>
-                  <a:txBody>
-                    <a:bodyPr/>
-                    <a:lstStyle/>
-                    <a:p>
-                      <a:pPr indent="0" marL="0">
-                        <a:buNone/>
-                      </a:pPr>
-                      <a:r>
-                        <a:rPr lang="en-US" sz="650" dirty="0">
-                          <a:solidFill>
-                            <a:srgbClr val="334155"/>
-                          </a:solidFill>
-                          <a:latin typeface="Arial" pitchFamily="34" charset="0"/>
-                          <a:ea typeface="Arial" pitchFamily="34" charset="-122"/>
-                          <a:cs typeface="Arial" pitchFamily="34" charset="-120"/>
-                        </a:rPr>
-                        <a:t>休息 15min</a:t>
-                      </a:r>
-                      <a:endParaRPr lang="en-US" sz="650" dirty="0">
-                        <a:latin typeface="Arial" charset="0"/>
-                        <a:ea typeface="Arial" charset="0"/>
-                        <a:cs typeface="Arial" charset="0"/>
-                      </a:endParaRPr>
-                    </a:p>
-                  </a:txBody>
-                  <a:tcPr marL="38100" marR="38100" marT="25400" marB="25400">
-                    <a:lnL w="6350" cap="flat" cmpd="sng" algn="ctr">
-                      <a:solidFill>
-                        <a:srgbClr val="666666"/>
-                      </a:solidFill>
-                      <a:prstDash val="solid"/>
-                      <a:round/>
-                      <a:headEnd type="none" w="med" len="med"/>
-                      <a:tailEnd type="none" w="med" len="med"/>
-                    </a:lnL>
-                    <a:lnR w="6350" cap="flat" cmpd="sng" algn="ctr">
-                      <a:solidFill>
-                        <a:srgbClr val="666666"/>
-                      </a:solidFill>
-                      <a:prstDash val="solid"/>
-                      <a:round/>
-                      <a:headEnd type="none" w="med" len="med"/>
-                      <a:tailEnd type="none" w="med" len="med"/>
-                    </a:lnR>
-                    <a:lnT w="6350" cap="flat" cmpd="sng" algn="ctr">
-                      <a:solidFill>
-                        <a:srgbClr val="666666"/>
-                      </a:solidFill>
-                      <a:prstDash val="solid"/>
-                      <a:round/>
-                      <a:headEnd type="none" w="med" len="med"/>
-                      <a:tailEnd type="none" w="med" len="med"/>
-                    </a:lnT>
-                    <a:lnB w="6350" cap="flat" cmpd="sng" algn="ctr">
-                      <a:solidFill>
-                        <a:srgbClr val="666666"/>
-                      </a:solidFill>
-                      <a:prstDash val="solid"/>
-                      <a:round/>
-                      <a:headEnd type="none" w="med" len="med"/>
-                      <a:tailEnd type="none" w="med" len="med"/>
-                    </a:lnB>
-                  </a:tcPr>
-                </a:tc>
-                <a:tc>
-                  <a:txBody>
-                    <a:bodyPr/>
-                    <a:lstStyle/>
-                    <a:p>
-                      <a:pPr indent="0" marL="0">
-                        <a:buNone/>
-                      </a:pPr>
-                      <a:endParaRPr lang="en-US" sz="650" dirty="0">
-                        <a:latin typeface="Arial" charset="0"/>
-                        <a:ea typeface="Arial" charset="0"/>
-                        <a:cs typeface="Arial" charset="0"/>
-                      </a:endParaRPr>
-                    </a:p>
-                  </a:txBody>
-                  <a:tcPr marL="38100" marR="38100" marT="25400" marB="25400">
-                    <a:lnL w="6350" cap="flat" cmpd="sng" algn="ctr">
-                      <a:solidFill>
-                        <a:srgbClr val="666666"/>
-                      </a:solidFill>
-                      <a:prstDash val="solid"/>
-                      <a:round/>
-                      <a:headEnd type="none" w="med" len="med"/>
-                      <a:tailEnd type="none" w="med" len="med"/>
-                    </a:lnL>
-                    <a:lnR w="6350" cap="flat" cmpd="sng" algn="ctr">
-                      <a:solidFill>
-                        <a:srgbClr val="666666"/>
-                      </a:solidFill>
-                      <a:prstDash val="solid"/>
-                      <a:round/>
-                      <a:headEnd type="none" w="med" len="med"/>
-                      <a:tailEnd type="none" w="med" len="med"/>
-                    </a:lnR>
-                    <a:lnT w="6350" cap="flat" cmpd="sng" algn="ctr">
-                      <a:solidFill>
-                        <a:srgbClr val="666666"/>
-                      </a:solidFill>
-                      <a:prstDash val="solid"/>
-                      <a:round/>
-                      <a:headEnd type="none" w="med" len="med"/>
-                      <a:tailEnd type="none" w="med" len="med"/>
-                    </a:lnT>
-                    <a:lnB w="6350" cap="flat" cmpd="sng" algn="ctr">
-                      <a:solidFill>
-                        <a:srgbClr val="666666"/>
-                      </a:solidFill>
-                      <a:prstDash val="solid"/>
-                      <a:round/>
-                      <a:headEnd type="none" w="med" len="med"/>
-                      <a:tailEnd type="none" w="med" len="med"/>
-                    </a:lnB>
-                  </a:tcPr>
-                </a:tc>
-              </a:tr>
-              <a:tr h="310896">
-                <a:tc>
-                  <a:txBody>
-                    <a:bodyPr/>
-                    <a:lstStyle/>
-                    <a:p>
-                      <a:pPr indent="0" marL="0">
-                        <a:buNone/>
-                      </a:pPr>
-                      <a:r>
-                        <a:rPr lang="en-US" sz="650" b="1" dirty="0">
-                          <a:solidFill>
-                            <a:srgbClr val="334155"/>
-                          </a:solidFill>
-                          <a:latin typeface="Arial" pitchFamily="34" charset="0"/>
-                          <a:ea typeface="Arial" pitchFamily="34" charset="-122"/>
-                          <a:cs typeface="Arial" pitchFamily="34" charset="-120"/>
-                        </a:rPr>
-                        <a:t>15:30</a:t>
-                      </a:r>
-                      <a:endParaRPr lang="en-US" sz="650" dirty="0">
-                        <a:latin typeface="Arial" charset="0"/>
-                        <a:ea typeface="Arial" charset="0"/>
-                        <a:cs typeface="Arial" charset="0"/>
-                      </a:endParaRPr>
-                    </a:p>
-                  </a:txBody>
-                  <a:tcPr marL="38100" marR="38100" marT="25400" marB="25400">
-                    <a:lnL w="6350" cap="flat" cmpd="sng" algn="ctr">
-                      <a:solidFill>
-                        <a:srgbClr val="666666"/>
-                      </a:solidFill>
-                      <a:prstDash val="solid"/>
-                      <a:round/>
-                      <a:headEnd type="none" w="med" len="med"/>
-                      <a:tailEnd type="none" w="med" len="med"/>
-                    </a:lnL>
-                    <a:lnR w="6350" cap="flat" cmpd="sng" algn="ctr">
-                      <a:solidFill>
-                        <a:srgbClr val="666666"/>
-                      </a:solidFill>
-                      <a:prstDash val="solid"/>
-                      <a:round/>
-                      <a:headEnd type="none" w="med" len="med"/>
-                      <a:tailEnd type="none" w="med" len="med"/>
-                    </a:lnR>
-                    <a:lnT w="6350" cap="flat" cmpd="sng" algn="ctr">
-                      <a:solidFill>
-                        <a:srgbClr val="666666"/>
-                      </a:solidFill>
-                      <a:prstDash val="solid"/>
-                      <a:round/>
-                      <a:headEnd type="none" w="med" len="med"/>
-                      <a:tailEnd type="none" w="med" len="med"/>
-                    </a:lnT>
-                    <a:lnB w="6350" cap="flat" cmpd="sng" algn="ctr">
-                      <a:solidFill>
-                        <a:srgbClr val="666666"/>
-                      </a:solidFill>
-                      <a:prstDash val="solid"/>
-                      <a:round/>
-                      <a:headEnd type="none" w="med" len="med"/>
-                      <a:tailEnd type="none" w="med" len="med"/>
-                    </a:lnB>
-                  </a:tcPr>
-                </a:tc>
-                <a:tc>
-                  <a:txBody>
-                    <a:bodyPr/>
-                    <a:lstStyle/>
-                    <a:p>
-                      <a:pPr indent="0" marL="0">
-                        <a:buNone/>
-                      </a:pPr>
-                      <a:r>
-                        <a:rPr lang="en-US" sz="650" dirty="0">
-                          <a:solidFill>
-                            <a:srgbClr val="334155"/>
-                          </a:solidFill>
-                          <a:latin typeface="Arial" pitchFamily="34" charset="0"/>
-                          <a:ea typeface="Arial" pitchFamily="34" charset="-122"/>
-                          <a:cs typeface="Arial" pitchFamily="34" charset="-120"/>
-                        </a:rPr>
-                        <a:t>L3 Live Coding 60min</a:t>
-                      </a:r>
-                      <a:endParaRPr lang="en-US" sz="650" dirty="0">
-                        <a:latin typeface="Arial" charset="0"/>
-                        <a:ea typeface="Arial" charset="0"/>
-                        <a:cs typeface="Arial" charset="0"/>
-                      </a:endParaRPr>
-                    </a:p>
-                  </a:txBody>
-                  <a:tcPr marL="38100" marR="38100" marT="25400" marB="25400">
-                    <a:lnL w="6350" cap="flat" cmpd="sng" algn="ctr">
-                      <a:solidFill>
-                        <a:srgbClr val="666666"/>
-                      </a:solidFill>
-                      <a:prstDash val="solid"/>
-                      <a:round/>
-                      <a:headEnd type="none" w="med" len="med"/>
-                      <a:tailEnd type="none" w="med" len="med"/>
-                    </a:lnL>
-                    <a:lnR w="6350" cap="flat" cmpd="sng" algn="ctr">
-                      <a:solidFill>
-                        <a:srgbClr val="666666"/>
-                      </a:solidFill>
-                      <a:prstDash val="solid"/>
-                      <a:round/>
-                      <a:headEnd type="none" w="med" len="med"/>
-                      <a:tailEnd type="none" w="med" len="med"/>
-                    </a:lnR>
-                    <a:lnT w="6350" cap="flat" cmpd="sng" algn="ctr">
-                      <a:solidFill>
-                        <a:srgbClr val="666666"/>
-                      </a:solidFill>
-                      <a:prstDash val="solid"/>
-                      <a:round/>
-                      <a:headEnd type="none" w="med" len="med"/>
-                      <a:tailEnd type="none" w="med" len="med"/>
-                    </a:lnT>
-                    <a:lnB w="6350" cap="flat" cmpd="sng" algn="ctr">
-                      <a:solidFill>
-                        <a:srgbClr val="666666"/>
-                      </a:solidFill>
-                      <a:prstDash val="solid"/>
-                      <a:round/>
-                      <a:headEnd type="none" w="med" len="med"/>
-                      <a:tailEnd type="none" w="med" len="med"/>
-                    </a:lnB>
-                    <a:solidFill>
-                      <a:srgbClr val="EFF6FF"/>
-                    </a:solidFill>
-                  </a:tcPr>
-                </a:tc>
-                <a:tc>
-                  <a:txBody>
-                    <a:bodyPr/>
-                    <a:lstStyle/>
-                    <a:p>
-                      <a:pPr indent="0" marL="0">
-                        <a:buNone/>
-                      </a:pPr>
-                      <a:r>
-                        <a:rPr lang="en-US" sz="650" dirty="0">
-                          <a:solidFill>
-                            <a:srgbClr val="334155"/>
-                          </a:solidFill>
-                          <a:latin typeface="Arial" pitchFamily="34" charset="0"/>
-                          <a:ea typeface="Arial" pitchFamily="34" charset="-122"/>
-                          <a:cs typeface="Arial" pitchFamily="34" charset="-120"/>
-                        </a:rPr>
-                        <a:t>学员跟做: 在自己的终端完成同一需求 · 对比点评</a:t>
+                        <a:t>推演示范 45min -&gt; 休息 -&gt; 学员跟做+点评 60min</a:t>
                       </a:r>
                       <a:endParaRPr lang="en-US" sz="650" dirty="0">
                         <a:latin typeface="Arial" charset="0"/>
@@ -6725,7 +6339,7 @@
                   </a:tcPr>
                 </a:tc>
               </a:tr>
-              <a:tr h="310896">
+              <a:tr h="347472">
                 <a:tc>
                   <a:txBody>
                     <a:bodyPr/>

--- a/docs/AI-Native-训战营-介绍与日程.pptx
+++ b/docs/AI-Native-训战营-介绍与日程.pptx
@@ -1606,7 +1606,7 @@
                   <a:srgbClr val="64748B"/>
                 </a:solidFill>
               </a:rPr>
-              <a:t>上午 9:30-12:00 讲座  |  下午 14:30-18:00 演示+演练  |  L4: 增量开发与重构</a:t>
+              <a:t>上午 9:30-12:00 讲座  |  下午 14:30-18:00 演练+演示  |  L4: 增量开发与重构</a:t>
             </a:r>
             <a:endParaRPr lang="en-US" sz="1100" dirty="0"/>
           </a:p>
@@ -1669,7 +1669,7 @@
                   <a:srgbClr val="2563EB"/>
                 </a:solidFill>
               </a:rPr>
-              <a:t>训前(1.5h): Prompt基础 + LLM概念 + Claude Code安装  -&gt;  课堂不讲基础</a:t>
+              <a:t>训前(1.5h): Prompt基础 + LLM概念 + Claude Code安装</a:t>
             </a:r>
             <a:endParaRPr lang="en-US" sz="1000" dirty="0"/>
           </a:p>
@@ -1808,7 +1808,7 @@
                   <a:srgbClr val="64748B"/>
                 </a:solidFill>
               </a:rPr>
-              <a:t>下午 演示+W1+L3</a:t>
+              <a:t>下午 W1实战+L3推演</a:t>
             </a:r>
             <a:endParaRPr lang="en-US" sz="700" dirty="0"/>
           </a:p>
@@ -1913,7 +1913,7 @@
                   <a:srgbClr val="64748B"/>
                 </a:solidFill>
               </a:rPr>
-              <a:t>增量开发+最佳实践</a:t>
+              <a:t>增量开发和重构</a:t>
             </a:r>
             <a:endParaRPr lang="en-US" sz="700" dirty="0"/>
           </a:p>
@@ -1930,7 +1930,7 @@
                   <a:srgbClr val="64748B"/>
                 </a:solidFill>
               </a:rPr>
-              <a:t>上午 L4增量+L5实践</a:t>
+              <a:t>上午 L4讲座+W2实操</a:t>
             </a:r>
             <a:endParaRPr lang="en-US" sz="700" dirty="0"/>
           </a:p>
@@ -1947,7 +1947,7 @@
                   <a:srgbClr val="64748B"/>
                 </a:solidFill>
               </a:rPr>
-              <a:t>下午 W2重构+W3+L6</a:t>
+              <a:t>下午 L5实践+W3项目</a:t>
             </a:r>
             <a:endParaRPr lang="en-US" sz="700" dirty="0"/>
           </a:p>
@@ -2052,7 +2052,7 @@
                   <a:srgbClr val="64748B"/>
                 </a:solidFill>
               </a:rPr>
-              <a:t>上午讲座(&lt;=12:00)</a:t>
+              <a:t>上午讲座/演练(&lt;=12:15)</a:t>
             </a:r>
             <a:endParaRPr lang="en-US" sz="700" dirty="0"/>
           </a:p>
@@ -2069,7 +2069,7 @@
                   <a:srgbClr val="64748B"/>
                 </a:solidFill>
               </a:rPr>
-              <a:t>下午先演示后演练</a:t>
+              <a:t>下午讲座/演练</a:t>
             </a:r>
             <a:endParaRPr lang="en-US" sz="700" dirty="0"/>
           </a:p>
@@ -2656,7 +2656,7 @@
                   <a:srgbClr val="64748B"/>
                 </a:solidFill>
               </a:rPr>
-              <a:t>60m</a:t>
+              <a:t>105m</a:t>
             </a:r>
             <a:endParaRPr lang="en-US" sz="650" dirty="0"/>
           </a:p>
@@ -3255,7 +3255,21 @@
                   <a:srgbClr val="2563EB"/>
                 </a:solidFill>
               </a:rPr>
-              <a:t>下午 演示+演练 (14:30-18:00)\nL3推演+跟做 105m | W1 60m</a:t>
+              <a:t>下午 演练+演示 (14:30-18:00)</a:t>
+            </a:r>
+            <a:endParaRPr lang="en-US" sz="700" dirty="0"/>
+          </a:p>
+          <a:p>
+            <a:pPr algn="ctr" indent="0" marL="0">
+              <a:buNone/>
+            </a:pPr>
+            <a:r>
+              <a:rPr lang="en-US" sz="700" b="1" dirty="0">
+                <a:solidFill>
+                  <a:srgbClr val="2563EB"/>
+                </a:solidFill>
+              </a:rPr>
+              <a:t>W1实战 60m | L3推演+跟做 105m</a:t>
             </a:r>
             <a:endParaRPr lang="en-US" sz="700" dirty="0"/>
           </a:p>
@@ -3291,7 +3305,7 @@
                   <a:srgbClr val="1A1A2E"/>
                 </a:solidFill>
               </a:rPr>
-              <a:t>Day 2: 增量开发+最佳实践</a:t>
+              <a:t>Day 2: 增量开发和重构</a:t>
             </a:r>
             <a:endParaRPr lang="en-US" sz="1000" dirty="0"/>
           </a:p>
@@ -3354,7 +3368,7 @@
                   <a:srgbClr val="2563EB"/>
                 </a:solidFill>
               </a:rPr>
-              <a:t>上午 讲座 (9:30-11:50)</a:t>
+              <a:t>上午 讲座+演练 (9:30-12:15)</a:t>
             </a:r>
             <a:endParaRPr lang="en-US" sz="700" dirty="0"/>
           </a:p>
@@ -3368,7 +3382,7 @@
                   <a:srgbClr val="2563EB"/>
                 </a:solidFill>
               </a:rPr>
-              <a:t>L4 增量重构 75min | L5 实践 50min</a:t>
+              <a:t>L4 增量重构 75min | W2 实操 75min</a:t>
             </a:r>
             <a:endParaRPr lang="en-US" sz="700" dirty="0"/>
           </a:p>
@@ -3431,7 +3445,21 @@
                   <a:srgbClr val="2563EB"/>
                 </a:solidFill>
               </a:rPr>
-              <a:t>下午 演练 (14:30-18:00)\nW2重构 75m | W3项目 60m | 评审+L6</a:t>
+              <a:t>下午 讲座+演练 (14:30-17:50)</a:t>
+            </a:r>
+            <a:endParaRPr lang="en-US" sz="700" dirty="0"/>
+          </a:p>
+          <a:p>
+            <a:pPr algn="ctr" indent="0" marL="0">
+              <a:buNone/>
+            </a:pPr>
+            <a:r>
+              <a:rPr lang="en-US" sz="700" b="1" dirty="0">
+                <a:solidFill>
+                  <a:srgbClr val="2563EB"/>
+                </a:solidFill>
+              </a:rPr>
+              <a:t>L5 实践 50m | W3 项目 60m | 总结+L6</a:t>
             </a:r>
             <a:endParaRPr lang="en-US" sz="700" dirty="0"/>
           </a:p>
@@ -3460,9 +3488,9 @@
             <a:tbl>
               <a:tblPr/>
               <a:tblGrid>
-                <a:gridCol w="1463040"/>
-                <a:gridCol w="3383280"/>
-                <a:gridCol w="3383280"/>
+                <a:gridCol w="1645920"/>
+                <a:gridCol w="3291840"/>
+                <a:gridCol w="3291840"/>
               </a:tblGrid>
               <a:tr h="164592">
                 <a:tc>
@@ -3677,7 +3705,7 @@
                           <a:ea typeface="Arial" pitchFamily="34" charset="-122"/>
                           <a:cs typeface="Arial" pitchFamily="34" charset="-120"/>
                         </a:rPr>
-                        <a:t>讲座</a:t>
+                        <a:t>讲座(上午)</a:t>
                       </a:r>
                       <a:endParaRPr lang="en-US" sz="650" dirty="0">
                         <a:latin typeface="Arial" charset="0"/>
@@ -3807,7 +3835,7 @@
                           <a:ea typeface="Arial" pitchFamily="34" charset="-122"/>
                           <a:cs typeface="Arial" pitchFamily="34" charset="-120"/>
                         </a:rPr>
-                        <a:t>L4+L5 (125min)</a:t>
+                        <a:t>L4+W2实操 (150min)</a:t>
                       </a:r>
                       <a:endParaRPr lang="en-US" sz="650" dirty="0">
                         <a:latin typeface="Arial" charset="0"/>
@@ -3874,7 +3902,7 @@
                           <a:ea typeface="Arial" pitchFamily="34" charset="-122"/>
                           <a:cs typeface="Arial" pitchFamily="34" charset="-120"/>
                         </a:rPr>
-                        <a:t>演示</a:t>
+                        <a:t>演练/演示(下午)</a:t>
                       </a:r>
                       <a:endParaRPr lang="en-US" sz="650" dirty="0">
                         <a:latin typeface="Arial" charset="0"/>
@@ -3939,7 +3967,7 @@
                           <a:ea typeface="Arial" pitchFamily="34" charset="-122"/>
                           <a:cs typeface="Arial" pitchFamily="34" charset="-120"/>
                         </a:rPr>
-                        <a:t>L3 推演+跟做 (105min)</a:t>
+                        <a:t>W1实战+L3推演 (165min)</a:t>
                       </a:r>
                       <a:endParaRPr lang="en-US" sz="650" dirty="0">
                         <a:latin typeface="Arial" charset="0"/>
@@ -4004,204 +4032,7 @@
                           <a:ea typeface="Arial" pitchFamily="34" charset="-122"/>
                           <a:cs typeface="Arial" pitchFamily="34" charset="-120"/>
                         </a:rPr>
-                        <a:t>--</a:t>
-                      </a:r>
-                      <a:endParaRPr lang="en-US" sz="650" dirty="0">
-                        <a:latin typeface="Arial" charset="0"/>
-                        <a:ea typeface="Arial" charset="0"/>
-                        <a:cs typeface="Arial" charset="0"/>
-                      </a:endParaRPr>
-                    </a:p>
-                  </a:txBody>
-                  <a:tcPr marL="38100" marR="38100" marT="25400" marB="25400">
-                    <a:lnL w="6350" cap="flat" cmpd="sng" algn="ctr">
-                      <a:solidFill>
-                        <a:srgbClr val="666666"/>
-                      </a:solidFill>
-                      <a:prstDash val="solid"/>
-                      <a:round/>
-                      <a:headEnd type="none" w="med" len="med"/>
-                      <a:tailEnd type="none" w="med" len="med"/>
-                    </a:lnL>
-                    <a:lnR w="6350" cap="flat" cmpd="sng" algn="ctr">
-                      <a:solidFill>
-                        <a:srgbClr val="666666"/>
-                      </a:solidFill>
-                      <a:prstDash val="solid"/>
-                      <a:round/>
-                      <a:headEnd type="none" w="med" len="med"/>
-                      <a:tailEnd type="none" w="med" len="med"/>
-                    </a:lnR>
-                    <a:lnT w="6350" cap="flat" cmpd="sng" algn="ctr">
-                      <a:solidFill>
-                        <a:srgbClr val="666666"/>
-                      </a:solidFill>
-                      <a:prstDash val="solid"/>
-                      <a:round/>
-                      <a:headEnd type="none" w="med" len="med"/>
-                      <a:tailEnd type="none" w="med" len="med"/>
-                    </a:lnT>
-                    <a:lnB w="6350" cap="flat" cmpd="sng" algn="ctr">
-                      <a:solidFill>
-                        <a:srgbClr val="666666"/>
-                      </a:solidFill>
-                      <a:prstDash val="solid"/>
-                      <a:round/>
-                      <a:headEnd type="none" w="med" len="med"/>
-                      <a:tailEnd type="none" w="med" len="med"/>
-                    </a:lnB>
-                  </a:tcPr>
-                </a:tc>
-              </a:tr>
-              <a:tr h="256032">
-                <a:tc>
-                  <a:txBody>
-                    <a:bodyPr/>
-                    <a:lstStyle/>
-                    <a:p>
-                      <a:pPr indent="0" marL="0">
-                        <a:buNone/>
-                      </a:pPr>
-                      <a:r>
-                        <a:rPr lang="en-US" sz="650" b="1" dirty="0">
-                          <a:solidFill>
-                            <a:srgbClr val="334155"/>
-                          </a:solidFill>
-                          <a:latin typeface="Arial" pitchFamily="34" charset="0"/>
-                          <a:ea typeface="Arial" pitchFamily="34" charset="-122"/>
-                          <a:cs typeface="Arial" pitchFamily="34" charset="-120"/>
-                        </a:rPr>
-                        <a:t>演练</a:t>
-                      </a:r>
-                      <a:endParaRPr lang="en-US" sz="650" dirty="0">
-                        <a:latin typeface="Arial" charset="0"/>
-                        <a:ea typeface="Arial" charset="0"/>
-                        <a:cs typeface="Arial" charset="0"/>
-                      </a:endParaRPr>
-                    </a:p>
-                  </a:txBody>
-                  <a:tcPr marL="38100" marR="38100" marT="25400" marB="25400">
-                    <a:lnL w="6350" cap="flat" cmpd="sng" algn="ctr">
-                      <a:solidFill>
-                        <a:srgbClr val="666666"/>
-                      </a:solidFill>
-                      <a:prstDash val="solid"/>
-                      <a:round/>
-                      <a:headEnd type="none" w="med" len="med"/>
-                      <a:tailEnd type="none" w="med" len="med"/>
-                    </a:lnL>
-                    <a:lnR w="6350" cap="flat" cmpd="sng" algn="ctr">
-                      <a:solidFill>
-                        <a:srgbClr val="666666"/>
-                      </a:solidFill>
-                      <a:prstDash val="solid"/>
-                      <a:round/>
-                      <a:headEnd type="none" w="med" len="med"/>
-                      <a:tailEnd type="none" w="med" len="med"/>
-                    </a:lnR>
-                    <a:lnT w="6350" cap="flat" cmpd="sng" algn="ctr">
-                      <a:solidFill>
-                        <a:srgbClr val="666666"/>
-                      </a:solidFill>
-                      <a:prstDash val="solid"/>
-                      <a:round/>
-                      <a:headEnd type="none" w="med" len="med"/>
-                      <a:tailEnd type="none" w="med" len="med"/>
-                    </a:lnT>
-                    <a:lnB w="6350" cap="flat" cmpd="sng" algn="ctr">
-                      <a:solidFill>
-                        <a:srgbClr val="666666"/>
-                      </a:solidFill>
-                      <a:prstDash val="solid"/>
-                      <a:round/>
-                      <a:headEnd type="none" w="med" len="med"/>
-                      <a:tailEnd type="none" w="med" len="med"/>
-                    </a:lnB>
-                  </a:tcPr>
-                </a:tc>
-                <a:tc>
-                  <a:txBody>
-                    <a:bodyPr/>
-                    <a:lstStyle/>
-                    <a:p>
-                      <a:pPr indent="0" marL="0">
-                        <a:buNone/>
-                      </a:pPr>
-                      <a:r>
-                        <a:rPr lang="en-US" sz="650" dirty="0">
-                          <a:solidFill>
-                            <a:srgbClr val="334155"/>
-                          </a:solidFill>
-                          <a:latin typeface="Arial" pitchFamily="34" charset="0"/>
-                          <a:ea typeface="Arial" pitchFamily="34" charset="-122"/>
-                          <a:cs typeface="Arial" pitchFamily="34" charset="-120"/>
-                        </a:rPr>
-                        <a:t>W1 练手 (60min)</a:t>
-                      </a:r>
-                      <a:endParaRPr lang="en-US" sz="650" dirty="0">
-                        <a:latin typeface="Arial" charset="0"/>
-                        <a:ea typeface="Arial" charset="0"/>
-                        <a:cs typeface="Arial" charset="0"/>
-                      </a:endParaRPr>
-                    </a:p>
-                  </a:txBody>
-                  <a:tcPr marL="38100" marR="38100" marT="25400" marB="25400">
-                    <a:lnL w="6350" cap="flat" cmpd="sng" algn="ctr">
-                      <a:solidFill>
-                        <a:srgbClr val="666666"/>
-                      </a:solidFill>
-                      <a:prstDash val="solid"/>
-                      <a:round/>
-                      <a:headEnd type="none" w="med" len="med"/>
-                      <a:tailEnd type="none" w="med" len="med"/>
-                    </a:lnL>
-                    <a:lnR w="6350" cap="flat" cmpd="sng" algn="ctr">
-                      <a:solidFill>
-                        <a:srgbClr val="666666"/>
-                      </a:solidFill>
-                      <a:prstDash val="solid"/>
-                      <a:round/>
-                      <a:headEnd type="none" w="med" len="med"/>
-                      <a:tailEnd type="none" w="med" len="med"/>
-                    </a:lnR>
-                    <a:lnT w="6350" cap="flat" cmpd="sng" algn="ctr">
-                      <a:solidFill>
-                        <a:srgbClr val="666666"/>
-                      </a:solidFill>
-                      <a:prstDash val="solid"/>
-                      <a:round/>
-                      <a:headEnd type="none" w="med" len="med"/>
-                      <a:tailEnd type="none" w="med" len="med"/>
-                    </a:lnT>
-                    <a:lnB w="6350" cap="flat" cmpd="sng" algn="ctr">
-                      <a:solidFill>
-                        <a:srgbClr val="666666"/>
-                      </a:solidFill>
-                      <a:prstDash val="solid"/>
-                      <a:round/>
-                      <a:headEnd type="none" w="med" len="med"/>
-                      <a:tailEnd type="none" w="med" len="med"/>
-                    </a:lnB>
-                  </a:tcPr>
-                </a:tc>
-                <a:tc>
-                  <a:txBody>
-                    <a:bodyPr/>
-                    <a:lstStyle/>
-                    <a:p>
-                      <a:pPr indent="0" marL="0">
-                        <a:buNone/>
-                      </a:pPr>
-                      <a:r>
-                        <a:rPr lang="en-US" sz="650" dirty="0">
-                          <a:solidFill>
-                            <a:srgbClr val="334155"/>
-                          </a:solidFill>
-                          <a:latin typeface="Arial" pitchFamily="34" charset="0"/>
-                          <a:ea typeface="Arial" pitchFamily="34" charset="-122"/>
-                          <a:cs typeface="Arial" pitchFamily="34" charset="-120"/>
-                        </a:rPr>
-                        <a:t>W2 重构 + W3 项目 (135min)</a:t>
+                        <a:t>L5实践+W3项目 (110min)</a:t>
                       </a:r>
                       <a:endParaRPr lang="en-US" sz="650" dirty="0">
                         <a:latin typeface="Arial" charset="0"/>
@@ -4333,7 +4164,7 @@
                           <a:ea typeface="Arial" pitchFamily="34" charset="-122"/>
                           <a:cs typeface="Arial" pitchFamily="34" charset="-120"/>
                         </a:rPr>
-                        <a:t>回顾 (20min)</a:t>
+                        <a:t>回顾 (30min)</a:t>
                       </a:r>
                       <a:endParaRPr lang="en-US" sz="650" dirty="0">
                         <a:latin typeface="Arial" charset="0"/>
@@ -4398,7 +4229,7 @@
                           <a:ea typeface="Arial" pitchFamily="34" charset="-122"/>
                           <a:cs typeface="Arial" pitchFamily="34" charset="-120"/>
                         </a:rPr>
-                        <a:t>评审 + L6总结 (50min)</a:t>
+                        <a:t>总结 + L6 (50min)</a:t>
                       </a:r>
                       <a:endParaRPr lang="en-US" sz="650" dirty="0">
                         <a:latin typeface="Arial" charset="0"/>
@@ -4459,7 +4290,7 @@
         </p:nvSpPr>
         <p:spPr>
           <a:xfrm>
-            <a:off x="457200" y="4745736"/>
+            <a:off x="457200" y="4562856"/>
             <a:ext cx="8229600" cy="164592"/>
           </a:xfrm>
           <a:prstGeom prst="rect">
@@ -5051,7 +4882,7 @@
                           <a:ea typeface="Arial" pitchFamily="34" charset="-122"/>
                           <a:cs typeface="Arial" pitchFamily="34" charset="-120"/>
                         </a:rPr>
-                        <a:t>痛点便签墙 场景代入</a:t>
+                        <a:t>痛点便签墙</a:t>
                       </a:r>
                       <a:endParaRPr lang="en-US" sz="650" dirty="0">
                         <a:latin typeface="Arial" charset="0"/>
@@ -5248,7 +5079,7 @@
                           <a:ea typeface="Arial" pitchFamily="34" charset="-122"/>
                           <a:cs typeface="Arial" pitchFamily="34" charset="-120"/>
                         </a:rPr>
-                        <a:t>三层模型 SDD融合 12模块数据 CRISPE速讲</a:t>
+                        <a:t>三层模型 SDD融合 12模块数据 CRISPE</a:t>
                       </a:r>
                       <a:endParaRPr lang="en-US" sz="650" dirty="0">
                         <a:latin typeface="Arial" charset="0"/>
@@ -5714,7 +5545,7 @@
                   <a:srgbClr val="1A1A2E"/>
                 </a:solidFill>
               </a:rPr>
-              <a:t>下午 演示+演练 (14:30-18:00)</a:t>
+              <a:t>下午 演练+演示 (14:30-18:00)</a:t>
             </a:r>
             <a:endParaRPr lang="en-US" sz="900" dirty="0"/>
           </a:p>
@@ -5953,7 +5784,7 @@
                   </a:tcPr>
                 </a:tc>
               </a:tr>
-              <a:tr h="384048">
+              <a:tr h="347472">
                 <a:tc>
                   <a:txBody>
                     <a:bodyPr/>
@@ -5972,392 +5803,6 @@
                           <a:cs typeface="Arial" pitchFamily="34" charset="-120"/>
                         </a:rPr>
                         <a:t>14:30</a:t>
-                      </a:r>
-                      <a:endParaRPr lang="en-US" sz="650" dirty="0">
-                        <a:latin typeface="Arial" charset="0"/>
-                        <a:ea typeface="Arial" charset="0"/>
-                        <a:cs typeface="Arial" charset="0"/>
-                      </a:endParaRPr>
-                    </a:p>
-                  </a:txBody>
-                  <a:tcPr marL="38100" marR="38100" marT="25400" marB="25400">
-                    <a:lnL w="6350" cap="flat" cmpd="sng" algn="ctr">
-                      <a:solidFill>
-                        <a:srgbClr val="666666"/>
-                      </a:solidFill>
-                      <a:prstDash val="solid"/>
-                      <a:round/>
-                      <a:headEnd type="none" w="med" len="med"/>
-                      <a:tailEnd type="none" w="med" len="med"/>
-                    </a:lnL>
-                    <a:lnR w="6350" cap="flat" cmpd="sng" algn="ctr">
-                      <a:solidFill>
-                        <a:srgbClr val="666666"/>
-                      </a:solidFill>
-                      <a:prstDash val="solid"/>
-                      <a:round/>
-                      <a:headEnd type="none" w="med" len="med"/>
-                      <a:tailEnd type="none" w="med" len="med"/>
-                    </a:lnR>
-                    <a:lnT w="6350" cap="flat" cmpd="sng" algn="ctr">
-                      <a:solidFill>
-                        <a:srgbClr val="666666"/>
-                      </a:solidFill>
-                      <a:prstDash val="solid"/>
-                      <a:round/>
-                      <a:headEnd type="none" w="med" len="med"/>
-                      <a:tailEnd type="none" w="med" len="med"/>
-                    </a:lnT>
-                    <a:lnB w="6350" cap="flat" cmpd="sng" algn="ctr">
-                      <a:solidFill>
-                        <a:srgbClr val="666666"/>
-                      </a:solidFill>
-                      <a:prstDash val="solid"/>
-                      <a:round/>
-                      <a:headEnd type="none" w="med" len="med"/>
-                      <a:tailEnd type="none" w="med" len="med"/>
-                    </a:lnB>
-                  </a:tcPr>
-                </a:tc>
-                <a:tc>
-                  <a:txBody>
-                    <a:bodyPr/>
-                    <a:lstStyle/>
-                    <a:p>
-                      <a:pPr indent="0" marL="0">
-                        <a:buNone/>
-                      </a:pPr>
-                      <a:r>
-                        <a:rPr lang="en-US" sz="650" dirty="0">
-                          <a:solidFill>
-                            <a:srgbClr val="334155"/>
-                          </a:solidFill>
-                          <a:latin typeface="Arial" pitchFamily="34" charset="0"/>
-                          <a:ea typeface="Arial" pitchFamily="34" charset="-122"/>
-                          <a:cs typeface="Arial" pitchFamily="34" charset="-120"/>
-                        </a:rPr>
-                        <a:t>L3: 全流程推演 105min</a:t>
-                      </a:r>
-                      <a:endParaRPr lang="en-US" sz="650" dirty="0">
-                        <a:latin typeface="Arial" charset="0"/>
-                        <a:ea typeface="Arial" charset="0"/>
-                        <a:cs typeface="Arial" charset="0"/>
-                      </a:endParaRPr>
-                    </a:p>
-                  </a:txBody>
-                  <a:tcPr marL="38100" marR="38100" marT="25400" marB="25400">
-                    <a:lnL w="6350" cap="flat" cmpd="sng" algn="ctr">
-                      <a:solidFill>
-                        <a:srgbClr val="666666"/>
-                      </a:solidFill>
-                      <a:prstDash val="solid"/>
-                      <a:round/>
-                      <a:headEnd type="none" w="med" len="med"/>
-                      <a:tailEnd type="none" w="med" len="med"/>
-                    </a:lnL>
-                    <a:lnR w="6350" cap="flat" cmpd="sng" algn="ctr">
-                      <a:solidFill>
-                        <a:srgbClr val="666666"/>
-                      </a:solidFill>
-                      <a:prstDash val="solid"/>
-                      <a:round/>
-                      <a:headEnd type="none" w="med" len="med"/>
-                      <a:tailEnd type="none" w="med" len="med"/>
-                    </a:lnR>
-                    <a:lnT w="6350" cap="flat" cmpd="sng" algn="ctr">
-                      <a:solidFill>
-                        <a:srgbClr val="666666"/>
-                      </a:solidFill>
-                      <a:prstDash val="solid"/>
-                      <a:round/>
-                      <a:headEnd type="none" w="med" len="med"/>
-                      <a:tailEnd type="none" w="med" len="med"/>
-                    </a:lnT>
-                    <a:lnB w="6350" cap="flat" cmpd="sng" algn="ctr">
-                      <a:solidFill>
-                        <a:srgbClr val="666666"/>
-                      </a:solidFill>
-                      <a:prstDash val="solid"/>
-                      <a:round/>
-                      <a:headEnd type="none" w="med" len="med"/>
-                      <a:tailEnd type="none" w="med" len="med"/>
-                    </a:lnB>
-                    <a:solidFill>
-                      <a:srgbClr val="EFF6FF"/>
-                    </a:solidFill>
-                  </a:tcPr>
-                </a:tc>
-                <a:tc>
-                  <a:txBody>
-                    <a:bodyPr/>
-                    <a:lstStyle/>
-                    <a:p>
-                      <a:pPr indent="0" marL="0">
-                        <a:buNone/>
-                      </a:pPr>
-                      <a:r>
-                        <a:rPr lang="en-US" sz="650" dirty="0">
-                          <a:solidFill>
-                            <a:srgbClr val="334155"/>
-                          </a:solidFill>
-                          <a:latin typeface="Arial" pitchFamily="34" charset="0"/>
-                          <a:ea typeface="Arial" pitchFamily="34" charset="-122"/>
-                          <a:cs typeface="Arial" pitchFamily="34" charset="-120"/>
-                        </a:rPr>
-                        <a:t>推演示范 45min -&gt; 休息 -&gt; 学员跟做+点评 60min</a:t>
-                      </a:r>
-                      <a:endParaRPr lang="en-US" sz="650" dirty="0">
-                        <a:latin typeface="Arial" charset="0"/>
-                        <a:ea typeface="Arial" charset="0"/>
-                        <a:cs typeface="Arial" charset="0"/>
-                      </a:endParaRPr>
-                    </a:p>
-                  </a:txBody>
-                  <a:tcPr marL="38100" marR="38100" marT="25400" marB="25400">
-                    <a:lnL w="6350" cap="flat" cmpd="sng" algn="ctr">
-                      <a:solidFill>
-                        <a:srgbClr val="666666"/>
-                      </a:solidFill>
-                      <a:prstDash val="solid"/>
-                      <a:round/>
-                      <a:headEnd type="none" w="med" len="med"/>
-                      <a:tailEnd type="none" w="med" len="med"/>
-                    </a:lnL>
-                    <a:lnR w="6350" cap="flat" cmpd="sng" algn="ctr">
-                      <a:solidFill>
-                        <a:srgbClr val="666666"/>
-                      </a:solidFill>
-                      <a:prstDash val="solid"/>
-                      <a:round/>
-                      <a:headEnd type="none" w="med" len="med"/>
-                      <a:tailEnd type="none" w="med" len="med"/>
-                    </a:lnR>
-                    <a:lnT w="6350" cap="flat" cmpd="sng" algn="ctr">
-                      <a:solidFill>
-                        <a:srgbClr val="666666"/>
-                      </a:solidFill>
-                      <a:prstDash val="solid"/>
-                      <a:round/>
-                      <a:headEnd type="none" w="med" len="med"/>
-                      <a:tailEnd type="none" w="med" len="med"/>
-                    </a:lnT>
-                    <a:lnB w="6350" cap="flat" cmpd="sng" algn="ctr">
-                      <a:solidFill>
-                        <a:srgbClr val="666666"/>
-                      </a:solidFill>
-                      <a:prstDash val="solid"/>
-                      <a:round/>
-                      <a:headEnd type="none" w="med" len="med"/>
-                      <a:tailEnd type="none" w="med" len="med"/>
-                    </a:lnB>
-                  </a:tcPr>
-                </a:tc>
-              </a:tr>
-              <a:tr h="155448">
-                <a:tc>
-                  <a:txBody>
-                    <a:bodyPr/>
-                    <a:lstStyle/>
-                    <a:p>
-                      <a:pPr indent="0" marL="0">
-                        <a:buNone/>
-                      </a:pPr>
-                      <a:r>
-                        <a:rPr lang="en-US" sz="650" b="1" dirty="0">
-                          <a:solidFill>
-                            <a:srgbClr val="334155"/>
-                          </a:solidFill>
-                          <a:latin typeface="Arial" pitchFamily="34" charset="0"/>
-                          <a:ea typeface="Arial" pitchFamily="34" charset="-122"/>
-                          <a:cs typeface="Arial" pitchFamily="34" charset="-120"/>
-                        </a:rPr>
-                        <a:t>16:30</a:t>
-                      </a:r>
-                      <a:endParaRPr lang="en-US" sz="650" dirty="0">
-                        <a:latin typeface="Arial" charset="0"/>
-                        <a:ea typeface="Arial" charset="0"/>
-                        <a:cs typeface="Arial" charset="0"/>
-                      </a:endParaRPr>
-                    </a:p>
-                  </a:txBody>
-                  <a:tcPr marL="38100" marR="38100" marT="25400" marB="25400">
-                    <a:lnL w="6350" cap="flat" cmpd="sng" algn="ctr">
-                      <a:solidFill>
-                        <a:srgbClr val="666666"/>
-                      </a:solidFill>
-                      <a:prstDash val="solid"/>
-                      <a:round/>
-                      <a:headEnd type="none" w="med" len="med"/>
-                      <a:tailEnd type="none" w="med" len="med"/>
-                    </a:lnL>
-                    <a:lnR w="6350" cap="flat" cmpd="sng" algn="ctr">
-                      <a:solidFill>
-                        <a:srgbClr val="666666"/>
-                      </a:solidFill>
-                      <a:prstDash val="solid"/>
-                      <a:round/>
-                      <a:headEnd type="none" w="med" len="med"/>
-                      <a:tailEnd type="none" w="med" len="med"/>
-                    </a:lnR>
-                    <a:lnT w="6350" cap="flat" cmpd="sng" algn="ctr">
-                      <a:solidFill>
-                        <a:srgbClr val="666666"/>
-                      </a:solidFill>
-                      <a:prstDash val="solid"/>
-                      <a:round/>
-                      <a:headEnd type="none" w="med" len="med"/>
-                      <a:tailEnd type="none" w="med" len="med"/>
-                    </a:lnT>
-                    <a:lnB w="6350" cap="flat" cmpd="sng" algn="ctr">
-                      <a:solidFill>
-                        <a:srgbClr val="666666"/>
-                      </a:solidFill>
-                      <a:prstDash val="solid"/>
-                      <a:round/>
-                      <a:headEnd type="none" w="med" len="med"/>
-                      <a:tailEnd type="none" w="med" len="med"/>
-                    </a:lnB>
-                  </a:tcPr>
-                </a:tc>
-                <a:tc>
-                  <a:txBody>
-                    <a:bodyPr/>
-                    <a:lstStyle/>
-                    <a:p>
-                      <a:pPr indent="0" marL="0">
-                        <a:buNone/>
-                      </a:pPr>
-                      <a:r>
-                        <a:rPr lang="en-US" sz="650" dirty="0">
-                          <a:solidFill>
-                            <a:srgbClr val="334155"/>
-                          </a:solidFill>
-                          <a:latin typeface="Arial" pitchFamily="34" charset="0"/>
-                          <a:ea typeface="Arial" pitchFamily="34" charset="-122"/>
-                          <a:cs typeface="Arial" pitchFamily="34" charset="-120"/>
-                        </a:rPr>
-                        <a:t>休息 10min</a:t>
-                      </a:r>
-                      <a:endParaRPr lang="en-US" sz="650" dirty="0">
-                        <a:latin typeface="Arial" charset="0"/>
-                        <a:ea typeface="Arial" charset="0"/>
-                        <a:cs typeface="Arial" charset="0"/>
-                      </a:endParaRPr>
-                    </a:p>
-                  </a:txBody>
-                  <a:tcPr marL="38100" marR="38100" marT="25400" marB="25400">
-                    <a:lnL w="6350" cap="flat" cmpd="sng" algn="ctr">
-                      <a:solidFill>
-                        <a:srgbClr val="666666"/>
-                      </a:solidFill>
-                      <a:prstDash val="solid"/>
-                      <a:round/>
-                      <a:headEnd type="none" w="med" len="med"/>
-                      <a:tailEnd type="none" w="med" len="med"/>
-                    </a:lnL>
-                    <a:lnR w="6350" cap="flat" cmpd="sng" algn="ctr">
-                      <a:solidFill>
-                        <a:srgbClr val="666666"/>
-                      </a:solidFill>
-                      <a:prstDash val="solid"/>
-                      <a:round/>
-                      <a:headEnd type="none" w="med" len="med"/>
-                      <a:tailEnd type="none" w="med" len="med"/>
-                    </a:lnR>
-                    <a:lnT w="6350" cap="flat" cmpd="sng" algn="ctr">
-                      <a:solidFill>
-                        <a:srgbClr val="666666"/>
-                      </a:solidFill>
-                      <a:prstDash val="solid"/>
-                      <a:round/>
-                      <a:headEnd type="none" w="med" len="med"/>
-                      <a:tailEnd type="none" w="med" len="med"/>
-                    </a:lnT>
-                    <a:lnB w="6350" cap="flat" cmpd="sng" algn="ctr">
-                      <a:solidFill>
-                        <a:srgbClr val="666666"/>
-                      </a:solidFill>
-                      <a:prstDash val="solid"/>
-                      <a:round/>
-                      <a:headEnd type="none" w="med" len="med"/>
-                      <a:tailEnd type="none" w="med" len="med"/>
-                    </a:lnB>
-                  </a:tcPr>
-                </a:tc>
-                <a:tc>
-                  <a:txBody>
-                    <a:bodyPr/>
-                    <a:lstStyle/>
-                    <a:p>
-                      <a:pPr indent="0" marL="0">
-                        <a:buNone/>
-                      </a:pPr>
-                      <a:endParaRPr lang="en-US" sz="650" dirty="0">
-                        <a:latin typeface="Arial" charset="0"/>
-                        <a:ea typeface="Arial" charset="0"/>
-                        <a:cs typeface="Arial" charset="0"/>
-                      </a:endParaRPr>
-                    </a:p>
-                  </a:txBody>
-                  <a:tcPr marL="38100" marR="38100" marT="25400" marB="25400">
-                    <a:lnL w="6350" cap="flat" cmpd="sng" algn="ctr">
-                      <a:solidFill>
-                        <a:srgbClr val="666666"/>
-                      </a:solidFill>
-                      <a:prstDash val="solid"/>
-                      <a:round/>
-                      <a:headEnd type="none" w="med" len="med"/>
-                      <a:tailEnd type="none" w="med" len="med"/>
-                    </a:lnL>
-                    <a:lnR w="6350" cap="flat" cmpd="sng" algn="ctr">
-                      <a:solidFill>
-                        <a:srgbClr val="666666"/>
-                      </a:solidFill>
-                      <a:prstDash val="solid"/>
-                      <a:round/>
-                      <a:headEnd type="none" w="med" len="med"/>
-                      <a:tailEnd type="none" w="med" len="med"/>
-                    </a:lnR>
-                    <a:lnT w="6350" cap="flat" cmpd="sng" algn="ctr">
-                      <a:solidFill>
-                        <a:srgbClr val="666666"/>
-                      </a:solidFill>
-                      <a:prstDash val="solid"/>
-                      <a:round/>
-                      <a:headEnd type="none" w="med" len="med"/>
-                      <a:tailEnd type="none" w="med" len="med"/>
-                    </a:lnT>
-                    <a:lnB w="6350" cap="flat" cmpd="sng" algn="ctr">
-                      <a:solidFill>
-                        <a:srgbClr val="666666"/>
-                      </a:solidFill>
-                      <a:prstDash val="solid"/>
-                      <a:round/>
-                      <a:headEnd type="none" w="med" len="med"/>
-                      <a:tailEnd type="none" w="med" len="med"/>
-                    </a:lnB>
-                  </a:tcPr>
-                </a:tc>
-              </a:tr>
-              <a:tr h="347472">
-                <a:tc>
-                  <a:txBody>
-                    <a:bodyPr/>
-                    <a:lstStyle/>
-                    <a:p>
-                      <a:pPr indent="0" marL="0">
-                        <a:buNone/>
-                      </a:pPr>
-                      <a:r>
-                        <a:rPr lang="en-US" sz="650" b="1" dirty="0">
-                          <a:solidFill>
-                            <a:srgbClr val="334155"/>
-                          </a:solidFill>
-                          <a:latin typeface="Arial" pitchFamily="34" charset="0"/>
-                          <a:ea typeface="Arial" pitchFamily="34" charset="-122"/>
-                          <a:cs typeface="Arial" pitchFamily="34" charset="-120"/>
-                        </a:rPr>
-                        <a:t>16:40</a:t>
                       </a:r>
                       <a:endParaRPr lang="en-US" sz="650" dirty="0">
                         <a:latin typeface="Arial" charset="0"/>
@@ -6539,7 +5984,7 @@
                   </a:tcPr>
                 </a:tc>
               </a:tr>
-              <a:tr h="274320">
+              <a:tr h="155448">
                 <a:tc>
                   <a:txBody>
                     <a:bodyPr/>
@@ -6557,7 +6002,7 @@
                           <a:ea typeface="Arial" pitchFamily="34" charset="-122"/>
                           <a:cs typeface="Arial" pitchFamily="34" charset="-120"/>
                         </a:rPr>
-                        <a:t>17:40</a:t>
+                        <a:t>15:30</a:t>
                       </a:r>
                       <a:endParaRPr lang="en-US" sz="650" dirty="0">
                         <a:latin typeface="Arial" charset="0"/>
@@ -6622,7 +6067,393 @@
                           <a:ea typeface="Arial" pitchFamily="34" charset="-122"/>
                           <a:cs typeface="Arial" pitchFamily="34" charset="-120"/>
                         </a:rPr>
-                        <a:t>Day1回顾+Q&amp;A 20min</a:t>
+                        <a:t>休息 15min</a:t>
+                      </a:r>
+                      <a:endParaRPr lang="en-US" sz="650" dirty="0">
+                        <a:latin typeface="Arial" charset="0"/>
+                        <a:ea typeface="Arial" charset="0"/>
+                        <a:cs typeface="Arial" charset="0"/>
+                      </a:endParaRPr>
+                    </a:p>
+                  </a:txBody>
+                  <a:tcPr marL="38100" marR="38100" marT="25400" marB="25400">
+                    <a:lnL w="6350" cap="flat" cmpd="sng" algn="ctr">
+                      <a:solidFill>
+                        <a:srgbClr val="666666"/>
+                      </a:solidFill>
+                      <a:prstDash val="solid"/>
+                      <a:round/>
+                      <a:headEnd type="none" w="med" len="med"/>
+                      <a:tailEnd type="none" w="med" len="med"/>
+                    </a:lnL>
+                    <a:lnR w="6350" cap="flat" cmpd="sng" algn="ctr">
+                      <a:solidFill>
+                        <a:srgbClr val="666666"/>
+                      </a:solidFill>
+                      <a:prstDash val="solid"/>
+                      <a:round/>
+                      <a:headEnd type="none" w="med" len="med"/>
+                      <a:tailEnd type="none" w="med" len="med"/>
+                    </a:lnR>
+                    <a:lnT w="6350" cap="flat" cmpd="sng" algn="ctr">
+                      <a:solidFill>
+                        <a:srgbClr val="666666"/>
+                      </a:solidFill>
+                      <a:prstDash val="solid"/>
+                      <a:round/>
+                      <a:headEnd type="none" w="med" len="med"/>
+                      <a:tailEnd type="none" w="med" len="med"/>
+                    </a:lnT>
+                    <a:lnB w="6350" cap="flat" cmpd="sng" algn="ctr">
+                      <a:solidFill>
+                        <a:srgbClr val="666666"/>
+                      </a:solidFill>
+                      <a:prstDash val="solid"/>
+                      <a:round/>
+                      <a:headEnd type="none" w="med" len="med"/>
+                      <a:tailEnd type="none" w="med" len="med"/>
+                    </a:lnB>
+                  </a:tcPr>
+                </a:tc>
+                <a:tc>
+                  <a:txBody>
+                    <a:bodyPr/>
+                    <a:lstStyle/>
+                    <a:p>
+                      <a:pPr indent="0" marL="0">
+                        <a:buNone/>
+                      </a:pPr>
+                      <a:endParaRPr lang="en-US" sz="650" dirty="0">
+                        <a:latin typeface="Arial" charset="0"/>
+                        <a:ea typeface="Arial" charset="0"/>
+                        <a:cs typeface="Arial" charset="0"/>
+                      </a:endParaRPr>
+                    </a:p>
+                  </a:txBody>
+                  <a:tcPr marL="38100" marR="38100" marT="25400" marB="25400">
+                    <a:lnL w="6350" cap="flat" cmpd="sng" algn="ctr">
+                      <a:solidFill>
+                        <a:srgbClr val="666666"/>
+                      </a:solidFill>
+                      <a:prstDash val="solid"/>
+                      <a:round/>
+                      <a:headEnd type="none" w="med" len="med"/>
+                      <a:tailEnd type="none" w="med" len="med"/>
+                    </a:lnL>
+                    <a:lnR w="6350" cap="flat" cmpd="sng" algn="ctr">
+                      <a:solidFill>
+                        <a:srgbClr val="666666"/>
+                      </a:solidFill>
+                      <a:prstDash val="solid"/>
+                      <a:round/>
+                      <a:headEnd type="none" w="med" len="med"/>
+                      <a:tailEnd type="none" w="med" len="med"/>
+                    </a:lnR>
+                    <a:lnT w="6350" cap="flat" cmpd="sng" algn="ctr">
+                      <a:solidFill>
+                        <a:srgbClr val="666666"/>
+                      </a:solidFill>
+                      <a:prstDash val="solid"/>
+                      <a:round/>
+                      <a:headEnd type="none" w="med" len="med"/>
+                      <a:tailEnd type="none" w="med" len="med"/>
+                    </a:lnT>
+                    <a:lnB w="6350" cap="flat" cmpd="sng" algn="ctr">
+                      <a:solidFill>
+                        <a:srgbClr val="666666"/>
+                      </a:solidFill>
+                      <a:prstDash val="solid"/>
+                      <a:round/>
+                      <a:headEnd type="none" w="med" len="med"/>
+                      <a:tailEnd type="none" w="med" len="med"/>
+                    </a:lnB>
+                  </a:tcPr>
+                </a:tc>
+              </a:tr>
+              <a:tr h="384048">
+                <a:tc>
+                  <a:txBody>
+                    <a:bodyPr/>
+                    <a:lstStyle/>
+                    <a:p>
+                      <a:pPr indent="0" marL="0">
+                        <a:buNone/>
+                      </a:pPr>
+                      <a:r>
+                        <a:rPr lang="en-US" sz="650" b="1" dirty="0">
+                          <a:solidFill>
+                            <a:srgbClr val="334155"/>
+                          </a:solidFill>
+                          <a:latin typeface="Arial" pitchFamily="34" charset="0"/>
+                          <a:ea typeface="Arial" pitchFamily="34" charset="-122"/>
+                          <a:cs typeface="Arial" pitchFamily="34" charset="-120"/>
+                        </a:rPr>
+                        <a:t>15:45</a:t>
+                      </a:r>
+                      <a:endParaRPr lang="en-US" sz="650" dirty="0">
+                        <a:latin typeface="Arial" charset="0"/>
+                        <a:ea typeface="Arial" charset="0"/>
+                        <a:cs typeface="Arial" charset="0"/>
+                      </a:endParaRPr>
+                    </a:p>
+                  </a:txBody>
+                  <a:tcPr marL="38100" marR="38100" marT="25400" marB="25400">
+                    <a:lnL w="6350" cap="flat" cmpd="sng" algn="ctr">
+                      <a:solidFill>
+                        <a:srgbClr val="666666"/>
+                      </a:solidFill>
+                      <a:prstDash val="solid"/>
+                      <a:round/>
+                      <a:headEnd type="none" w="med" len="med"/>
+                      <a:tailEnd type="none" w="med" len="med"/>
+                    </a:lnL>
+                    <a:lnR w="6350" cap="flat" cmpd="sng" algn="ctr">
+                      <a:solidFill>
+                        <a:srgbClr val="666666"/>
+                      </a:solidFill>
+                      <a:prstDash val="solid"/>
+                      <a:round/>
+                      <a:headEnd type="none" w="med" len="med"/>
+                      <a:tailEnd type="none" w="med" len="med"/>
+                    </a:lnR>
+                    <a:lnT w="6350" cap="flat" cmpd="sng" algn="ctr">
+                      <a:solidFill>
+                        <a:srgbClr val="666666"/>
+                      </a:solidFill>
+                      <a:prstDash val="solid"/>
+                      <a:round/>
+                      <a:headEnd type="none" w="med" len="med"/>
+                      <a:tailEnd type="none" w="med" len="med"/>
+                    </a:lnT>
+                    <a:lnB w="6350" cap="flat" cmpd="sng" algn="ctr">
+                      <a:solidFill>
+                        <a:srgbClr val="666666"/>
+                      </a:solidFill>
+                      <a:prstDash val="solid"/>
+                      <a:round/>
+                      <a:headEnd type="none" w="med" len="med"/>
+                      <a:tailEnd type="none" w="med" len="med"/>
+                    </a:lnB>
+                  </a:tcPr>
+                </a:tc>
+                <a:tc>
+                  <a:txBody>
+                    <a:bodyPr/>
+                    <a:lstStyle/>
+                    <a:p>
+                      <a:pPr indent="0" marL="0">
+                        <a:buNone/>
+                      </a:pPr>
+                      <a:r>
+                        <a:rPr lang="en-US" sz="650" dirty="0">
+                          <a:solidFill>
+                            <a:srgbClr val="334155"/>
+                          </a:solidFill>
+                          <a:latin typeface="Arial" pitchFamily="34" charset="0"/>
+                          <a:ea typeface="Arial" pitchFamily="34" charset="-122"/>
+                          <a:cs typeface="Arial" pitchFamily="34" charset="-120"/>
+                        </a:rPr>
+                        <a:t>L3: 全流程推演 105min</a:t>
+                      </a:r>
+                      <a:endParaRPr lang="en-US" sz="650" dirty="0">
+                        <a:latin typeface="Arial" charset="0"/>
+                        <a:ea typeface="Arial" charset="0"/>
+                        <a:cs typeface="Arial" charset="0"/>
+                      </a:endParaRPr>
+                    </a:p>
+                  </a:txBody>
+                  <a:tcPr marL="38100" marR="38100" marT="25400" marB="25400">
+                    <a:lnL w="6350" cap="flat" cmpd="sng" algn="ctr">
+                      <a:solidFill>
+                        <a:srgbClr val="666666"/>
+                      </a:solidFill>
+                      <a:prstDash val="solid"/>
+                      <a:round/>
+                      <a:headEnd type="none" w="med" len="med"/>
+                      <a:tailEnd type="none" w="med" len="med"/>
+                    </a:lnL>
+                    <a:lnR w="6350" cap="flat" cmpd="sng" algn="ctr">
+                      <a:solidFill>
+                        <a:srgbClr val="666666"/>
+                      </a:solidFill>
+                      <a:prstDash val="solid"/>
+                      <a:round/>
+                      <a:headEnd type="none" w="med" len="med"/>
+                      <a:tailEnd type="none" w="med" len="med"/>
+                    </a:lnR>
+                    <a:lnT w="6350" cap="flat" cmpd="sng" algn="ctr">
+                      <a:solidFill>
+                        <a:srgbClr val="666666"/>
+                      </a:solidFill>
+                      <a:prstDash val="solid"/>
+                      <a:round/>
+                      <a:headEnd type="none" w="med" len="med"/>
+                      <a:tailEnd type="none" w="med" len="med"/>
+                    </a:lnT>
+                    <a:lnB w="6350" cap="flat" cmpd="sng" algn="ctr">
+                      <a:solidFill>
+                        <a:srgbClr val="666666"/>
+                      </a:solidFill>
+                      <a:prstDash val="solid"/>
+                      <a:round/>
+                      <a:headEnd type="none" w="med" len="med"/>
+                      <a:tailEnd type="none" w="med" len="med"/>
+                    </a:lnB>
+                    <a:solidFill>
+                      <a:srgbClr val="EFF6FF"/>
+                    </a:solidFill>
+                  </a:tcPr>
+                </a:tc>
+                <a:tc>
+                  <a:txBody>
+                    <a:bodyPr/>
+                    <a:lstStyle/>
+                    <a:p>
+                      <a:pPr indent="0" marL="0">
+                        <a:buNone/>
+                      </a:pPr>
+                      <a:r>
+                        <a:rPr lang="en-US" sz="650" dirty="0">
+                          <a:solidFill>
+                            <a:srgbClr val="334155"/>
+                          </a:solidFill>
+                          <a:latin typeface="Arial" pitchFamily="34" charset="0"/>
+                          <a:ea typeface="Arial" pitchFamily="34" charset="-122"/>
+                          <a:cs typeface="Arial" pitchFamily="34" charset="-120"/>
+                        </a:rPr>
+                        <a:t>推演示范 45min · 学员跟做+点评 60min</a:t>
+                      </a:r>
+                      <a:endParaRPr lang="en-US" sz="650" dirty="0">
+                        <a:latin typeface="Arial" charset="0"/>
+                        <a:ea typeface="Arial" charset="0"/>
+                        <a:cs typeface="Arial" charset="0"/>
+                      </a:endParaRPr>
+                    </a:p>
+                  </a:txBody>
+                  <a:tcPr marL="38100" marR="38100" marT="25400" marB="25400">
+                    <a:lnL w="6350" cap="flat" cmpd="sng" algn="ctr">
+                      <a:solidFill>
+                        <a:srgbClr val="666666"/>
+                      </a:solidFill>
+                      <a:prstDash val="solid"/>
+                      <a:round/>
+                      <a:headEnd type="none" w="med" len="med"/>
+                      <a:tailEnd type="none" w="med" len="med"/>
+                    </a:lnL>
+                    <a:lnR w="6350" cap="flat" cmpd="sng" algn="ctr">
+                      <a:solidFill>
+                        <a:srgbClr val="666666"/>
+                      </a:solidFill>
+                      <a:prstDash val="solid"/>
+                      <a:round/>
+                      <a:headEnd type="none" w="med" len="med"/>
+                      <a:tailEnd type="none" w="med" len="med"/>
+                    </a:lnR>
+                    <a:lnT w="6350" cap="flat" cmpd="sng" algn="ctr">
+                      <a:solidFill>
+                        <a:srgbClr val="666666"/>
+                      </a:solidFill>
+                      <a:prstDash val="solid"/>
+                      <a:round/>
+                      <a:headEnd type="none" w="med" len="med"/>
+                      <a:tailEnd type="none" w="med" len="med"/>
+                    </a:lnT>
+                    <a:lnB w="6350" cap="flat" cmpd="sng" algn="ctr">
+                      <a:solidFill>
+                        <a:srgbClr val="666666"/>
+                      </a:solidFill>
+                      <a:prstDash val="solid"/>
+                      <a:round/>
+                      <a:headEnd type="none" w="med" len="med"/>
+                      <a:tailEnd type="none" w="med" len="med"/>
+                    </a:lnB>
+                  </a:tcPr>
+                </a:tc>
+              </a:tr>
+              <a:tr h="274320">
+                <a:tc>
+                  <a:txBody>
+                    <a:bodyPr/>
+                    <a:lstStyle/>
+                    <a:p>
+                      <a:pPr indent="0" marL="0">
+                        <a:buNone/>
+                      </a:pPr>
+                      <a:r>
+                        <a:rPr lang="en-US" sz="650" b="1" dirty="0">
+                          <a:solidFill>
+                            <a:srgbClr val="334155"/>
+                          </a:solidFill>
+                          <a:latin typeface="Arial" pitchFamily="34" charset="0"/>
+                          <a:ea typeface="Arial" pitchFamily="34" charset="-122"/>
+                          <a:cs typeface="Arial" pitchFamily="34" charset="-120"/>
+                        </a:rPr>
+                        <a:t>17:30</a:t>
+                      </a:r>
+                      <a:endParaRPr lang="en-US" sz="650" dirty="0">
+                        <a:latin typeface="Arial" charset="0"/>
+                        <a:ea typeface="Arial" charset="0"/>
+                        <a:cs typeface="Arial" charset="0"/>
+                      </a:endParaRPr>
+                    </a:p>
+                  </a:txBody>
+                  <a:tcPr marL="38100" marR="38100" marT="25400" marB="25400">
+                    <a:lnL w="6350" cap="flat" cmpd="sng" algn="ctr">
+                      <a:solidFill>
+                        <a:srgbClr val="666666"/>
+                      </a:solidFill>
+                      <a:prstDash val="solid"/>
+                      <a:round/>
+                      <a:headEnd type="none" w="med" len="med"/>
+                      <a:tailEnd type="none" w="med" len="med"/>
+                    </a:lnL>
+                    <a:lnR w="6350" cap="flat" cmpd="sng" algn="ctr">
+                      <a:solidFill>
+                        <a:srgbClr val="666666"/>
+                      </a:solidFill>
+                      <a:prstDash val="solid"/>
+                      <a:round/>
+                      <a:headEnd type="none" w="med" len="med"/>
+                      <a:tailEnd type="none" w="med" len="med"/>
+                    </a:lnR>
+                    <a:lnT w="6350" cap="flat" cmpd="sng" algn="ctr">
+                      <a:solidFill>
+                        <a:srgbClr val="666666"/>
+                      </a:solidFill>
+                      <a:prstDash val="solid"/>
+                      <a:round/>
+                      <a:headEnd type="none" w="med" len="med"/>
+                      <a:tailEnd type="none" w="med" len="med"/>
+                    </a:lnT>
+                    <a:lnB w="6350" cap="flat" cmpd="sng" algn="ctr">
+                      <a:solidFill>
+                        <a:srgbClr val="666666"/>
+                      </a:solidFill>
+                      <a:prstDash val="solid"/>
+                      <a:round/>
+                      <a:headEnd type="none" w="med" len="med"/>
+                      <a:tailEnd type="none" w="med" len="med"/>
+                    </a:lnB>
+                  </a:tcPr>
+                </a:tc>
+                <a:tc>
+                  <a:txBody>
+                    <a:bodyPr/>
+                    <a:lstStyle/>
+                    <a:p>
+                      <a:pPr indent="0" marL="0">
+                        <a:buNone/>
+                      </a:pPr>
+                      <a:r>
+                        <a:rPr lang="en-US" sz="650" dirty="0">
+                          <a:solidFill>
+                            <a:srgbClr val="334155"/>
+                          </a:solidFill>
+                          <a:latin typeface="Arial" pitchFamily="34" charset="0"/>
+                          <a:ea typeface="Arial" pitchFamily="34" charset="-122"/>
+                          <a:cs typeface="Arial" pitchFamily="34" charset="-120"/>
+                        </a:rPr>
+                        <a:t>Day1回顾+Q&amp;A 30min</a:t>
                       </a:r>
                       <a:endParaRPr lang="en-US" sz="650" dirty="0">
                         <a:latin typeface="Arial" charset="0"/>
@@ -6917,7 +6748,7 @@
                   <a:srgbClr val="1A1A2E"/>
                 </a:solidFill>
               </a:rPr>
-              <a:t>上午 讲座 (9:30-11:50)</a:t>
+              <a:t>上午 讲座+演练 (9:30-12:15)</a:t>
             </a:r>
             <a:endParaRPr lang="en-US" sz="900" dirty="0"/>
           </a:p>
@@ -7539,7 +7370,7 @@
                   </a:tcPr>
                 </a:tc>
               </a:tr>
-              <a:tr h="329184">
+              <a:tr h="347472">
                 <a:tc>
                   <a:txBody>
                     <a:bodyPr/>
@@ -7622,7 +7453,7 @@
                           <a:ea typeface="Arial" pitchFamily="34" charset="-122"/>
                           <a:cs typeface="Arial" pitchFamily="34" charset="-120"/>
                         </a:rPr>
-                        <a:t>L5: 工程最佳实践 50min</a:t>
+                        <a:t>Workshop 2: 增量重构 75min</a:t>
                       </a:r>
                       <a:endParaRPr lang="en-US" sz="650" dirty="0">
                         <a:latin typeface="Arial" charset="0"/>
@@ -7668,6 +7499,9 @@
                       <a:headEnd type="none" w="med" len="med"/>
                       <a:tailEnd type="none" w="med" len="med"/>
                     </a:lnB>
+                    <a:solidFill>
+                      <a:srgbClr val="FFF7ED"/>
+                    </a:solidFill>
                   </a:tcPr>
                 </a:tc>
                 <a:tc>
@@ -7687,7 +7521,7 @@
                           <a:ea typeface="Arial" pitchFamily="34" charset="-122"/>
                           <a:cs typeface="Arial" pitchFamily="34" charset="-120"/>
                         </a:rPr>
-                        <a:t>70/30法则 审查清单 三重门禁 决策矩阵</a:t>
+                        <a:t>A组(全重写)/B组(增量)/C组(手工+AI) 策略对比</a:t>
                       </a:r>
                       <a:endParaRPr lang="en-US" sz="650" dirty="0">
                         <a:latin typeface="Arial" charset="0"/>
@@ -7770,7 +7604,7 @@
                   <a:srgbClr val="1A1A2E"/>
                 </a:solidFill>
               </a:rPr>
-              <a:t>下午 演练 (14:30-18:00)</a:t>
+              <a:t>下午 讲座+演练 (14:30-17:50)</a:t>
             </a:r>
             <a:endParaRPr lang="en-US" sz="900" dirty="0"/>
           </a:p>
@@ -8092,7 +7926,7 @@
                           <a:ea typeface="Arial" pitchFamily="34" charset="-122"/>
                           <a:cs typeface="Arial" pitchFamily="34" charset="-120"/>
                         </a:rPr>
-                        <a:t>Workshop 2: 增量重构 75min</a:t>
+                        <a:t>L5: 工程最佳实践 50min</a:t>
                       </a:r>
                       <a:endParaRPr lang="en-US" sz="650" dirty="0">
                         <a:latin typeface="Arial" charset="0"/>
@@ -8138,9 +7972,6 @@
                       <a:headEnd type="none" w="med" len="med"/>
                       <a:tailEnd type="none" w="med" len="med"/>
                     </a:lnB>
-                    <a:solidFill>
-                      <a:srgbClr val="FFF7ED"/>
-                    </a:solidFill>
                   </a:tcPr>
                 </a:tc>
                 <a:tc>
@@ -8160,7 +7991,7 @@
                           <a:ea typeface="Arial" pitchFamily="34" charset="-122"/>
                           <a:cs typeface="Arial" pitchFamily="34" charset="-120"/>
                         </a:rPr>
-                        <a:t>A组(全重写)/B组(增量)/C组(手工+AI) 策略对比</a:t>
+                        <a:t>效率(70/30) · 质量(审查清单) · 安全(三重门禁) · 决策矩阵</a:t>
                       </a:r>
                       <a:endParaRPr lang="en-US" sz="650" dirty="0">
                         <a:latin typeface="Arial" charset="0"/>
@@ -8227,7 +8058,7 @@
                           <a:ea typeface="Arial" pitchFamily="34" charset="-122"/>
                           <a:cs typeface="Arial" pitchFamily="34" charset="-120"/>
                         </a:rPr>
-                        <a:t>15:45</a:t>
+                        <a:t>15:20</a:t>
                       </a:r>
                       <a:endParaRPr lang="en-US" sz="650" dirty="0">
                         <a:latin typeface="Arial" charset="0"/>
@@ -8413,7 +8244,7 @@
                           <a:ea typeface="Arial" pitchFamily="34" charset="-122"/>
                           <a:cs typeface="Arial" pitchFamily="34" charset="-120"/>
                         </a:rPr>
-                        <a:t>16:00</a:t>
+                        <a:t>15:35</a:t>
                       </a:r>
                       <a:endParaRPr lang="en-US" sz="650" dirty="0">
                         <a:latin typeface="Arial" charset="0"/>
@@ -8613,7 +8444,7 @@
                           <a:ea typeface="Arial" pitchFamily="34" charset="-122"/>
                           <a:cs typeface="Arial" pitchFamily="34" charset="-120"/>
                         </a:rPr>
-                        <a:t>17:00</a:t>
+                        <a:t>16:35</a:t>
                       </a:r>
                       <a:endParaRPr lang="en-US" sz="650" dirty="0">
                         <a:latin typeface="Arial" charset="0"/>
@@ -8746,7 +8577,7 @@
                           <a:ea typeface="Arial" pitchFamily="34" charset="-122"/>
                           <a:cs typeface="Arial" pitchFamily="34" charset="-120"/>
                         </a:rPr>
-                        <a:t>Day1疑问解答 · 两天问题总结 · 成果展示点评</a:t>
+                        <a:t>Day1疑问解答 · 两天问题总结 · 成果点评</a:t>
                       </a:r>
                       <a:endParaRPr lang="en-US" sz="650" dirty="0">
                         <a:latin typeface="Arial" charset="0"/>
@@ -8813,7 +8644,7 @@
                           <a:ea typeface="Arial" pitchFamily="34" charset="-122"/>
                           <a:cs typeface="Arial" pitchFamily="34" charset="-120"/>
                         </a:rPr>
-                        <a:t>17:30</a:t>
+                        <a:t>17:05</a:t>
                       </a:r>
                       <a:endParaRPr lang="en-US" sz="650" dirty="0">
                         <a:latin typeface="Arial" charset="0"/>
@@ -9010,7 +8841,7 @@
                           <a:ea typeface="Arial" pitchFamily="34" charset="-122"/>
                           <a:cs typeface="Arial" pitchFamily="34" charset="-120"/>
                         </a:rPr>
-                        <a:t>17:50</a:t>
+                        <a:t>17:25</a:t>
                       </a:r>
                       <a:endParaRPr lang="en-US" sz="650" dirty="0">
                         <a:latin typeface="Arial" charset="0"/>
@@ -9686,7 +9517,7 @@
                   <a:srgbClr val="64748B"/>
                 </a:solidFill>
               </a:rPr>
-              <a:t>Live Coding完整演示</a:t>
+              <a:t>推演+跟做</a:t>
             </a:r>
             <a:endParaRPr lang="en-US" sz="700" dirty="0"/>
           </a:p>
@@ -12059,7 +11890,7 @@
                   <a:srgbClr val="64748B"/>
                 </a:solidFill>
               </a:rPr>
-              <a:t>hooks 上下文管理 Token优化 工作流</a:t>
+              <a:t>hooks 上下文管理 Token 工作流</a:t>
             </a:r>
             <a:endParaRPr lang="en-US" sz="700" dirty="0"/>
           </a:p>
@@ -12164,7 +11995,7 @@
                   <a:srgbClr val="64748B"/>
                 </a:solidFill>
               </a:rPr>
-              <a:t>A/B/C三组策略 限时增量(在L4后)</a:t>
+              <a:t>A/B/C三组策略 (在L4后)</a:t>
             </a:r>
             <a:endParaRPr lang="en-US" sz="700" dirty="0"/>
           </a:p>
@@ -12485,7 +12316,7 @@
                 <a:gridCol w="1188720"/>
                 <a:gridCol w="411480"/>
               </a:tblGrid>
-              <a:tr h="137160">
+              <a:tr h="164592">
                 <a:tc>
                   <a:txBody>
                     <a:bodyPr/>
@@ -12691,7 +12522,7 @@
                   </a:tcPr>
                 </a:tc>
               </a:tr>
-              <a:tr h="137160">
+              <a:tr h="164592">
                 <a:tc>
                   <a:txBody>
                     <a:bodyPr/>
@@ -12888,7 +12719,7 @@
                   </a:tcPr>
                 </a:tc>
               </a:tr>
-              <a:tr h="137160">
+              <a:tr h="164592">
                 <a:tc>
                   <a:txBody>
                     <a:bodyPr/>
@@ -13088,7 +12919,7 @@
                   </a:tcPr>
                 </a:tc>
               </a:tr>
-              <a:tr h="137160">
+              <a:tr h="164592">
                 <a:tc>
                   <a:txBody>
                     <a:bodyPr/>
@@ -13285,7 +13116,7 @@
                   </a:tcPr>
                 </a:tc>
               </a:tr>
-              <a:tr h="137160">
+              <a:tr h="164592">
                 <a:tc>
                   <a:txBody>
                     <a:bodyPr/>
@@ -13485,7 +13316,7 @@
                   </a:tcPr>
                 </a:tc>
               </a:tr>
-              <a:tr h="137160">
+              <a:tr h="164592">
                 <a:tc>
                   <a:txBody>
                     <a:bodyPr/>
@@ -13682,7 +13513,7 @@
                   </a:tcPr>
                 </a:tc>
               </a:tr>
-              <a:tr h="137160">
+              <a:tr h="164592">
                 <a:tc>
                   <a:txBody>
                     <a:bodyPr/>
@@ -13765,404 +13596,7 @@
                           <a:ea typeface="Arial" pitchFamily="34" charset="-122"/>
                           <a:cs typeface="Arial" pitchFamily="34" charset="-120"/>
                         </a:rPr>
-                        <a:t>演示</a:t>
-                      </a:r>
-                      <a:endParaRPr lang="en-US" sz="650" dirty="0">
-                        <a:latin typeface="Arial" charset="0"/>
-                        <a:ea typeface="Arial" charset="0"/>
-                        <a:cs typeface="Arial" charset="0"/>
-                      </a:endParaRPr>
-                    </a:p>
-                  </a:txBody>
-                  <a:tcPr marL="38100" marR="38100" marT="25400" marB="25400">
-                    <a:lnL w="6350" cap="flat" cmpd="sng" algn="ctr">
-                      <a:solidFill>
-                        <a:srgbClr val="666666"/>
-                      </a:solidFill>
-                      <a:prstDash val="solid"/>
-                      <a:round/>
-                      <a:headEnd type="none" w="med" len="med"/>
-                      <a:tailEnd type="none" w="med" len="med"/>
-                    </a:lnL>
-                    <a:lnR w="6350" cap="flat" cmpd="sng" algn="ctr">
-                      <a:solidFill>
-                        <a:srgbClr val="666666"/>
-                      </a:solidFill>
-                      <a:prstDash val="solid"/>
-                      <a:round/>
-                      <a:headEnd type="none" w="med" len="med"/>
-                      <a:tailEnd type="none" w="med" len="med"/>
-                    </a:lnR>
-                    <a:lnT w="6350" cap="flat" cmpd="sng" algn="ctr">
-                      <a:solidFill>
-                        <a:srgbClr val="666666"/>
-                      </a:solidFill>
-                      <a:prstDash val="solid"/>
-                      <a:round/>
-                      <a:headEnd type="none" w="med" len="med"/>
-                      <a:tailEnd type="none" w="med" len="med"/>
-                    </a:lnT>
-                    <a:lnB w="6350" cap="flat" cmpd="sng" algn="ctr">
-                      <a:solidFill>
-                        <a:srgbClr val="666666"/>
-                      </a:solidFill>
-                      <a:prstDash val="solid"/>
-                      <a:round/>
-                      <a:headEnd type="none" w="med" len="med"/>
-                      <a:tailEnd type="none" w="med" len="med"/>
-                    </a:lnB>
-                    <a:solidFill>
-                      <a:srgbClr val="EFF6FF"/>
-                    </a:solidFill>
-                  </a:tcPr>
-                </a:tc>
-                <a:tc>
-                  <a:txBody>
-                    <a:bodyPr/>
-                    <a:lstStyle/>
-                    <a:p>
-                      <a:pPr indent="0" marL="0">
-                        <a:buNone/>
-                      </a:pPr>
-                      <a:r>
-                        <a:rPr lang="en-US" sz="650" dirty="0">
-                          <a:solidFill>
-                            <a:srgbClr val="334155"/>
-                          </a:solidFill>
-                          <a:latin typeface="Arial" pitchFamily="34" charset="0"/>
-                          <a:ea typeface="Arial" pitchFamily="34" charset="-122"/>
-                          <a:cs typeface="Arial" pitchFamily="34" charset="-120"/>
-                        </a:rPr>
-                        <a:t>45m</a:t>
-                      </a:r>
-                      <a:endParaRPr lang="en-US" sz="650" dirty="0">
-                        <a:latin typeface="Arial" charset="0"/>
-                        <a:ea typeface="Arial" charset="0"/>
-                        <a:cs typeface="Arial" charset="0"/>
-                      </a:endParaRPr>
-                    </a:p>
-                  </a:txBody>
-                  <a:tcPr marL="38100" marR="38100" marT="25400" marB="25400">
-                    <a:lnL w="6350" cap="flat" cmpd="sng" algn="ctr">
-                      <a:solidFill>
-                        <a:srgbClr val="666666"/>
-                      </a:solidFill>
-                      <a:prstDash val="solid"/>
-                      <a:round/>
-                      <a:headEnd type="none" w="med" len="med"/>
-                      <a:tailEnd type="none" w="med" len="med"/>
-                    </a:lnL>
-                    <a:lnR w="6350" cap="flat" cmpd="sng" algn="ctr">
-                      <a:solidFill>
-                        <a:srgbClr val="666666"/>
-                      </a:solidFill>
-                      <a:prstDash val="solid"/>
-                      <a:round/>
-                      <a:headEnd type="none" w="med" len="med"/>
-                      <a:tailEnd type="none" w="med" len="med"/>
-                    </a:lnR>
-                    <a:lnT w="6350" cap="flat" cmpd="sng" algn="ctr">
-                      <a:solidFill>
-                        <a:srgbClr val="666666"/>
-                      </a:solidFill>
-                      <a:prstDash val="solid"/>
-                      <a:round/>
-                      <a:headEnd type="none" w="med" len="med"/>
-                      <a:tailEnd type="none" w="med" len="med"/>
-                    </a:lnT>
-                    <a:lnB w="6350" cap="flat" cmpd="sng" algn="ctr">
-                      <a:solidFill>
-                        <a:srgbClr val="666666"/>
-                      </a:solidFill>
-                      <a:prstDash val="solid"/>
-                      <a:round/>
-                      <a:headEnd type="none" w="med" len="med"/>
-                      <a:tailEnd type="none" w="med" len="med"/>
-                    </a:lnB>
-                  </a:tcPr>
-                </a:tc>
-              </a:tr>
-              <a:tr h="137160">
-                <a:tc>
-                  <a:txBody>
-                    <a:bodyPr/>
-                    <a:lstStyle/>
-                    <a:p>
-                      <a:pPr indent="0" marL="0">
-                        <a:buNone/>
-                      </a:pPr>
-                      <a:r>
-                        <a:rPr lang="en-US" sz="650" b="1" dirty="0">
-                          <a:solidFill>
-                            <a:srgbClr val="334155"/>
-                          </a:solidFill>
-                          <a:latin typeface="Arial" pitchFamily="34" charset="0"/>
-                          <a:ea typeface="Arial" pitchFamily="34" charset="-122"/>
-                          <a:cs typeface="Arial" pitchFamily="34" charset="-120"/>
-                        </a:rPr>
-                        <a:t>15:15</a:t>
-                      </a:r>
-                      <a:endParaRPr lang="en-US" sz="650" dirty="0">
-                        <a:latin typeface="Arial" charset="0"/>
-                        <a:ea typeface="Arial" charset="0"/>
-                        <a:cs typeface="Arial" charset="0"/>
-                      </a:endParaRPr>
-                    </a:p>
-                  </a:txBody>
-                  <a:tcPr marL="38100" marR="38100" marT="25400" marB="25400">
-                    <a:lnL w="6350" cap="flat" cmpd="sng" algn="ctr">
-                      <a:solidFill>
-                        <a:srgbClr val="666666"/>
-                      </a:solidFill>
-                      <a:prstDash val="solid"/>
-                      <a:round/>
-                      <a:headEnd type="none" w="med" len="med"/>
-                      <a:tailEnd type="none" w="med" len="med"/>
-                    </a:lnL>
-                    <a:lnR w="6350" cap="flat" cmpd="sng" algn="ctr">
-                      <a:solidFill>
-                        <a:srgbClr val="666666"/>
-                      </a:solidFill>
-                      <a:prstDash val="solid"/>
-                      <a:round/>
-                      <a:headEnd type="none" w="med" len="med"/>
-                      <a:tailEnd type="none" w="med" len="med"/>
-                    </a:lnR>
-                    <a:lnT w="6350" cap="flat" cmpd="sng" algn="ctr">
-                      <a:solidFill>
-                        <a:srgbClr val="666666"/>
-                      </a:solidFill>
-                      <a:prstDash val="solid"/>
-                      <a:round/>
-                      <a:headEnd type="none" w="med" len="med"/>
-                      <a:tailEnd type="none" w="med" len="med"/>
-                    </a:lnT>
-                    <a:lnB w="6350" cap="flat" cmpd="sng" algn="ctr">
-                      <a:solidFill>
-                        <a:srgbClr val="666666"/>
-                      </a:solidFill>
-                      <a:prstDash val="solid"/>
-                      <a:round/>
-                      <a:headEnd type="none" w="med" len="med"/>
-                      <a:tailEnd type="none" w="med" len="med"/>
-                    </a:lnB>
-                  </a:tcPr>
-                </a:tc>
-                <a:tc>
-                  <a:txBody>
-                    <a:bodyPr/>
-                    <a:lstStyle/>
-                    <a:p>
-                      <a:pPr indent="0" marL="0">
-                        <a:buNone/>
-                      </a:pPr>
-                      <a:r>
-                        <a:rPr lang="en-US" sz="650" dirty="0">
-                          <a:solidFill>
-                            <a:srgbClr val="334155"/>
-                          </a:solidFill>
-                          <a:latin typeface="Arial" pitchFamily="34" charset="0"/>
-                          <a:ea typeface="Arial" pitchFamily="34" charset="-122"/>
-                          <a:cs typeface="Arial" pitchFamily="34" charset="-120"/>
-                        </a:rPr>
-                        <a:t>休息</a:t>
-                      </a:r>
-                      <a:endParaRPr lang="en-US" sz="650" dirty="0">
-                        <a:latin typeface="Arial" charset="0"/>
-                        <a:ea typeface="Arial" charset="0"/>
-                        <a:cs typeface="Arial" charset="0"/>
-                      </a:endParaRPr>
-                    </a:p>
-                  </a:txBody>
-                  <a:tcPr marL="38100" marR="38100" marT="25400" marB="25400">
-                    <a:lnL w="6350" cap="flat" cmpd="sng" algn="ctr">
-                      <a:solidFill>
-                        <a:srgbClr val="666666"/>
-                      </a:solidFill>
-                      <a:prstDash val="solid"/>
-                      <a:round/>
-                      <a:headEnd type="none" w="med" len="med"/>
-                      <a:tailEnd type="none" w="med" len="med"/>
-                    </a:lnL>
-                    <a:lnR w="6350" cap="flat" cmpd="sng" algn="ctr">
-                      <a:solidFill>
-                        <a:srgbClr val="666666"/>
-                      </a:solidFill>
-                      <a:prstDash val="solid"/>
-                      <a:round/>
-                      <a:headEnd type="none" w="med" len="med"/>
-                      <a:tailEnd type="none" w="med" len="med"/>
-                    </a:lnR>
-                    <a:lnT w="6350" cap="flat" cmpd="sng" algn="ctr">
-                      <a:solidFill>
-                        <a:srgbClr val="666666"/>
-                      </a:solidFill>
-                      <a:prstDash val="solid"/>
-                      <a:round/>
-                      <a:headEnd type="none" w="med" len="med"/>
-                      <a:tailEnd type="none" w="med" len="med"/>
-                    </a:lnT>
-                    <a:lnB w="6350" cap="flat" cmpd="sng" algn="ctr">
-                      <a:solidFill>
-                        <a:srgbClr val="666666"/>
-                      </a:solidFill>
-                      <a:prstDash val="solid"/>
-                      <a:round/>
-                      <a:headEnd type="none" w="med" len="med"/>
-                      <a:tailEnd type="none" w="med" len="med"/>
-                    </a:lnB>
-                  </a:tcPr>
-                </a:tc>
-                <a:tc>
-                  <a:txBody>
-                    <a:bodyPr/>
-                    <a:lstStyle/>
-                    <a:p>
-                      <a:pPr indent="0" marL="0">
-                        <a:buNone/>
-                      </a:pPr>
-                      <a:r>
-                        <a:rPr lang="en-US" sz="650" dirty="0">
-                          <a:solidFill>
-                            <a:srgbClr val="334155"/>
-                          </a:solidFill>
-                          <a:latin typeface="Arial" pitchFamily="34" charset="0"/>
-                          <a:ea typeface="Arial" pitchFamily="34" charset="-122"/>
-                          <a:cs typeface="Arial" pitchFamily="34" charset="-120"/>
-                        </a:rPr>
-                        <a:t>-</a:t>
-                      </a:r>
-                      <a:endParaRPr lang="en-US" sz="650" dirty="0">
-                        <a:latin typeface="Arial" charset="0"/>
-                        <a:ea typeface="Arial" charset="0"/>
-                        <a:cs typeface="Arial" charset="0"/>
-                      </a:endParaRPr>
-                    </a:p>
-                  </a:txBody>
-                  <a:tcPr marL="38100" marR="38100" marT="25400" marB="25400">
-                    <a:lnL w="6350" cap="flat" cmpd="sng" algn="ctr">
-                      <a:solidFill>
-                        <a:srgbClr val="666666"/>
-                      </a:solidFill>
-                      <a:prstDash val="solid"/>
-                      <a:round/>
-                      <a:headEnd type="none" w="med" len="med"/>
-                      <a:tailEnd type="none" w="med" len="med"/>
-                    </a:lnL>
-                    <a:lnR w="6350" cap="flat" cmpd="sng" algn="ctr">
-                      <a:solidFill>
-                        <a:srgbClr val="666666"/>
-                      </a:solidFill>
-                      <a:prstDash val="solid"/>
-                      <a:round/>
-                      <a:headEnd type="none" w="med" len="med"/>
-                      <a:tailEnd type="none" w="med" len="med"/>
-                    </a:lnR>
-                    <a:lnT w="6350" cap="flat" cmpd="sng" algn="ctr">
-                      <a:solidFill>
-                        <a:srgbClr val="666666"/>
-                      </a:solidFill>
-                      <a:prstDash val="solid"/>
-                      <a:round/>
-                      <a:headEnd type="none" w="med" len="med"/>
-                      <a:tailEnd type="none" w="med" len="med"/>
-                    </a:lnT>
-                    <a:lnB w="6350" cap="flat" cmpd="sng" algn="ctr">
-                      <a:solidFill>
-                        <a:srgbClr val="666666"/>
-                      </a:solidFill>
-                      <a:prstDash val="solid"/>
-                      <a:round/>
-                      <a:headEnd type="none" w="med" len="med"/>
-                      <a:tailEnd type="none" w="med" len="med"/>
-                    </a:lnB>
-                  </a:tcPr>
-                </a:tc>
-              </a:tr>
-              <a:tr h="137160">
-                <a:tc>
-                  <a:txBody>
-                    <a:bodyPr/>
-                    <a:lstStyle/>
-                    <a:p>
-                      <a:pPr indent="0" marL="0">
-                        <a:buNone/>
-                      </a:pPr>
-                      <a:r>
-                        <a:rPr lang="en-US" sz="650" b="1" dirty="0">
-                          <a:solidFill>
-                            <a:srgbClr val="334155"/>
-                          </a:solidFill>
-                          <a:latin typeface="Arial" pitchFamily="34" charset="0"/>
-                          <a:ea typeface="Arial" pitchFamily="34" charset="-122"/>
-                          <a:cs typeface="Arial" pitchFamily="34" charset="-120"/>
-                        </a:rPr>
-                        <a:t>15:30</a:t>
-                      </a:r>
-                      <a:endParaRPr lang="en-US" sz="650" dirty="0">
-                        <a:latin typeface="Arial" charset="0"/>
-                        <a:ea typeface="Arial" charset="0"/>
-                        <a:cs typeface="Arial" charset="0"/>
-                      </a:endParaRPr>
-                    </a:p>
-                  </a:txBody>
-                  <a:tcPr marL="38100" marR="38100" marT="25400" marB="25400">
-                    <a:lnL w="6350" cap="flat" cmpd="sng" algn="ctr">
-                      <a:solidFill>
-                        <a:srgbClr val="666666"/>
-                      </a:solidFill>
-                      <a:prstDash val="solid"/>
-                      <a:round/>
-                      <a:headEnd type="none" w="med" len="med"/>
-                      <a:tailEnd type="none" w="med" len="med"/>
-                    </a:lnL>
-                    <a:lnR w="6350" cap="flat" cmpd="sng" algn="ctr">
-                      <a:solidFill>
-                        <a:srgbClr val="666666"/>
-                      </a:solidFill>
-                      <a:prstDash val="solid"/>
-                      <a:round/>
-                      <a:headEnd type="none" w="med" len="med"/>
-                      <a:tailEnd type="none" w="med" len="med"/>
-                    </a:lnR>
-                    <a:lnT w="6350" cap="flat" cmpd="sng" algn="ctr">
-                      <a:solidFill>
-                        <a:srgbClr val="666666"/>
-                      </a:solidFill>
-                      <a:prstDash val="solid"/>
-                      <a:round/>
-                      <a:headEnd type="none" w="med" len="med"/>
-                      <a:tailEnd type="none" w="med" len="med"/>
-                    </a:lnT>
-                    <a:lnB w="6350" cap="flat" cmpd="sng" algn="ctr">
-                      <a:solidFill>
-                        <a:srgbClr val="666666"/>
-                      </a:solidFill>
-                      <a:prstDash val="solid"/>
-                      <a:round/>
-                      <a:headEnd type="none" w="med" len="med"/>
-                      <a:tailEnd type="none" w="med" len="med"/>
-                    </a:lnB>
-                  </a:tcPr>
-                </a:tc>
-                <a:tc>
-                  <a:txBody>
-                    <a:bodyPr/>
-                    <a:lstStyle/>
-                    <a:p>
-                      <a:pPr indent="0" marL="0">
-                        <a:buNone/>
-                      </a:pPr>
-                      <a:r>
-                        <a:rPr lang="en-US" sz="650" dirty="0">
-                          <a:solidFill>
-                            <a:srgbClr val="334155"/>
-                          </a:solidFill>
-                          <a:latin typeface="Arial" pitchFamily="34" charset="0"/>
-                          <a:ea typeface="Arial" pitchFamily="34" charset="-122"/>
-                          <a:cs typeface="Arial" pitchFamily="34" charset="-120"/>
-                        </a:rPr>
-                        <a:t>W1练手</a:t>
+                        <a:t>W1实战</a:t>
                       </a:r>
                       <a:endParaRPr lang="en-US" sz="650" dirty="0">
                         <a:latin typeface="Arial" charset="0"/>
@@ -14279,7 +13713,7 @@
                   </a:tcPr>
                 </a:tc>
               </a:tr>
-              <a:tr h="137160">
+              <a:tr h="164592">
                 <a:tc>
                   <a:txBody>
                     <a:bodyPr/>
@@ -14297,7 +13731,7 @@
                           <a:ea typeface="Arial" pitchFamily="34" charset="-122"/>
                           <a:cs typeface="Arial" pitchFamily="34" charset="-120"/>
                         </a:rPr>
-                        <a:t>16:30</a:t>
+                        <a:t>15:30</a:t>
                       </a:r>
                       <a:endParaRPr lang="en-US" sz="650" dirty="0">
                         <a:latin typeface="Arial" charset="0"/>
@@ -14476,7 +13910,7 @@
                   </a:tcPr>
                 </a:tc>
               </a:tr>
-              <a:tr h="137160">
+              <a:tr h="164592">
                 <a:tc>
                   <a:txBody>
                     <a:bodyPr/>
@@ -14494,7 +13928,7 @@
                           <a:ea typeface="Arial" pitchFamily="34" charset="-122"/>
                           <a:cs typeface="Arial" pitchFamily="34" charset="-120"/>
                         </a:rPr>
-                        <a:t>16:40</a:t>
+                        <a:t>15:45</a:t>
                       </a:r>
                       <a:endParaRPr lang="en-US" sz="650" dirty="0">
                         <a:latin typeface="Arial" charset="0"/>
@@ -14559,7 +13993,7 @@
                           <a:ea typeface="Arial" pitchFamily="34" charset="-122"/>
                           <a:cs typeface="Arial" pitchFamily="34" charset="-120"/>
                         </a:rPr>
-                        <a:t>L3 Live</a:t>
+                        <a:t>L3推演</a:t>
                       </a:r>
                       <a:endParaRPr lang="en-US" sz="650" dirty="0">
                         <a:latin typeface="Arial" charset="0"/>
@@ -14627,7 +14061,7 @@
                           <a:ea typeface="Arial" pitchFamily="34" charset="-122"/>
                           <a:cs typeface="Arial" pitchFamily="34" charset="-120"/>
                         </a:rPr>
-                        <a:t>60m</a:t>
+                        <a:t>105m</a:t>
                       </a:r>
                       <a:endParaRPr lang="en-US" sz="650" dirty="0">
                         <a:latin typeface="Arial" charset="0"/>
@@ -14676,7 +14110,7 @@
                   </a:tcPr>
                 </a:tc>
               </a:tr>
-              <a:tr h="137160">
+              <a:tr h="164592">
                 <a:tc>
                   <a:txBody>
                     <a:bodyPr/>
@@ -14694,7 +14128,7 @@
                           <a:ea typeface="Arial" pitchFamily="34" charset="-122"/>
                           <a:cs typeface="Arial" pitchFamily="34" charset="-120"/>
                         </a:rPr>
-                        <a:t>17:40</a:t>
+                        <a:t>17:30</a:t>
                       </a:r>
                       <a:endParaRPr lang="en-US" sz="650" dirty="0">
                         <a:latin typeface="Arial" charset="0"/>
@@ -14827,7 +14261,7 @@
                           <a:ea typeface="Arial" pitchFamily="34" charset="-122"/>
                           <a:cs typeface="Arial" pitchFamily="34" charset="-120"/>
                         </a:rPr>
-                        <a:t>20m</a:t>
+                        <a:t>30m</a:t>
                       </a:r>
                       <a:endParaRPr lang="en-US" sz="650" dirty="0">
                         <a:latin typeface="Arial" charset="0"/>
@@ -14943,7 +14377,7 @@
                 <a:gridCol w="1188720"/>
                 <a:gridCol w="411480"/>
               </a:tblGrid>
-              <a:tr h="150876">
+              <a:tr h="164592">
                 <a:tc>
                   <a:txBody>
                     <a:bodyPr/>
@@ -15149,7 +14583,7 @@
                   </a:tcPr>
                 </a:tc>
               </a:tr>
-              <a:tr h="150876">
+              <a:tr h="164592">
                 <a:tc>
                   <a:txBody>
                     <a:bodyPr/>
@@ -15349,7 +14783,7 @@
                   </a:tcPr>
                 </a:tc>
               </a:tr>
-              <a:tr h="150876">
+              <a:tr h="164592">
                 <a:tc>
                   <a:txBody>
                     <a:bodyPr/>
@@ -15546,7 +14980,7 @@
                   </a:tcPr>
                 </a:tc>
               </a:tr>
-              <a:tr h="150876">
+              <a:tr h="164592">
                 <a:tc>
                   <a:txBody>
                     <a:bodyPr/>
@@ -15565,6 +14999,206 @@
                           <a:cs typeface="Arial" pitchFamily="34" charset="-120"/>
                         </a:rPr>
                         <a:t>11:00</a:t>
+                      </a:r>
+                      <a:endParaRPr lang="en-US" sz="650" dirty="0">
+                        <a:latin typeface="Arial" charset="0"/>
+                        <a:ea typeface="Arial" charset="0"/>
+                        <a:cs typeface="Arial" charset="0"/>
+                      </a:endParaRPr>
+                    </a:p>
+                  </a:txBody>
+                  <a:tcPr marL="38100" marR="38100" marT="25400" marB="25400">
+                    <a:lnL w="6350" cap="flat" cmpd="sng" algn="ctr">
+                      <a:solidFill>
+                        <a:srgbClr val="666666"/>
+                      </a:solidFill>
+                      <a:prstDash val="solid"/>
+                      <a:round/>
+                      <a:headEnd type="none" w="med" len="med"/>
+                      <a:tailEnd type="none" w="med" len="med"/>
+                    </a:lnL>
+                    <a:lnR w="6350" cap="flat" cmpd="sng" algn="ctr">
+                      <a:solidFill>
+                        <a:srgbClr val="666666"/>
+                      </a:solidFill>
+                      <a:prstDash val="solid"/>
+                      <a:round/>
+                      <a:headEnd type="none" w="med" len="med"/>
+                      <a:tailEnd type="none" w="med" len="med"/>
+                    </a:lnR>
+                    <a:lnT w="6350" cap="flat" cmpd="sng" algn="ctr">
+                      <a:solidFill>
+                        <a:srgbClr val="666666"/>
+                      </a:solidFill>
+                      <a:prstDash val="solid"/>
+                      <a:round/>
+                      <a:headEnd type="none" w="med" len="med"/>
+                      <a:tailEnd type="none" w="med" len="med"/>
+                    </a:lnT>
+                    <a:lnB w="6350" cap="flat" cmpd="sng" algn="ctr">
+                      <a:solidFill>
+                        <a:srgbClr val="666666"/>
+                      </a:solidFill>
+                      <a:prstDash val="solid"/>
+                      <a:round/>
+                      <a:headEnd type="none" w="med" len="med"/>
+                      <a:tailEnd type="none" w="med" len="med"/>
+                    </a:lnB>
+                  </a:tcPr>
+                </a:tc>
+                <a:tc>
+                  <a:txBody>
+                    <a:bodyPr/>
+                    <a:lstStyle/>
+                    <a:p>
+                      <a:pPr indent="0" marL="0">
+                        <a:buNone/>
+                      </a:pPr>
+                      <a:r>
+                        <a:rPr lang="en-US" sz="650" dirty="0">
+                          <a:solidFill>
+                            <a:srgbClr val="334155"/>
+                          </a:solidFill>
+                          <a:latin typeface="Arial" pitchFamily="34" charset="0"/>
+                          <a:ea typeface="Arial" pitchFamily="34" charset="-122"/>
+                          <a:cs typeface="Arial" pitchFamily="34" charset="-120"/>
+                        </a:rPr>
+                        <a:t>W2实操</a:t>
+                      </a:r>
+                      <a:endParaRPr lang="en-US" sz="650" dirty="0">
+                        <a:latin typeface="Arial" charset="0"/>
+                        <a:ea typeface="Arial" charset="0"/>
+                        <a:cs typeface="Arial" charset="0"/>
+                      </a:endParaRPr>
+                    </a:p>
+                  </a:txBody>
+                  <a:tcPr marL="38100" marR="38100" marT="25400" marB="25400">
+                    <a:lnL w="6350" cap="flat" cmpd="sng" algn="ctr">
+                      <a:solidFill>
+                        <a:srgbClr val="666666"/>
+                      </a:solidFill>
+                      <a:prstDash val="solid"/>
+                      <a:round/>
+                      <a:headEnd type="none" w="med" len="med"/>
+                      <a:tailEnd type="none" w="med" len="med"/>
+                    </a:lnL>
+                    <a:lnR w="6350" cap="flat" cmpd="sng" algn="ctr">
+                      <a:solidFill>
+                        <a:srgbClr val="666666"/>
+                      </a:solidFill>
+                      <a:prstDash val="solid"/>
+                      <a:round/>
+                      <a:headEnd type="none" w="med" len="med"/>
+                      <a:tailEnd type="none" w="med" len="med"/>
+                    </a:lnR>
+                    <a:lnT w="6350" cap="flat" cmpd="sng" algn="ctr">
+                      <a:solidFill>
+                        <a:srgbClr val="666666"/>
+                      </a:solidFill>
+                      <a:prstDash val="solid"/>
+                      <a:round/>
+                      <a:headEnd type="none" w="med" len="med"/>
+                      <a:tailEnd type="none" w="med" len="med"/>
+                    </a:lnT>
+                    <a:lnB w="6350" cap="flat" cmpd="sng" algn="ctr">
+                      <a:solidFill>
+                        <a:srgbClr val="666666"/>
+                      </a:solidFill>
+                      <a:prstDash val="solid"/>
+                      <a:round/>
+                      <a:headEnd type="none" w="med" len="med"/>
+                      <a:tailEnd type="none" w="med" len="med"/>
+                    </a:lnB>
+                    <a:solidFill>
+                      <a:srgbClr val="FFF7ED"/>
+                    </a:solidFill>
+                  </a:tcPr>
+                </a:tc>
+                <a:tc>
+                  <a:txBody>
+                    <a:bodyPr/>
+                    <a:lstStyle/>
+                    <a:p>
+                      <a:pPr indent="0" marL="0">
+                        <a:buNone/>
+                      </a:pPr>
+                      <a:r>
+                        <a:rPr lang="en-US" sz="650" dirty="0">
+                          <a:solidFill>
+                            <a:srgbClr val="334155"/>
+                          </a:solidFill>
+                          <a:latin typeface="Arial" pitchFamily="34" charset="0"/>
+                          <a:ea typeface="Arial" pitchFamily="34" charset="-122"/>
+                          <a:cs typeface="Arial" pitchFamily="34" charset="-120"/>
+                        </a:rPr>
+                        <a:t>75m</a:t>
+                      </a:r>
+                      <a:endParaRPr lang="en-US" sz="650" dirty="0">
+                        <a:latin typeface="Arial" charset="0"/>
+                        <a:ea typeface="Arial" charset="0"/>
+                        <a:cs typeface="Arial" charset="0"/>
+                      </a:endParaRPr>
+                    </a:p>
+                  </a:txBody>
+                  <a:tcPr marL="38100" marR="38100" marT="25400" marB="25400">
+                    <a:lnL w="6350" cap="flat" cmpd="sng" algn="ctr">
+                      <a:solidFill>
+                        <a:srgbClr val="666666"/>
+                      </a:solidFill>
+                      <a:prstDash val="solid"/>
+                      <a:round/>
+                      <a:headEnd type="none" w="med" len="med"/>
+                      <a:tailEnd type="none" w="med" len="med"/>
+                    </a:lnL>
+                    <a:lnR w="6350" cap="flat" cmpd="sng" algn="ctr">
+                      <a:solidFill>
+                        <a:srgbClr val="666666"/>
+                      </a:solidFill>
+                      <a:prstDash val="solid"/>
+                      <a:round/>
+                      <a:headEnd type="none" w="med" len="med"/>
+                      <a:tailEnd type="none" w="med" len="med"/>
+                    </a:lnR>
+                    <a:lnT w="6350" cap="flat" cmpd="sng" algn="ctr">
+                      <a:solidFill>
+                        <a:srgbClr val="666666"/>
+                      </a:solidFill>
+                      <a:prstDash val="solid"/>
+                      <a:round/>
+                      <a:headEnd type="none" w="med" len="med"/>
+                      <a:tailEnd type="none" w="med" len="med"/>
+                    </a:lnT>
+                    <a:lnB w="6350" cap="flat" cmpd="sng" algn="ctr">
+                      <a:solidFill>
+                        <a:srgbClr val="666666"/>
+                      </a:solidFill>
+                      <a:prstDash val="solid"/>
+                      <a:round/>
+                      <a:headEnd type="none" w="med" len="med"/>
+                      <a:tailEnd type="none" w="med" len="med"/>
+                    </a:lnB>
+                  </a:tcPr>
+                </a:tc>
+              </a:tr>
+              <a:tr h="164592">
+                <a:tc>
+                  <a:txBody>
+                    <a:bodyPr/>
+                    <a:lstStyle/>
+                    <a:p>
+                      <a:pPr indent="0" marL="0">
+                        <a:buNone/>
+                      </a:pPr>
+                      <a:r>
+                        <a:rPr lang="en-US" sz="650" b="1" dirty="0">
+                          <a:solidFill>
+                            <a:srgbClr val="334155"/>
+                          </a:solidFill>
+                          <a:latin typeface="Arial" pitchFamily="34" charset="0"/>
+                          <a:ea typeface="Arial" pitchFamily="34" charset="-122"/>
+                          <a:cs typeface="Arial" pitchFamily="34" charset="-120"/>
+                        </a:rPr>
+                        <a:t>14:30</a:t>
                       </a:r>
                       <a:endParaRPr lang="en-US" sz="650" dirty="0">
                         <a:latin typeface="Arial" charset="0"/>
@@ -15746,7 +15380,7 @@
                   </a:tcPr>
                 </a:tc>
               </a:tr>
-              <a:tr h="150876">
+              <a:tr h="164592">
                 <a:tc>
                   <a:txBody>
                     <a:bodyPr/>
@@ -15764,7 +15398,7 @@
                           <a:ea typeface="Arial" pitchFamily="34" charset="-122"/>
                           <a:cs typeface="Arial" pitchFamily="34" charset="-120"/>
                         </a:rPr>
-                        <a:t>11:50</a:t>
+                        <a:t>15:20</a:t>
                       </a:r>
                       <a:endParaRPr lang="en-US" sz="650" dirty="0">
                         <a:latin typeface="Arial" charset="0"/>
@@ -15829,7 +15463,7 @@
                           <a:ea typeface="Arial" pitchFamily="34" charset="-122"/>
                           <a:cs typeface="Arial" pitchFamily="34" charset="-120"/>
                         </a:rPr>
-                        <a:t>午餐</a:t>
+                        <a:t>休息</a:t>
                       </a:r>
                       <a:endParaRPr lang="en-US" sz="650" dirty="0">
                         <a:latin typeface="Arial" charset="0"/>
@@ -15943,7 +15577,7 @@
                   </a:tcPr>
                 </a:tc>
               </a:tr>
-              <a:tr h="150876">
+              <a:tr h="164592">
                 <a:tc>
                   <a:txBody>
                     <a:bodyPr/>
@@ -15961,404 +15595,7 @@
                           <a:ea typeface="Arial" pitchFamily="34" charset="-122"/>
                           <a:cs typeface="Arial" pitchFamily="34" charset="-120"/>
                         </a:rPr>
-                        <a:t>14:30</a:t>
-                      </a:r>
-                      <a:endParaRPr lang="en-US" sz="650" dirty="0">
-                        <a:latin typeface="Arial" charset="0"/>
-                        <a:ea typeface="Arial" charset="0"/>
-                        <a:cs typeface="Arial" charset="0"/>
-                      </a:endParaRPr>
-                    </a:p>
-                  </a:txBody>
-                  <a:tcPr marL="38100" marR="38100" marT="25400" marB="25400">
-                    <a:lnL w="6350" cap="flat" cmpd="sng" algn="ctr">
-                      <a:solidFill>
-                        <a:srgbClr val="666666"/>
-                      </a:solidFill>
-                      <a:prstDash val="solid"/>
-                      <a:round/>
-                      <a:headEnd type="none" w="med" len="med"/>
-                      <a:tailEnd type="none" w="med" len="med"/>
-                    </a:lnL>
-                    <a:lnR w="6350" cap="flat" cmpd="sng" algn="ctr">
-                      <a:solidFill>
-                        <a:srgbClr val="666666"/>
-                      </a:solidFill>
-                      <a:prstDash val="solid"/>
-                      <a:round/>
-                      <a:headEnd type="none" w="med" len="med"/>
-                      <a:tailEnd type="none" w="med" len="med"/>
-                    </a:lnR>
-                    <a:lnT w="6350" cap="flat" cmpd="sng" algn="ctr">
-                      <a:solidFill>
-                        <a:srgbClr val="666666"/>
-                      </a:solidFill>
-                      <a:prstDash val="solid"/>
-                      <a:round/>
-                      <a:headEnd type="none" w="med" len="med"/>
-                      <a:tailEnd type="none" w="med" len="med"/>
-                    </a:lnT>
-                    <a:lnB w="6350" cap="flat" cmpd="sng" algn="ctr">
-                      <a:solidFill>
-                        <a:srgbClr val="666666"/>
-                      </a:solidFill>
-                      <a:prstDash val="solid"/>
-                      <a:round/>
-                      <a:headEnd type="none" w="med" len="med"/>
-                      <a:tailEnd type="none" w="med" len="med"/>
-                    </a:lnB>
-                  </a:tcPr>
-                </a:tc>
-                <a:tc>
-                  <a:txBody>
-                    <a:bodyPr/>
-                    <a:lstStyle/>
-                    <a:p>
-                      <a:pPr indent="0" marL="0">
-                        <a:buNone/>
-                      </a:pPr>
-                      <a:r>
-                        <a:rPr lang="en-US" sz="650" dirty="0">
-                          <a:solidFill>
-                            <a:srgbClr val="334155"/>
-                          </a:solidFill>
-                          <a:latin typeface="Arial" pitchFamily="34" charset="0"/>
-                          <a:ea typeface="Arial" pitchFamily="34" charset="-122"/>
-                          <a:cs typeface="Arial" pitchFamily="34" charset="-120"/>
-                        </a:rPr>
-                        <a:t>W2重构</a:t>
-                      </a:r>
-                      <a:endParaRPr lang="en-US" sz="650" dirty="0">
-                        <a:latin typeface="Arial" charset="0"/>
-                        <a:ea typeface="Arial" charset="0"/>
-                        <a:cs typeface="Arial" charset="0"/>
-                      </a:endParaRPr>
-                    </a:p>
-                  </a:txBody>
-                  <a:tcPr marL="38100" marR="38100" marT="25400" marB="25400">
-                    <a:lnL w="6350" cap="flat" cmpd="sng" algn="ctr">
-                      <a:solidFill>
-                        <a:srgbClr val="666666"/>
-                      </a:solidFill>
-                      <a:prstDash val="solid"/>
-                      <a:round/>
-                      <a:headEnd type="none" w="med" len="med"/>
-                      <a:tailEnd type="none" w="med" len="med"/>
-                    </a:lnL>
-                    <a:lnR w="6350" cap="flat" cmpd="sng" algn="ctr">
-                      <a:solidFill>
-                        <a:srgbClr val="666666"/>
-                      </a:solidFill>
-                      <a:prstDash val="solid"/>
-                      <a:round/>
-                      <a:headEnd type="none" w="med" len="med"/>
-                      <a:tailEnd type="none" w="med" len="med"/>
-                    </a:lnR>
-                    <a:lnT w="6350" cap="flat" cmpd="sng" algn="ctr">
-                      <a:solidFill>
-                        <a:srgbClr val="666666"/>
-                      </a:solidFill>
-                      <a:prstDash val="solid"/>
-                      <a:round/>
-                      <a:headEnd type="none" w="med" len="med"/>
-                      <a:tailEnd type="none" w="med" len="med"/>
-                    </a:lnT>
-                    <a:lnB w="6350" cap="flat" cmpd="sng" algn="ctr">
-                      <a:solidFill>
-                        <a:srgbClr val="666666"/>
-                      </a:solidFill>
-                      <a:prstDash val="solid"/>
-                      <a:round/>
-                      <a:headEnd type="none" w="med" len="med"/>
-                      <a:tailEnd type="none" w="med" len="med"/>
-                    </a:lnB>
-                    <a:solidFill>
-                      <a:srgbClr val="FFF7ED"/>
-                    </a:solidFill>
-                  </a:tcPr>
-                </a:tc>
-                <a:tc>
-                  <a:txBody>
-                    <a:bodyPr/>
-                    <a:lstStyle/>
-                    <a:p>
-                      <a:pPr indent="0" marL="0">
-                        <a:buNone/>
-                      </a:pPr>
-                      <a:r>
-                        <a:rPr lang="en-US" sz="650" dirty="0">
-                          <a:solidFill>
-                            <a:srgbClr val="334155"/>
-                          </a:solidFill>
-                          <a:latin typeface="Arial" pitchFamily="34" charset="0"/>
-                          <a:ea typeface="Arial" pitchFamily="34" charset="-122"/>
-                          <a:cs typeface="Arial" pitchFamily="34" charset="-120"/>
-                        </a:rPr>
-                        <a:t>75m</a:t>
-                      </a:r>
-                      <a:endParaRPr lang="en-US" sz="650" dirty="0">
-                        <a:latin typeface="Arial" charset="0"/>
-                        <a:ea typeface="Arial" charset="0"/>
-                        <a:cs typeface="Arial" charset="0"/>
-                      </a:endParaRPr>
-                    </a:p>
-                  </a:txBody>
-                  <a:tcPr marL="38100" marR="38100" marT="25400" marB="25400">
-                    <a:lnL w="6350" cap="flat" cmpd="sng" algn="ctr">
-                      <a:solidFill>
-                        <a:srgbClr val="666666"/>
-                      </a:solidFill>
-                      <a:prstDash val="solid"/>
-                      <a:round/>
-                      <a:headEnd type="none" w="med" len="med"/>
-                      <a:tailEnd type="none" w="med" len="med"/>
-                    </a:lnL>
-                    <a:lnR w="6350" cap="flat" cmpd="sng" algn="ctr">
-                      <a:solidFill>
-                        <a:srgbClr val="666666"/>
-                      </a:solidFill>
-                      <a:prstDash val="solid"/>
-                      <a:round/>
-                      <a:headEnd type="none" w="med" len="med"/>
-                      <a:tailEnd type="none" w="med" len="med"/>
-                    </a:lnR>
-                    <a:lnT w="6350" cap="flat" cmpd="sng" algn="ctr">
-                      <a:solidFill>
-                        <a:srgbClr val="666666"/>
-                      </a:solidFill>
-                      <a:prstDash val="solid"/>
-                      <a:round/>
-                      <a:headEnd type="none" w="med" len="med"/>
-                      <a:tailEnd type="none" w="med" len="med"/>
-                    </a:lnT>
-                    <a:lnB w="6350" cap="flat" cmpd="sng" algn="ctr">
-                      <a:solidFill>
-                        <a:srgbClr val="666666"/>
-                      </a:solidFill>
-                      <a:prstDash val="solid"/>
-                      <a:round/>
-                      <a:headEnd type="none" w="med" len="med"/>
-                      <a:tailEnd type="none" w="med" len="med"/>
-                    </a:lnB>
-                  </a:tcPr>
-                </a:tc>
-              </a:tr>
-              <a:tr h="150876">
-                <a:tc>
-                  <a:txBody>
-                    <a:bodyPr/>
-                    <a:lstStyle/>
-                    <a:p>
-                      <a:pPr indent="0" marL="0">
-                        <a:buNone/>
-                      </a:pPr>
-                      <a:r>
-                        <a:rPr lang="en-US" sz="650" b="1" dirty="0">
-                          <a:solidFill>
-                            <a:srgbClr val="334155"/>
-                          </a:solidFill>
-                          <a:latin typeface="Arial" pitchFamily="34" charset="0"/>
-                          <a:ea typeface="Arial" pitchFamily="34" charset="-122"/>
-                          <a:cs typeface="Arial" pitchFamily="34" charset="-120"/>
-                        </a:rPr>
-                        <a:t>15:45</a:t>
-                      </a:r>
-                      <a:endParaRPr lang="en-US" sz="650" dirty="0">
-                        <a:latin typeface="Arial" charset="0"/>
-                        <a:ea typeface="Arial" charset="0"/>
-                        <a:cs typeface="Arial" charset="0"/>
-                      </a:endParaRPr>
-                    </a:p>
-                  </a:txBody>
-                  <a:tcPr marL="38100" marR="38100" marT="25400" marB="25400">
-                    <a:lnL w="6350" cap="flat" cmpd="sng" algn="ctr">
-                      <a:solidFill>
-                        <a:srgbClr val="666666"/>
-                      </a:solidFill>
-                      <a:prstDash val="solid"/>
-                      <a:round/>
-                      <a:headEnd type="none" w="med" len="med"/>
-                      <a:tailEnd type="none" w="med" len="med"/>
-                    </a:lnL>
-                    <a:lnR w="6350" cap="flat" cmpd="sng" algn="ctr">
-                      <a:solidFill>
-                        <a:srgbClr val="666666"/>
-                      </a:solidFill>
-                      <a:prstDash val="solid"/>
-                      <a:round/>
-                      <a:headEnd type="none" w="med" len="med"/>
-                      <a:tailEnd type="none" w="med" len="med"/>
-                    </a:lnR>
-                    <a:lnT w="6350" cap="flat" cmpd="sng" algn="ctr">
-                      <a:solidFill>
-                        <a:srgbClr val="666666"/>
-                      </a:solidFill>
-                      <a:prstDash val="solid"/>
-                      <a:round/>
-                      <a:headEnd type="none" w="med" len="med"/>
-                      <a:tailEnd type="none" w="med" len="med"/>
-                    </a:lnT>
-                    <a:lnB w="6350" cap="flat" cmpd="sng" algn="ctr">
-                      <a:solidFill>
-                        <a:srgbClr val="666666"/>
-                      </a:solidFill>
-                      <a:prstDash val="solid"/>
-                      <a:round/>
-                      <a:headEnd type="none" w="med" len="med"/>
-                      <a:tailEnd type="none" w="med" len="med"/>
-                    </a:lnB>
-                  </a:tcPr>
-                </a:tc>
-                <a:tc>
-                  <a:txBody>
-                    <a:bodyPr/>
-                    <a:lstStyle/>
-                    <a:p>
-                      <a:pPr indent="0" marL="0">
-                        <a:buNone/>
-                      </a:pPr>
-                      <a:r>
-                        <a:rPr lang="en-US" sz="650" dirty="0">
-                          <a:solidFill>
-                            <a:srgbClr val="334155"/>
-                          </a:solidFill>
-                          <a:latin typeface="Arial" pitchFamily="34" charset="0"/>
-                          <a:ea typeface="Arial" pitchFamily="34" charset="-122"/>
-                          <a:cs typeface="Arial" pitchFamily="34" charset="-120"/>
-                        </a:rPr>
-                        <a:t>休息</a:t>
-                      </a:r>
-                      <a:endParaRPr lang="en-US" sz="650" dirty="0">
-                        <a:latin typeface="Arial" charset="0"/>
-                        <a:ea typeface="Arial" charset="0"/>
-                        <a:cs typeface="Arial" charset="0"/>
-                      </a:endParaRPr>
-                    </a:p>
-                  </a:txBody>
-                  <a:tcPr marL="38100" marR="38100" marT="25400" marB="25400">
-                    <a:lnL w="6350" cap="flat" cmpd="sng" algn="ctr">
-                      <a:solidFill>
-                        <a:srgbClr val="666666"/>
-                      </a:solidFill>
-                      <a:prstDash val="solid"/>
-                      <a:round/>
-                      <a:headEnd type="none" w="med" len="med"/>
-                      <a:tailEnd type="none" w="med" len="med"/>
-                    </a:lnL>
-                    <a:lnR w="6350" cap="flat" cmpd="sng" algn="ctr">
-                      <a:solidFill>
-                        <a:srgbClr val="666666"/>
-                      </a:solidFill>
-                      <a:prstDash val="solid"/>
-                      <a:round/>
-                      <a:headEnd type="none" w="med" len="med"/>
-                      <a:tailEnd type="none" w="med" len="med"/>
-                    </a:lnR>
-                    <a:lnT w="6350" cap="flat" cmpd="sng" algn="ctr">
-                      <a:solidFill>
-                        <a:srgbClr val="666666"/>
-                      </a:solidFill>
-                      <a:prstDash val="solid"/>
-                      <a:round/>
-                      <a:headEnd type="none" w="med" len="med"/>
-                      <a:tailEnd type="none" w="med" len="med"/>
-                    </a:lnT>
-                    <a:lnB w="6350" cap="flat" cmpd="sng" algn="ctr">
-                      <a:solidFill>
-                        <a:srgbClr val="666666"/>
-                      </a:solidFill>
-                      <a:prstDash val="solid"/>
-                      <a:round/>
-                      <a:headEnd type="none" w="med" len="med"/>
-                      <a:tailEnd type="none" w="med" len="med"/>
-                    </a:lnB>
-                  </a:tcPr>
-                </a:tc>
-                <a:tc>
-                  <a:txBody>
-                    <a:bodyPr/>
-                    <a:lstStyle/>
-                    <a:p>
-                      <a:pPr indent="0" marL="0">
-                        <a:buNone/>
-                      </a:pPr>
-                      <a:r>
-                        <a:rPr lang="en-US" sz="650" dirty="0">
-                          <a:solidFill>
-                            <a:srgbClr val="334155"/>
-                          </a:solidFill>
-                          <a:latin typeface="Arial" pitchFamily="34" charset="0"/>
-                          <a:ea typeface="Arial" pitchFamily="34" charset="-122"/>
-                          <a:cs typeface="Arial" pitchFamily="34" charset="-120"/>
-                        </a:rPr>
-                        <a:t>-</a:t>
-                      </a:r>
-                      <a:endParaRPr lang="en-US" sz="650" dirty="0">
-                        <a:latin typeface="Arial" charset="0"/>
-                        <a:ea typeface="Arial" charset="0"/>
-                        <a:cs typeface="Arial" charset="0"/>
-                      </a:endParaRPr>
-                    </a:p>
-                  </a:txBody>
-                  <a:tcPr marL="38100" marR="38100" marT="25400" marB="25400">
-                    <a:lnL w="6350" cap="flat" cmpd="sng" algn="ctr">
-                      <a:solidFill>
-                        <a:srgbClr val="666666"/>
-                      </a:solidFill>
-                      <a:prstDash val="solid"/>
-                      <a:round/>
-                      <a:headEnd type="none" w="med" len="med"/>
-                      <a:tailEnd type="none" w="med" len="med"/>
-                    </a:lnL>
-                    <a:lnR w="6350" cap="flat" cmpd="sng" algn="ctr">
-                      <a:solidFill>
-                        <a:srgbClr val="666666"/>
-                      </a:solidFill>
-                      <a:prstDash val="solid"/>
-                      <a:round/>
-                      <a:headEnd type="none" w="med" len="med"/>
-                      <a:tailEnd type="none" w="med" len="med"/>
-                    </a:lnR>
-                    <a:lnT w="6350" cap="flat" cmpd="sng" algn="ctr">
-                      <a:solidFill>
-                        <a:srgbClr val="666666"/>
-                      </a:solidFill>
-                      <a:prstDash val="solid"/>
-                      <a:round/>
-                      <a:headEnd type="none" w="med" len="med"/>
-                      <a:tailEnd type="none" w="med" len="med"/>
-                    </a:lnT>
-                    <a:lnB w="6350" cap="flat" cmpd="sng" algn="ctr">
-                      <a:solidFill>
-                        <a:srgbClr val="666666"/>
-                      </a:solidFill>
-                      <a:prstDash val="solid"/>
-                      <a:round/>
-                      <a:headEnd type="none" w="med" len="med"/>
-                      <a:tailEnd type="none" w="med" len="med"/>
-                    </a:lnB>
-                  </a:tcPr>
-                </a:tc>
-              </a:tr>
-              <a:tr h="150876">
-                <a:tc>
-                  <a:txBody>
-                    <a:bodyPr/>
-                    <a:lstStyle/>
-                    <a:p>
-                      <a:pPr indent="0" marL="0">
-                        <a:buNone/>
-                      </a:pPr>
-                      <a:r>
-                        <a:rPr lang="en-US" sz="650" b="1" dirty="0">
-                          <a:solidFill>
-                            <a:srgbClr val="334155"/>
-                          </a:solidFill>
-                          <a:latin typeface="Arial" pitchFamily="34" charset="0"/>
-                          <a:ea typeface="Arial" pitchFamily="34" charset="-122"/>
-                          <a:cs typeface="Arial" pitchFamily="34" charset="-120"/>
-                        </a:rPr>
-                        <a:t>16:00</a:t>
+                        <a:t>15:35</a:t>
                       </a:r>
                       <a:endParaRPr lang="en-US" sz="650" dirty="0">
                         <a:latin typeface="Arial" charset="0"/>
@@ -16540,7 +15777,7 @@
                   </a:tcPr>
                 </a:tc>
               </a:tr>
-              <a:tr h="150876">
+              <a:tr h="164592">
                 <a:tc>
                   <a:txBody>
                     <a:bodyPr/>
@@ -16558,7 +15795,7 @@
                           <a:ea typeface="Arial" pitchFamily="34" charset="-122"/>
                           <a:cs typeface="Arial" pitchFamily="34" charset="-120"/>
                         </a:rPr>
-                        <a:t>17:00</a:t>
+                        <a:t>16:35</a:t>
                       </a:r>
                       <a:endParaRPr lang="en-US" sz="650" dirty="0">
                         <a:latin typeface="Arial" charset="0"/>
@@ -16623,7 +15860,7 @@
                           <a:ea typeface="Arial" pitchFamily="34" charset="-122"/>
                           <a:cs typeface="Arial" pitchFamily="34" charset="-120"/>
                         </a:rPr>
-                        <a:t>评审</a:t>
+                        <a:t>总结</a:t>
                       </a:r>
                       <a:endParaRPr lang="en-US" sz="650" dirty="0">
                         <a:latin typeface="Arial" charset="0"/>
@@ -16740,7 +15977,7 @@
                   </a:tcPr>
                 </a:tc>
               </a:tr>
-              <a:tr h="150876">
+              <a:tr h="164592">
                 <a:tc>
                   <a:txBody>
                     <a:bodyPr/>
@@ -16758,7 +15995,7 @@
                           <a:ea typeface="Arial" pitchFamily="34" charset="-122"/>
                           <a:cs typeface="Arial" pitchFamily="34" charset="-120"/>
                         </a:rPr>
-                        <a:t>17:30</a:t>
+                        <a:t>17:05</a:t>
                       </a:r>
                       <a:endParaRPr lang="en-US" sz="650" dirty="0">
                         <a:latin typeface="Arial" charset="0"/>
@@ -16823,7 +16060,7 @@
                           <a:ea typeface="Arial" pitchFamily="34" charset="-122"/>
                           <a:cs typeface="Arial" pitchFamily="34" charset="-120"/>
                         </a:rPr>
-                        <a:t>L6总结</a:t>
+                        <a:t>L6</a:t>
                       </a:r>
                       <a:endParaRPr lang="en-US" sz="650" dirty="0">
                         <a:latin typeface="Arial" charset="0"/>
@@ -16940,7 +16177,7 @@
                   </a:tcPr>
                 </a:tc>
               </a:tr>
-              <a:tr h="150876">
+              <a:tr h="164592">
                 <a:tc>
                   <a:txBody>
                     <a:bodyPr/>
@@ -16958,7 +16195,7 @@
                           <a:ea typeface="Arial" pitchFamily="34" charset="-122"/>
                           <a:cs typeface="Arial" pitchFamily="34" charset="-120"/>
                         </a:rPr>
-                        <a:t>17:50</a:t>
+                        <a:t>17:25</a:t>
                       </a:r>
                       <a:endParaRPr lang="en-US" sz="650" dirty="0">
                         <a:latin typeface="Arial" charset="0"/>
@@ -17695,7 +16932,7 @@
                           <a:ea typeface="Arial" pitchFamily="34" charset="-122"/>
                           <a:cs typeface="Arial" pitchFamily="34" charset="-120"/>
                         </a:rPr>
-                        <a:t>~40% (上午)</a:t>
+                        <a:t>~40%</a:t>
                       </a:r>
                       <a:endParaRPr lang="en-US" sz="650" dirty="0">
                         <a:latin typeface="Arial" charset="0"/>
@@ -17827,7 +17064,7 @@
                           <a:ea typeface="Arial" pitchFamily="34" charset="-122"/>
                           <a:cs typeface="Arial" pitchFamily="34" charset="-120"/>
                         </a:rPr>
-                        <a:t>105min</a:t>
+                        <a:t>105min (L3)</a:t>
                       </a:r>
                       <a:endParaRPr lang="en-US" sz="650" dirty="0">
                         <a:latin typeface="Arial" charset="0"/>
@@ -17957,7 +17194,7 @@
                           <a:ea typeface="Arial" pitchFamily="34" charset="-122"/>
                           <a:cs typeface="Arial" pitchFamily="34" charset="-120"/>
                         </a:rPr>
-                        <a:t>195min (3 Workshop)</a:t>
+                        <a:t>270min (3 Workshop)</a:t>
                       </a:r>
                       <a:endParaRPr lang="en-US" sz="650" dirty="0">
                         <a:latin typeface="Arial" charset="0"/>
@@ -18329,7 +17566,7 @@
                   <a:srgbClr val="2563EB"/>
                 </a:solidFill>
               </a:rPr>
-              <a:t>上午讲座(到12:00)  下午先演示后演练  Workshop紧跟对应模块</a:t>
+              <a:t>上午讲座/演练  下午讲座/演练  Workshop紧跟对应模块</a:t>
             </a:r>
             <a:endParaRPr lang="en-US" sz="900" dirty="0"/>
           </a:p>

--- a/docs/AI-Native-训战营-介绍与日程.pptx
+++ b/docs/AI-Native-训战营-介绍与日程.pptx
@@ -1913,7 +1913,7 @@
                   <a:srgbClr val="64748B"/>
                 </a:solidFill>
               </a:rPr>
-              <a:t>增量开发和重构</a:t>
+              <a:t>增量开发和重构+最佳实践</a:t>
             </a:r>
             <a:endParaRPr lang="en-US" sz="700" dirty="0"/>
           </a:p>
@@ -3269,7 +3269,7 @@
                   <a:srgbClr val="2563EB"/>
                 </a:solidFill>
               </a:rPr>
-              <a:t>W1实战 60m | L3推演+跟做 105m</a:t>
+              <a:t>W1实战 60m | L3推演+实战 45+60m</a:t>
             </a:r>
             <a:endParaRPr lang="en-US" sz="700" dirty="0"/>
           </a:p>
@@ -3305,7 +3305,7 @@
                   <a:srgbClr val="1A1A2E"/>
                 </a:solidFill>
               </a:rPr>
-              <a:t>Day 2: 增量开发和重构</a:t>
+              <a:t>Day 2: 增量开发和重构+最佳实践</a:t>
             </a:r>
             <a:endParaRPr lang="en-US" sz="1000" dirty="0"/>
           </a:p>
@@ -3967,7 +3967,7 @@
                           <a:ea typeface="Arial" pitchFamily="34" charset="-122"/>
                           <a:cs typeface="Arial" pitchFamily="34" charset="-120"/>
                         </a:rPr>
-                        <a:t>W1实战+L3推演 (165min)</a:t>
+                        <a:t>W1实战+L3a推演+L3b实战 (165min)</a:t>
                       </a:r>
                       <a:endParaRPr lang="en-US" sz="650" dirty="0">
                         <a:latin typeface="Arial" charset="0"/>
@@ -6170,7 +6170,7 @@
                   </a:tcPr>
                 </a:tc>
               </a:tr>
-              <a:tr h="384048">
+              <a:tr h="329184">
                 <a:tc>
                   <a:txBody>
                     <a:bodyPr/>
@@ -6253,7 +6253,7 @@
                           <a:ea typeface="Arial" pitchFamily="34" charset="-122"/>
                           <a:cs typeface="Arial" pitchFamily="34" charset="-120"/>
                         </a:rPr>
-                        <a:t>L3: 全流程推演 105min</a:t>
+                        <a:t>L3a: 推演示范 45min</a:t>
                       </a:r>
                       <a:endParaRPr lang="en-US" sz="650" dirty="0">
                         <a:latin typeface="Arial" charset="0"/>
@@ -6321,7 +6321,207 @@
                           <a:ea typeface="Arial" pitchFamily="34" charset="-122"/>
                           <a:cs typeface="Arial" pitchFamily="34" charset="-120"/>
                         </a:rPr>
-                        <a:t>推演示范 45min · 学员跟做+点评 60min</a:t>
+                        <a:t>完整演示[加单位换算] Spec-&gt;Code 不剪辑</a:t>
+                      </a:r>
+                      <a:endParaRPr lang="en-US" sz="650" dirty="0">
+                        <a:latin typeface="Arial" charset="0"/>
+                        <a:ea typeface="Arial" charset="0"/>
+                        <a:cs typeface="Arial" charset="0"/>
+                      </a:endParaRPr>
+                    </a:p>
+                  </a:txBody>
+                  <a:tcPr marL="38100" marR="38100" marT="25400" marB="25400">
+                    <a:lnL w="6350" cap="flat" cmpd="sng" algn="ctr">
+                      <a:solidFill>
+                        <a:srgbClr val="666666"/>
+                      </a:solidFill>
+                      <a:prstDash val="solid"/>
+                      <a:round/>
+                      <a:headEnd type="none" w="med" len="med"/>
+                      <a:tailEnd type="none" w="med" len="med"/>
+                    </a:lnL>
+                    <a:lnR w="6350" cap="flat" cmpd="sng" algn="ctr">
+                      <a:solidFill>
+                        <a:srgbClr val="666666"/>
+                      </a:solidFill>
+                      <a:prstDash val="solid"/>
+                      <a:round/>
+                      <a:headEnd type="none" w="med" len="med"/>
+                      <a:tailEnd type="none" w="med" len="med"/>
+                    </a:lnR>
+                    <a:lnT w="6350" cap="flat" cmpd="sng" algn="ctr">
+                      <a:solidFill>
+                        <a:srgbClr val="666666"/>
+                      </a:solidFill>
+                      <a:prstDash val="solid"/>
+                      <a:round/>
+                      <a:headEnd type="none" w="med" len="med"/>
+                      <a:tailEnd type="none" w="med" len="med"/>
+                    </a:lnT>
+                    <a:lnB w="6350" cap="flat" cmpd="sng" algn="ctr">
+                      <a:solidFill>
+                        <a:srgbClr val="666666"/>
+                      </a:solidFill>
+                      <a:prstDash val="solid"/>
+                      <a:round/>
+                      <a:headEnd type="none" w="med" len="med"/>
+                      <a:tailEnd type="none" w="med" len="med"/>
+                    </a:lnB>
+                  </a:tcPr>
+                </a:tc>
+              </a:tr>
+              <a:tr h="329184">
+                <a:tc>
+                  <a:txBody>
+                    <a:bodyPr/>
+                    <a:lstStyle/>
+                    <a:p>
+                      <a:pPr indent="0" marL="0">
+                        <a:buNone/>
+                      </a:pPr>
+                      <a:r>
+                        <a:rPr lang="en-US" sz="650" b="1" dirty="0">
+                          <a:solidFill>
+                            <a:srgbClr val="334155"/>
+                          </a:solidFill>
+                          <a:latin typeface="Arial" pitchFamily="34" charset="0"/>
+                          <a:ea typeface="Arial" pitchFamily="34" charset="-122"/>
+                          <a:cs typeface="Arial" pitchFamily="34" charset="-120"/>
+                        </a:rPr>
+                        <a:t>16:30</a:t>
+                      </a:r>
+                      <a:endParaRPr lang="en-US" sz="650" dirty="0">
+                        <a:latin typeface="Arial" charset="0"/>
+                        <a:ea typeface="Arial" charset="0"/>
+                        <a:cs typeface="Arial" charset="0"/>
+                      </a:endParaRPr>
+                    </a:p>
+                  </a:txBody>
+                  <a:tcPr marL="38100" marR="38100" marT="25400" marB="25400">
+                    <a:lnL w="6350" cap="flat" cmpd="sng" algn="ctr">
+                      <a:solidFill>
+                        <a:srgbClr val="666666"/>
+                      </a:solidFill>
+                      <a:prstDash val="solid"/>
+                      <a:round/>
+                      <a:headEnd type="none" w="med" len="med"/>
+                      <a:tailEnd type="none" w="med" len="med"/>
+                    </a:lnL>
+                    <a:lnR w="6350" cap="flat" cmpd="sng" algn="ctr">
+                      <a:solidFill>
+                        <a:srgbClr val="666666"/>
+                      </a:solidFill>
+                      <a:prstDash val="solid"/>
+                      <a:round/>
+                      <a:headEnd type="none" w="med" len="med"/>
+                      <a:tailEnd type="none" w="med" len="med"/>
+                    </a:lnR>
+                    <a:lnT w="6350" cap="flat" cmpd="sng" algn="ctr">
+                      <a:solidFill>
+                        <a:srgbClr val="666666"/>
+                      </a:solidFill>
+                      <a:prstDash val="solid"/>
+                      <a:round/>
+                      <a:headEnd type="none" w="med" len="med"/>
+                      <a:tailEnd type="none" w="med" len="med"/>
+                    </a:lnT>
+                    <a:lnB w="6350" cap="flat" cmpd="sng" algn="ctr">
+                      <a:solidFill>
+                        <a:srgbClr val="666666"/>
+                      </a:solidFill>
+                      <a:prstDash val="solid"/>
+                      <a:round/>
+                      <a:headEnd type="none" w="med" len="med"/>
+                      <a:tailEnd type="none" w="med" len="med"/>
+                    </a:lnB>
+                  </a:tcPr>
+                </a:tc>
+                <a:tc>
+                  <a:txBody>
+                    <a:bodyPr/>
+                    <a:lstStyle/>
+                    <a:p>
+                      <a:pPr indent="0" marL="0">
+                        <a:buNone/>
+                      </a:pPr>
+                      <a:r>
+                        <a:rPr lang="en-US" sz="650" dirty="0">
+                          <a:solidFill>
+                            <a:srgbClr val="334155"/>
+                          </a:solidFill>
+                          <a:latin typeface="Arial" pitchFamily="34" charset="0"/>
+                          <a:ea typeface="Arial" pitchFamily="34" charset="-122"/>
+                          <a:cs typeface="Arial" pitchFamily="34" charset="-120"/>
+                        </a:rPr>
+                        <a:t>L3b: 学员实战 60min</a:t>
+                      </a:r>
+                      <a:endParaRPr lang="en-US" sz="650" dirty="0">
+                        <a:latin typeface="Arial" charset="0"/>
+                        <a:ea typeface="Arial" charset="0"/>
+                        <a:cs typeface="Arial" charset="0"/>
+                      </a:endParaRPr>
+                    </a:p>
+                  </a:txBody>
+                  <a:tcPr marL="38100" marR="38100" marT="25400" marB="25400">
+                    <a:lnL w="6350" cap="flat" cmpd="sng" algn="ctr">
+                      <a:solidFill>
+                        <a:srgbClr val="666666"/>
+                      </a:solidFill>
+                      <a:prstDash val="solid"/>
+                      <a:round/>
+                      <a:headEnd type="none" w="med" len="med"/>
+                      <a:tailEnd type="none" w="med" len="med"/>
+                    </a:lnL>
+                    <a:lnR w="6350" cap="flat" cmpd="sng" algn="ctr">
+                      <a:solidFill>
+                        <a:srgbClr val="666666"/>
+                      </a:solidFill>
+                      <a:prstDash val="solid"/>
+                      <a:round/>
+                      <a:headEnd type="none" w="med" len="med"/>
+                      <a:tailEnd type="none" w="med" len="med"/>
+                    </a:lnR>
+                    <a:lnT w="6350" cap="flat" cmpd="sng" algn="ctr">
+                      <a:solidFill>
+                        <a:srgbClr val="666666"/>
+                      </a:solidFill>
+                      <a:prstDash val="solid"/>
+                      <a:round/>
+                      <a:headEnd type="none" w="med" len="med"/>
+                      <a:tailEnd type="none" w="med" len="med"/>
+                    </a:lnT>
+                    <a:lnB w="6350" cap="flat" cmpd="sng" algn="ctr">
+                      <a:solidFill>
+                        <a:srgbClr val="666666"/>
+                      </a:solidFill>
+                      <a:prstDash val="solid"/>
+                      <a:round/>
+                      <a:headEnd type="none" w="med" len="med"/>
+                      <a:tailEnd type="none" w="med" len="med"/>
+                    </a:lnB>
+                    <a:solidFill>
+                      <a:srgbClr val="EFF6FF"/>
+                    </a:solidFill>
+                  </a:tcPr>
+                </a:tc>
+                <a:tc>
+                  <a:txBody>
+                    <a:bodyPr/>
+                    <a:lstStyle/>
+                    <a:p>
+                      <a:pPr indent="0" marL="0">
+                        <a:buNone/>
+                      </a:pPr>
+                      <a:r>
+                        <a:rPr lang="en-US" sz="650" dirty="0">
+                          <a:solidFill>
+                            <a:srgbClr val="334155"/>
+                          </a:solidFill>
+                          <a:latin typeface="Arial" pitchFamily="34" charset="0"/>
+                          <a:ea typeface="Arial" pitchFamily="34" charset="-122"/>
+                          <a:cs typeface="Arial" pitchFamily="34" charset="-120"/>
+                        </a:rPr>
+                        <a:t>跟做+对比点评</a:t>
                       </a:r>
                       <a:endParaRPr lang="en-US" sz="650" dirty="0">
                         <a:latin typeface="Arial" charset="0"/>
@@ -13993,7 +14193,7 @@
                           <a:ea typeface="Arial" pitchFamily="34" charset="-122"/>
                           <a:cs typeface="Arial" pitchFamily="34" charset="-120"/>
                         </a:rPr>
-                        <a:t>L3推演</a:t>
+                        <a:t>L3a推演</a:t>
                       </a:r>
                       <a:endParaRPr lang="en-US" sz="650" dirty="0">
                         <a:latin typeface="Arial" charset="0"/>
@@ -14061,7 +14261,207 @@
                           <a:ea typeface="Arial" pitchFamily="34" charset="-122"/>
                           <a:cs typeface="Arial" pitchFamily="34" charset="-120"/>
                         </a:rPr>
-                        <a:t>105m</a:t>
+                        <a:t>45m</a:t>
+                      </a:r>
+                      <a:endParaRPr lang="en-US" sz="650" dirty="0">
+                        <a:latin typeface="Arial" charset="0"/>
+                        <a:ea typeface="Arial" charset="0"/>
+                        <a:cs typeface="Arial" charset="0"/>
+                      </a:endParaRPr>
+                    </a:p>
+                  </a:txBody>
+                  <a:tcPr marL="38100" marR="38100" marT="25400" marB="25400">
+                    <a:lnL w="6350" cap="flat" cmpd="sng" algn="ctr">
+                      <a:solidFill>
+                        <a:srgbClr val="666666"/>
+                      </a:solidFill>
+                      <a:prstDash val="solid"/>
+                      <a:round/>
+                      <a:headEnd type="none" w="med" len="med"/>
+                      <a:tailEnd type="none" w="med" len="med"/>
+                    </a:lnL>
+                    <a:lnR w="6350" cap="flat" cmpd="sng" algn="ctr">
+                      <a:solidFill>
+                        <a:srgbClr val="666666"/>
+                      </a:solidFill>
+                      <a:prstDash val="solid"/>
+                      <a:round/>
+                      <a:headEnd type="none" w="med" len="med"/>
+                      <a:tailEnd type="none" w="med" len="med"/>
+                    </a:lnR>
+                    <a:lnT w="6350" cap="flat" cmpd="sng" algn="ctr">
+                      <a:solidFill>
+                        <a:srgbClr val="666666"/>
+                      </a:solidFill>
+                      <a:prstDash val="solid"/>
+                      <a:round/>
+                      <a:headEnd type="none" w="med" len="med"/>
+                      <a:tailEnd type="none" w="med" len="med"/>
+                    </a:lnT>
+                    <a:lnB w="6350" cap="flat" cmpd="sng" algn="ctr">
+                      <a:solidFill>
+                        <a:srgbClr val="666666"/>
+                      </a:solidFill>
+                      <a:prstDash val="solid"/>
+                      <a:round/>
+                      <a:headEnd type="none" w="med" len="med"/>
+                      <a:tailEnd type="none" w="med" len="med"/>
+                    </a:lnB>
+                  </a:tcPr>
+                </a:tc>
+              </a:tr>
+              <a:tr h="164592">
+                <a:tc>
+                  <a:txBody>
+                    <a:bodyPr/>
+                    <a:lstStyle/>
+                    <a:p>
+                      <a:pPr indent="0" marL="0">
+                        <a:buNone/>
+                      </a:pPr>
+                      <a:r>
+                        <a:rPr lang="en-US" sz="650" b="1" dirty="0">
+                          <a:solidFill>
+                            <a:srgbClr val="334155"/>
+                          </a:solidFill>
+                          <a:latin typeface="Arial" pitchFamily="34" charset="0"/>
+                          <a:ea typeface="Arial" pitchFamily="34" charset="-122"/>
+                          <a:cs typeface="Arial" pitchFamily="34" charset="-120"/>
+                        </a:rPr>
+                        <a:t>16:30</a:t>
+                      </a:r>
+                      <a:endParaRPr lang="en-US" sz="650" dirty="0">
+                        <a:latin typeface="Arial" charset="0"/>
+                        <a:ea typeface="Arial" charset="0"/>
+                        <a:cs typeface="Arial" charset="0"/>
+                      </a:endParaRPr>
+                    </a:p>
+                  </a:txBody>
+                  <a:tcPr marL="38100" marR="38100" marT="25400" marB="25400">
+                    <a:lnL w="6350" cap="flat" cmpd="sng" algn="ctr">
+                      <a:solidFill>
+                        <a:srgbClr val="666666"/>
+                      </a:solidFill>
+                      <a:prstDash val="solid"/>
+                      <a:round/>
+                      <a:headEnd type="none" w="med" len="med"/>
+                      <a:tailEnd type="none" w="med" len="med"/>
+                    </a:lnL>
+                    <a:lnR w="6350" cap="flat" cmpd="sng" algn="ctr">
+                      <a:solidFill>
+                        <a:srgbClr val="666666"/>
+                      </a:solidFill>
+                      <a:prstDash val="solid"/>
+                      <a:round/>
+                      <a:headEnd type="none" w="med" len="med"/>
+                      <a:tailEnd type="none" w="med" len="med"/>
+                    </a:lnR>
+                    <a:lnT w="6350" cap="flat" cmpd="sng" algn="ctr">
+                      <a:solidFill>
+                        <a:srgbClr val="666666"/>
+                      </a:solidFill>
+                      <a:prstDash val="solid"/>
+                      <a:round/>
+                      <a:headEnd type="none" w="med" len="med"/>
+                      <a:tailEnd type="none" w="med" len="med"/>
+                    </a:lnT>
+                    <a:lnB w="6350" cap="flat" cmpd="sng" algn="ctr">
+                      <a:solidFill>
+                        <a:srgbClr val="666666"/>
+                      </a:solidFill>
+                      <a:prstDash val="solid"/>
+                      <a:round/>
+                      <a:headEnd type="none" w="med" len="med"/>
+                      <a:tailEnd type="none" w="med" len="med"/>
+                    </a:lnB>
+                  </a:tcPr>
+                </a:tc>
+                <a:tc>
+                  <a:txBody>
+                    <a:bodyPr/>
+                    <a:lstStyle/>
+                    <a:p>
+                      <a:pPr indent="0" marL="0">
+                        <a:buNone/>
+                      </a:pPr>
+                      <a:r>
+                        <a:rPr lang="en-US" sz="650" dirty="0">
+                          <a:solidFill>
+                            <a:srgbClr val="334155"/>
+                          </a:solidFill>
+                          <a:latin typeface="Arial" pitchFamily="34" charset="0"/>
+                          <a:ea typeface="Arial" pitchFamily="34" charset="-122"/>
+                          <a:cs typeface="Arial" pitchFamily="34" charset="-120"/>
+                        </a:rPr>
+                        <a:t>L3b实战</a:t>
+                      </a:r>
+                      <a:endParaRPr lang="en-US" sz="650" dirty="0">
+                        <a:latin typeface="Arial" charset="0"/>
+                        <a:ea typeface="Arial" charset="0"/>
+                        <a:cs typeface="Arial" charset="0"/>
+                      </a:endParaRPr>
+                    </a:p>
+                  </a:txBody>
+                  <a:tcPr marL="38100" marR="38100" marT="25400" marB="25400">
+                    <a:lnL w="6350" cap="flat" cmpd="sng" algn="ctr">
+                      <a:solidFill>
+                        <a:srgbClr val="666666"/>
+                      </a:solidFill>
+                      <a:prstDash val="solid"/>
+                      <a:round/>
+                      <a:headEnd type="none" w="med" len="med"/>
+                      <a:tailEnd type="none" w="med" len="med"/>
+                    </a:lnL>
+                    <a:lnR w="6350" cap="flat" cmpd="sng" algn="ctr">
+                      <a:solidFill>
+                        <a:srgbClr val="666666"/>
+                      </a:solidFill>
+                      <a:prstDash val="solid"/>
+                      <a:round/>
+                      <a:headEnd type="none" w="med" len="med"/>
+                      <a:tailEnd type="none" w="med" len="med"/>
+                    </a:lnR>
+                    <a:lnT w="6350" cap="flat" cmpd="sng" algn="ctr">
+                      <a:solidFill>
+                        <a:srgbClr val="666666"/>
+                      </a:solidFill>
+                      <a:prstDash val="solid"/>
+                      <a:round/>
+                      <a:headEnd type="none" w="med" len="med"/>
+                      <a:tailEnd type="none" w="med" len="med"/>
+                    </a:lnT>
+                    <a:lnB w="6350" cap="flat" cmpd="sng" algn="ctr">
+                      <a:solidFill>
+                        <a:srgbClr val="666666"/>
+                      </a:solidFill>
+                      <a:prstDash val="solid"/>
+                      <a:round/>
+                      <a:headEnd type="none" w="med" len="med"/>
+                      <a:tailEnd type="none" w="med" len="med"/>
+                    </a:lnB>
+                    <a:solidFill>
+                      <a:srgbClr val="EFF6FF"/>
+                    </a:solidFill>
+                  </a:tcPr>
+                </a:tc>
+                <a:tc>
+                  <a:txBody>
+                    <a:bodyPr/>
+                    <a:lstStyle/>
+                    <a:p>
+                      <a:pPr indent="0" marL="0">
+                        <a:buNone/>
+                      </a:pPr>
+                      <a:r>
+                        <a:rPr lang="en-US" sz="650" dirty="0">
+                          <a:solidFill>
+                            <a:srgbClr val="334155"/>
+                          </a:solidFill>
+                          <a:latin typeface="Arial" pitchFamily="34" charset="0"/>
+                          <a:ea typeface="Arial" pitchFamily="34" charset="-122"/>
+                          <a:cs typeface="Arial" pitchFamily="34" charset="-120"/>
+                        </a:rPr>
+                        <a:t>60m</a:t>
                       </a:r>
                       <a:endParaRPr lang="en-US" sz="650" dirty="0">
                         <a:latin typeface="Arial" charset="0"/>
